--- a/Slides/unit_5_prog_2.pptx
+++ b/Slides/unit_5_prog_2.pptx
@@ -64,26 +64,19 @@
   <p:notesSz cx="7099300" cy="10234613"/>
   <p:embeddedFontLst>
     <p:embeddedFont>
-      <p:font typeface="Blackadder ITC" panose="04020505051007020D02" pitchFamily="82" charset="0"/>
+      <p:font typeface="Blackadder ITC" pitchFamily="82" charset="77"/>
       <p:regular r:id="rId54"/>
     </p:embeddedFont>
     <p:embeddedFont>
-      <p:font typeface="Calibri" panose="020F0502020204030204" pitchFamily="34" charset="0"/>
+      <p:font typeface="Cambria Math" panose="02040503050406030204" pitchFamily="18" charset="0"/>
       <p:regular r:id="rId55"/>
-      <p:bold r:id="rId56"/>
-      <p:italic r:id="rId57"/>
-      <p:boldItalic r:id="rId58"/>
-    </p:embeddedFont>
-    <p:embeddedFont>
-      <p:font typeface="Cambria Math" panose="02040503050406030204" pitchFamily="18" charset="0"/>
-      <p:regular r:id="rId59"/>
     </p:embeddedFont>
     <p:embeddedFont>
       <p:font typeface="Consolas" panose="020B0609020204030204" pitchFamily="49" charset="0"/>
-      <p:regular r:id="rId60"/>
-      <p:bold r:id="rId61"/>
-      <p:italic r:id="rId62"/>
-      <p:boldItalic r:id="rId63"/>
+      <p:regular r:id="rId56"/>
+      <p:bold r:id="rId57"/>
+      <p:italic r:id="rId58"/>
+      <p:boldItalic r:id="rId59"/>
     </p:embeddedFont>
   </p:embeddedFontLst>
   <p:defaultTextStyle>
@@ -331,7 +324,7 @@
       </p15:sldGuideLst>
     </p:ext>
     <p:ext uri="http://customooxmlschemas.google.com/">
-      <go:slidesCustomData xmlns="" xmlns:mc="http://schemas.openxmlformats.org/markup-compatibility/2006" xmlns:mv="urn:schemas-microsoft-com:mac:vml" xmlns:c="http://schemas.openxmlformats.org/drawingml/2006/chart" xmlns:dgm="http://schemas.openxmlformats.org/drawingml/2006/diagram" xmlns:o="urn:schemas-microsoft-com:office:office" xmlns:v="urn:schemas-microsoft-com:vml" xmlns:pvml="urn:schemas-microsoft-com:office:powerpoint" xmlns:com="http://schemas.openxmlformats.org/drawingml/2006/compatibility" xmlns:p14="http://schemas.microsoft.com/office/powerpoint/2010/main" xmlns:p15="http://schemas.microsoft.com/office/powerpoint/2012/main" xmlns:ahyp="http://schemas.microsoft.com/office/drawing/2018/hyperlinkcolor" xmlns:go="http://customooxmlschemas.google.com/" r:id="rId80" roundtripDataSignature="AMtx7milieXwv5OUJdQk1cj/252aZuXcIQ=="/>
+      <go:slidesCustomData xmlns:go="http://customooxmlschemas.google.com/" xmlns:ahyp="http://schemas.microsoft.com/office/drawing/2018/hyperlinkcolor" xmlns:p15="http://schemas.microsoft.com/office/powerpoint/2012/main" xmlns:p14="http://schemas.microsoft.com/office/powerpoint/2010/main" xmlns:com="http://schemas.openxmlformats.org/drawingml/2006/compatibility" xmlns:pvml="urn:schemas-microsoft-com:office:powerpoint" xmlns:v="urn:schemas-microsoft-com:vml" xmlns:o="urn:schemas-microsoft-com:office:office" xmlns:dgm="http://schemas.openxmlformats.org/drawingml/2006/diagram" xmlns:c="http://schemas.openxmlformats.org/drawingml/2006/chart" xmlns:mv="urn:schemas-microsoft-com:mac:vml" xmlns:mc="http://schemas.openxmlformats.org/markup-compatibility/2006" xmlns="" r:id="rId80" roundtripDataSignature="AMtx7milieXwv5OUJdQk1cj/252aZuXcIQ=="/>
     </p:ext>
   </p:extLst>
 </p:presentation>
@@ -340,9 +333,7 @@
 <file path=ppt/revisionInfo.xml><?xml version="1.0" encoding="utf-8"?>
 <p1510:revInfo xmlns:a="http://schemas.openxmlformats.org/drawingml/2006/main" xmlns:r="http://schemas.openxmlformats.org/officeDocument/2006/relationships" xmlns:p1510="http://schemas.microsoft.com/office/powerpoint/2015/10/main">
   <p1510:revLst>
-    <p1510:client id="{6650C529-5FF6-DF91-408E-CA6877BEA450}" v="10" dt="2022-02-28T12:12:33.858"/>
-    <p1510:client id="{690A8561-0462-61C5-122F-B37E0D33A249}" v="452" dt="2022-02-25T18:00:28.886"/>
-    <p1510:client id="{B0536F86-C883-7A67-11FA-EA747C9A93F9}" v="3132" dt="2022-02-27T19:54:03.084"/>
+    <p1510:client id="{5AA0F01B-7B24-6643-B66F-DE0DB9E8D753}" v="11" dt="2025-10-29T15:04:43.666"/>
   </p1510:revLst>
 </p1510:revInfo>
 </file>
@@ -350,2268 +341,220 @@
 <file path=ppt/changesInfos/changesInfo1.xml><?xml version="1.0" encoding="utf-8"?>
 <pc:chgInfo xmlns:a="http://schemas.openxmlformats.org/drawingml/2006/main" xmlns:r="http://schemas.openxmlformats.org/officeDocument/2006/relationships" xmlns:ac="http://schemas.microsoft.com/office/drawing/2013/main/command" xmlns:pc="http://schemas.microsoft.com/office/powerpoint/2013/main/command">
   <pc:docChgLst>
-    <pc:chgData name="Daniel Dan" userId="S::daniel.dan@modul.ac.at::e2a95533-a292-400e-bcf5-c81090ef720f" providerId="AD" clId="Web-{B0536F86-C883-7A67-11FA-EA747C9A93F9}"/>
-    <pc:docChg chg="addSld delSld modSld sldOrd">
-      <pc:chgData name="Daniel Dan" userId="S::daniel.dan@modul.ac.at::e2a95533-a292-400e-bcf5-c81090ef720f" providerId="AD" clId="Web-{B0536F86-C883-7A67-11FA-EA747C9A93F9}" dt="2022-02-27T19:54:03.084" v="2519"/>
+    <pc:chgData name="Ingo Frommholz" userId="ee3b4549-206f-4e4f-93a1-b7ff676f0af7" providerId="ADAL" clId="{5F8971C4-3D52-5FAB-A951-9912A46CDBB0}"/>
+    <pc:docChg chg="undo custSel modSld">
+      <pc:chgData name="Ingo Frommholz" userId="ee3b4549-206f-4e4f-93a1-b7ff676f0af7" providerId="ADAL" clId="{5F8971C4-3D52-5FAB-A951-9912A46CDBB0}" dt="2025-10-29T15:04:46.856" v="221"/>
       <pc:docMkLst>
         <pc:docMk/>
       </pc:docMkLst>
-      <pc:sldChg chg="modSp">
-        <pc:chgData name="Daniel Dan" userId="S::daniel.dan@modul.ac.at::e2a95533-a292-400e-bcf5-c81090ef720f" providerId="AD" clId="Web-{B0536F86-C883-7A67-11FA-EA747C9A93F9}" dt="2022-02-27T19:41:23.940" v="1323" actId="20577"/>
+      <pc:sldChg chg="addSp delSp modSp mod">
+        <pc:chgData name="Ingo Frommholz" userId="ee3b4549-206f-4e4f-93a1-b7ff676f0af7" providerId="ADAL" clId="{5F8971C4-3D52-5FAB-A951-9912A46CDBB0}" dt="2025-10-29T15:04:46.856" v="221"/>
         <pc:sldMkLst>
           <pc:docMk/>
-          <pc:sldMk cId="0" sldId="257"/>
+          <pc:sldMk cId="2688265821" sldId="461"/>
         </pc:sldMkLst>
-        <pc:spChg chg="mod">
-          <ac:chgData name="Daniel Dan" userId="S::daniel.dan@modul.ac.at::e2a95533-a292-400e-bcf5-c81090ef720f" providerId="AD" clId="Web-{B0536F86-C883-7A67-11FA-EA747C9A93F9}" dt="2022-02-27T19:41:23.940" v="1323" actId="20577"/>
+        <pc:spChg chg="add del mod">
+          <ac:chgData name="Ingo Frommholz" userId="ee3b4549-206f-4e4f-93a1-b7ff676f0af7" providerId="ADAL" clId="{5F8971C4-3D52-5FAB-A951-9912A46CDBB0}" dt="2025-10-29T15:04:46.856" v="221"/>
           <ac:spMkLst>
             <pc:docMk/>
-            <pc:sldMk cId="0" sldId="257"/>
-            <ac:spMk id="87" creationId="{00000000-0000-0000-0000-000000000000}"/>
+            <pc:sldMk cId="2688265821" sldId="461"/>
+            <ac:spMk id="3" creationId="{13A39BB6-C530-5630-B4E1-3939CA8BA345}"/>
           </ac:spMkLst>
         </pc:spChg>
       </pc:sldChg>
-      <pc:sldChg chg="modSp">
-        <pc:chgData name="Daniel Dan" userId="S::daniel.dan@modul.ac.at::e2a95533-a292-400e-bcf5-c81090ef720f" providerId="AD" clId="Web-{B0536F86-C883-7A67-11FA-EA747C9A93F9}" dt="2022-02-27T10:47:02.715" v="4" actId="20577"/>
+      <pc:sldChg chg="modSp mod">
+        <pc:chgData name="Ingo Frommholz" userId="ee3b4549-206f-4e4f-93a1-b7ff676f0af7" providerId="ADAL" clId="{5F8971C4-3D52-5FAB-A951-9912A46CDBB0}" dt="2025-10-29T10:08:46.025" v="69" actId="20577"/>
         <pc:sldMkLst>
           <pc:docMk/>
-          <pc:sldMk cId="0" sldId="258"/>
+          <pc:sldMk cId="2965119385" sldId="468"/>
         </pc:sldMkLst>
         <pc:spChg chg="mod">
-          <ac:chgData name="Daniel Dan" userId="S::daniel.dan@modul.ac.at::e2a95533-a292-400e-bcf5-c81090ef720f" providerId="AD" clId="Web-{B0536F86-C883-7A67-11FA-EA747C9A93F9}" dt="2022-02-27T10:47:02.715" v="4" actId="20577"/>
+          <ac:chgData name="Ingo Frommholz" userId="ee3b4549-206f-4e4f-93a1-b7ff676f0af7" providerId="ADAL" clId="{5F8971C4-3D52-5FAB-A951-9912A46CDBB0}" dt="2025-10-29T10:08:46.025" v="69" actId="20577"/>
           <ac:spMkLst>
             <pc:docMk/>
-            <pc:sldMk cId="0" sldId="258"/>
-            <ac:spMk id="2" creationId="{2AC6E17C-95F6-43A8-9683-8D544AABF34F}"/>
+            <pc:sldMk cId="2965119385" sldId="468"/>
+            <ac:spMk id="8" creationId="{21A8D102-1C16-49D0-9B80-8EAB675A9A7B}"/>
           </ac:spMkLst>
         </pc:spChg>
       </pc:sldChg>
-      <pc:sldChg chg="addSp modSp">
-        <pc:chgData name="Daniel Dan" userId="S::daniel.dan@modul.ac.at::e2a95533-a292-400e-bcf5-c81090ef720f" providerId="AD" clId="Web-{B0536F86-C883-7A67-11FA-EA747C9A93F9}" dt="2022-02-27T11:12:59.042" v="70" actId="1076"/>
+      <pc:sldChg chg="modSp mod">
+        <pc:chgData name="Ingo Frommholz" userId="ee3b4549-206f-4e4f-93a1-b7ff676f0af7" providerId="ADAL" clId="{5F8971C4-3D52-5FAB-A951-9912A46CDBB0}" dt="2025-10-29T09:41:42.435" v="1" actId="20577"/>
         <pc:sldMkLst>
           <pc:docMk/>
-          <pc:sldMk cId="0" sldId="262"/>
+          <pc:sldMk cId="1780598022" sldId="469"/>
         </pc:sldMkLst>
         <pc:spChg chg="mod">
-          <ac:chgData name="Daniel Dan" userId="S::daniel.dan@modul.ac.at::e2a95533-a292-400e-bcf5-c81090ef720f" providerId="AD" clId="Web-{B0536F86-C883-7A67-11FA-EA747C9A93F9}" dt="2022-02-27T11:09:47.609" v="63" actId="20577"/>
+          <ac:chgData name="Ingo Frommholz" userId="ee3b4549-206f-4e4f-93a1-b7ff676f0af7" providerId="ADAL" clId="{5F8971C4-3D52-5FAB-A951-9912A46CDBB0}" dt="2025-10-29T09:41:42.435" v="1" actId="20577"/>
           <ac:spMkLst>
             <pc:docMk/>
-            <pc:sldMk cId="0" sldId="262"/>
-            <ac:spMk id="127" creationId="{00000000-0000-0000-0000-000000000000}"/>
+            <pc:sldMk cId="1780598022" sldId="469"/>
+            <ac:spMk id="8" creationId="{21A8D102-1C16-49D0-9B80-8EAB675A9A7B}"/>
+          </ac:spMkLst>
+        </pc:spChg>
+      </pc:sldChg>
+      <pc:sldChg chg="modSp mod">
+        <pc:chgData name="Ingo Frommholz" userId="ee3b4549-206f-4e4f-93a1-b7ff676f0af7" providerId="ADAL" clId="{5F8971C4-3D52-5FAB-A951-9912A46CDBB0}" dt="2025-10-29T10:29:28.885" v="141" actId="20577"/>
+        <pc:sldMkLst>
+          <pc:docMk/>
+          <pc:sldMk cId="2635778816" sldId="472"/>
+        </pc:sldMkLst>
+        <pc:spChg chg="mod">
+          <ac:chgData name="Ingo Frommholz" userId="ee3b4549-206f-4e4f-93a1-b7ff676f0af7" providerId="ADAL" clId="{5F8971C4-3D52-5FAB-A951-9912A46CDBB0}" dt="2025-10-29T10:29:28.885" v="141" actId="20577"/>
+          <ac:spMkLst>
+            <pc:docMk/>
+            <pc:sldMk cId="2635778816" sldId="472"/>
+            <ac:spMk id="8" creationId="{21A8D102-1C16-49D0-9B80-8EAB675A9A7B}"/>
+          </ac:spMkLst>
+        </pc:spChg>
+      </pc:sldChg>
+      <pc:sldChg chg="modSp mod">
+        <pc:chgData name="Ingo Frommholz" userId="ee3b4549-206f-4e4f-93a1-b7ff676f0af7" providerId="ADAL" clId="{5F8971C4-3D52-5FAB-A951-9912A46CDBB0}" dt="2025-10-29T09:46:40.570" v="2" actId="20577"/>
+        <pc:sldMkLst>
+          <pc:docMk/>
+          <pc:sldMk cId="255500345" sldId="501"/>
+        </pc:sldMkLst>
+        <pc:spChg chg="mod">
+          <ac:chgData name="Ingo Frommholz" userId="ee3b4549-206f-4e4f-93a1-b7ff676f0af7" providerId="ADAL" clId="{5F8971C4-3D52-5FAB-A951-9912A46CDBB0}" dt="2025-10-29T09:46:40.570" v="2" actId="20577"/>
+          <ac:spMkLst>
+            <pc:docMk/>
+            <pc:sldMk cId="255500345" sldId="501"/>
+            <ac:spMk id="8" creationId="{21A8D102-1C16-49D0-9B80-8EAB675A9A7B}"/>
+          </ac:spMkLst>
+        </pc:spChg>
+      </pc:sldChg>
+      <pc:sldChg chg="modSp mod">
+        <pc:chgData name="Ingo Frommholz" userId="ee3b4549-206f-4e4f-93a1-b7ff676f0af7" providerId="ADAL" clId="{5F8971C4-3D52-5FAB-A951-9912A46CDBB0}" dt="2025-10-29T09:46:57.707" v="3" actId="20577"/>
+        <pc:sldMkLst>
+          <pc:docMk/>
+          <pc:sldMk cId="3153159043" sldId="502"/>
+        </pc:sldMkLst>
+        <pc:spChg chg="mod">
+          <ac:chgData name="Ingo Frommholz" userId="ee3b4549-206f-4e4f-93a1-b7ff676f0af7" providerId="ADAL" clId="{5F8971C4-3D52-5FAB-A951-9912A46CDBB0}" dt="2025-10-29T09:46:57.707" v="3" actId="20577"/>
+          <ac:spMkLst>
+            <pc:docMk/>
+            <pc:sldMk cId="3153159043" sldId="502"/>
+            <ac:spMk id="8" creationId="{21A8D102-1C16-49D0-9B80-8EAB675A9A7B}"/>
+          </ac:spMkLst>
+        </pc:spChg>
+      </pc:sldChg>
+      <pc:sldChg chg="addSp delSp modSp mod">
+        <pc:chgData name="Ingo Frommholz" userId="ee3b4549-206f-4e4f-93a1-b7ff676f0af7" providerId="ADAL" clId="{5F8971C4-3D52-5FAB-A951-9912A46CDBB0}" dt="2025-10-29T09:59:02.815" v="8" actId="20577"/>
+        <pc:sldMkLst>
+          <pc:docMk/>
+          <pc:sldMk cId="183097626" sldId="506"/>
+        </pc:sldMkLst>
+        <pc:spChg chg="add del mod">
+          <ac:chgData name="Ingo Frommholz" userId="ee3b4549-206f-4e4f-93a1-b7ff676f0af7" providerId="ADAL" clId="{5F8971C4-3D52-5FAB-A951-9912A46CDBB0}" dt="2025-10-29T09:58:50.618" v="6"/>
+          <ac:spMkLst>
+            <pc:docMk/>
+            <pc:sldMk cId="183097626" sldId="506"/>
+            <ac:spMk id="2" creationId="{C12658B2-9B75-3EF9-A2F3-88F1C1157EDE}"/>
           </ac:spMkLst>
         </pc:spChg>
         <pc:spChg chg="mod">
-          <ac:chgData name="Daniel Dan" userId="S::daniel.dan@modul.ac.at::e2a95533-a292-400e-bcf5-c81090ef720f" providerId="AD" clId="Web-{B0536F86-C883-7A67-11FA-EA747C9A93F9}" dt="2022-02-27T11:10:05.735" v="66" actId="20577"/>
+          <ac:chgData name="Ingo Frommholz" userId="ee3b4549-206f-4e4f-93a1-b7ff676f0af7" providerId="ADAL" clId="{5F8971C4-3D52-5FAB-A951-9912A46CDBB0}" dt="2025-10-29T09:59:02.815" v="8" actId="20577"/>
           <ac:spMkLst>
             <pc:docMk/>
-            <pc:sldMk cId="0" sldId="262"/>
-            <ac:spMk id="128" creationId="{00000000-0000-0000-0000-000000000000}"/>
+            <pc:sldMk cId="183097626" sldId="506"/>
+            <ac:spMk id="8" creationId="{21A8D102-1C16-49D0-9B80-8EAB675A9A7B}"/>
           </ac:spMkLst>
         </pc:spChg>
-        <pc:picChg chg="add mod">
-          <ac:chgData name="Daniel Dan" userId="S::daniel.dan@modul.ac.at::e2a95533-a292-400e-bcf5-c81090ef720f" providerId="AD" clId="Web-{B0536F86-C883-7A67-11FA-EA747C9A93F9}" dt="2022-02-27T11:12:59.042" v="70" actId="1076"/>
-          <ac:picMkLst>
-            <pc:docMk/>
-            <pc:sldMk cId="0" sldId="262"/>
-            <ac:picMk id="2" creationId="{04DAB524-A9F3-4A49-A8C0-8C2EC209D27E}"/>
-          </ac:picMkLst>
-        </pc:picChg>
       </pc:sldChg>
-      <pc:sldChg chg="addSp modSp">
-        <pc:chgData name="Daniel Dan" userId="S::daniel.dan@modul.ac.at::e2a95533-a292-400e-bcf5-c81090ef720f" providerId="AD" clId="Web-{B0536F86-C883-7A67-11FA-EA747C9A93F9}" dt="2022-02-27T11:16:29.475" v="102" actId="20577"/>
+      <pc:sldChg chg="addSp delSp modSp mod">
+        <pc:chgData name="Ingo Frommholz" userId="ee3b4549-206f-4e4f-93a1-b7ff676f0af7" providerId="ADAL" clId="{5F8971C4-3D52-5FAB-A951-9912A46CDBB0}" dt="2025-10-29T10:43:08.491" v="144"/>
         <pc:sldMkLst>
           <pc:docMk/>
-          <pc:sldMk cId="0" sldId="263"/>
+          <pc:sldMk cId="2321275284" sldId="507"/>
         </pc:sldMkLst>
-        <pc:spChg chg="add mod">
-          <ac:chgData name="Daniel Dan" userId="S::daniel.dan@modul.ac.at::e2a95533-a292-400e-bcf5-c81090ef720f" providerId="AD" clId="Web-{B0536F86-C883-7A67-11FA-EA747C9A93F9}" dt="2022-02-27T11:16:29.475" v="102" actId="20577"/>
+        <pc:spChg chg="add del mod">
+          <ac:chgData name="Ingo Frommholz" userId="ee3b4549-206f-4e4f-93a1-b7ff676f0af7" providerId="ADAL" clId="{5F8971C4-3D52-5FAB-A951-9912A46CDBB0}" dt="2025-10-29T10:43:08.491" v="144"/>
           <ac:spMkLst>
             <pc:docMk/>
-            <pc:sldMk cId="0" sldId="263"/>
-            <ac:spMk id="3" creationId="{4D3EA09A-1AEA-41F2-997D-E1849B0F2163}"/>
+            <pc:sldMk cId="2321275284" sldId="507"/>
+            <ac:spMk id="2" creationId="{96715BA4-9DBB-6833-DE58-2BAB1CBB3C4C}"/>
+          </ac:spMkLst>
+        </pc:spChg>
+      </pc:sldChg>
+      <pc:sldChg chg="modSp mod">
+        <pc:chgData name="Ingo Frommholz" userId="ee3b4549-206f-4e4f-93a1-b7ff676f0af7" providerId="ADAL" clId="{5F8971C4-3D52-5FAB-A951-9912A46CDBB0}" dt="2025-10-29T11:55:31.915" v="162"/>
+        <pc:sldMkLst>
+          <pc:docMk/>
+          <pc:sldMk cId="1991990786" sldId="511"/>
+        </pc:sldMkLst>
+        <pc:spChg chg="mod">
+          <ac:chgData name="Ingo Frommholz" userId="ee3b4549-206f-4e4f-93a1-b7ff676f0af7" providerId="ADAL" clId="{5F8971C4-3D52-5FAB-A951-9912A46CDBB0}" dt="2025-10-29T11:55:31.915" v="162"/>
+          <ac:spMkLst>
+            <pc:docMk/>
+            <pc:sldMk cId="1991990786" sldId="511"/>
+            <ac:spMk id="8" creationId="{21A8D102-1C16-49D0-9B80-8EAB675A9A7B}"/>
+          </ac:spMkLst>
+        </pc:spChg>
+      </pc:sldChg>
+      <pc:sldChg chg="modSp mod">
+        <pc:chgData name="Ingo Frommholz" userId="ee3b4549-206f-4e4f-93a1-b7ff676f0af7" providerId="ADAL" clId="{5F8971C4-3D52-5FAB-A951-9912A46CDBB0}" dt="2025-10-29T12:26:53.159" v="182" actId="1076"/>
+        <pc:sldMkLst>
+          <pc:docMk/>
+          <pc:sldMk cId="2788699760" sldId="519"/>
+        </pc:sldMkLst>
+        <pc:spChg chg="mod">
+          <ac:chgData name="Ingo Frommholz" userId="ee3b4549-206f-4e4f-93a1-b7ff676f0af7" providerId="ADAL" clId="{5F8971C4-3D52-5FAB-A951-9912A46CDBB0}" dt="2025-10-29T12:26:53.159" v="182" actId="1076"/>
+          <ac:spMkLst>
+            <pc:docMk/>
+            <pc:sldMk cId="2788699760" sldId="519"/>
+            <ac:spMk id="4" creationId="{17DB317F-4D39-4F2E-8849-9AFEFF108ABD}"/>
           </ac:spMkLst>
         </pc:spChg>
         <pc:spChg chg="mod">
-          <ac:chgData name="Daniel Dan" userId="S::daniel.dan@modul.ac.at::e2a95533-a292-400e-bcf5-c81090ef720f" providerId="AD" clId="Web-{B0536F86-C883-7A67-11FA-EA747C9A93F9}" dt="2022-02-27T11:13:47.904" v="74" actId="20577"/>
+          <ac:chgData name="Ingo Frommholz" userId="ee3b4549-206f-4e4f-93a1-b7ff676f0af7" providerId="ADAL" clId="{5F8971C4-3D52-5FAB-A951-9912A46CDBB0}" dt="2025-10-29T12:26:23.480" v="180"/>
           <ac:spMkLst>
             <pc:docMk/>
-            <pc:sldMk cId="0" sldId="263"/>
-            <ac:spMk id="134" creationId="{00000000-0000-0000-0000-000000000000}"/>
-          </ac:spMkLst>
-        </pc:spChg>
-        <pc:spChg chg="mod">
-          <ac:chgData name="Daniel Dan" userId="S::daniel.dan@modul.ac.at::e2a95533-a292-400e-bcf5-c81090ef720f" providerId="AD" clId="Web-{B0536F86-C883-7A67-11FA-EA747C9A93F9}" dt="2022-02-27T11:15:24.347" v="86" actId="20577"/>
-          <ac:spMkLst>
-            <pc:docMk/>
-            <pc:sldMk cId="0" sldId="263"/>
-            <ac:spMk id="135" creationId="{00000000-0000-0000-0000-000000000000}"/>
-          </ac:spMkLst>
-        </pc:spChg>
-        <pc:picChg chg="add mod">
-          <ac:chgData name="Daniel Dan" userId="S::daniel.dan@modul.ac.at::e2a95533-a292-400e-bcf5-c81090ef720f" providerId="AD" clId="Web-{B0536F86-C883-7A67-11FA-EA747C9A93F9}" dt="2022-02-27T11:15:31.675" v="89" actId="14100"/>
-          <ac:picMkLst>
-            <pc:docMk/>
-            <pc:sldMk cId="0" sldId="263"/>
-            <ac:picMk id="2" creationId="{A4BEBE51-DC18-4D86-A4F0-FACE4AD031D8}"/>
-          </ac:picMkLst>
-        </pc:picChg>
-      </pc:sldChg>
-      <pc:sldChg chg="addSp delSp modSp">
-        <pc:chgData name="Daniel Dan" userId="S::daniel.dan@modul.ac.at::e2a95533-a292-400e-bcf5-c81090ef720f" providerId="AD" clId="Web-{B0536F86-C883-7A67-11FA-EA747C9A93F9}" dt="2022-02-27T11:36:49.627" v="332" actId="1076"/>
-        <pc:sldMkLst>
-          <pc:docMk/>
-          <pc:sldMk cId="0" sldId="264"/>
-        </pc:sldMkLst>
-        <pc:spChg chg="add mod">
-          <ac:chgData name="Daniel Dan" userId="S::daniel.dan@modul.ac.at::e2a95533-a292-400e-bcf5-c81090ef720f" providerId="AD" clId="Web-{B0536F86-C883-7A67-11FA-EA747C9A93F9}" dt="2022-02-27T11:17:30.323" v="108"/>
-          <ac:spMkLst>
-            <pc:docMk/>
-            <pc:sldMk cId="0" sldId="264"/>
-            <ac:spMk id="3" creationId="{FA7269B2-5EAC-40A0-BC78-8699C651F14B}"/>
-          </ac:spMkLst>
-        </pc:spChg>
-        <pc:spChg chg="add del">
-          <ac:chgData name="Daniel Dan" userId="S::daniel.dan@modul.ac.at::e2a95533-a292-400e-bcf5-c81090ef720f" providerId="AD" clId="Web-{B0536F86-C883-7A67-11FA-EA747C9A93F9}" dt="2022-02-27T11:20:26.317" v="111"/>
-          <ac:spMkLst>
-            <pc:docMk/>
-            <pc:sldMk cId="0" sldId="264"/>
-            <ac:spMk id="4" creationId="{594DD0DF-F057-4111-B631-0FE84BCCDA1B}"/>
-          </ac:spMkLst>
-        </pc:spChg>
-        <pc:spChg chg="add del mod">
-          <ac:chgData name="Daniel Dan" userId="S::daniel.dan@modul.ac.at::e2a95533-a292-400e-bcf5-c81090ef720f" providerId="AD" clId="Web-{B0536F86-C883-7A67-11FA-EA747C9A93F9}" dt="2022-02-27T11:20:53.662" v="114"/>
-          <ac:spMkLst>
-            <pc:docMk/>
-            <pc:sldMk cId="0" sldId="264"/>
-            <ac:spMk id="5" creationId="{9FE7237F-E970-451C-B9BA-A3A8ECB8F5BD}"/>
-          </ac:spMkLst>
-        </pc:spChg>
-        <pc:spChg chg="add del">
-          <ac:chgData name="Daniel Dan" userId="S::daniel.dan@modul.ac.at::e2a95533-a292-400e-bcf5-c81090ef720f" providerId="AD" clId="Web-{B0536F86-C883-7A67-11FA-EA747C9A93F9}" dt="2022-02-27T11:21:04.241" v="116"/>
-          <ac:spMkLst>
-            <pc:docMk/>
-            <pc:sldMk cId="0" sldId="264"/>
-            <ac:spMk id="6" creationId="{FFBBD527-BAAF-458A-915A-72F1C6D56E7C}"/>
-          </ac:spMkLst>
-        </pc:spChg>
-        <pc:spChg chg="add del mod">
-          <ac:chgData name="Daniel Dan" userId="S::daniel.dan@modul.ac.at::e2a95533-a292-400e-bcf5-c81090ef720f" providerId="AD" clId="Web-{B0536F86-C883-7A67-11FA-EA747C9A93F9}" dt="2022-02-27T11:21:40.274" v="120"/>
-          <ac:spMkLst>
-            <pc:docMk/>
-            <pc:sldMk cId="0" sldId="264"/>
-            <ac:spMk id="7" creationId="{B1D5E76B-264B-4A72-AB89-9522D0656748}"/>
-          </ac:spMkLst>
-        </pc:spChg>
-        <pc:spChg chg="add mod">
-          <ac:chgData name="Daniel Dan" userId="S::daniel.dan@modul.ac.at::e2a95533-a292-400e-bcf5-c81090ef720f" providerId="AD" clId="Web-{B0536F86-C883-7A67-11FA-EA747C9A93F9}" dt="2022-02-27T11:24:38.503" v="148" actId="1076"/>
-          <ac:spMkLst>
-            <pc:docMk/>
-            <pc:sldMk cId="0" sldId="264"/>
-            <ac:spMk id="8" creationId="{12ED535B-6CCF-43FC-81E9-04835CE0D12D}"/>
-          </ac:spMkLst>
-        </pc:spChg>
-        <pc:spChg chg="add mod">
-          <ac:chgData name="Daniel Dan" userId="S::daniel.dan@modul.ac.at::e2a95533-a292-400e-bcf5-c81090ef720f" providerId="AD" clId="Web-{B0536F86-C883-7A67-11FA-EA747C9A93F9}" dt="2022-02-27T11:31:43.015" v="215" actId="20577"/>
-          <ac:spMkLst>
-            <pc:docMk/>
-            <pc:sldMk cId="0" sldId="264"/>
-            <ac:spMk id="12" creationId="{A73186A8-BEB2-4989-9C4B-6A12C1481E27}"/>
-          </ac:spMkLst>
-        </pc:spChg>
-        <pc:spChg chg="add mod">
-          <ac:chgData name="Daniel Dan" userId="S::daniel.dan@modul.ac.at::e2a95533-a292-400e-bcf5-c81090ef720f" providerId="AD" clId="Web-{B0536F86-C883-7A67-11FA-EA747C9A93F9}" dt="2022-02-27T11:24:45.175" v="150" actId="1076"/>
-          <ac:spMkLst>
-            <pc:docMk/>
-            <pc:sldMk cId="0" sldId="264"/>
-            <ac:spMk id="13" creationId="{67FE433E-2D4C-4D9A-9E36-4ECF262E5DAA}"/>
-          </ac:spMkLst>
-        </pc:spChg>
-        <pc:spChg chg="add mod">
-          <ac:chgData name="Daniel Dan" userId="S::daniel.dan@modul.ac.at::e2a95533-a292-400e-bcf5-c81090ef720f" providerId="AD" clId="Web-{B0536F86-C883-7A67-11FA-EA747C9A93F9}" dt="2022-02-27T11:23:53.954" v="139" actId="14100"/>
-          <ac:spMkLst>
-            <pc:docMk/>
-            <pc:sldMk cId="0" sldId="264"/>
-            <ac:spMk id="14" creationId="{7222F7DF-9180-46F4-A269-AA6E4230EE0B}"/>
-          </ac:spMkLst>
-        </pc:spChg>
-        <pc:spChg chg="add mod">
-          <ac:chgData name="Daniel Dan" userId="S::daniel.dan@modul.ac.at::e2a95533-a292-400e-bcf5-c81090ef720f" providerId="AD" clId="Web-{B0536F86-C883-7A67-11FA-EA747C9A93F9}" dt="2022-02-27T11:23:58.938" v="142" actId="1076"/>
-          <ac:spMkLst>
-            <pc:docMk/>
-            <pc:sldMk cId="0" sldId="264"/>
-            <ac:spMk id="15" creationId="{5BFFB2CD-BB7C-403E-A6ED-0FB8A30D7042}"/>
-          </ac:spMkLst>
-        </pc:spChg>
-        <pc:spChg chg="add mod">
-          <ac:chgData name="Daniel Dan" userId="S::daniel.dan@modul.ac.at::e2a95533-a292-400e-bcf5-c81090ef720f" providerId="AD" clId="Web-{B0536F86-C883-7A67-11FA-EA747C9A93F9}" dt="2022-02-27T11:24:04.017" v="143" actId="1076"/>
-          <ac:spMkLst>
-            <pc:docMk/>
-            <pc:sldMk cId="0" sldId="264"/>
-            <ac:spMk id="16" creationId="{2C9E1B4A-8E9D-432E-AEFB-8382DAA6AD5F}"/>
-          </ac:spMkLst>
-        </pc:spChg>
-        <pc:spChg chg="add mod">
-          <ac:chgData name="Daniel Dan" userId="S::daniel.dan@modul.ac.at::e2a95533-a292-400e-bcf5-c81090ef720f" providerId="AD" clId="Web-{B0536F86-C883-7A67-11FA-EA747C9A93F9}" dt="2022-02-27T11:24:31.675" v="146" actId="1076"/>
-          <ac:spMkLst>
-            <pc:docMk/>
-            <pc:sldMk cId="0" sldId="264"/>
-            <ac:spMk id="17" creationId="{AA5ADC1B-F307-4221-9E8B-40A4A8919F57}"/>
-          </ac:spMkLst>
-        </pc:spChg>
-        <pc:spChg chg="add mod">
-          <ac:chgData name="Daniel Dan" userId="S::daniel.dan@modul.ac.at::e2a95533-a292-400e-bcf5-c81090ef720f" providerId="AD" clId="Web-{B0536F86-C883-7A67-11FA-EA747C9A93F9}" dt="2022-02-27T11:24:31.675" v="147" actId="1076"/>
-          <ac:spMkLst>
-            <pc:docMk/>
-            <pc:sldMk cId="0" sldId="264"/>
-            <ac:spMk id="18" creationId="{5EE5DB66-D0EC-4202-AA15-D7A5337D8222}"/>
-          </ac:spMkLst>
-        </pc:spChg>
-        <pc:spChg chg="add mod">
-          <ac:chgData name="Daniel Dan" userId="S::daniel.dan@modul.ac.at::e2a95533-a292-400e-bcf5-c81090ef720f" providerId="AD" clId="Web-{B0536F86-C883-7A67-11FA-EA747C9A93F9}" dt="2022-02-27T11:31:29.905" v="214" actId="1076"/>
-          <ac:spMkLst>
-            <pc:docMk/>
-            <pc:sldMk cId="0" sldId="264"/>
-            <ac:spMk id="20" creationId="{294E924A-BA10-4FD7-983B-9E1FB12B6558}"/>
-          </ac:spMkLst>
-        </pc:spChg>
-        <pc:spChg chg="add mod">
-          <ac:chgData name="Daniel Dan" userId="S::daniel.dan@modul.ac.at::e2a95533-a292-400e-bcf5-c81090ef720f" providerId="AD" clId="Web-{B0536F86-C883-7A67-11FA-EA747C9A93F9}" dt="2022-02-27T11:33:09.005" v="243" actId="1076"/>
-          <ac:spMkLst>
-            <pc:docMk/>
-            <pc:sldMk cId="0" sldId="264"/>
-            <ac:spMk id="28" creationId="{BB30CBD7-0375-4DF7-B0AE-753ED713CE6D}"/>
-          </ac:spMkLst>
-        </pc:spChg>
-        <pc:spChg chg="add mod">
-          <ac:chgData name="Daniel Dan" userId="S::daniel.dan@modul.ac.at::e2a95533-a292-400e-bcf5-c81090ef720f" providerId="AD" clId="Web-{B0536F86-C883-7A67-11FA-EA747C9A93F9}" dt="2022-02-27T11:32:58.707" v="242" actId="1076"/>
-          <ac:spMkLst>
-            <pc:docMk/>
-            <pc:sldMk cId="0" sldId="264"/>
-            <ac:spMk id="29" creationId="{58EDA8A9-9308-4A04-BC70-F2C750A11B10}"/>
-          </ac:spMkLst>
-        </pc:spChg>
-        <pc:spChg chg="add mod">
-          <ac:chgData name="Daniel Dan" userId="S::daniel.dan@modul.ac.at::e2a95533-a292-400e-bcf5-c81090ef720f" providerId="AD" clId="Web-{B0536F86-C883-7A67-11FA-EA747C9A93F9}" dt="2022-02-27T11:34:06.508" v="266" actId="1076"/>
-          <ac:spMkLst>
-            <pc:docMk/>
-            <pc:sldMk cId="0" sldId="264"/>
-            <ac:spMk id="30" creationId="{E1491593-CF0A-47E4-95A2-DBC0183F0411}"/>
-          </ac:spMkLst>
-        </pc:spChg>
-        <pc:spChg chg="add mod">
-          <ac:chgData name="Daniel Dan" userId="S::daniel.dan@modul.ac.at::e2a95533-a292-400e-bcf5-c81090ef720f" providerId="AD" clId="Web-{B0536F86-C883-7A67-11FA-EA747C9A93F9}" dt="2022-02-27T11:34:39.057" v="280" actId="1076"/>
-          <ac:spMkLst>
-            <pc:docMk/>
-            <pc:sldMk cId="0" sldId="264"/>
-            <ac:spMk id="31" creationId="{BB428BE3-86D3-42A5-A89C-3436F402C584}"/>
-          </ac:spMkLst>
-        </pc:spChg>
-        <pc:spChg chg="add mod">
-          <ac:chgData name="Daniel Dan" userId="S::daniel.dan@modul.ac.at::e2a95533-a292-400e-bcf5-c81090ef720f" providerId="AD" clId="Web-{B0536F86-C883-7A67-11FA-EA747C9A93F9}" dt="2022-02-27T11:36:27.500" v="310" actId="1076"/>
-          <ac:spMkLst>
-            <pc:docMk/>
-            <pc:sldMk cId="0" sldId="264"/>
-            <ac:spMk id="32" creationId="{279491CC-92A2-4D7E-B858-DE9D2B45C3E3}"/>
-          </ac:spMkLst>
-        </pc:spChg>
-        <pc:spChg chg="add mod">
-          <ac:chgData name="Daniel Dan" userId="S::daniel.dan@modul.ac.at::e2a95533-a292-400e-bcf5-c81090ef720f" providerId="AD" clId="Web-{B0536F86-C883-7A67-11FA-EA747C9A93F9}" dt="2022-02-27T11:35:45.420" v="303" actId="14100"/>
-          <ac:spMkLst>
-            <pc:docMk/>
-            <pc:sldMk cId="0" sldId="264"/>
-            <ac:spMk id="33" creationId="{40FF0825-F225-46DC-B574-954EC9D85CDC}"/>
-          </ac:spMkLst>
-        </pc:spChg>
-        <pc:spChg chg="add mod">
-          <ac:chgData name="Daniel Dan" userId="S::daniel.dan@modul.ac.at::e2a95533-a292-400e-bcf5-c81090ef720f" providerId="AD" clId="Web-{B0536F86-C883-7A67-11FA-EA747C9A93F9}" dt="2022-02-27T11:36:49.627" v="332" actId="1076"/>
-          <ac:spMkLst>
-            <pc:docMk/>
-            <pc:sldMk cId="0" sldId="264"/>
-            <ac:spMk id="34" creationId="{AD2A4E70-05A0-482B-8768-0DA6785CE8FC}"/>
-          </ac:spMkLst>
-        </pc:spChg>
-        <pc:spChg chg="mod">
-          <ac:chgData name="Daniel Dan" userId="S::daniel.dan@modul.ac.at::e2a95533-a292-400e-bcf5-c81090ef720f" providerId="AD" clId="Web-{B0536F86-C883-7A67-11FA-EA747C9A93F9}" dt="2022-02-27T11:17:25.947" v="107" actId="20577"/>
-          <ac:spMkLst>
-            <pc:docMk/>
-            <pc:sldMk cId="0" sldId="264"/>
-            <ac:spMk id="141" creationId="{00000000-0000-0000-0000-000000000000}"/>
-          </ac:spMkLst>
-        </pc:spChg>
-        <pc:spChg chg="del">
-          <ac:chgData name="Daniel Dan" userId="S::daniel.dan@modul.ac.at::e2a95533-a292-400e-bcf5-c81090ef720f" providerId="AD" clId="Web-{B0536F86-C883-7A67-11FA-EA747C9A93F9}" dt="2022-02-27T11:17:30.323" v="108"/>
-          <ac:spMkLst>
-            <pc:docMk/>
-            <pc:sldMk cId="0" sldId="264"/>
-            <ac:spMk id="142" creationId="{00000000-0000-0000-0000-000000000000}"/>
-          </ac:spMkLst>
-        </pc:spChg>
-        <pc:picChg chg="del">
-          <ac:chgData name="Daniel Dan" userId="S::daniel.dan@modul.ac.at::e2a95533-a292-400e-bcf5-c81090ef720f" providerId="AD" clId="Web-{B0536F86-C883-7A67-11FA-EA747C9A93F9}" dt="2022-02-27T11:17:31.948" v="109"/>
-          <ac:picMkLst>
-            <pc:docMk/>
-            <pc:sldMk cId="0" sldId="264"/>
-            <ac:picMk id="143" creationId="{00000000-0000-0000-0000-000000000000}"/>
-          </ac:picMkLst>
-        </pc:picChg>
-        <pc:cxnChg chg="add del mod">
-          <ac:chgData name="Daniel Dan" userId="S::daniel.dan@modul.ac.at::e2a95533-a292-400e-bcf5-c81090ef720f" providerId="AD" clId="Web-{B0536F86-C883-7A67-11FA-EA747C9A93F9}" dt="2022-02-27T11:25:24.146" v="154"/>
-          <ac:cxnSpMkLst>
-            <pc:docMk/>
-            <pc:sldMk cId="0" sldId="264"/>
-            <ac:cxnSpMk id="9" creationId="{BF87AA38-1352-47BE-95D5-DF18E06337B9}"/>
-          </ac:cxnSpMkLst>
-        </pc:cxnChg>
-        <pc:cxnChg chg="add mod">
-          <ac:chgData name="Daniel Dan" userId="S::daniel.dan@modul.ac.at::e2a95533-a292-400e-bcf5-c81090ef720f" providerId="AD" clId="Web-{B0536F86-C883-7A67-11FA-EA747C9A93F9}" dt="2022-02-27T11:26:13.368" v="161" actId="14100"/>
-          <ac:cxnSpMkLst>
-            <pc:docMk/>
-            <pc:sldMk cId="0" sldId="264"/>
-            <ac:cxnSpMk id="10" creationId="{70B96866-1296-4A4E-B11F-08DB35F14C8F}"/>
-          </ac:cxnSpMkLst>
-        </pc:cxnChg>
-        <pc:cxnChg chg="add mod">
-          <ac:chgData name="Daniel Dan" userId="S::daniel.dan@modul.ac.at::e2a95533-a292-400e-bcf5-c81090ef720f" providerId="AD" clId="Web-{B0536F86-C883-7A67-11FA-EA747C9A93F9}" dt="2022-02-27T11:27:28.407" v="169" actId="14100"/>
-          <ac:cxnSpMkLst>
-            <pc:docMk/>
-            <pc:sldMk cId="0" sldId="264"/>
-            <ac:cxnSpMk id="11" creationId="{376198DB-1B98-4AED-896D-590311D6D3F6}"/>
-          </ac:cxnSpMkLst>
-        </pc:cxnChg>
-        <pc:cxnChg chg="add mod">
-          <ac:chgData name="Daniel Dan" userId="S::daniel.dan@modul.ac.at::e2a95533-a292-400e-bcf5-c81090ef720f" providerId="AD" clId="Web-{B0536F86-C883-7A67-11FA-EA747C9A93F9}" dt="2022-02-27T11:29:23.039" v="184" actId="14100"/>
-          <ac:cxnSpMkLst>
-            <pc:docMk/>
-            <pc:sldMk cId="0" sldId="264"/>
-            <ac:cxnSpMk id="19" creationId="{9AB9CB49-1ED6-4394-866B-D44B63EDFF4D}"/>
-          </ac:cxnSpMkLst>
-        </pc:cxnChg>
-        <pc:cxnChg chg="add mod">
-          <ac:chgData name="Daniel Dan" userId="S::daniel.dan@modul.ac.at::e2a95533-a292-400e-bcf5-c81090ef720f" providerId="AD" clId="Web-{B0536F86-C883-7A67-11FA-EA747C9A93F9}" dt="2022-02-27T11:29:57.009" v="189" actId="14100"/>
-          <ac:cxnSpMkLst>
-            <pc:docMk/>
-            <pc:sldMk cId="0" sldId="264"/>
-            <ac:cxnSpMk id="23" creationId="{3871D6BC-8253-4619-89DB-FD9BB0355CF4}"/>
-          </ac:cxnSpMkLst>
-        </pc:cxnChg>
-        <pc:cxnChg chg="add mod">
-          <ac:chgData name="Daniel Dan" userId="S::daniel.dan@modul.ac.at::e2a95533-a292-400e-bcf5-c81090ef720f" providerId="AD" clId="Web-{B0536F86-C883-7A67-11FA-EA747C9A93F9}" dt="2022-02-27T11:29:48.540" v="188" actId="14100"/>
-          <ac:cxnSpMkLst>
-            <pc:docMk/>
-            <pc:sldMk cId="0" sldId="264"/>
-            <ac:cxnSpMk id="24" creationId="{E59A18B9-127C-4DF3-9AB0-6FEDE2BADEE4}"/>
-          </ac:cxnSpMkLst>
-        </pc:cxnChg>
-        <pc:cxnChg chg="add mod">
-          <ac:chgData name="Daniel Dan" userId="S::daniel.dan@modul.ac.at::e2a95533-a292-400e-bcf5-c81090ef720f" providerId="AD" clId="Web-{B0536F86-C883-7A67-11FA-EA747C9A93F9}" dt="2022-02-27T11:30:36.918" v="195" actId="14100"/>
-          <ac:cxnSpMkLst>
-            <pc:docMk/>
-            <pc:sldMk cId="0" sldId="264"/>
-            <ac:cxnSpMk id="25" creationId="{7D7AB94C-518D-4577-809B-350181669BF3}"/>
-          </ac:cxnSpMkLst>
-        </pc:cxnChg>
-        <pc:cxnChg chg="add mod">
-          <ac:chgData name="Daniel Dan" userId="S::daniel.dan@modul.ac.at::e2a95533-a292-400e-bcf5-c81090ef720f" providerId="AD" clId="Web-{B0536F86-C883-7A67-11FA-EA747C9A93F9}" dt="2022-02-27T11:30:17.136" v="192" actId="14100"/>
-          <ac:cxnSpMkLst>
-            <pc:docMk/>
-            <pc:sldMk cId="0" sldId="264"/>
-            <ac:cxnSpMk id="26" creationId="{2C51D958-D2C4-4B86-BF14-2AE35FC1DC40}"/>
-          </ac:cxnSpMkLst>
-        </pc:cxnChg>
-      </pc:sldChg>
-      <pc:sldChg chg="delSp modSp">
-        <pc:chgData name="Daniel Dan" userId="S::daniel.dan@modul.ac.at::e2a95533-a292-400e-bcf5-c81090ef720f" providerId="AD" clId="Web-{B0536F86-C883-7A67-11FA-EA747C9A93F9}" dt="2022-02-27T17:52:45.324" v="532" actId="20577"/>
-        <pc:sldMkLst>
-          <pc:docMk/>
-          <pc:sldMk cId="0" sldId="265"/>
-        </pc:sldMkLst>
-        <pc:spChg chg="mod">
-          <ac:chgData name="Daniel Dan" userId="S::daniel.dan@modul.ac.at::e2a95533-a292-400e-bcf5-c81090ef720f" providerId="AD" clId="Web-{B0536F86-C883-7A67-11FA-EA747C9A93F9}" dt="2022-02-27T17:52:00.682" v="525" actId="20577"/>
-          <ac:spMkLst>
-            <pc:docMk/>
-            <pc:sldMk cId="0" sldId="265"/>
-            <ac:spMk id="149" creationId="{00000000-0000-0000-0000-000000000000}"/>
-          </ac:spMkLst>
-        </pc:spChg>
-        <pc:spChg chg="mod">
-          <ac:chgData name="Daniel Dan" userId="S::daniel.dan@modul.ac.at::e2a95533-a292-400e-bcf5-c81090ef720f" providerId="AD" clId="Web-{B0536F86-C883-7A67-11FA-EA747C9A93F9}" dt="2022-02-27T17:52:45.324" v="532" actId="20577"/>
-          <ac:spMkLst>
-            <pc:docMk/>
-            <pc:sldMk cId="0" sldId="265"/>
-            <ac:spMk id="150" creationId="{00000000-0000-0000-0000-000000000000}"/>
-          </ac:spMkLst>
-        </pc:spChg>
-        <pc:picChg chg="del">
-          <ac:chgData name="Daniel Dan" userId="S::daniel.dan@modul.ac.at::e2a95533-a292-400e-bcf5-c81090ef720f" providerId="AD" clId="Web-{B0536F86-C883-7A67-11FA-EA747C9A93F9}" dt="2022-02-27T17:52:03.104" v="526"/>
-          <ac:picMkLst>
-            <pc:docMk/>
-            <pc:sldMk cId="0" sldId="265"/>
-            <ac:picMk id="151" creationId="{00000000-0000-0000-0000-000000000000}"/>
-          </ac:picMkLst>
-        </pc:picChg>
-      </pc:sldChg>
-      <pc:sldChg chg="addSp modSp del">
-        <pc:chgData name="Daniel Dan" userId="S::daniel.dan@modul.ac.at::e2a95533-a292-400e-bcf5-c81090ef720f" providerId="AD" clId="Web-{B0536F86-C883-7A67-11FA-EA747C9A93F9}" dt="2022-02-27T18:13:29.373" v="612"/>
-        <pc:sldMkLst>
-          <pc:docMk/>
-          <pc:sldMk cId="0" sldId="266"/>
-        </pc:sldMkLst>
-        <pc:spChg chg="mod">
-          <ac:chgData name="Daniel Dan" userId="S::daniel.dan@modul.ac.at::e2a95533-a292-400e-bcf5-c81090ef720f" providerId="AD" clId="Web-{B0536F86-C883-7A67-11FA-EA747C9A93F9}" dt="2022-02-27T17:53:52.500" v="549" actId="20577"/>
-          <ac:spMkLst>
-            <pc:docMk/>
-            <pc:sldMk cId="0" sldId="266"/>
-            <ac:spMk id="157" creationId="{00000000-0000-0000-0000-000000000000}"/>
-          </ac:spMkLst>
-        </pc:spChg>
-        <pc:spChg chg="mod">
-          <ac:chgData name="Daniel Dan" userId="S::daniel.dan@modul.ac.at::e2a95533-a292-400e-bcf5-c81090ef720f" providerId="AD" clId="Web-{B0536F86-C883-7A67-11FA-EA747C9A93F9}" dt="2022-02-27T18:05:07.269" v="577" actId="20577"/>
-          <ac:spMkLst>
-            <pc:docMk/>
-            <pc:sldMk cId="0" sldId="266"/>
-            <ac:spMk id="158" creationId="{00000000-0000-0000-0000-000000000000}"/>
-          </ac:spMkLst>
-        </pc:spChg>
-        <pc:picChg chg="add mod">
-          <ac:chgData name="Daniel Dan" userId="S::daniel.dan@modul.ac.at::e2a95533-a292-400e-bcf5-c81090ef720f" providerId="AD" clId="Web-{B0536F86-C883-7A67-11FA-EA747C9A93F9}" dt="2022-02-27T18:03:58.094" v="565" actId="1076"/>
-          <ac:picMkLst>
-            <pc:docMk/>
-            <pc:sldMk cId="0" sldId="266"/>
-            <ac:picMk id="2" creationId="{2A515699-D87A-4013-808B-5A3F43412698}"/>
-          </ac:picMkLst>
-        </pc:picChg>
-      </pc:sldChg>
-      <pc:sldChg chg="del">
-        <pc:chgData name="Daniel Dan" userId="S::daniel.dan@modul.ac.at::e2a95533-a292-400e-bcf5-c81090ef720f" providerId="AD" clId="Web-{B0536F86-C883-7A67-11FA-EA747C9A93F9}" dt="2022-02-27T19:40:30.314" v="1310"/>
-        <pc:sldMkLst>
-          <pc:docMk/>
-          <pc:sldMk cId="0" sldId="267"/>
-        </pc:sldMkLst>
-      </pc:sldChg>
-      <pc:sldChg chg="del">
-        <pc:chgData name="Daniel Dan" userId="S::daniel.dan@modul.ac.at::e2a95533-a292-400e-bcf5-c81090ef720f" providerId="AD" clId="Web-{B0536F86-C883-7A67-11FA-EA747C9A93F9}" dt="2022-02-27T19:40:30.314" v="1309"/>
-        <pc:sldMkLst>
-          <pc:docMk/>
-          <pc:sldMk cId="0" sldId="268"/>
-        </pc:sldMkLst>
-      </pc:sldChg>
-      <pc:sldChg chg="del">
-        <pc:chgData name="Daniel Dan" userId="S::daniel.dan@modul.ac.at::e2a95533-a292-400e-bcf5-c81090ef720f" providerId="AD" clId="Web-{B0536F86-C883-7A67-11FA-EA747C9A93F9}" dt="2022-02-27T19:40:30.314" v="1308"/>
-        <pc:sldMkLst>
-          <pc:docMk/>
-          <pc:sldMk cId="0" sldId="269"/>
-        </pc:sldMkLst>
-      </pc:sldChg>
-      <pc:sldChg chg="del">
-        <pc:chgData name="Daniel Dan" userId="S::daniel.dan@modul.ac.at::e2a95533-a292-400e-bcf5-c81090ef720f" providerId="AD" clId="Web-{B0536F86-C883-7A67-11FA-EA747C9A93F9}" dt="2022-02-27T19:40:30.314" v="1307"/>
-        <pc:sldMkLst>
-          <pc:docMk/>
-          <pc:sldMk cId="0" sldId="270"/>
-        </pc:sldMkLst>
-      </pc:sldChg>
-      <pc:sldChg chg="del">
-        <pc:chgData name="Daniel Dan" userId="S::daniel.dan@modul.ac.at::e2a95533-a292-400e-bcf5-c81090ef720f" providerId="AD" clId="Web-{B0536F86-C883-7A67-11FA-EA747C9A93F9}" dt="2022-02-27T19:40:30.299" v="1306"/>
-        <pc:sldMkLst>
-          <pc:docMk/>
-          <pc:sldMk cId="0" sldId="271"/>
-        </pc:sldMkLst>
-      </pc:sldChg>
-      <pc:sldChg chg="del">
-        <pc:chgData name="Daniel Dan" userId="S::daniel.dan@modul.ac.at::e2a95533-a292-400e-bcf5-c81090ef720f" providerId="AD" clId="Web-{B0536F86-C883-7A67-11FA-EA747C9A93F9}" dt="2022-02-27T19:40:30.299" v="1305"/>
-        <pc:sldMkLst>
-          <pc:docMk/>
-          <pc:sldMk cId="0" sldId="272"/>
-        </pc:sldMkLst>
-      </pc:sldChg>
-      <pc:sldChg chg="del">
-        <pc:chgData name="Daniel Dan" userId="S::daniel.dan@modul.ac.at::e2a95533-a292-400e-bcf5-c81090ef720f" providerId="AD" clId="Web-{B0536F86-C883-7A67-11FA-EA747C9A93F9}" dt="2022-02-27T19:40:30.299" v="1304"/>
-        <pc:sldMkLst>
-          <pc:docMk/>
-          <pc:sldMk cId="0" sldId="273"/>
-        </pc:sldMkLst>
-      </pc:sldChg>
-      <pc:sldChg chg="del">
-        <pc:chgData name="Daniel Dan" userId="S::daniel.dan@modul.ac.at::e2a95533-a292-400e-bcf5-c81090ef720f" providerId="AD" clId="Web-{B0536F86-C883-7A67-11FA-EA747C9A93F9}" dt="2022-02-27T19:40:30.299" v="1303"/>
-        <pc:sldMkLst>
-          <pc:docMk/>
-          <pc:sldMk cId="0" sldId="274"/>
-        </pc:sldMkLst>
-      </pc:sldChg>
-      <pc:sldChg chg="del">
-        <pc:chgData name="Daniel Dan" userId="S::daniel.dan@modul.ac.at::e2a95533-a292-400e-bcf5-c81090ef720f" providerId="AD" clId="Web-{B0536F86-C883-7A67-11FA-EA747C9A93F9}" dt="2022-02-27T19:40:30.299" v="1302"/>
-        <pc:sldMkLst>
-          <pc:docMk/>
-          <pc:sldMk cId="0" sldId="275"/>
-        </pc:sldMkLst>
-      </pc:sldChg>
-      <pc:sldChg chg="del">
-        <pc:chgData name="Daniel Dan" userId="S::daniel.dan@modul.ac.at::e2a95533-a292-400e-bcf5-c81090ef720f" providerId="AD" clId="Web-{B0536F86-C883-7A67-11FA-EA747C9A93F9}" dt="2022-02-27T19:40:30.299" v="1301"/>
-        <pc:sldMkLst>
-          <pc:docMk/>
-          <pc:sldMk cId="0" sldId="276"/>
-        </pc:sldMkLst>
-      </pc:sldChg>
-      <pc:sldChg chg="del">
-        <pc:chgData name="Daniel Dan" userId="S::daniel.dan@modul.ac.at::e2a95533-a292-400e-bcf5-c81090ef720f" providerId="AD" clId="Web-{B0536F86-C883-7A67-11FA-EA747C9A93F9}" dt="2022-02-27T19:40:30.299" v="1300"/>
-        <pc:sldMkLst>
-          <pc:docMk/>
-          <pc:sldMk cId="0" sldId="277"/>
-        </pc:sldMkLst>
-      </pc:sldChg>
-      <pc:sldChg chg="del">
-        <pc:chgData name="Daniel Dan" userId="S::daniel.dan@modul.ac.at::e2a95533-a292-400e-bcf5-c81090ef720f" providerId="AD" clId="Web-{B0536F86-C883-7A67-11FA-EA747C9A93F9}" dt="2022-02-27T19:40:30.299" v="1299"/>
-        <pc:sldMkLst>
-          <pc:docMk/>
-          <pc:sldMk cId="0" sldId="278"/>
-        </pc:sldMkLst>
-      </pc:sldChg>
-      <pc:sldChg chg="del">
-        <pc:chgData name="Daniel Dan" userId="S::daniel.dan@modul.ac.at::e2a95533-a292-400e-bcf5-c81090ef720f" providerId="AD" clId="Web-{B0536F86-C883-7A67-11FA-EA747C9A93F9}" dt="2022-02-27T19:40:30.299" v="1298"/>
-        <pc:sldMkLst>
-          <pc:docMk/>
-          <pc:sldMk cId="0" sldId="279"/>
-        </pc:sldMkLst>
-      </pc:sldChg>
-      <pc:sldChg chg="del">
-        <pc:chgData name="Daniel Dan" userId="S::daniel.dan@modul.ac.at::e2a95533-a292-400e-bcf5-c81090ef720f" providerId="AD" clId="Web-{B0536F86-C883-7A67-11FA-EA747C9A93F9}" dt="2022-02-27T19:40:30.299" v="1297"/>
-        <pc:sldMkLst>
-          <pc:docMk/>
-          <pc:sldMk cId="0" sldId="280"/>
-        </pc:sldMkLst>
-      </pc:sldChg>
-      <pc:sldChg chg="del">
-        <pc:chgData name="Daniel Dan" userId="S::daniel.dan@modul.ac.at::e2a95533-a292-400e-bcf5-c81090ef720f" providerId="AD" clId="Web-{B0536F86-C883-7A67-11FA-EA747C9A93F9}" dt="2022-02-27T19:40:30.299" v="1296"/>
-        <pc:sldMkLst>
-          <pc:docMk/>
-          <pc:sldMk cId="0" sldId="281"/>
-        </pc:sldMkLst>
-      </pc:sldChg>
-      <pc:sldChg chg="del">
-        <pc:chgData name="Daniel Dan" userId="S::daniel.dan@modul.ac.at::e2a95533-a292-400e-bcf5-c81090ef720f" providerId="AD" clId="Web-{B0536F86-C883-7A67-11FA-EA747C9A93F9}" dt="2022-02-27T19:40:30.299" v="1295"/>
-        <pc:sldMkLst>
-          <pc:docMk/>
-          <pc:sldMk cId="0" sldId="282"/>
-        </pc:sldMkLst>
-      </pc:sldChg>
-      <pc:sldChg chg="del">
-        <pc:chgData name="Daniel Dan" userId="S::daniel.dan@modul.ac.at::e2a95533-a292-400e-bcf5-c81090ef720f" providerId="AD" clId="Web-{B0536F86-C883-7A67-11FA-EA747C9A93F9}" dt="2022-02-27T19:40:30.299" v="1294"/>
-        <pc:sldMkLst>
-          <pc:docMk/>
-          <pc:sldMk cId="0" sldId="283"/>
-        </pc:sldMkLst>
-      </pc:sldChg>
-      <pc:sldChg chg="del">
-        <pc:chgData name="Daniel Dan" userId="S::daniel.dan@modul.ac.at::e2a95533-a292-400e-bcf5-c81090ef720f" providerId="AD" clId="Web-{B0536F86-C883-7A67-11FA-EA747C9A93F9}" dt="2022-02-27T19:40:30.299" v="1293"/>
-        <pc:sldMkLst>
-          <pc:docMk/>
-          <pc:sldMk cId="0" sldId="284"/>
-        </pc:sldMkLst>
-      </pc:sldChg>
-      <pc:sldChg chg="del">
-        <pc:chgData name="Daniel Dan" userId="S::daniel.dan@modul.ac.at::e2a95533-a292-400e-bcf5-c81090ef720f" providerId="AD" clId="Web-{B0536F86-C883-7A67-11FA-EA747C9A93F9}" dt="2022-02-27T19:40:30.299" v="1292"/>
-        <pc:sldMkLst>
-          <pc:docMk/>
-          <pc:sldMk cId="0" sldId="285"/>
-        </pc:sldMkLst>
-      </pc:sldChg>
-      <pc:sldChg chg="del">
-        <pc:chgData name="Daniel Dan" userId="S::daniel.dan@modul.ac.at::e2a95533-a292-400e-bcf5-c81090ef720f" providerId="AD" clId="Web-{B0536F86-C883-7A67-11FA-EA747C9A93F9}" dt="2022-02-27T19:40:30.283" v="1291"/>
-        <pc:sldMkLst>
-          <pc:docMk/>
-          <pc:sldMk cId="0" sldId="286"/>
-        </pc:sldMkLst>
-      </pc:sldChg>
-      <pc:sldChg chg="del">
-        <pc:chgData name="Daniel Dan" userId="S::daniel.dan@modul.ac.at::e2a95533-a292-400e-bcf5-c81090ef720f" providerId="AD" clId="Web-{B0536F86-C883-7A67-11FA-EA747C9A93F9}" dt="2022-02-27T19:40:30.283" v="1290"/>
-        <pc:sldMkLst>
-          <pc:docMk/>
-          <pc:sldMk cId="0" sldId="287"/>
-        </pc:sldMkLst>
-      </pc:sldChg>
-      <pc:sldChg chg="del">
-        <pc:chgData name="Daniel Dan" userId="S::daniel.dan@modul.ac.at::e2a95533-a292-400e-bcf5-c81090ef720f" providerId="AD" clId="Web-{B0536F86-C883-7A67-11FA-EA747C9A93F9}" dt="2022-02-27T19:40:30.283" v="1289"/>
-        <pc:sldMkLst>
-          <pc:docMk/>
-          <pc:sldMk cId="0" sldId="288"/>
-        </pc:sldMkLst>
-      </pc:sldChg>
-      <pc:sldChg chg="del">
-        <pc:chgData name="Daniel Dan" userId="S::daniel.dan@modul.ac.at::e2a95533-a292-400e-bcf5-c81090ef720f" providerId="AD" clId="Web-{B0536F86-C883-7A67-11FA-EA747C9A93F9}" dt="2022-02-27T19:40:30.283" v="1288"/>
-        <pc:sldMkLst>
-          <pc:docMk/>
-          <pc:sldMk cId="0" sldId="289"/>
-        </pc:sldMkLst>
-      </pc:sldChg>
-      <pc:sldChg chg="del">
-        <pc:chgData name="Daniel Dan" userId="S::daniel.dan@modul.ac.at::e2a95533-a292-400e-bcf5-c81090ef720f" providerId="AD" clId="Web-{B0536F86-C883-7A67-11FA-EA747C9A93F9}" dt="2022-02-27T19:40:30.283" v="1287"/>
-        <pc:sldMkLst>
-          <pc:docMk/>
-          <pc:sldMk cId="0" sldId="290"/>
-        </pc:sldMkLst>
-      </pc:sldChg>
-      <pc:sldChg chg="del">
-        <pc:chgData name="Daniel Dan" userId="S::daniel.dan@modul.ac.at::e2a95533-a292-400e-bcf5-c81090ef720f" providerId="AD" clId="Web-{B0536F86-C883-7A67-11FA-EA747C9A93F9}" dt="2022-02-27T19:40:30.283" v="1286"/>
-        <pc:sldMkLst>
-          <pc:docMk/>
-          <pc:sldMk cId="0" sldId="291"/>
-        </pc:sldMkLst>
-      </pc:sldChg>
-      <pc:sldChg chg="del">
-        <pc:chgData name="Daniel Dan" userId="S::daniel.dan@modul.ac.at::e2a95533-a292-400e-bcf5-c81090ef720f" providerId="AD" clId="Web-{B0536F86-C883-7A67-11FA-EA747C9A93F9}" dt="2022-02-27T19:40:30.283" v="1285"/>
-        <pc:sldMkLst>
-          <pc:docMk/>
-          <pc:sldMk cId="0" sldId="292"/>
-        </pc:sldMkLst>
-      </pc:sldChg>
-      <pc:sldChg chg="del">
-        <pc:chgData name="Daniel Dan" userId="S::daniel.dan@modul.ac.at::e2a95533-a292-400e-bcf5-c81090ef720f" providerId="AD" clId="Web-{B0536F86-C883-7A67-11FA-EA747C9A93F9}" dt="2022-02-27T19:40:30.283" v="1284"/>
-        <pc:sldMkLst>
-          <pc:docMk/>
-          <pc:sldMk cId="0" sldId="293"/>
-        </pc:sldMkLst>
-      </pc:sldChg>
-      <pc:sldChg chg="del">
-        <pc:chgData name="Daniel Dan" userId="S::daniel.dan@modul.ac.at::e2a95533-a292-400e-bcf5-c81090ef720f" providerId="AD" clId="Web-{B0536F86-C883-7A67-11FA-EA747C9A93F9}" dt="2022-02-27T19:40:30.283" v="1283"/>
-        <pc:sldMkLst>
-          <pc:docMk/>
-          <pc:sldMk cId="0" sldId="294"/>
-        </pc:sldMkLst>
-      </pc:sldChg>
-      <pc:sldChg chg="del">
-        <pc:chgData name="Daniel Dan" userId="S::daniel.dan@modul.ac.at::e2a95533-a292-400e-bcf5-c81090ef720f" providerId="AD" clId="Web-{B0536F86-C883-7A67-11FA-EA747C9A93F9}" dt="2022-02-27T19:40:30.283" v="1282"/>
-        <pc:sldMkLst>
-          <pc:docMk/>
-          <pc:sldMk cId="0" sldId="295"/>
-        </pc:sldMkLst>
-      </pc:sldChg>
-      <pc:sldChg chg="del">
-        <pc:chgData name="Daniel Dan" userId="S::daniel.dan@modul.ac.at::e2a95533-a292-400e-bcf5-c81090ef720f" providerId="AD" clId="Web-{B0536F86-C883-7A67-11FA-EA747C9A93F9}" dt="2022-02-27T19:40:30.283" v="1281"/>
-        <pc:sldMkLst>
-          <pc:docMk/>
-          <pc:sldMk cId="0" sldId="296"/>
-        </pc:sldMkLst>
-      </pc:sldChg>
-      <pc:sldChg chg="del">
-        <pc:chgData name="Daniel Dan" userId="S::daniel.dan@modul.ac.at::e2a95533-a292-400e-bcf5-c81090ef720f" providerId="AD" clId="Web-{B0536F86-C883-7A67-11FA-EA747C9A93F9}" dt="2022-02-27T19:40:30.283" v="1280"/>
-        <pc:sldMkLst>
-          <pc:docMk/>
-          <pc:sldMk cId="0" sldId="297"/>
-        </pc:sldMkLst>
-      </pc:sldChg>
-      <pc:sldChg chg="del">
-        <pc:chgData name="Daniel Dan" userId="S::daniel.dan@modul.ac.at::e2a95533-a292-400e-bcf5-c81090ef720f" providerId="AD" clId="Web-{B0536F86-C883-7A67-11FA-EA747C9A93F9}" dt="2022-02-27T19:40:30.283" v="1279"/>
-        <pc:sldMkLst>
-          <pc:docMk/>
-          <pc:sldMk cId="0" sldId="298"/>
-        </pc:sldMkLst>
-      </pc:sldChg>
-      <pc:sldChg chg="del">
-        <pc:chgData name="Daniel Dan" userId="S::daniel.dan@modul.ac.at::e2a95533-a292-400e-bcf5-c81090ef720f" providerId="AD" clId="Web-{B0536F86-C883-7A67-11FA-EA747C9A93F9}" dt="2022-02-27T19:40:30.283" v="1278"/>
-        <pc:sldMkLst>
-          <pc:docMk/>
-          <pc:sldMk cId="0" sldId="299"/>
-        </pc:sldMkLst>
-      </pc:sldChg>
-      <pc:sldChg chg="del">
-        <pc:chgData name="Daniel Dan" userId="S::daniel.dan@modul.ac.at::e2a95533-a292-400e-bcf5-c81090ef720f" providerId="AD" clId="Web-{B0536F86-C883-7A67-11FA-EA747C9A93F9}" dt="2022-02-27T19:40:30.268" v="1277"/>
-        <pc:sldMkLst>
-          <pc:docMk/>
-          <pc:sldMk cId="0" sldId="300"/>
-        </pc:sldMkLst>
-      </pc:sldChg>
-      <pc:sldChg chg="del">
-        <pc:chgData name="Daniel Dan" userId="S::daniel.dan@modul.ac.at::e2a95533-a292-400e-bcf5-c81090ef720f" providerId="AD" clId="Web-{B0536F86-C883-7A67-11FA-EA747C9A93F9}" dt="2022-02-27T19:40:30.268" v="1276"/>
-        <pc:sldMkLst>
-          <pc:docMk/>
-          <pc:sldMk cId="0" sldId="301"/>
-        </pc:sldMkLst>
-      </pc:sldChg>
-      <pc:sldChg chg="del">
-        <pc:chgData name="Daniel Dan" userId="S::daniel.dan@modul.ac.at::e2a95533-a292-400e-bcf5-c81090ef720f" providerId="AD" clId="Web-{B0536F86-C883-7A67-11FA-EA747C9A93F9}" dt="2022-02-27T19:40:30.268" v="1275"/>
-        <pc:sldMkLst>
-          <pc:docMk/>
-          <pc:sldMk cId="0" sldId="302"/>
-        </pc:sldMkLst>
-      </pc:sldChg>
-      <pc:sldChg chg="del">
-        <pc:chgData name="Daniel Dan" userId="S::daniel.dan@modul.ac.at::e2a95533-a292-400e-bcf5-c81090ef720f" providerId="AD" clId="Web-{B0536F86-C883-7A67-11FA-EA747C9A93F9}" dt="2022-02-27T19:54:03.084" v="2519"/>
-        <pc:sldMkLst>
-          <pc:docMk/>
-          <pc:sldMk cId="0" sldId="303"/>
-        </pc:sldMkLst>
-      </pc:sldChg>
-      <pc:sldChg chg="modSp">
-        <pc:chgData name="Daniel Dan" userId="S::daniel.dan@modul.ac.at::e2a95533-a292-400e-bcf5-c81090ef720f" providerId="AD" clId="Web-{B0536F86-C883-7A67-11FA-EA747C9A93F9}" dt="2022-02-27T19:41:28.847" v="1325" actId="20577"/>
-        <pc:sldMkLst>
-          <pc:docMk/>
-          <pc:sldMk cId="0" sldId="304"/>
-        </pc:sldMkLst>
-        <pc:spChg chg="mod">
-          <ac:chgData name="Daniel Dan" userId="S::daniel.dan@modul.ac.at::e2a95533-a292-400e-bcf5-c81090ef720f" providerId="AD" clId="Web-{B0536F86-C883-7A67-11FA-EA747C9A93F9}" dt="2022-02-27T19:41:28.847" v="1325" actId="20577"/>
-          <ac:spMkLst>
-            <pc:docMk/>
-            <pc:sldMk cId="0" sldId="304"/>
-            <ac:spMk id="433" creationId="{00000000-0000-0000-0000-000000000000}"/>
+            <pc:sldMk cId="2788699760" sldId="519"/>
+            <ac:spMk id="8" creationId="{21A8D102-1C16-49D0-9B80-8EAB675A9A7B}"/>
           </ac:spMkLst>
         </pc:spChg>
       </pc:sldChg>
-      <pc:sldChg chg="modSp">
-        <pc:chgData name="Daniel Dan" userId="S::daniel.dan@modul.ac.at::e2a95533-a292-400e-bcf5-c81090ef720f" providerId="AD" clId="Web-{B0536F86-C883-7A67-11FA-EA747C9A93F9}" dt="2022-02-27T19:43:45.864" v="1482" actId="20577"/>
+      <pc:sldChg chg="modSp mod">
+        <pc:chgData name="Ingo Frommholz" userId="ee3b4549-206f-4e4f-93a1-b7ff676f0af7" providerId="ADAL" clId="{5F8971C4-3D52-5FAB-A951-9912A46CDBB0}" dt="2025-10-29T12:31:01.013" v="200"/>
         <pc:sldMkLst>
           <pc:docMk/>
-          <pc:sldMk cId="0" sldId="305"/>
+          <pc:sldMk cId="834931280" sldId="522"/>
         </pc:sldMkLst>
         <pc:spChg chg="mod">
-          <ac:chgData name="Daniel Dan" userId="S::daniel.dan@modul.ac.at::e2a95533-a292-400e-bcf5-c81090ef720f" providerId="AD" clId="Web-{B0536F86-C883-7A67-11FA-EA747C9A93F9}" dt="2022-02-27T19:43:45.864" v="1482" actId="20577"/>
+          <ac:chgData name="Ingo Frommholz" userId="ee3b4549-206f-4e4f-93a1-b7ff676f0af7" providerId="ADAL" clId="{5F8971C4-3D52-5FAB-A951-9912A46CDBB0}" dt="2025-10-29T12:31:01.013" v="200"/>
           <ac:spMkLst>
             <pc:docMk/>
-            <pc:sldMk cId="0" sldId="305"/>
-            <ac:spMk id="438" creationId="{00000000-0000-0000-0000-000000000000}"/>
+            <pc:sldMk cId="834931280" sldId="522"/>
+            <ac:spMk id="8" creationId="{21A8D102-1C16-49D0-9B80-8EAB675A9A7B}"/>
           </ac:spMkLst>
         </pc:spChg>
       </pc:sldChg>
-      <pc:sldChg chg="addSp delSp modSp">
-        <pc:chgData name="Daniel Dan" userId="S::daniel.dan@modul.ac.at::e2a95533-a292-400e-bcf5-c81090ef720f" providerId="AD" clId="Web-{B0536F86-C883-7A67-11FA-EA747C9A93F9}" dt="2022-02-27T11:15:56.192" v="91" actId="20577"/>
+      <pc:sldChg chg="modSp mod">
+        <pc:chgData name="Ingo Frommholz" userId="ee3b4549-206f-4e4f-93a1-b7ff676f0af7" providerId="ADAL" clId="{5F8971C4-3D52-5FAB-A951-9912A46CDBB0}" dt="2025-10-29T12:32:51.690" v="201" actId="113"/>
         <pc:sldMkLst>
           <pc:docMk/>
-          <pc:sldMk cId="808992841" sldId="309"/>
+          <pc:sldMk cId="4234670050" sldId="534"/>
         </pc:sldMkLst>
-        <pc:spChg chg="add mod">
-          <ac:chgData name="Daniel Dan" userId="S::daniel.dan@modul.ac.at::e2a95533-a292-400e-bcf5-c81090ef720f" providerId="AD" clId="Web-{B0536F86-C883-7A67-11FA-EA747C9A93F9}" dt="2022-02-27T11:15:56.192" v="91" actId="20577"/>
+        <pc:spChg chg="mod">
+          <ac:chgData name="Ingo Frommholz" userId="ee3b4549-206f-4e4f-93a1-b7ff676f0af7" providerId="ADAL" clId="{5F8971C4-3D52-5FAB-A951-9912A46CDBB0}" dt="2025-10-29T12:32:51.690" v="201" actId="113"/>
           <ac:spMkLst>
             <pc:docMk/>
-            <pc:sldMk cId="808992841" sldId="309"/>
-            <ac:spMk id="3" creationId="{3115D5A0-2193-4443-9F84-B0DFAF8F16C7}"/>
-          </ac:spMkLst>
-        </pc:spChg>
-        <pc:spChg chg="mod">
-          <ac:chgData name="Daniel Dan" userId="S::daniel.dan@modul.ac.at::e2a95533-a292-400e-bcf5-c81090ef720f" providerId="AD" clId="Web-{B0536F86-C883-7A67-11FA-EA747C9A93F9}" dt="2022-02-27T10:50:30.164" v="16" actId="20577"/>
-          <ac:spMkLst>
-            <pc:docMk/>
-            <pc:sldMk cId="808992841" sldId="309"/>
-            <ac:spMk id="115" creationId="{00000000-0000-0000-0000-000000000000}"/>
-          </ac:spMkLst>
-        </pc:spChg>
-        <pc:spChg chg="mod">
-          <ac:chgData name="Daniel Dan" userId="S::daniel.dan@modul.ac.at::e2a95533-a292-400e-bcf5-c81090ef720f" providerId="AD" clId="Web-{B0536F86-C883-7A67-11FA-EA747C9A93F9}" dt="2022-02-27T10:51:43.106" v="40" actId="20577"/>
-          <ac:spMkLst>
-            <pc:docMk/>
-            <pc:sldMk cId="808992841" sldId="309"/>
-            <ac:spMk id="116" creationId="{00000000-0000-0000-0000-000000000000}"/>
-          </ac:spMkLst>
-        </pc:spChg>
-        <pc:spChg chg="del">
-          <ac:chgData name="Daniel Dan" userId="S::daniel.dan@modul.ac.at::e2a95533-a292-400e-bcf5-c81090ef720f" providerId="AD" clId="Web-{B0536F86-C883-7A67-11FA-EA747C9A93F9}" dt="2022-02-27T10:50:41.040" v="21"/>
-          <ac:spMkLst>
-            <pc:docMk/>
-            <pc:sldMk cId="808992841" sldId="309"/>
-            <ac:spMk id="117" creationId="{00000000-0000-0000-0000-000000000000}"/>
-          </ac:spMkLst>
-        </pc:spChg>
-        <pc:spChg chg="del">
-          <ac:chgData name="Daniel Dan" userId="S::daniel.dan@modul.ac.at::e2a95533-a292-400e-bcf5-c81090ef720f" providerId="AD" clId="Web-{B0536F86-C883-7A67-11FA-EA747C9A93F9}" dt="2022-02-27T10:50:36.555" v="17"/>
-          <ac:spMkLst>
-            <pc:docMk/>
-            <pc:sldMk cId="808992841" sldId="309"/>
-            <ac:spMk id="118" creationId="{00000000-0000-0000-0000-000000000000}"/>
-          </ac:spMkLst>
-        </pc:spChg>
-        <pc:spChg chg="del">
-          <ac:chgData name="Daniel Dan" userId="S::daniel.dan@modul.ac.at::e2a95533-a292-400e-bcf5-c81090ef720f" providerId="AD" clId="Web-{B0536F86-C883-7A67-11FA-EA747C9A93F9}" dt="2022-02-27T10:50:37.774" v="19"/>
-          <ac:spMkLst>
-            <pc:docMk/>
-            <pc:sldMk cId="808992841" sldId="309"/>
-            <ac:spMk id="119" creationId="{00000000-0000-0000-0000-000000000000}"/>
-          </ac:spMkLst>
-        </pc:spChg>
-        <pc:picChg chg="add mod">
-          <ac:chgData name="Daniel Dan" userId="S::daniel.dan@modul.ac.at::e2a95533-a292-400e-bcf5-c81090ef720f" providerId="AD" clId="Web-{B0536F86-C883-7A67-11FA-EA747C9A93F9}" dt="2022-02-27T11:09:11.107" v="46" actId="14100"/>
-          <ac:picMkLst>
-            <pc:docMk/>
-            <pc:sldMk cId="808992841" sldId="309"/>
-            <ac:picMk id="2" creationId="{695EDC47-AE7F-4460-88BE-3A2873850499}"/>
-          </ac:picMkLst>
-        </pc:picChg>
-        <pc:cxnChg chg="del mod">
-          <ac:chgData name="Daniel Dan" userId="S::daniel.dan@modul.ac.at::e2a95533-a292-400e-bcf5-c81090ef720f" providerId="AD" clId="Web-{B0536F86-C883-7A67-11FA-EA747C9A93F9}" dt="2022-02-27T10:50:39.540" v="20"/>
-          <ac:cxnSpMkLst>
-            <pc:docMk/>
-            <pc:sldMk cId="808992841" sldId="309"/>
-            <ac:cxnSpMk id="120" creationId="{00000000-0000-0000-0000-000000000000}"/>
-          </ac:cxnSpMkLst>
-        </pc:cxnChg>
-        <pc:cxnChg chg="del mod">
-          <ac:chgData name="Daniel Dan" userId="S::daniel.dan@modul.ac.at::e2a95533-a292-400e-bcf5-c81090ef720f" providerId="AD" clId="Web-{B0536F86-C883-7A67-11FA-EA747C9A93F9}" dt="2022-02-27T10:50:36.665" v="18"/>
-          <ac:cxnSpMkLst>
-            <pc:docMk/>
-            <pc:sldMk cId="808992841" sldId="309"/>
-            <ac:cxnSpMk id="121" creationId="{00000000-0000-0000-0000-000000000000}"/>
-          </ac:cxnSpMkLst>
-        </pc:cxnChg>
-      </pc:sldChg>
-      <pc:sldChg chg="addSp delSp modSp add replId">
-        <pc:chgData name="Daniel Dan" userId="S::daniel.dan@modul.ac.at::e2a95533-a292-400e-bcf5-c81090ef720f" providerId="AD" clId="Web-{B0536F86-C883-7A67-11FA-EA747C9A93F9}" dt="2022-02-27T11:42:15.551" v="396" actId="20577"/>
-        <pc:sldMkLst>
-          <pc:docMk/>
-          <pc:sldMk cId="2255279033" sldId="310"/>
-        </pc:sldMkLst>
-        <pc:spChg chg="del">
-          <ac:chgData name="Daniel Dan" userId="S::daniel.dan@modul.ac.at::e2a95533-a292-400e-bcf5-c81090ef720f" providerId="AD" clId="Web-{B0536F86-C883-7A67-11FA-EA747C9A93F9}" dt="2022-02-27T11:38:29.226" v="334"/>
-          <ac:spMkLst>
-            <pc:docMk/>
-            <pc:sldMk cId="2255279033" sldId="310"/>
-            <ac:spMk id="3" creationId="{FA7269B2-5EAC-40A0-BC78-8699C651F14B}"/>
-          </ac:spMkLst>
-        </pc:spChg>
-        <pc:spChg chg="add mod">
-          <ac:chgData name="Daniel Dan" userId="S::daniel.dan@modul.ac.at::e2a95533-a292-400e-bcf5-c81090ef720f" providerId="AD" clId="Web-{B0536F86-C883-7A67-11FA-EA747C9A93F9}" dt="2022-02-27T11:42:15.551" v="396" actId="20577"/>
-          <ac:spMkLst>
-            <pc:docMk/>
-            <pc:sldMk cId="2255279033" sldId="310"/>
-            <ac:spMk id="4" creationId="{E8CB220C-C520-4842-AAF7-BCBE3FD1411D}"/>
-          </ac:spMkLst>
-        </pc:spChg>
-        <pc:spChg chg="del">
-          <ac:chgData name="Daniel Dan" userId="S::daniel.dan@modul.ac.at::e2a95533-a292-400e-bcf5-c81090ef720f" providerId="AD" clId="Web-{B0536F86-C883-7A67-11FA-EA747C9A93F9}" dt="2022-02-27T11:39:13.150" v="384"/>
-          <ac:spMkLst>
-            <pc:docMk/>
-            <pc:sldMk cId="2255279033" sldId="310"/>
-            <ac:spMk id="8" creationId="{12ED535B-6CCF-43FC-81E9-04835CE0D12D}"/>
-          </ac:spMkLst>
-        </pc:spChg>
-        <pc:spChg chg="del">
-          <ac:chgData name="Daniel Dan" userId="S::daniel.dan@modul.ac.at::e2a95533-a292-400e-bcf5-c81090ef720f" providerId="AD" clId="Web-{B0536F86-C883-7A67-11FA-EA747C9A93F9}" dt="2022-02-27T11:39:13.150" v="383"/>
-          <ac:spMkLst>
-            <pc:docMk/>
-            <pc:sldMk cId="2255279033" sldId="310"/>
-            <ac:spMk id="12" creationId="{A73186A8-BEB2-4989-9C4B-6A12C1481E27}"/>
-          </ac:spMkLst>
-        </pc:spChg>
-        <pc:spChg chg="del">
-          <ac:chgData name="Daniel Dan" userId="S::daniel.dan@modul.ac.at::e2a95533-a292-400e-bcf5-c81090ef720f" providerId="AD" clId="Web-{B0536F86-C883-7A67-11FA-EA747C9A93F9}" dt="2022-02-27T11:39:13.150" v="382"/>
-          <ac:spMkLst>
-            <pc:docMk/>
-            <pc:sldMk cId="2255279033" sldId="310"/>
-            <ac:spMk id="13" creationId="{67FE433E-2D4C-4D9A-9E36-4ECF262E5DAA}"/>
-          </ac:spMkLst>
-        </pc:spChg>
-        <pc:spChg chg="del">
-          <ac:chgData name="Daniel Dan" userId="S::daniel.dan@modul.ac.at::e2a95533-a292-400e-bcf5-c81090ef720f" providerId="AD" clId="Web-{B0536F86-C883-7A67-11FA-EA747C9A93F9}" dt="2022-02-27T11:39:15.088" v="385"/>
-          <ac:spMkLst>
-            <pc:docMk/>
-            <pc:sldMk cId="2255279033" sldId="310"/>
-            <ac:spMk id="14" creationId="{7222F7DF-9180-46F4-A269-AA6E4230EE0B}"/>
-          </ac:spMkLst>
-        </pc:spChg>
-        <pc:spChg chg="del">
-          <ac:chgData name="Daniel Dan" userId="S::daniel.dan@modul.ac.at::e2a95533-a292-400e-bcf5-c81090ef720f" providerId="AD" clId="Web-{B0536F86-C883-7A67-11FA-EA747C9A93F9}" dt="2022-02-27T11:39:13.150" v="381"/>
-          <ac:spMkLst>
-            <pc:docMk/>
-            <pc:sldMk cId="2255279033" sldId="310"/>
-            <ac:spMk id="15" creationId="{5BFFB2CD-BB7C-403E-A6ED-0FB8A30D7042}"/>
-          </ac:spMkLst>
-        </pc:spChg>
-        <pc:spChg chg="del">
-          <ac:chgData name="Daniel Dan" userId="S::daniel.dan@modul.ac.at::e2a95533-a292-400e-bcf5-c81090ef720f" providerId="AD" clId="Web-{B0536F86-C883-7A67-11FA-EA747C9A93F9}" dt="2022-02-27T11:39:13.150" v="380"/>
-          <ac:spMkLst>
-            <pc:docMk/>
-            <pc:sldMk cId="2255279033" sldId="310"/>
-            <ac:spMk id="16" creationId="{2C9E1B4A-8E9D-432E-AEFB-8382DAA6AD5F}"/>
-          </ac:spMkLst>
-        </pc:spChg>
-        <pc:spChg chg="del">
-          <ac:chgData name="Daniel Dan" userId="S::daniel.dan@modul.ac.at::e2a95533-a292-400e-bcf5-c81090ef720f" providerId="AD" clId="Web-{B0536F86-C883-7A67-11FA-EA747C9A93F9}" dt="2022-02-27T11:39:13.150" v="379"/>
-          <ac:spMkLst>
-            <pc:docMk/>
-            <pc:sldMk cId="2255279033" sldId="310"/>
-            <ac:spMk id="17" creationId="{AA5ADC1B-F307-4221-9E8B-40A4A8919F57}"/>
-          </ac:spMkLst>
-        </pc:spChg>
-        <pc:spChg chg="del">
-          <ac:chgData name="Daniel Dan" userId="S::daniel.dan@modul.ac.at::e2a95533-a292-400e-bcf5-c81090ef720f" providerId="AD" clId="Web-{B0536F86-C883-7A67-11FA-EA747C9A93F9}" dt="2022-02-27T11:39:13.150" v="378"/>
-          <ac:spMkLst>
-            <pc:docMk/>
-            <pc:sldMk cId="2255279033" sldId="310"/>
-            <ac:spMk id="18" creationId="{5EE5DB66-D0EC-4202-AA15-D7A5337D8222}"/>
-          </ac:spMkLst>
-        </pc:spChg>
-        <pc:spChg chg="del">
-          <ac:chgData name="Daniel Dan" userId="S::daniel.dan@modul.ac.at::e2a95533-a292-400e-bcf5-c81090ef720f" providerId="AD" clId="Web-{B0536F86-C883-7A67-11FA-EA747C9A93F9}" dt="2022-02-27T11:39:13.150" v="370"/>
-          <ac:spMkLst>
-            <pc:docMk/>
-            <pc:sldMk cId="2255279033" sldId="310"/>
-            <ac:spMk id="20" creationId="{294E924A-BA10-4FD7-983B-9E1FB12B6558}"/>
-          </ac:spMkLst>
-        </pc:spChg>
-        <pc:spChg chg="del">
-          <ac:chgData name="Daniel Dan" userId="S::daniel.dan@modul.ac.at::e2a95533-a292-400e-bcf5-c81090ef720f" providerId="AD" clId="Web-{B0536F86-C883-7A67-11FA-EA747C9A93F9}" dt="2022-02-27T11:39:13.135" v="369"/>
-          <ac:spMkLst>
-            <pc:docMk/>
-            <pc:sldMk cId="2255279033" sldId="310"/>
-            <ac:spMk id="28" creationId="{BB30CBD7-0375-4DF7-B0AE-753ED713CE6D}"/>
-          </ac:spMkLst>
-        </pc:spChg>
-        <pc:spChg chg="del">
-          <ac:chgData name="Daniel Dan" userId="S::daniel.dan@modul.ac.at::e2a95533-a292-400e-bcf5-c81090ef720f" providerId="AD" clId="Web-{B0536F86-C883-7A67-11FA-EA747C9A93F9}" dt="2022-02-27T11:39:13.135" v="368"/>
-          <ac:spMkLst>
-            <pc:docMk/>
-            <pc:sldMk cId="2255279033" sldId="310"/>
-            <ac:spMk id="29" creationId="{58EDA8A9-9308-4A04-BC70-F2C750A11B10}"/>
-          </ac:spMkLst>
-        </pc:spChg>
-        <pc:spChg chg="del">
-          <ac:chgData name="Daniel Dan" userId="S::daniel.dan@modul.ac.at::e2a95533-a292-400e-bcf5-c81090ef720f" providerId="AD" clId="Web-{B0536F86-C883-7A67-11FA-EA747C9A93F9}" dt="2022-02-27T11:39:13.135" v="367"/>
-          <ac:spMkLst>
-            <pc:docMk/>
-            <pc:sldMk cId="2255279033" sldId="310"/>
-            <ac:spMk id="30" creationId="{E1491593-CF0A-47E4-95A2-DBC0183F0411}"/>
-          </ac:spMkLst>
-        </pc:spChg>
-        <pc:spChg chg="del">
-          <ac:chgData name="Daniel Dan" userId="S::daniel.dan@modul.ac.at::e2a95533-a292-400e-bcf5-c81090ef720f" providerId="AD" clId="Web-{B0536F86-C883-7A67-11FA-EA747C9A93F9}" dt="2022-02-27T11:39:13.135" v="366"/>
-          <ac:spMkLst>
-            <pc:docMk/>
-            <pc:sldMk cId="2255279033" sldId="310"/>
-            <ac:spMk id="31" creationId="{BB428BE3-86D3-42A5-A89C-3436F402C584}"/>
-          </ac:spMkLst>
-        </pc:spChg>
-        <pc:spChg chg="del">
-          <ac:chgData name="Daniel Dan" userId="S::daniel.dan@modul.ac.at::e2a95533-a292-400e-bcf5-c81090ef720f" providerId="AD" clId="Web-{B0536F86-C883-7A67-11FA-EA747C9A93F9}" dt="2022-02-27T11:39:13.135" v="365"/>
-          <ac:spMkLst>
-            <pc:docMk/>
-            <pc:sldMk cId="2255279033" sldId="310"/>
-            <ac:spMk id="32" creationId="{279491CC-92A2-4D7E-B858-DE9D2B45C3E3}"/>
-          </ac:spMkLst>
-        </pc:spChg>
-        <pc:spChg chg="del">
-          <ac:chgData name="Daniel Dan" userId="S::daniel.dan@modul.ac.at::e2a95533-a292-400e-bcf5-c81090ef720f" providerId="AD" clId="Web-{B0536F86-C883-7A67-11FA-EA747C9A93F9}" dt="2022-02-27T11:39:13.135" v="364"/>
-          <ac:spMkLst>
-            <pc:docMk/>
-            <pc:sldMk cId="2255279033" sldId="310"/>
-            <ac:spMk id="33" creationId="{40FF0825-F225-46DC-B574-954EC9D85CDC}"/>
-          </ac:spMkLst>
-        </pc:spChg>
-        <pc:spChg chg="del">
-          <ac:chgData name="Daniel Dan" userId="S::daniel.dan@modul.ac.at::e2a95533-a292-400e-bcf5-c81090ef720f" providerId="AD" clId="Web-{B0536F86-C883-7A67-11FA-EA747C9A93F9}" dt="2022-02-27T11:39:13.135" v="363"/>
-          <ac:spMkLst>
-            <pc:docMk/>
-            <pc:sldMk cId="2255279033" sldId="310"/>
-            <ac:spMk id="34" creationId="{AD2A4E70-05A0-482B-8768-0DA6785CE8FC}"/>
-          </ac:spMkLst>
-        </pc:spChg>
-        <pc:spChg chg="mod">
-          <ac:chgData name="Daniel Dan" userId="S::daniel.dan@modul.ac.at::e2a95533-a292-400e-bcf5-c81090ef720f" providerId="AD" clId="Web-{B0536F86-C883-7A67-11FA-EA747C9A93F9}" dt="2022-02-27T11:39:05.462" v="362" actId="20577"/>
-          <ac:spMkLst>
-            <pc:docMk/>
-            <pc:sldMk cId="2255279033" sldId="310"/>
-            <ac:spMk id="141" creationId="{00000000-0000-0000-0000-000000000000}"/>
-          </ac:spMkLst>
-        </pc:spChg>
-        <pc:picChg chg="add mod">
-          <ac:chgData name="Daniel Dan" userId="S::daniel.dan@modul.ac.at::e2a95533-a292-400e-bcf5-c81090ef720f" providerId="AD" clId="Web-{B0536F86-C883-7A67-11FA-EA747C9A93F9}" dt="2022-02-27T11:39:37.402" v="391" actId="1076"/>
-          <ac:picMkLst>
-            <pc:docMk/>
-            <pc:sldMk cId="2255279033" sldId="310"/>
-            <ac:picMk id="2" creationId="{00243F75-935B-4A75-934D-972B513C5EF1}"/>
-          </ac:picMkLst>
-        </pc:picChg>
-        <pc:cxnChg chg="del">
-          <ac:chgData name="Daniel Dan" userId="S::daniel.dan@modul.ac.at::e2a95533-a292-400e-bcf5-c81090ef720f" providerId="AD" clId="Web-{B0536F86-C883-7A67-11FA-EA747C9A93F9}" dt="2022-02-27T11:39:13.150" v="377"/>
-          <ac:cxnSpMkLst>
-            <pc:docMk/>
-            <pc:sldMk cId="2255279033" sldId="310"/>
-            <ac:cxnSpMk id="10" creationId="{70B96866-1296-4A4E-B11F-08DB35F14C8F}"/>
-          </ac:cxnSpMkLst>
-        </pc:cxnChg>
-        <pc:cxnChg chg="del">
-          <ac:chgData name="Daniel Dan" userId="S::daniel.dan@modul.ac.at::e2a95533-a292-400e-bcf5-c81090ef720f" providerId="AD" clId="Web-{B0536F86-C883-7A67-11FA-EA747C9A93F9}" dt="2022-02-27T11:39:13.150" v="376"/>
-          <ac:cxnSpMkLst>
-            <pc:docMk/>
-            <pc:sldMk cId="2255279033" sldId="310"/>
-            <ac:cxnSpMk id="11" creationId="{376198DB-1B98-4AED-896D-590311D6D3F6}"/>
-          </ac:cxnSpMkLst>
-        </pc:cxnChg>
-        <pc:cxnChg chg="del">
-          <ac:chgData name="Daniel Dan" userId="S::daniel.dan@modul.ac.at::e2a95533-a292-400e-bcf5-c81090ef720f" providerId="AD" clId="Web-{B0536F86-C883-7A67-11FA-EA747C9A93F9}" dt="2022-02-27T11:39:13.150" v="375"/>
-          <ac:cxnSpMkLst>
-            <pc:docMk/>
-            <pc:sldMk cId="2255279033" sldId="310"/>
-            <ac:cxnSpMk id="19" creationId="{9AB9CB49-1ED6-4394-866B-D44B63EDFF4D}"/>
-          </ac:cxnSpMkLst>
-        </pc:cxnChg>
-        <pc:cxnChg chg="del">
-          <ac:chgData name="Daniel Dan" userId="S::daniel.dan@modul.ac.at::e2a95533-a292-400e-bcf5-c81090ef720f" providerId="AD" clId="Web-{B0536F86-C883-7A67-11FA-EA747C9A93F9}" dt="2022-02-27T11:39:13.150" v="374"/>
-          <ac:cxnSpMkLst>
-            <pc:docMk/>
-            <pc:sldMk cId="2255279033" sldId="310"/>
-            <ac:cxnSpMk id="23" creationId="{3871D6BC-8253-4619-89DB-FD9BB0355CF4}"/>
-          </ac:cxnSpMkLst>
-        </pc:cxnChg>
-        <pc:cxnChg chg="del">
-          <ac:chgData name="Daniel Dan" userId="S::daniel.dan@modul.ac.at::e2a95533-a292-400e-bcf5-c81090ef720f" providerId="AD" clId="Web-{B0536F86-C883-7A67-11FA-EA747C9A93F9}" dt="2022-02-27T11:39:13.150" v="373"/>
-          <ac:cxnSpMkLst>
-            <pc:docMk/>
-            <pc:sldMk cId="2255279033" sldId="310"/>
-            <ac:cxnSpMk id="24" creationId="{E59A18B9-127C-4DF3-9AB0-6FEDE2BADEE4}"/>
-          </ac:cxnSpMkLst>
-        </pc:cxnChg>
-        <pc:cxnChg chg="del">
-          <ac:chgData name="Daniel Dan" userId="S::daniel.dan@modul.ac.at::e2a95533-a292-400e-bcf5-c81090ef720f" providerId="AD" clId="Web-{B0536F86-C883-7A67-11FA-EA747C9A93F9}" dt="2022-02-27T11:39:13.150" v="372"/>
-          <ac:cxnSpMkLst>
-            <pc:docMk/>
-            <pc:sldMk cId="2255279033" sldId="310"/>
-            <ac:cxnSpMk id="25" creationId="{7D7AB94C-518D-4577-809B-350181669BF3}"/>
-          </ac:cxnSpMkLst>
-        </pc:cxnChg>
-        <pc:cxnChg chg="del">
-          <ac:chgData name="Daniel Dan" userId="S::daniel.dan@modul.ac.at::e2a95533-a292-400e-bcf5-c81090ef720f" providerId="AD" clId="Web-{B0536F86-C883-7A67-11FA-EA747C9A93F9}" dt="2022-02-27T11:39:13.150" v="371"/>
-          <ac:cxnSpMkLst>
-            <pc:docMk/>
-            <pc:sldMk cId="2255279033" sldId="310"/>
-            <ac:cxnSpMk id="26" creationId="{2C51D958-D2C4-4B86-BF14-2AE35FC1DC40}"/>
-          </ac:cxnSpMkLst>
-        </pc:cxnChg>
-      </pc:sldChg>
-      <pc:sldChg chg="addSp delSp modSp add replId">
-        <pc:chgData name="Daniel Dan" userId="S::daniel.dan@modul.ac.at::e2a95533-a292-400e-bcf5-c81090ef720f" providerId="AD" clId="Web-{B0536F86-C883-7A67-11FA-EA747C9A93F9}" dt="2022-02-27T11:45:26.031" v="464" actId="20577"/>
-        <pc:sldMkLst>
-          <pc:docMk/>
-          <pc:sldMk cId="3047330159" sldId="311"/>
-        </pc:sldMkLst>
-        <pc:spChg chg="add mod">
-          <ac:chgData name="Daniel Dan" userId="S::daniel.dan@modul.ac.at::e2a95533-a292-400e-bcf5-c81090ef720f" providerId="AD" clId="Web-{B0536F86-C883-7A67-11FA-EA747C9A93F9}" dt="2022-02-27T11:43:29.009" v="446" actId="20577"/>
-          <ac:spMkLst>
-            <pc:docMk/>
-            <pc:sldMk cId="3047330159" sldId="311"/>
-            <ac:spMk id="2" creationId="{89365D37-3590-43F3-850E-038EA4D84B9A}"/>
-          </ac:spMkLst>
-        </pc:spChg>
-        <pc:spChg chg="del">
-          <ac:chgData name="Daniel Dan" userId="S::daniel.dan@modul.ac.at::e2a95533-a292-400e-bcf5-c81090ef720f" providerId="AD" clId="Web-{B0536F86-C883-7A67-11FA-EA747C9A93F9}" dt="2022-02-27T11:45:12.999" v="447"/>
-          <ac:spMkLst>
-            <pc:docMk/>
-            <pc:sldMk cId="3047330159" sldId="311"/>
-            <ac:spMk id="3" creationId="{FA7269B2-5EAC-40A0-BC78-8699C651F14B}"/>
-          </ac:spMkLst>
-        </pc:spChg>
-        <pc:spChg chg="del">
-          <ac:chgData name="Daniel Dan" userId="S::daniel.dan@modul.ac.at::e2a95533-a292-400e-bcf5-c81090ef720f" providerId="AD" clId="Web-{B0536F86-C883-7A67-11FA-EA747C9A93F9}" dt="2022-02-27T11:42:28.240" v="420"/>
-          <ac:spMkLst>
-            <pc:docMk/>
-            <pc:sldMk cId="3047330159" sldId="311"/>
-            <ac:spMk id="8" creationId="{12ED535B-6CCF-43FC-81E9-04835CE0D12D}"/>
-          </ac:spMkLst>
-        </pc:spChg>
-        <pc:spChg chg="del">
-          <ac:chgData name="Daniel Dan" userId="S::daniel.dan@modul.ac.at::e2a95533-a292-400e-bcf5-c81090ef720f" providerId="AD" clId="Web-{B0536F86-C883-7A67-11FA-EA747C9A93F9}" dt="2022-02-27T11:42:28.240" v="419"/>
-          <ac:spMkLst>
-            <pc:docMk/>
-            <pc:sldMk cId="3047330159" sldId="311"/>
-            <ac:spMk id="12" creationId="{A73186A8-BEB2-4989-9C4B-6A12C1481E27}"/>
-          </ac:spMkLst>
-        </pc:spChg>
-        <pc:spChg chg="del">
-          <ac:chgData name="Daniel Dan" userId="S::daniel.dan@modul.ac.at::e2a95533-a292-400e-bcf5-c81090ef720f" providerId="AD" clId="Web-{B0536F86-C883-7A67-11FA-EA747C9A93F9}" dt="2022-02-27T11:42:28.240" v="418"/>
-          <ac:spMkLst>
-            <pc:docMk/>
-            <pc:sldMk cId="3047330159" sldId="311"/>
-            <ac:spMk id="13" creationId="{67FE433E-2D4C-4D9A-9E36-4ECF262E5DAA}"/>
-          </ac:spMkLst>
-        </pc:spChg>
-        <pc:spChg chg="del">
-          <ac:chgData name="Daniel Dan" userId="S::daniel.dan@modul.ac.at::e2a95533-a292-400e-bcf5-c81090ef720f" providerId="AD" clId="Web-{B0536F86-C883-7A67-11FA-EA747C9A93F9}" dt="2022-02-27T11:42:28.240" v="417"/>
-          <ac:spMkLst>
-            <pc:docMk/>
-            <pc:sldMk cId="3047330159" sldId="311"/>
-            <ac:spMk id="14" creationId="{7222F7DF-9180-46F4-A269-AA6E4230EE0B}"/>
-          </ac:spMkLst>
-        </pc:spChg>
-        <pc:spChg chg="del">
-          <ac:chgData name="Daniel Dan" userId="S::daniel.dan@modul.ac.at::e2a95533-a292-400e-bcf5-c81090ef720f" providerId="AD" clId="Web-{B0536F86-C883-7A67-11FA-EA747C9A93F9}" dt="2022-02-27T11:42:28.240" v="416"/>
-          <ac:spMkLst>
-            <pc:docMk/>
-            <pc:sldMk cId="3047330159" sldId="311"/>
-            <ac:spMk id="15" creationId="{5BFFB2CD-BB7C-403E-A6ED-0FB8A30D7042}"/>
-          </ac:spMkLst>
-        </pc:spChg>
-        <pc:spChg chg="del">
-          <ac:chgData name="Daniel Dan" userId="S::daniel.dan@modul.ac.at::e2a95533-a292-400e-bcf5-c81090ef720f" providerId="AD" clId="Web-{B0536F86-C883-7A67-11FA-EA747C9A93F9}" dt="2022-02-27T11:42:28.240" v="415"/>
-          <ac:spMkLst>
-            <pc:docMk/>
-            <pc:sldMk cId="3047330159" sldId="311"/>
-            <ac:spMk id="16" creationId="{2C9E1B4A-8E9D-432E-AEFB-8382DAA6AD5F}"/>
-          </ac:spMkLst>
-        </pc:spChg>
-        <pc:spChg chg="del">
-          <ac:chgData name="Daniel Dan" userId="S::daniel.dan@modul.ac.at::e2a95533-a292-400e-bcf5-c81090ef720f" providerId="AD" clId="Web-{B0536F86-C883-7A67-11FA-EA747C9A93F9}" dt="2022-02-27T11:42:28.240" v="414"/>
-          <ac:spMkLst>
-            <pc:docMk/>
-            <pc:sldMk cId="3047330159" sldId="311"/>
-            <ac:spMk id="17" creationId="{AA5ADC1B-F307-4221-9E8B-40A4A8919F57}"/>
-          </ac:spMkLst>
-        </pc:spChg>
-        <pc:spChg chg="del">
-          <ac:chgData name="Daniel Dan" userId="S::daniel.dan@modul.ac.at::e2a95533-a292-400e-bcf5-c81090ef720f" providerId="AD" clId="Web-{B0536F86-C883-7A67-11FA-EA747C9A93F9}" dt="2022-02-27T11:42:28.240" v="413"/>
-          <ac:spMkLst>
-            <pc:docMk/>
-            <pc:sldMk cId="3047330159" sldId="311"/>
-            <ac:spMk id="18" creationId="{5EE5DB66-D0EC-4202-AA15-D7A5337D8222}"/>
-          </ac:spMkLst>
-        </pc:spChg>
-        <pc:spChg chg="del">
-          <ac:chgData name="Daniel Dan" userId="S::daniel.dan@modul.ac.at::e2a95533-a292-400e-bcf5-c81090ef720f" providerId="AD" clId="Web-{B0536F86-C883-7A67-11FA-EA747C9A93F9}" dt="2022-02-27T11:42:28.240" v="405"/>
-          <ac:spMkLst>
-            <pc:docMk/>
-            <pc:sldMk cId="3047330159" sldId="311"/>
-            <ac:spMk id="20" creationId="{294E924A-BA10-4FD7-983B-9E1FB12B6558}"/>
-          </ac:spMkLst>
-        </pc:spChg>
-        <pc:spChg chg="del">
-          <ac:chgData name="Daniel Dan" userId="S::daniel.dan@modul.ac.at::e2a95533-a292-400e-bcf5-c81090ef720f" providerId="AD" clId="Web-{B0536F86-C883-7A67-11FA-EA747C9A93F9}" dt="2022-02-27T11:42:28.240" v="404"/>
-          <ac:spMkLst>
-            <pc:docMk/>
-            <pc:sldMk cId="3047330159" sldId="311"/>
-            <ac:spMk id="28" creationId="{BB30CBD7-0375-4DF7-B0AE-753ED713CE6D}"/>
-          </ac:spMkLst>
-        </pc:spChg>
-        <pc:spChg chg="del">
-          <ac:chgData name="Daniel Dan" userId="S::daniel.dan@modul.ac.at::e2a95533-a292-400e-bcf5-c81090ef720f" providerId="AD" clId="Web-{B0536F86-C883-7A67-11FA-EA747C9A93F9}" dt="2022-02-27T11:42:28.240" v="403"/>
-          <ac:spMkLst>
-            <pc:docMk/>
-            <pc:sldMk cId="3047330159" sldId="311"/>
-            <ac:spMk id="29" creationId="{58EDA8A9-9308-4A04-BC70-F2C750A11B10}"/>
-          </ac:spMkLst>
-        </pc:spChg>
-        <pc:spChg chg="del">
-          <ac:chgData name="Daniel Dan" userId="S::daniel.dan@modul.ac.at::e2a95533-a292-400e-bcf5-c81090ef720f" providerId="AD" clId="Web-{B0536F86-C883-7A67-11FA-EA747C9A93F9}" dt="2022-02-27T11:42:28.240" v="402"/>
-          <ac:spMkLst>
-            <pc:docMk/>
-            <pc:sldMk cId="3047330159" sldId="311"/>
-            <ac:spMk id="30" creationId="{E1491593-CF0A-47E4-95A2-DBC0183F0411}"/>
-          </ac:spMkLst>
-        </pc:spChg>
-        <pc:spChg chg="del">
-          <ac:chgData name="Daniel Dan" userId="S::daniel.dan@modul.ac.at::e2a95533-a292-400e-bcf5-c81090ef720f" providerId="AD" clId="Web-{B0536F86-C883-7A67-11FA-EA747C9A93F9}" dt="2022-02-27T11:42:28.240" v="401"/>
-          <ac:spMkLst>
-            <pc:docMk/>
-            <pc:sldMk cId="3047330159" sldId="311"/>
-            <ac:spMk id="31" creationId="{BB428BE3-86D3-42A5-A89C-3436F402C584}"/>
-          </ac:spMkLst>
-        </pc:spChg>
-        <pc:spChg chg="del">
-          <ac:chgData name="Daniel Dan" userId="S::daniel.dan@modul.ac.at::e2a95533-a292-400e-bcf5-c81090ef720f" providerId="AD" clId="Web-{B0536F86-C883-7A67-11FA-EA747C9A93F9}" dt="2022-02-27T11:42:28.240" v="400"/>
-          <ac:spMkLst>
-            <pc:docMk/>
-            <pc:sldMk cId="3047330159" sldId="311"/>
-            <ac:spMk id="32" creationId="{279491CC-92A2-4D7E-B858-DE9D2B45C3E3}"/>
-          </ac:spMkLst>
-        </pc:spChg>
-        <pc:spChg chg="del">
-          <ac:chgData name="Daniel Dan" userId="S::daniel.dan@modul.ac.at::e2a95533-a292-400e-bcf5-c81090ef720f" providerId="AD" clId="Web-{B0536F86-C883-7A67-11FA-EA747C9A93F9}" dt="2022-02-27T11:42:28.240" v="399"/>
-          <ac:spMkLst>
-            <pc:docMk/>
-            <pc:sldMk cId="3047330159" sldId="311"/>
-            <ac:spMk id="33" creationId="{40FF0825-F225-46DC-B574-954EC9D85CDC}"/>
-          </ac:spMkLst>
-        </pc:spChg>
-        <pc:spChg chg="del">
-          <ac:chgData name="Daniel Dan" userId="S::daniel.dan@modul.ac.at::e2a95533-a292-400e-bcf5-c81090ef720f" providerId="AD" clId="Web-{B0536F86-C883-7A67-11FA-EA747C9A93F9}" dt="2022-02-27T11:42:28.240" v="398"/>
-          <ac:spMkLst>
-            <pc:docMk/>
-            <pc:sldMk cId="3047330159" sldId="311"/>
-            <ac:spMk id="34" creationId="{AD2A4E70-05A0-482B-8768-0DA6785CE8FC}"/>
-          </ac:spMkLst>
-        </pc:spChg>
-        <pc:spChg chg="mod">
-          <ac:chgData name="Daniel Dan" userId="S::daniel.dan@modul.ac.at::e2a95533-a292-400e-bcf5-c81090ef720f" providerId="AD" clId="Web-{B0536F86-C883-7A67-11FA-EA747C9A93F9}" dt="2022-02-27T11:45:26.031" v="464" actId="20577"/>
-          <ac:spMkLst>
-            <pc:docMk/>
-            <pc:sldMk cId="3047330159" sldId="311"/>
-            <ac:spMk id="141" creationId="{00000000-0000-0000-0000-000000000000}"/>
-          </ac:spMkLst>
-        </pc:spChg>
-        <pc:cxnChg chg="del">
-          <ac:chgData name="Daniel Dan" userId="S::daniel.dan@modul.ac.at::e2a95533-a292-400e-bcf5-c81090ef720f" providerId="AD" clId="Web-{B0536F86-C883-7A67-11FA-EA747C9A93F9}" dt="2022-02-27T11:42:28.240" v="412"/>
-          <ac:cxnSpMkLst>
-            <pc:docMk/>
-            <pc:sldMk cId="3047330159" sldId="311"/>
-            <ac:cxnSpMk id="10" creationId="{70B96866-1296-4A4E-B11F-08DB35F14C8F}"/>
-          </ac:cxnSpMkLst>
-        </pc:cxnChg>
-        <pc:cxnChg chg="del">
-          <ac:chgData name="Daniel Dan" userId="S::daniel.dan@modul.ac.at::e2a95533-a292-400e-bcf5-c81090ef720f" providerId="AD" clId="Web-{B0536F86-C883-7A67-11FA-EA747C9A93F9}" dt="2022-02-27T11:42:28.240" v="411"/>
-          <ac:cxnSpMkLst>
-            <pc:docMk/>
-            <pc:sldMk cId="3047330159" sldId="311"/>
-            <ac:cxnSpMk id="11" creationId="{376198DB-1B98-4AED-896D-590311D6D3F6}"/>
-          </ac:cxnSpMkLst>
-        </pc:cxnChg>
-        <pc:cxnChg chg="del">
-          <ac:chgData name="Daniel Dan" userId="S::daniel.dan@modul.ac.at::e2a95533-a292-400e-bcf5-c81090ef720f" providerId="AD" clId="Web-{B0536F86-C883-7A67-11FA-EA747C9A93F9}" dt="2022-02-27T11:42:28.240" v="410"/>
-          <ac:cxnSpMkLst>
-            <pc:docMk/>
-            <pc:sldMk cId="3047330159" sldId="311"/>
-            <ac:cxnSpMk id="19" creationId="{9AB9CB49-1ED6-4394-866B-D44B63EDFF4D}"/>
-          </ac:cxnSpMkLst>
-        </pc:cxnChg>
-        <pc:cxnChg chg="del">
-          <ac:chgData name="Daniel Dan" userId="S::daniel.dan@modul.ac.at::e2a95533-a292-400e-bcf5-c81090ef720f" providerId="AD" clId="Web-{B0536F86-C883-7A67-11FA-EA747C9A93F9}" dt="2022-02-27T11:42:28.240" v="409"/>
-          <ac:cxnSpMkLst>
-            <pc:docMk/>
-            <pc:sldMk cId="3047330159" sldId="311"/>
-            <ac:cxnSpMk id="23" creationId="{3871D6BC-8253-4619-89DB-FD9BB0355CF4}"/>
-          </ac:cxnSpMkLst>
-        </pc:cxnChg>
-        <pc:cxnChg chg="del">
-          <ac:chgData name="Daniel Dan" userId="S::daniel.dan@modul.ac.at::e2a95533-a292-400e-bcf5-c81090ef720f" providerId="AD" clId="Web-{B0536F86-C883-7A67-11FA-EA747C9A93F9}" dt="2022-02-27T11:42:28.240" v="408"/>
-          <ac:cxnSpMkLst>
-            <pc:docMk/>
-            <pc:sldMk cId="3047330159" sldId="311"/>
-            <ac:cxnSpMk id="24" creationId="{E59A18B9-127C-4DF3-9AB0-6FEDE2BADEE4}"/>
-          </ac:cxnSpMkLst>
-        </pc:cxnChg>
-        <pc:cxnChg chg="del">
-          <ac:chgData name="Daniel Dan" userId="S::daniel.dan@modul.ac.at::e2a95533-a292-400e-bcf5-c81090ef720f" providerId="AD" clId="Web-{B0536F86-C883-7A67-11FA-EA747C9A93F9}" dt="2022-02-27T11:42:28.240" v="407"/>
-          <ac:cxnSpMkLst>
-            <pc:docMk/>
-            <pc:sldMk cId="3047330159" sldId="311"/>
-            <ac:cxnSpMk id="25" creationId="{7D7AB94C-518D-4577-809B-350181669BF3}"/>
-          </ac:cxnSpMkLst>
-        </pc:cxnChg>
-        <pc:cxnChg chg="del">
-          <ac:chgData name="Daniel Dan" userId="S::daniel.dan@modul.ac.at::e2a95533-a292-400e-bcf5-c81090ef720f" providerId="AD" clId="Web-{B0536F86-C883-7A67-11FA-EA747C9A93F9}" dt="2022-02-27T11:42:28.240" v="406"/>
-          <ac:cxnSpMkLst>
-            <pc:docMk/>
-            <pc:sldMk cId="3047330159" sldId="311"/>
-            <ac:cxnSpMk id="26" creationId="{2C51D958-D2C4-4B86-BF14-2AE35FC1DC40}"/>
-          </ac:cxnSpMkLst>
-        </pc:cxnChg>
-      </pc:sldChg>
-      <pc:sldChg chg="addSp delSp modSp add replId">
-        <pc:chgData name="Daniel Dan" userId="S::daniel.dan@modul.ac.at::e2a95533-a292-400e-bcf5-c81090ef720f" providerId="AD" clId="Web-{B0536F86-C883-7A67-11FA-EA747C9A93F9}" dt="2022-02-27T17:51:38.852" v="518" actId="20577"/>
-        <pc:sldMkLst>
-          <pc:docMk/>
-          <pc:sldMk cId="3962950277" sldId="312"/>
-        </pc:sldMkLst>
-        <pc:spChg chg="add mod">
-          <ac:chgData name="Daniel Dan" userId="S::daniel.dan@modul.ac.at::e2a95533-a292-400e-bcf5-c81090ef720f" providerId="AD" clId="Web-{B0536F86-C883-7A67-11FA-EA747C9A93F9}" dt="2022-02-27T11:46:33.847" v="494" actId="20577"/>
-          <ac:spMkLst>
-            <pc:docMk/>
-            <pc:sldMk cId="3962950277" sldId="312"/>
-            <ac:spMk id="3" creationId="{F7BAE381-3B77-4D2E-80C7-AFE28DDF32F8}"/>
-          </ac:spMkLst>
-        </pc:spChg>
-        <pc:spChg chg="mod">
-          <ac:chgData name="Daniel Dan" userId="S::daniel.dan@modul.ac.at::e2a95533-a292-400e-bcf5-c81090ef720f" providerId="AD" clId="Web-{B0536F86-C883-7A67-11FA-EA747C9A93F9}" dt="2022-02-27T17:51:38.852" v="518" actId="20577"/>
-          <ac:spMkLst>
-            <pc:docMk/>
-            <pc:sldMk cId="3962950277" sldId="312"/>
-            <ac:spMk id="4" creationId="{E8CB220C-C520-4842-AAF7-BCBE3FD1411D}"/>
-          </ac:spMkLst>
-        </pc:spChg>
-        <pc:spChg chg="mod">
-          <ac:chgData name="Daniel Dan" userId="S::daniel.dan@modul.ac.at::e2a95533-a292-400e-bcf5-c81090ef720f" providerId="AD" clId="Web-{B0536F86-C883-7A67-11FA-EA747C9A93F9}" dt="2022-02-27T17:49:17.970" v="510" actId="20577"/>
-          <ac:spMkLst>
-            <pc:docMk/>
-            <pc:sldMk cId="3962950277" sldId="312"/>
-            <ac:spMk id="141" creationId="{00000000-0000-0000-0000-000000000000}"/>
-          </ac:spMkLst>
-        </pc:spChg>
-        <pc:picChg chg="del">
-          <ac:chgData name="Daniel Dan" userId="S::daniel.dan@modul.ac.at::e2a95533-a292-400e-bcf5-c81090ef720f" providerId="AD" clId="Web-{B0536F86-C883-7A67-11FA-EA747C9A93F9}" dt="2022-02-27T11:45:38.172" v="466"/>
-          <ac:picMkLst>
-            <pc:docMk/>
-            <pc:sldMk cId="3962950277" sldId="312"/>
-            <ac:picMk id="2" creationId="{00243F75-935B-4A75-934D-972B513C5EF1}"/>
-          </ac:picMkLst>
-        </pc:picChg>
-        <pc:picChg chg="add del mod">
-          <ac:chgData name="Daniel Dan" userId="S::daniel.dan@modul.ac.at::e2a95533-a292-400e-bcf5-c81090ef720f" providerId="AD" clId="Web-{B0536F86-C883-7A67-11FA-EA747C9A93F9}" dt="2022-02-27T17:51:10.867" v="513"/>
-          <ac:picMkLst>
-            <pc:docMk/>
-            <pc:sldMk cId="3962950277" sldId="312"/>
-            <ac:picMk id="2" creationId="{F3990193-43DE-4DF3-9CF1-B07BD86D4848}"/>
-          </ac:picMkLst>
-        </pc:picChg>
-        <pc:picChg chg="add mod">
-          <ac:chgData name="Daniel Dan" userId="S::daniel.dan@modul.ac.at::e2a95533-a292-400e-bcf5-c81090ef720f" providerId="AD" clId="Web-{B0536F86-C883-7A67-11FA-EA747C9A93F9}" dt="2022-02-27T17:51:24.961" v="515" actId="1076"/>
-          <ac:picMkLst>
-            <pc:docMk/>
-            <pc:sldMk cId="3962950277" sldId="312"/>
-            <ac:picMk id="5" creationId="{CB7C1570-F39B-4FBB-8212-21BA64259AB2}"/>
-          </ac:picMkLst>
-        </pc:picChg>
-      </pc:sldChg>
-      <pc:sldChg chg="modSp add replId">
-        <pc:chgData name="Daniel Dan" userId="S::daniel.dan@modul.ac.at::e2a95533-a292-400e-bcf5-c81090ef720f" providerId="AD" clId="Web-{B0536F86-C883-7A67-11FA-EA747C9A93F9}" dt="2022-02-27T17:53:43.593" v="540" actId="20577"/>
-        <pc:sldMkLst>
-          <pc:docMk/>
-          <pc:sldMk cId="883025682" sldId="313"/>
-        </pc:sldMkLst>
-        <pc:spChg chg="mod">
-          <ac:chgData name="Daniel Dan" userId="S::daniel.dan@modul.ac.at::e2a95533-a292-400e-bcf5-c81090ef720f" providerId="AD" clId="Web-{B0536F86-C883-7A67-11FA-EA747C9A93F9}" dt="2022-02-27T17:53:43.593" v="540" actId="20577"/>
-          <ac:spMkLst>
-            <pc:docMk/>
-            <pc:sldMk cId="883025682" sldId="313"/>
-            <ac:spMk id="150" creationId="{00000000-0000-0000-0000-000000000000}"/>
+            <pc:sldMk cId="4234670050" sldId="534"/>
+            <ac:spMk id="8" creationId="{21A8D102-1C16-49D0-9B80-8EAB675A9A7B}"/>
           </ac:spMkLst>
         </pc:spChg>
       </pc:sldChg>
-      <pc:sldChg chg="addSp modSp add ord replId">
-        <pc:chgData name="Daniel Dan" userId="S::daniel.dan@modul.ac.at::e2a95533-a292-400e-bcf5-c81090ef720f" providerId="AD" clId="Web-{B0536F86-C883-7A67-11FA-EA747C9A93F9}" dt="2022-02-27T18:15:00.596" v="614" actId="20577"/>
+      <pc:sldChg chg="modSp mod">
+        <pc:chgData name="Ingo Frommholz" userId="ee3b4549-206f-4e4f-93a1-b7ff676f0af7" providerId="ADAL" clId="{5F8971C4-3D52-5FAB-A951-9912A46CDBB0}" dt="2025-10-29T13:32:54.223" v="218"/>
         <pc:sldMkLst>
           <pc:docMk/>
-          <pc:sldMk cId="61331412" sldId="314"/>
+          <pc:sldMk cId="3966810098" sldId="535"/>
         </pc:sldMkLst>
-        <pc:spChg chg="add mod">
-          <ac:chgData name="Daniel Dan" userId="S::daniel.dan@modul.ac.at::e2a95533-a292-400e-bcf5-c81090ef720f" providerId="AD" clId="Web-{B0536F86-C883-7A67-11FA-EA747C9A93F9}" dt="2022-02-27T18:15:00.596" v="614" actId="20577"/>
+        <pc:spChg chg="mod">
+          <ac:chgData name="Ingo Frommholz" userId="ee3b4549-206f-4e4f-93a1-b7ff676f0af7" providerId="ADAL" clId="{5F8971C4-3D52-5FAB-A951-9912A46CDBB0}" dt="2025-10-29T13:32:54.223" v="218"/>
           <ac:spMkLst>
             <pc:docMk/>
-            <pc:sldMk cId="61331412" sldId="314"/>
-            <ac:spMk id="3" creationId="{B6A28984-A9FA-4B39-B437-69AA110E10AB}"/>
-          </ac:spMkLst>
-        </pc:spChg>
-        <pc:spChg chg="mod">
-          <ac:chgData name="Daniel Dan" userId="S::daniel.dan@modul.ac.at::e2a95533-a292-400e-bcf5-c81090ef720f" providerId="AD" clId="Web-{B0536F86-C883-7A67-11FA-EA747C9A93F9}" dt="2022-02-27T18:06:15.319" v="579" actId="20577"/>
-          <ac:spMkLst>
-            <pc:docMk/>
-            <pc:sldMk cId="61331412" sldId="314"/>
-            <ac:spMk id="158" creationId="{00000000-0000-0000-0000-000000000000}"/>
-          </ac:spMkLst>
-        </pc:spChg>
-        <pc:picChg chg="mod">
-          <ac:chgData name="Daniel Dan" userId="S::daniel.dan@modul.ac.at::e2a95533-a292-400e-bcf5-c81090ef720f" providerId="AD" clId="Web-{B0536F86-C883-7A67-11FA-EA747C9A93F9}" dt="2022-02-27T18:06:53.337" v="586" actId="14100"/>
-          <ac:picMkLst>
-            <pc:docMk/>
-            <pc:sldMk cId="61331412" sldId="314"/>
-            <ac:picMk id="2" creationId="{2A515699-D87A-4013-808B-5A3F43412698}"/>
-          </ac:picMkLst>
-        </pc:picChg>
-      </pc:sldChg>
-      <pc:sldChg chg="addSp delSp modSp add del ord replId">
-        <pc:chgData name="Daniel Dan" userId="S::daniel.dan@modul.ac.at::e2a95533-a292-400e-bcf5-c81090ef720f" providerId="AD" clId="Web-{B0536F86-C883-7A67-11FA-EA747C9A93F9}" dt="2022-02-27T18:13:26.888" v="611"/>
-        <pc:sldMkLst>
-          <pc:docMk/>
-          <pc:sldMk cId="2370974219" sldId="315"/>
-        </pc:sldMkLst>
-        <pc:spChg chg="mod">
-          <ac:chgData name="Daniel Dan" userId="S::daniel.dan@modul.ac.at::e2a95533-a292-400e-bcf5-c81090ef720f" providerId="AD" clId="Web-{B0536F86-C883-7A67-11FA-EA747C9A93F9}" dt="2022-02-27T18:04:57.940" v="575" actId="20577"/>
-          <ac:spMkLst>
-            <pc:docMk/>
-            <pc:sldMk cId="2370974219" sldId="315"/>
-            <ac:spMk id="158" creationId="{00000000-0000-0000-0000-000000000000}"/>
-          </ac:spMkLst>
-        </pc:spChg>
-        <pc:picChg chg="add del">
-          <ac:chgData name="Daniel Dan" userId="S::daniel.dan@modul.ac.at::e2a95533-a292-400e-bcf5-c81090ef720f" providerId="AD" clId="Web-{B0536F86-C883-7A67-11FA-EA747C9A93F9}" dt="2022-02-27T18:12:38.245" v="604"/>
-          <ac:picMkLst>
-            <pc:docMk/>
-            <pc:sldMk cId="2370974219" sldId="315"/>
-            <ac:picMk id="2" creationId="{2A515699-D87A-4013-808B-5A3F43412698}"/>
-          </ac:picMkLst>
-        </pc:picChg>
-      </pc:sldChg>
-      <pc:sldChg chg="addSp delSp modSp add replId">
-        <pc:chgData name="Daniel Dan" userId="S::daniel.dan@modul.ac.at::e2a95533-a292-400e-bcf5-c81090ef720f" providerId="AD" clId="Web-{B0536F86-C883-7A67-11FA-EA747C9A93F9}" dt="2022-02-27T18:15:13.347" v="623" actId="20577"/>
-        <pc:sldMkLst>
-          <pc:docMk/>
-          <pc:sldMk cId="4220365655" sldId="316"/>
-        </pc:sldMkLst>
-        <pc:spChg chg="add mod">
-          <ac:chgData name="Daniel Dan" userId="S::daniel.dan@modul.ac.at::e2a95533-a292-400e-bcf5-c81090ef720f" providerId="AD" clId="Web-{B0536F86-C883-7A67-11FA-EA747C9A93F9}" dt="2022-02-27T18:15:13.347" v="623" actId="20577"/>
-          <ac:spMkLst>
-            <pc:docMk/>
-            <pc:sldMk cId="4220365655" sldId="316"/>
-            <ac:spMk id="4" creationId="{568FDDE6-0377-49A5-B3E9-DC84DB2B09DF}"/>
-          </ac:spMkLst>
-        </pc:spChg>
-        <pc:spChg chg="mod">
-          <ac:chgData name="Daniel Dan" userId="S::daniel.dan@modul.ac.at::e2a95533-a292-400e-bcf5-c81090ef720f" providerId="AD" clId="Web-{B0536F86-C883-7A67-11FA-EA747C9A93F9}" dt="2022-02-27T18:12:57.324" v="607" actId="20577"/>
-          <ac:spMkLst>
-            <pc:docMk/>
-            <pc:sldMk cId="4220365655" sldId="316"/>
-            <ac:spMk id="158" creationId="{00000000-0000-0000-0000-000000000000}"/>
-          </ac:spMkLst>
-        </pc:spChg>
-        <pc:picChg chg="del">
-          <ac:chgData name="Daniel Dan" userId="S::daniel.dan@modul.ac.at::e2a95533-a292-400e-bcf5-c81090ef720f" providerId="AD" clId="Web-{B0536F86-C883-7A67-11FA-EA747C9A93F9}" dt="2022-02-27T18:06:31.086" v="580"/>
-          <ac:picMkLst>
-            <pc:docMk/>
-            <pc:sldMk cId="4220365655" sldId="316"/>
-            <ac:picMk id="2" creationId="{2A515699-D87A-4013-808B-5A3F43412698}"/>
-          </ac:picMkLst>
-        </pc:picChg>
-        <pc:picChg chg="add mod">
-          <ac:chgData name="Daniel Dan" userId="S::daniel.dan@modul.ac.at::e2a95533-a292-400e-bcf5-c81090ef720f" providerId="AD" clId="Web-{B0536F86-C883-7A67-11FA-EA747C9A93F9}" dt="2022-02-27T18:06:44.008" v="584" actId="1076"/>
-          <ac:picMkLst>
-            <pc:docMk/>
-            <pc:sldMk cId="4220365655" sldId="316"/>
-            <ac:picMk id="3" creationId="{55592C39-C9C6-4ABC-A848-C32C60C55AC1}"/>
-          </ac:picMkLst>
-        </pc:picChg>
-      </pc:sldChg>
-      <pc:sldChg chg="addSp delSp modSp add replId">
-        <pc:chgData name="Daniel Dan" userId="S::daniel.dan@modul.ac.at::e2a95533-a292-400e-bcf5-c81090ef720f" providerId="AD" clId="Web-{B0536F86-C883-7A67-11FA-EA747C9A93F9}" dt="2022-02-27T18:16:35.476" v="632" actId="20577"/>
-        <pc:sldMkLst>
-          <pc:docMk/>
-          <pc:sldMk cId="1750328212" sldId="317"/>
-        </pc:sldMkLst>
-        <pc:spChg chg="add mod">
-          <ac:chgData name="Daniel Dan" userId="S::daniel.dan@modul.ac.at::e2a95533-a292-400e-bcf5-c81090ef720f" providerId="AD" clId="Web-{B0536F86-C883-7A67-11FA-EA747C9A93F9}" dt="2022-02-27T18:16:35.476" v="632" actId="20577"/>
-          <ac:spMkLst>
-            <pc:docMk/>
-            <pc:sldMk cId="1750328212" sldId="317"/>
-            <ac:spMk id="4" creationId="{EAC4C751-6916-4D9C-8E51-5A3C944A2D18}"/>
-          </ac:spMkLst>
-        </pc:spChg>
-        <pc:spChg chg="mod">
-          <ac:chgData name="Daniel Dan" userId="S::daniel.dan@modul.ac.at::e2a95533-a292-400e-bcf5-c81090ef720f" providerId="AD" clId="Web-{B0536F86-C883-7A67-11FA-EA747C9A93F9}" dt="2022-02-27T18:13:23.591" v="610" actId="20577"/>
-          <ac:spMkLst>
-            <pc:docMk/>
-            <pc:sldMk cId="1750328212" sldId="317"/>
-            <ac:spMk id="158" creationId="{00000000-0000-0000-0000-000000000000}"/>
-          </ac:spMkLst>
-        </pc:spChg>
-        <pc:picChg chg="add mod">
-          <ac:chgData name="Daniel Dan" userId="S::daniel.dan@modul.ac.at::e2a95533-a292-400e-bcf5-c81090ef720f" providerId="AD" clId="Web-{B0536F86-C883-7A67-11FA-EA747C9A93F9}" dt="2022-02-27T18:11:57.383" v="599" actId="1076"/>
-          <ac:picMkLst>
-            <pc:docMk/>
-            <pc:sldMk cId="1750328212" sldId="317"/>
-            <ac:picMk id="2" creationId="{3354AAC9-0A2C-4988-9DF7-89018407934A}"/>
-          </ac:picMkLst>
-        </pc:picChg>
-        <pc:picChg chg="del">
-          <ac:chgData name="Daniel Dan" userId="S::daniel.dan@modul.ac.at::e2a95533-a292-400e-bcf5-c81090ef720f" providerId="AD" clId="Web-{B0536F86-C883-7A67-11FA-EA747C9A93F9}" dt="2022-02-27T18:10:41.661" v="595"/>
-          <ac:picMkLst>
-            <pc:docMk/>
-            <pc:sldMk cId="1750328212" sldId="317"/>
-            <ac:picMk id="3" creationId="{55592C39-C9C6-4ABC-A848-C32C60C55AC1}"/>
-          </ac:picMkLst>
-        </pc:picChg>
-      </pc:sldChg>
-      <pc:sldChg chg="addSp delSp modSp add replId">
-        <pc:chgData name="Daniel Dan" userId="S::daniel.dan@modul.ac.at::e2a95533-a292-400e-bcf5-c81090ef720f" providerId="AD" clId="Web-{B0536F86-C883-7A67-11FA-EA747C9A93F9}" dt="2022-02-27T18:37:03.091" v="951" actId="1076"/>
-        <pc:sldMkLst>
-          <pc:docMk/>
-          <pc:sldMk cId="3435117287" sldId="318"/>
-        </pc:sldMkLst>
-        <pc:spChg chg="add del">
-          <ac:chgData name="Daniel Dan" userId="S::daniel.dan@modul.ac.at::e2a95533-a292-400e-bcf5-c81090ef720f" providerId="AD" clId="Web-{B0536F86-C883-7A67-11FA-EA747C9A93F9}" dt="2022-02-27T18:28:11.935" v="747"/>
-          <ac:spMkLst>
-            <pc:docMk/>
-            <pc:sldMk cId="3435117287" sldId="318"/>
-            <ac:spMk id="3" creationId="{3AF0F248-872A-4B44-96EB-EBAA07041213}"/>
-          </ac:spMkLst>
-        </pc:spChg>
-        <pc:spChg chg="add mod">
-          <ac:chgData name="Daniel Dan" userId="S::daniel.dan@modul.ac.at::e2a95533-a292-400e-bcf5-c81090ef720f" providerId="AD" clId="Web-{B0536F86-C883-7A67-11FA-EA747C9A93F9}" dt="2022-02-27T18:33:29.173" v="901" actId="14100"/>
-          <ac:spMkLst>
-            <pc:docMk/>
-            <pc:sldMk cId="3435117287" sldId="318"/>
-            <ac:spMk id="5" creationId="{639C04D4-9C4E-43DB-B3BD-4A741A4B36C0}"/>
-          </ac:spMkLst>
-        </pc:spChg>
-        <pc:spChg chg="add del mod">
-          <ac:chgData name="Daniel Dan" userId="S::daniel.dan@modul.ac.at::e2a95533-a292-400e-bcf5-c81090ef720f" providerId="AD" clId="Web-{B0536F86-C883-7A67-11FA-EA747C9A93F9}" dt="2022-02-27T18:30:14.617" v="813"/>
-          <ac:spMkLst>
-            <pc:docMk/>
-            <pc:sldMk cId="3435117287" sldId="318"/>
-            <ac:spMk id="6" creationId="{2C537286-233C-4796-9091-E68D3E1064D8}"/>
-          </ac:spMkLst>
-        </pc:spChg>
-        <pc:spChg chg="add mod">
-          <ac:chgData name="Daniel Dan" userId="S::daniel.dan@modul.ac.at::e2a95533-a292-400e-bcf5-c81090ef720f" providerId="AD" clId="Web-{B0536F86-C883-7A67-11FA-EA747C9A93F9}" dt="2022-02-27T18:34:41.708" v="930" actId="20577"/>
-          <ac:spMkLst>
-            <pc:docMk/>
-            <pc:sldMk cId="3435117287" sldId="318"/>
-            <ac:spMk id="7" creationId="{877D5788-EFA2-455C-8462-5136F1C6D7A5}"/>
-          </ac:spMkLst>
-        </pc:spChg>
-        <pc:spChg chg="add mod">
-          <ac:chgData name="Daniel Dan" userId="S::daniel.dan@modul.ac.at::e2a95533-a292-400e-bcf5-c81090ef720f" providerId="AD" clId="Web-{B0536F86-C883-7A67-11FA-EA747C9A93F9}" dt="2022-02-27T18:28:49.609" v="754" actId="1076"/>
-          <ac:spMkLst>
-            <pc:docMk/>
-            <pc:sldMk cId="3435117287" sldId="318"/>
-            <ac:spMk id="8" creationId="{042DB9B9-2AFB-4890-A18C-CDAAE43AF153}"/>
-          </ac:spMkLst>
-        </pc:spChg>
-        <pc:spChg chg="add mod">
-          <ac:chgData name="Daniel Dan" userId="S::daniel.dan@modul.ac.at::e2a95533-a292-400e-bcf5-c81090ef720f" providerId="AD" clId="Web-{B0536F86-C883-7A67-11FA-EA747C9A93F9}" dt="2022-02-27T18:36:30.198" v="943" actId="20577"/>
-          <ac:spMkLst>
-            <pc:docMk/>
-            <pc:sldMk cId="3435117287" sldId="318"/>
-            <ac:spMk id="9" creationId="{DDC27FBF-E02E-4BCB-A831-2B8522B2A17D}"/>
-          </ac:spMkLst>
-        </pc:spChg>
-        <pc:spChg chg="add mod">
-          <ac:chgData name="Daniel Dan" userId="S::daniel.dan@modul.ac.at::e2a95533-a292-400e-bcf5-c81090ef720f" providerId="AD" clId="Web-{B0536F86-C883-7A67-11FA-EA747C9A93F9}" dt="2022-02-27T18:34:36.458" v="923" actId="20577"/>
-          <ac:spMkLst>
-            <pc:docMk/>
-            <pc:sldMk cId="3435117287" sldId="318"/>
-            <ac:spMk id="10" creationId="{A0790012-41B0-4479-83E2-9E565AB0BF58}"/>
-          </ac:spMkLst>
-        </pc:spChg>
-        <pc:spChg chg="add del">
-          <ac:chgData name="Daniel Dan" userId="S::daniel.dan@modul.ac.at::e2a95533-a292-400e-bcf5-c81090ef720f" providerId="AD" clId="Web-{B0536F86-C883-7A67-11FA-EA747C9A93F9}" dt="2022-02-27T18:35:32.867" v="934"/>
-          <ac:spMkLst>
-            <pc:docMk/>
-            <pc:sldMk cId="3435117287" sldId="318"/>
-            <ac:spMk id="11" creationId="{41D6AEB8-77D6-44A4-B1FE-36377EA4E896}"/>
-          </ac:spMkLst>
-        </pc:spChg>
-        <pc:spChg chg="add mod">
-          <ac:chgData name="Daniel Dan" userId="S::daniel.dan@modul.ac.at::e2a95533-a292-400e-bcf5-c81090ef720f" providerId="AD" clId="Web-{B0536F86-C883-7A67-11FA-EA747C9A93F9}" dt="2022-02-27T18:36:12.791" v="938" actId="1076"/>
-          <ac:spMkLst>
-            <pc:docMk/>
-            <pc:sldMk cId="3435117287" sldId="318"/>
-            <ac:spMk id="12" creationId="{972F3C98-09DE-40DC-9458-044B098DBB68}"/>
-          </ac:spMkLst>
-        </pc:spChg>
-        <pc:spChg chg="add mod">
-          <ac:chgData name="Daniel Dan" userId="S::daniel.dan@modul.ac.at::e2a95533-a292-400e-bcf5-c81090ef720f" providerId="AD" clId="Web-{B0536F86-C883-7A67-11FA-EA747C9A93F9}" dt="2022-02-27T18:37:03.091" v="951" actId="1076"/>
-          <ac:spMkLst>
-            <pc:docMk/>
-            <pc:sldMk cId="3435117287" sldId="318"/>
-            <ac:spMk id="13" creationId="{4E9FED30-55C5-49AD-A89A-9611F261A3D4}"/>
-          </ac:spMkLst>
-        </pc:spChg>
-        <pc:spChg chg="add mod">
-          <ac:chgData name="Daniel Dan" userId="S::daniel.dan@modul.ac.at::e2a95533-a292-400e-bcf5-c81090ef720f" providerId="AD" clId="Web-{B0536F86-C883-7A67-11FA-EA747C9A93F9}" dt="2022-02-27T18:36:23.557" v="940" actId="1076"/>
-          <ac:spMkLst>
-            <pc:docMk/>
-            <pc:sldMk cId="3435117287" sldId="318"/>
-            <ac:spMk id="15" creationId="{8A72A438-28F4-4D55-95A4-88716E444225}"/>
-          </ac:spMkLst>
-        </pc:spChg>
-        <pc:spChg chg="mod">
-          <ac:chgData name="Daniel Dan" userId="S::daniel.dan@modul.ac.at::e2a95533-a292-400e-bcf5-c81090ef720f" providerId="AD" clId="Web-{B0536F86-C883-7A67-11FA-EA747C9A93F9}" dt="2022-02-27T18:35:44.180" v="936"/>
-          <ac:spMkLst>
-            <pc:docMk/>
-            <pc:sldMk cId="3435117287" sldId="318"/>
-            <ac:spMk id="158" creationId="{00000000-0000-0000-0000-000000000000}"/>
-          </ac:spMkLst>
-        </pc:spChg>
-        <pc:picChg chg="del">
-          <ac:chgData name="Daniel Dan" userId="S::daniel.dan@modul.ac.at::e2a95533-a292-400e-bcf5-c81090ef720f" providerId="AD" clId="Web-{B0536F86-C883-7A67-11FA-EA747C9A93F9}" dt="2022-02-27T18:17:03.243" v="635"/>
-          <ac:picMkLst>
-            <pc:docMk/>
-            <pc:sldMk cId="3435117287" sldId="318"/>
-            <ac:picMk id="2" creationId="{3354AAC9-0A2C-4988-9DF7-89018407934A}"/>
-          </ac:picMkLst>
-        </pc:picChg>
-      </pc:sldChg>
-      <pc:sldChg chg="addSp delSp modSp add replId">
-        <pc:chgData name="Daniel Dan" userId="S::daniel.dan@modul.ac.at::e2a95533-a292-400e-bcf5-c81090ef720f" providerId="AD" clId="Web-{B0536F86-C883-7A67-11FA-EA747C9A93F9}" dt="2022-02-27T18:25:58.912" v="716" actId="20577"/>
-        <pc:sldMkLst>
-          <pc:docMk/>
-          <pc:sldMk cId="1930231165" sldId="319"/>
-        </pc:sldMkLst>
-        <pc:spChg chg="mod">
-          <ac:chgData name="Daniel Dan" userId="S::daniel.dan@modul.ac.at::e2a95533-a292-400e-bcf5-c81090ef720f" providerId="AD" clId="Web-{B0536F86-C883-7A67-11FA-EA747C9A93F9}" dt="2022-02-27T18:25:58.912" v="716" actId="20577"/>
-          <ac:spMkLst>
-            <pc:docMk/>
-            <pc:sldMk cId="1930231165" sldId="319"/>
-            <ac:spMk id="4" creationId="{EAC4C751-6916-4D9C-8E51-5A3C944A2D18}"/>
-          </ac:spMkLst>
-        </pc:spChg>
-        <pc:spChg chg="add del mod">
-          <ac:chgData name="Daniel Dan" userId="S::daniel.dan@modul.ac.at::e2a95533-a292-400e-bcf5-c81090ef720f" providerId="AD" clId="Web-{B0536F86-C883-7A67-11FA-EA747C9A93F9}" dt="2022-02-27T18:25:07.863" v="702"/>
-          <ac:spMkLst>
-            <pc:docMk/>
-            <pc:sldMk cId="1930231165" sldId="319"/>
-            <ac:spMk id="6" creationId="{0DD5799A-DF6B-417D-BCC3-B77B7C0FFB82}"/>
-          </ac:spMkLst>
-        </pc:spChg>
-        <pc:spChg chg="del">
-          <ac:chgData name="Daniel Dan" userId="S::daniel.dan@modul.ac.at::e2a95533-a292-400e-bcf5-c81090ef720f" providerId="AD" clId="Web-{B0536F86-C883-7A67-11FA-EA747C9A93F9}" dt="2022-02-27T18:25:02.363" v="701"/>
-          <ac:spMkLst>
-            <pc:docMk/>
-            <pc:sldMk cId="1930231165" sldId="319"/>
-            <ac:spMk id="158" creationId="{00000000-0000-0000-0000-000000000000}"/>
-          </ac:spMkLst>
-        </pc:spChg>
-        <pc:picChg chg="del">
-          <ac:chgData name="Daniel Dan" userId="S::daniel.dan@modul.ac.at::e2a95533-a292-400e-bcf5-c81090ef720f" providerId="AD" clId="Web-{B0536F86-C883-7A67-11FA-EA747C9A93F9}" dt="2022-02-27T18:24:43.799" v="697"/>
-          <ac:picMkLst>
-            <pc:docMk/>
-            <pc:sldMk cId="1930231165" sldId="319"/>
-            <ac:picMk id="2" creationId="{3354AAC9-0A2C-4988-9DF7-89018407934A}"/>
-          </ac:picMkLst>
-        </pc:picChg>
-        <pc:picChg chg="add mod">
-          <ac:chgData name="Daniel Dan" userId="S::daniel.dan@modul.ac.at::e2a95533-a292-400e-bcf5-c81090ef720f" providerId="AD" clId="Web-{B0536F86-C883-7A67-11FA-EA747C9A93F9}" dt="2022-02-27T18:24:59.831" v="700" actId="14100"/>
-          <ac:picMkLst>
-            <pc:docMk/>
-            <pc:sldMk cId="1930231165" sldId="319"/>
-            <ac:picMk id="3" creationId="{750D9348-B158-4932-B485-4BC2BDD9E9E2}"/>
-          </ac:picMkLst>
-        </pc:picChg>
-      </pc:sldChg>
-      <pc:sldChg chg="addSp delSp modSp add replId">
-        <pc:chgData name="Daniel Dan" userId="S::daniel.dan@modul.ac.at::e2a95533-a292-400e-bcf5-c81090ef720f" providerId="AD" clId="Web-{B0536F86-C883-7A67-11FA-EA747C9A93F9}" dt="2022-02-27T18:59:20.432" v="1021" actId="20577"/>
-        <pc:sldMkLst>
-          <pc:docMk/>
-          <pc:sldMk cId="705339712" sldId="320"/>
-        </pc:sldMkLst>
-        <pc:spChg chg="add del mod">
-          <ac:chgData name="Daniel Dan" userId="S::daniel.dan@modul.ac.at::e2a95533-a292-400e-bcf5-c81090ef720f" providerId="AD" clId="Web-{B0536F86-C883-7A67-11FA-EA747C9A93F9}" dt="2022-02-27T18:43:10.114" v="962"/>
-          <ac:spMkLst>
-            <pc:docMk/>
-            <pc:sldMk cId="705339712" sldId="320"/>
-            <ac:spMk id="3" creationId="{A6055272-5DD7-434C-B5A8-73F27B07C224}"/>
-          </ac:spMkLst>
-        </pc:spChg>
-        <pc:spChg chg="del">
-          <ac:chgData name="Daniel Dan" userId="S::daniel.dan@modul.ac.at::e2a95533-a292-400e-bcf5-c81090ef720f" providerId="AD" clId="Web-{B0536F86-C883-7A67-11FA-EA747C9A93F9}" dt="2022-02-27T18:42:55.457" v="954"/>
-          <ac:spMkLst>
-            <pc:docMk/>
-            <pc:sldMk cId="705339712" sldId="320"/>
-            <ac:spMk id="5" creationId="{639C04D4-9C4E-43DB-B3BD-4A741A4B36C0}"/>
-          </ac:spMkLst>
-        </pc:spChg>
-        <pc:spChg chg="add mod">
-          <ac:chgData name="Daniel Dan" userId="S::daniel.dan@modul.ac.at::e2a95533-a292-400e-bcf5-c81090ef720f" providerId="AD" clId="Web-{B0536F86-C883-7A67-11FA-EA747C9A93F9}" dt="2022-02-27T18:48:48.428" v="1011" actId="20577"/>
-          <ac:spMkLst>
-            <pc:docMk/>
-            <pc:sldMk cId="705339712" sldId="320"/>
-            <ac:spMk id="6" creationId="{4384693D-6919-4B86-A2AF-93F6D8421A68}"/>
-          </ac:spMkLst>
-        </pc:spChg>
-        <pc:spChg chg="del">
-          <ac:chgData name="Daniel Dan" userId="S::daniel.dan@modul.ac.at::e2a95533-a292-400e-bcf5-c81090ef720f" providerId="AD" clId="Web-{B0536F86-C883-7A67-11FA-EA747C9A93F9}" dt="2022-02-27T18:42:59.707" v="958"/>
-          <ac:spMkLst>
-            <pc:docMk/>
-            <pc:sldMk cId="705339712" sldId="320"/>
-            <ac:spMk id="7" creationId="{877D5788-EFA2-455C-8462-5136F1C6D7A5}"/>
-          </ac:spMkLst>
-        </pc:spChg>
-        <pc:spChg chg="del">
-          <ac:chgData name="Daniel Dan" userId="S::daniel.dan@modul.ac.at::e2a95533-a292-400e-bcf5-c81090ef720f" providerId="AD" clId="Web-{B0536F86-C883-7A67-11FA-EA747C9A93F9}" dt="2022-02-27T18:42:59.707" v="960"/>
-          <ac:spMkLst>
-            <pc:docMk/>
-            <pc:sldMk cId="705339712" sldId="320"/>
-            <ac:spMk id="8" creationId="{042DB9B9-2AFB-4890-A18C-CDAAE43AF153}"/>
-          </ac:spMkLst>
-        </pc:spChg>
-        <pc:spChg chg="del">
-          <ac:chgData name="Daniel Dan" userId="S::daniel.dan@modul.ac.at::e2a95533-a292-400e-bcf5-c81090ef720f" providerId="AD" clId="Web-{B0536F86-C883-7A67-11FA-EA747C9A93F9}" dt="2022-02-27T18:42:59.707" v="959"/>
-          <ac:spMkLst>
-            <pc:docMk/>
-            <pc:sldMk cId="705339712" sldId="320"/>
-            <ac:spMk id="9" creationId="{DDC27FBF-E02E-4BCB-A831-2B8522B2A17D}"/>
-          </ac:spMkLst>
-        </pc:spChg>
-        <pc:spChg chg="del">
-          <ac:chgData name="Daniel Dan" userId="S::daniel.dan@modul.ac.at::e2a95533-a292-400e-bcf5-c81090ef720f" providerId="AD" clId="Web-{B0536F86-C883-7A67-11FA-EA747C9A93F9}" dt="2022-02-27T18:43:05.473" v="961"/>
-          <ac:spMkLst>
-            <pc:docMk/>
-            <pc:sldMk cId="705339712" sldId="320"/>
-            <ac:spMk id="10" creationId="{A0790012-41B0-4479-83E2-9E565AB0BF58}"/>
-          </ac:spMkLst>
-        </pc:spChg>
-        <pc:spChg chg="del">
-          <ac:chgData name="Daniel Dan" userId="S::daniel.dan@modul.ac.at::e2a95533-a292-400e-bcf5-c81090ef720f" providerId="AD" clId="Web-{B0536F86-C883-7A67-11FA-EA747C9A93F9}" dt="2022-02-27T18:42:59.707" v="957"/>
-          <ac:spMkLst>
-            <pc:docMk/>
-            <pc:sldMk cId="705339712" sldId="320"/>
-            <ac:spMk id="12" creationId="{972F3C98-09DE-40DC-9458-044B098DBB68}"/>
-          </ac:spMkLst>
-        </pc:spChg>
-        <pc:spChg chg="del">
-          <ac:chgData name="Daniel Dan" userId="S::daniel.dan@modul.ac.at::e2a95533-a292-400e-bcf5-c81090ef720f" providerId="AD" clId="Web-{B0536F86-C883-7A67-11FA-EA747C9A93F9}" dt="2022-02-27T18:42:59.707" v="955"/>
-          <ac:spMkLst>
-            <pc:docMk/>
-            <pc:sldMk cId="705339712" sldId="320"/>
-            <ac:spMk id="13" creationId="{4E9FED30-55C5-49AD-A89A-9611F261A3D4}"/>
-          </ac:spMkLst>
-        </pc:spChg>
-        <pc:spChg chg="del">
-          <ac:chgData name="Daniel Dan" userId="S::daniel.dan@modul.ac.at::e2a95533-a292-400e-bcf5-c81090ef720f" providerId="AD" clId="Web-{B0536F86-C883-7A67-11FA-EA747C9A93F9}" dt="2022-02-27T18:42:59.707" v="956"/>
-          <ac:spMkLst>
-            <pc:docMk/>
-            <pc:sldMk cId="705339712" sldId="320"/>
-            <ac:spMk id="15" creationId="{8A72A438-28F4-4D55-95A4-88716E444225}"/>
-          </ac:spMkLst>
-        </pc:spChg>
-        <pc:spChg chg="mod">
-          <ac:chgData name="Daniel Dan" userId="S::daniel.dan@modul.ac.at::e2a95533-a292-400e-bcf5-c81090ef720f" providerId="AD" clId="Web-{B0536F86-C883-7A67-11FA-EA747C9A93F9}" dt="2022-02-27T18:59:20.432" v="1021" actId="20577"/>
-          <ac:spMkLst>
-            <pc:docMk/>
-            <pc:sldMk cId="705339712" sldId="320"/>
-            <ac:spMk id="157" creationId="{00000000-0000-0000-0000-000000000000}"/>
-          </ac:spMkLst>
-        </pc:spChg>
-        <pc:spChg chg="del">
-          <ac:chgData name="Daniel Dan" userId="S::daniel.dan@modul.ac.at::e2a95533-a292-400e-bcf5-c81090ef720f" providerId="AD" clId="Web-{B0536F86-C883-7A67-11FA-EA747C9A93F9}" dt="2022-02-27T18:42:53.613" v="953"/>
-          <ac:spMkLst>
-            <pc:docMk/>
-            <pc:sldMk cId="705339712" sldId="320"/>
-            <ac:spMk id="158" creationId="{00000000-0000-0000-0000-000000000000}"/>
-          </ac:spMkLst>
-        </pc:spChg>
-      </pc:sldChg>
-      <pc:sldChg chg="addSp delSp modSp add replId">
-        <pc:chgData name="Daniel Dan" userId="S::daniel.dan@modul.ac.at::e2a95533-a292-400e-bcf5-c81090ef720f" providerId="AD" clId="Web-{B0536F86-C883-7A67-11FA-EA747C9A93F9}" dt="2022-02-27T19:39:52.236" v="1267" actId="20577"/>
-        <pc:sldMkLst>
-          <pc:docMk/>
-          <pc:sldMk cId="3771323663" sldId="321"/>
-        </pc:sldMkLst>
-        <pc:spChg chg="add mod">
-          <ac:chgData name="Daniel Dan" userId="S::daniel.dan@modul.ac.at::e2a95533-a292-400e-bcf5-c81090ef720f" providerId="AD" clId="Web-{B0536F86-C883-7A67-11FA-EA747C9A93F9}" dt="2022-02-27T19:11:46.173" v="1232" actId="20577"/>
-          <ac:spMkLst>
-            <pc:docMk/>
-            <pc:sldMk cId="3771323663" sldId="321"/>
-            <ac:spMk id="2" creationId="{2C8E9D9B-0A9B-430B-8E73-1FD89A2AD545}"/>
-          </ac:spMkLst>
-        </pc:spChg>
-        <pc:spChg chg="add">
-          <ac:chgData name="Daniel Dan" userId="S::daniel.dan@modul.ac.at::e2a95533-a292-400e-bcf5-c81090ef720f" providerId="AD" clId="Web-{B0536F86-C883-7A67-11FA-EA747C9A93F9}" dt="2022-02-27T19:01:08.046" v="1079"/>
-          <ac:spMkLst>
-            <pc:docMk/>
-            <pc:sldMk cId="3771323663" sldId="321"/>
-            <ac:spMk id="3" creationId="{60F5FB00-4525-44CB-9653-DC87B0C1B19B}"/>
-          </ac:spMkLst>
-        </pc:spChg>
-        <pc:spChg chg="add">
-          <ac:chgData name="Daniel Dan" userId="S::daniel.dan@modul.ac.at::e2a95533-a292-400e-bcf5-c81090ef720f" providerId="AD" clId="Web-{B0536F86-C883-7A67-11FA-EA747C9A93F9}" dt="2022-02-27T19:01:08.062" v="1080"/>
-          <ac:spMkLst>
-            <pc:docMk/>
-            <pc:sldMk cId="3771323663" sldId="321"/>
-            <ac:spMk id="5" creationId="{31E6133C-DC43-4AA8-AFEC-81D03EE5E589}"/>
-          </ac:spMkLst>
-        </pc:spChg>
-        <pc:spChg chg="del mod">
-          <ac:chgData name="Daniel Dan" userId="S::daniel.dan@modul.ac.at::e2a95533-a292-400e-bcf5-c81090ef720f" providerId="AD" clId="Web-{B0536F86-C883-7A67-11FA-EA747C9A93F9}" dt="2022-02-27T18:59:50.542" v="1028"/>
-          <ac:spMkLst>
-            <pc:docMk/>
-            <pc:sldMk cId="3771323663" sldId="321"/>
-            <ac:spMk id="6" creationId="{4384693D-6919-4B86-A2AF-93F6D8421A68}"/>
-          </ac:spMkLst>
-        </pc:spChg>
-        <pc:spChg chg="add">
-          <ac:chgData name="Daniel Dan" userId="S::daniel.dan@modul.ac.at::e2a95533-a292-400e-bcf5-c81090ef720f" providerId="AD" clId="Web-{B0536F86-C883-7A67-11FA-EA747C9A93F9}" dt="2022-02-27T19:01:08.062" v="1081"/>
-          <ac:spMkLst>
-            <pc:docMk/>
-            <pc:sldMk cId="3771323663" sldId="321"/>
-            <ac:spMk id="9" creationId="{F8E0876B-00DB-432C-A8E6-3EDB7FCE2242}"/>
-          </ac:spMkLst>
-        </pc:spChg>
-        <pc:spChg chg="add mod">
-          <ac:chgData name="Daniel Dan" userId="S::daniel.dan@modul.ac.at::e2a95533-a292-400e-bcf5-c81090ef720f" providerId="AD" clId="Web-{B0536F86-C883-7A67-11FA-EA747C9A93F9}" dt="2022-02-27T19:02:05.252" v="1108" actId="20577"/>
-          <ac:spMkLst>
-            <pc:docMk/>
-            <pc:sldMk cId="3771323663" sldId="321"/>
-            <ac:spMk id="11" creationId="{3C4D02FA-1CE8-472A-9175-7CEEFF0422CF}"/>
-          </ac:spMkLst>
-        </pc:spChg>
-        <pc:spChg chg="add">
-          <ac:chgData name="Daniel Dan" userId="S::daniel.dan@modul.ac.at::e2a95533-a292-400e-bcf5-c81090ef720f" providerId="AD" clId="Web-{B0536F86-C883-7A67-11FA-EA747C9A93F9}" dt="2022-02-27T19:01:08.078" v="1083"/>
-          <ac:spMkLst>
-            <pc:docMk/>
-            <pc:sldMk cId="3771323663" sldId="321"/>
-            <ac:spMk id="13" creationId="{2913E011-2738-45D2-A9F8-44FABE537C55}"/>
-          </ac:spMkLst>
-        </pc:spChg>
-        <pc:spChg chg="add">
-          <ac:chgData name="Daniel Dan" userId="S::daniel.dan@modul.ac.at::e2a95533-a292-400e-bcf5-c81090ef720f" providerId="AD" clId="Web-{B0536F86-C883-7A67-11FA-EA747C9A93F9}" dt="2022-02-27T19:01:08.093" v="1084"/>
-          <ac:spMkLst>
-            <pc:docMk/>
-            <pc:sldMk cId="3771323663" sldId="321"/>
-            <ac:spMk id="15" creationId="{0EB08093-8619-4222-A05D-D7B5DDA244E7}"/>
-          </ac:spMkLst>
-        </pc:spChg>
-        <pc:spChg chg="add mod">
-          <ac:chgData name="Daniel Dan" userId="S::daniel.dan@modul.ac.at::e2a95533-a292-400e-bcf5-c81090ef720f" providerId="AD" clId="Web-{B0536F86-C883-7A67-11FA-EA747C9A93F9}" dt="2022-02-27T19:02:12.331" v="1111" actId="20577"/>
-          <ac:spMkLst>
-            <pc:docMk/>
-            <pc:sldMk cId="3771323663" sldId="321"/>
-            <ac:spMk id="17" creationId="{63BC5BE6-2497-4219-B3E2-1175FBAC95E1}"/>
-          </ac:spMkLst>
-        </pc:spChg>
-        <pc:spChg chg="add mod">
-          <ac:chgData name="Daniel Dan" userId="S::daniel.dan@modul.ac.at::e2a95533-a292-400e-bcf5-c81090ef720f" providerId="AD" clId="Web-{B0536F86-C883-7A67-11FA-EA747C9A93F9}" dt="2022-02-27T19:39:52.236" v="1267" actId="20577"/>
-          <ac:spMkLst>
-            <pc:docMk/>
-            <pc:sldMk cId="3771323663" sldId="321"/>
-            <ac:spMk id="19" creationId="{16B51973-F20E-4200-BB19-5F8EB3E2960F}"/>
-          </ac:spMkLst>
-        </pc:spChg>
-      </pc:sldChg>
-      <pc:sldChg chg="modSp add replId">
-        <pc:chgData name="Daniel Dan" userId="S::daniel.dan@modul.ac.at::e2a95533-a292-400e-bcf5-c81090ef720f" providerId="AD" clId="Web-{B0536F86-C883-7A67-11FA-EA747C9A93F9}" dt="2022-02-27T19:53:58.162" v="2518" actId="20577"/>
-        <pc:sldMkLst>
-          <pc:docMk/>
-          <pc:sldMk cId="3370229835" sldId="322"/>
-        </pc:sldMkLst>
-        <pc:spChg chg="mod">
-          <ac:chgData name="Daniel Dan" userId="S::daniel.dan@modul.ac.at::e2a95533-a292-400e-bcf5-c81090ef720f" providerId="AD" clId="Web-{B0536F86-C883-7A67-11FA-EA747C9A93F9}" dt="2022-02-27T19:53:58.162" v="2518" actId="20577"/>
-          <ac:spMkLst>
-            <pc:docMk/>
-            <pc:sldMk cId="3370229835" sldId="322"/>
-            <ac:spMk id="2" creationId="{2C8E9D9B-0A9B-430B-8E73-1FD89A2AD545}"/>
-          </ac:spMkLst>
-        </pc:spChg>
-        <pc:spChg chg="mod">
-          <ac:chgData name="Daniel Dan" userId="S::daniel.dan@modul.ac.at::e2a95533-a292-400e-bcf5-c81090ef720f" providerId="AD" clId="Web-{B0536F86-C883-7A67-11FA-EA747C9A93F9}" dt="2022-02-27T19:12:40.597" v="1241" actId="20577"/>
-          <ac:spMkLst>
-            <pc:docMk/>
-            <pc:sldMk cId="3370229835" sldId="322"/>
-            <ac:spMk id="11" creationId="{3C4D02FA-1CE8-472A-9175-7CEEFF0422CF}"/>
-          </ac:spMkLst>
-        </pc:spChg>
-        <pc:spChg chg="mod">
-          <ac:chgData name="Daniel Dan" userId="S::daniel.dan@modul.ac.at::e2a95533-a292-400e-bcf5-c81090ef720f" providerId="AD" clId="Web-{B0536F86-C883-7A67-11FA-EA747C9A93F9}" dt="2022-02-27T19:39:42.611" v="1254" actId="20577"/>
-          <ac:spMkLst>
-            <pc:docMk/>
-            <pc:sldMk cId="3370229835" sldId="322"/>
-            <ac:spMk id="17" creationId="{63BC5BE6-2497-4219-B3E2-1175FBAC95E1}"/>
-          </ac:spMkLst>
-        </pc:spChg>
-        <pc:spChg chg="mod">
-          <ac:chgData name="Daniel Dan" userId="S::daniel.dan@modul.ac.at::e2a95533-a292-400e-bcf5-c81090ef720f" providerId="AD" clId="Web-{B0536F86-C883-7A67-11FA-EA747C9A93F9}" dt="2022-02-27T19:40:07.642" v="1274" actId="20577"/>
-          <ac:spMkLst>
-            <pc:docMk/>
-            <pc:sldMk cId="3370229835" sldId="322"/>
-            <ac:spMk id="19" creationId="{16B51973-F20E-4200-BB19-5F8EB3E2960F}"/>
-          </ac:spMkLst>
-        </pc:spChg>
-      </pc:sldChg>
-      <pc:sldChg chg="addSp delSp modSp add replId">
-        <pc:chgData name="Daniel Dan" userId="S::daniel.dan@modul.ac.at::e2a95533-a292-400e-bcf5-c81090ef720f" providerId="AD" clId="Web-{B0536F86-C883-7A67-11FA-EA747C9A93F9}" dt="2022-02-27T19:51:55.236" v="2459"/>
-        <pc:sldMkLst>
-          <pc:docMk/>
-          <pc:sldMk cId="3219428231" sldId="323"/>
-        </pc:sldMkLst>
-        <pc:spChg chg="del">
-          <ac:chgData name="Daniel Dan" userId="S::daniel.dan@modul.ac.at::e2a95533-a292-400e-bcf5-c81090ef720f" providerId="AD" clId="Web-{B0536F86-C883-7A67-11FA-EA747C9A93F9}" dt="2022-02-27T19:44:48.272" v="1485"/>
-          <ac:spMkLst>
-            <pc:docMk/>
-            <pc:sldMk cId="3219428231" sldId="323"/>
-            <ac:spMk id="2" creationId="{2C8E9D9B-0A9B-430B-8E73-1FD89A2AD545}"/>
-          </ac:spMkLst>
-        </pc:spChg>
-        <pc:spChg chg="del">
-          <ac:chgData name="Daniel Dan" userId="S::daniel.dan@modul.ac.at::e2a95533-a292-400e-bcf5-c81090ef720f" providerId="AD" clId="Web-{B0536F86-C883-7A67-11FA-EA747C9A93F9}" dt="2022-02-27T19:44:52.334" v="1493"/>
-          <ac:spMkLst>
-            <pc:docMk/>
-            <pc:sldMk cId="3219428231" sldId="323"/>
-            <ac:spMk id="3" creationId="{60F5FB00-4525-44CB-9653-DC87B0C1B19B}"/>
-          </ac:spMkLst>
-        </pc:spChg>
-        <pc:spChg chg="del">
-          <ac:chgData name="Daniel Dan" userId="S::daniel.dan@modul.ac.at::e2a95533-a292-400e-bcf5-c81090ef720f" providerId="AD" clId="Web-{B0536F86-C883-7A67-11FA-EA747C9A93F9}" dt="2022-02-27T19:44:52.334" v="1492"/>
-          <ac:spMkLst>
-            <pc:docMk/>
-            <pc:sldMk cId="3219428231" sldId="323"/>
-            <ac:spMk id="5" creationId="{31E6133C-DC43-4AA8-AFEC-81D03EE5E589}"/>
-          </ac:spMkLst>
-        </pc:spChg>
-        <pc:spChg chg="del">
-          <ac:chgData name="Daniel Dan" userId="S::daniel.dan@modul.ac.at::e2a95533-a292-400e-bcf5-c81090ef720f" providerId="AD" clId="Web-{B0536F86-C883-7A67-11FA-EA747C9A93F9}" dt="2022-02-27T19:44:52.334" v="1491"/>
-          <ac:spMkLst>
-            <pc:docMk/>
-            <pc:sldMk cId="3219428231" sldId="323"/>
-            <ac:spMk id="9" creationId="{F8E0876B-00DB-432C-A8E6-3EDB7FCE2242}"/>
-          </ac:spMkLst>
-        </pc:spChg>
-        <pc:spChg chg="del">
-          <ac:chgData name="Daniel Dan" userId="S::daniel.dan@modul.ac.at::e2a95533-a292-400e-bcf5-c81090ef720f" providerId="AD" clId="Web-{B0536F86-C883-7A67-11FA-EA747C9A93F9}" dt="2022-02-27T19:44:52.334" v="1490"/>
-          <ac:spMkLst>
-            <pc:docMk/>
-            <pc:sldMk cId="3219428231" sldId="323"/>
-            <ac:spMk id="11" creationId="{3C4D02FA-1CE8-472A-9175-7CEEFF0422CF}"/>
-          </ac:spMkLst>
-        </pc:spChg>
-        <pc:spChg chg="del">
-          <ac:chgData name="Daniel Dan" userId="S::daniel.dan@modul.ac.at::e2a95533-a292-400e-bcf5-c81090ef720f" providerId="AD" clId="Web-{B0536F86-C883-7A67-11FA-EA747C9A93F9}" dt="2022-02-27T19:44:52.334" v="1489"/>
-          <ac:spMkLst>
-            <pc:docMk/>
-            <pc:sldMk cId="3219428231" sldId="323"/>
-            <ac:spMk id="13" creationId="{2913E011-2738-45D2-A9F8-44FABE537C55}"/>
-          </ac:spMkLst>
-        </pc:spChg>
-        <pc:spChg chg="del">
-          <ac:chgData name="Daniel Dan" userId="S::daniel.dan@modul.ac.at::e2a95533-a292-400e-bcf5-c81090ef720f" providerId="AD" clId="Web-{B0536F86-C883-7A67-11FA-EA747C9A93F9}" dt="2022-02-27T19:44:52.334" v="1488"/>
-          <ac:spMkLst>
-            <pc:docMk/>
-            <pc:sldMk cId="3219428231" sldId="323"/>
-            <ac:spMk id="15" creationId="{0EB08093-8619-4222-A05D-D7B5DDA244E7}"/>
-          </ac:spMkLst>
-        </pc:spChg>
-        <pc:spChg chg="del">
-          <ac:chgData name="Daniel Dan" userId="S::daniel.dan@modul.ac.at::e2a95533-a292-400e-bcf5-c81090ef720f" providerId="AD" clId="Web-{B0536F86-C883-7A67-11FA-EA747C9A93F9}" dt="2022-02-27T19:44:52.334" v="1487"/>
-          <ac:spMkLst>
-            <pc:docMk/>
-            <pc:sldMk cId="3219428231" sldId="323"/>
-            <ac:spMk id="17" creationId="{63BC5BE6-2497-4219-B3E2-1175FBAC95E1}"/>
-          </ac:spMkLst>
-        </pc:spChg>
-        <pc:spChg chg="del">
-          <ac:chgData name="Daniel Dan" userId="S::daniel.dan@modul.ac.at::e2a95533-a292-400e-bcf5-c81090ef720f" providerId="AD" clId="Web-{B0536F86-C883-7A67-11FA-EA747C9A93F9}" dt="2022-02-27T19:44:52.334" v="1486"/>
-          <ac:spMkLst>
-            <pc:docMk/>
-            <pc:sldMk cId="3219428231" sldId="323"/>
-            <ac:spMk id="19" creationId="{16B51973-F20E-4200-BB19-5F8EB3E2960F}"/>
-          </ac:spMkLst>
-        </pc:spChg>
-        <pc:spChg chg="mod">
-          <ac:chgData name="Daniel Dan" userId="S::daniel.dan@modul.ac.at::e2a95533-a292-400e-bcf5-c81090ef720f" providerId="AD" clId="Web-{B0536F86-C883-7A67-11FA-EA747C9A93F9}" dt="2022-02-27T19:44:42.162" v="1484" actId="20577"/>
-          <ac:spMkLst>
-            <pc:docMk/>
-            <pc:sldMk cId="3219428231" sldId="323"/>
-            <ac:spMk id="157" creationId="{00000000-0000-0000-0000-000000000000}"/>
-          </ac:spMkLst>
-        </pc:spChg>
-        <pc:graphicFrameChg chg="add mod modGraphic">
-          <ac:chgData name="Daniel Dan" userId="S::daniel.dan@modul.ac.at::e2a95533-a292-400e-bcf5-c81090ef720f" providerId="AD" clId="Web-{B0536F86-C883-7A67-11FA-EA747C9A93F9}" dt="2022-02-27T19:51:55.236" v="2459"/>
-          <ac:graphicFrameMkLst>
-            <pc:docMk/>
-            <pc:sldMk cId="3219428231" sldId="323"/>
-            <ac:graphicFrameMk id="6" creationId="{6B2D2C6F-2BD6-4075-8B5C-4562248A9DEB}"/>
-          </ac:graphicFrameMkLst>
-        </pc:graphicFrameChg>
-      </pc:sldChg>
-    </pc:docChg>
-  </pc:docChgLst>
-  <pc:docChgLst>
-    <pc:chgData name="Daniel Dan" userId="S::daniel.dan@modul.ac.at::e2a95533-a292-400e-bcf5-c81090ef720f" providerId="AD" clId="Web-{690A8561-0462-61C5-122F-B37E0D33A249}"/>
-    <pc:docChg chg="addSld modSld">
-      <pc:chgData name="Daniel Dan" userId="S::daniel.dan@modul.ac.at::e2a95533-a292-400e-bcf5-c81090ef720f" providerId="AD" clId="Web-{690A8561-0462-61C5-122F-B37E0D33A249}" dt="2022-02-25T18:00:25.011" v="398" actId="20577"/>
-      <pc:docMkLst>
-        <pc:docMk/>
-      </pc:docMkLst>
-      <pc:sldChg chg="modSp">
-        <pc:chgData name="Daniel Dan" userId="S::daniel.dan@modul.ac.at::e2a95533-a292-400e-bcf5-c81090ef720f" providerId="AD" clId="Web-{690A8561-0462-61C5-122F-B37E0D33A249}" dt="2022-02-25T17:10:40.821" v="7" actId="20577"/>
-        <pc:sldMkLst>
-          <pc:docMk/>
-          <pc:sldMk cId="0" sldId="256"/>
-        </pc:sldMkLst>
-        <pc:spChg chg="mod">
-          <ac:chgData name="Daniel Dan" userId="S::daniel.dan@modul.ac.at::e2a95533-a292-400e-bcf5-c81090ef720f" providerId="AD" clId="Web-{690A8561-0462-61C5-122F-B37E0D33A249}" dt="2022-02-25T17:10:40.821" v="7" actId="20577"/>
-          <ac:spMkLst>
-            <pc:docMk/>
-            <pc:sldMk cId="0" sldId="256"/>
-            <ac:spMk id="80" creationId="{00000000-0000-0000-0000-000000000000}"/>
-          </ac:spMkLst>
-        </pc:spChg>
-      </pc:sldChg>
-      <pc:sldChg chg="modSp">
-        <pc:chgData name="Daniel Dan" userId="S::daniel.dan@modul.ac.at::e2a95533-a292-400e-bcf5-c81090ef720f" providerId="AD" clId="Web-{690A8561-0462-61C5-122F-B37E0D33A249}" dt="2022-02-25T17:30:54.181" v="146" actId="20577"/>
-        <pc:sldMkLst>
-          <pc:docMk/>
-          <pc:sldMk cId="0" sldId="257"/>
-        </pc:sldMkLst>
-        <pc:spChg chg="mod">
-          <ac:chgData name="Daniel Dan" userId="S::daniel.dan@modul.ac.at::e2a95533-a292-400e-bcf5-c81090ef720f" providerId="AD" clId="Web-{690A8561-0462-61C5-122F-B37E0D33A249}" dt="2022-02-25T17:19:28.820" v="83" actId="20577"/>
-          <ac:spMkLst>
-            <pc:docMk/>
-            <pc:sldMk cId="0" sldId="257"/>
-            <ac:spMk id="86" creationId="{00000000-0000-0000-0000-000000000000}"/>
-          </ac:spMkLst>
-        </pc:spChg>
-        <pc:spChg chg="mod">
-          <ac:chgData name="Daniel Dan" userId="S::daniel.dan@modul.ac.at::e2a95533-a292-400e-bcf5-c81090ef720f" providerId="AD" clId="Web-{690A8561-0462-61C5-122F-B37E0D33A249}" dt="2022-02-25T17:30:54.181" v="146" actId="20577"/>
-          <ac:spMkLst>
-            <pc:docMk/>
-            <pc:sldMk cId="0" sldId="257"/>
-            <ac:spMk id="87" creationId="{00000000-0000-0000-0000-000000000000}"/>
-          </ac:spMkLst>
-        </pc:spChg>
-      </pc:sldChg>
-      <pc:sldChg chg="addSp delSp modSp">
-        <pc:chgData name="Daniel Dan" userId="S::daniel.dan@modul.ac.at::e2a95533-a292-400e-bcf5-c81090ef720f" providerId="AD" clId="Web-{690A8561-0462-61C5-122F-B37E0D33A249}" dt="2022-02-25T17:41:53.037" v="288" actId="20577"/>
-        <pc:sldMkLst>
-          <pc:docMk/>
-          <pc:sldMk cId="0" sldId="258"/>
-        </pc:sldMkLst>
-        <pc:spChg chg="add mod">
-          <ac:chgData name="Daniel Dan" userId="S::daniel.dan@modul.ac.at::e2a95533-a292-400e-bcf5-c81090ef720f" providerId="AD" clId="Web-{690A8561-0462-61C5-122F-B37E0D33A249}" dt="2022-02-25T17:41:53.037" v="288" actId="20577"/>
-          <ac:spMkLst>
-            <pc:docMk/>
-            <pc:sldMk cId="0" sldId="258"/>
-            <ac:spMk id="2" creationId="{2AC6E17C-95F6-43A8-9683-8D544AABF34F}"/>
-          </ac:spMkLst>
-        </pc:spChg>
-        <pc:spChg chg="mod">
-          <ac:chgData name="Daniel Dan" userId="S::daniel.dan@modul.ac.at::e2a95533-a292-400e-bcf5-c81090ef720f" providerId="AD" clId="Web-{690A8561-0462-61C5-122F-B37E0D33A249}" dt="2022-02-25T17:36:07.680" v="211" actId="20577"/>
-          <ac:spMkLst>
-            <pc:docMk/>
-            <pc:sldMk cId="0" sldId="258"/>
-            <ac:spMk id="93" creationId="{00000000-0000-0000-0000-000000000000}"/>
-          </ac:spMkLst>
-        </pc:spChg>
-        <pc:spChg chg="del mod">
-          <ac:chgData name="Daniel Dan" userId="S::daniel.dan@modul.ac.at::e2a95533-a292-400e-bcf5-c81090ef720f" providerId="AD" clId="Web-{690A8561-0462-61C5-122F-B37E0D33A249}" dt="2022-02-25T17:40:22.956" v="257"/>
-          <ac:spMkLst>
-            <pc:docMk/>
-            <pc:sldMk cId="0" sldId="258"/>
-            <ac:spMk id="94" creationId="{00000000-0000-0000-0000-000000000000}"/>
-          </ac:spMkLst>
-        </pc:spChg>
-      </pc:sldChg>
-      <pc:sldChg chg="addSp delSp modSp">
-        <pc:chgData name="Daniel Dan" userId="S::daniel.dan@modul.ac.at::e2a95533-a292-400e-bcf5-c81090ef720f" providerId="AD" clId="Web-{690A8561-0462-61C5-122F-B37E0D33A249}" dt="2022-02-25T17:47:17.330" v="346" actId="20577"/>
-        <pc:sldMkLst>
-          <pc:docMk/>
-          <pc:sldMk cId="0" sldId="259"/>
-        </pc:sldMkLst>
-        <pc:spChg chg="add mod">
-          <ac:chgData name="Daniel Dan" userId="S::daniel.dan@modul.ac.at::e2a95533-a292-400e-bcf5-c81090ef720f" providerId="AD" clId="Web-{690A8561-0462-61C5-122F-B37E0D33A249}" dt="2022-02-25T17:47:17.330" v="346" actId="20577"/>
-          <ac:spMkLst>
-            <pc:docMk/>
-            <pc:sldMk cId="0" sldId="259"/>
-            <ac:spMk id="2" creationId="{13DC73B7-25F9-40B5-97EA-554C45F92658}"/>
-          </ac:spMkLst>
-        </pc:spChg>
-        <pc:spChg chg="add mod">
-          <ac:chgData name="Daniel Dan" userId="S::daniel.dan@modul.ac.at::e2a95533-a292-400e-bcf5-c81090ef720f" providerId="AD" clId="Web-{690A8561-0462-61C5-122F-B37E0D33A249}" dt="2022-02-25T17:45:55.172" v="331" actId="1076"/>
-          <ac:spMkLst>
-            <pc:docMk/>
-            <pc:sldMk cId="0" sldId="259"/>
-            <ac:spMk id="4" creationId="{B92A72C2-7B1A-4D69-BD9E-0A6D944717BF}"/>
-          </ac:spMkLst>
-        </pc:spChg>
-        <pc:spChg chg="mod">
-          <ac:chgData name="Daniel Dan" userId="S::daniel.dan@modul.ac.at::e2a95533-a292-400e-bcf5-c81090ef720f" providerId="AD" clId="Web-{690A8561-0462-61C5-122F-B37E0D33A249}" dt="2022-02-25T17:42:39.651" v="293" actId="20577"/>
-          <ac:spMkLst>
-            <pc:docMk/>
-            <pc:sldMk cId="0" sldId="259"/>
-            <ac:spMk id="100" creationId="{00000000-0000-0000-0000-000000000000}"/>
-          </ac:spMkLst>
-        </pc:spChg>
-        <pc:spChg chg="del">
-          <ac:chgData name="Daniel Dan" userId="S::daniel.dan@modul.ac.at::e2a95533-a292-400e-bcf5-c81090ef720f" providerId="AD" clId="Web-{690A8561-0462-61C5-122F-B37E0D33A249}" dt="2022-02-25T17:42:42.698" v="294"/>
-          <ac:spMkLst>
-            <pc:docMk/>
-            <pc:sldMk cId="0" sldId="259"/>
-            <ac:spMk id="101" creationId="{00000000-0000-0000-0000-000000000000}"/>
-          </ac:spMkLst>
-        </pc:spChg>
-        <pc:picChg chg="add mod">
-          <ac:chgData name="Daniel Dan" userId="S::daniel.dan@modul.ac.at::e2a95533-a292-400e-bcf5-c81090ef720f" providerId="AD" clId="Web-{690A8561-0462-61C5-122F-B37E0D33A249}" dt="2022-02-25T17:45:04.280" v="313" actId="14100"/>
-          <ac:picMkLst>
-            <pc:docMk/>
-            <pc:sldMk cId="0" sldId="259"/>
-            <ac:picMk id="3" creationId="{6FF03AE6-7DA7-41B3-9B0E-2709BF48736A}"/>
-          </ac:picMkLst>
-        </pc:picChg>
-        <pc:picChg chg="del">
-          <ac:chgData name="Daniel Dan" userId="S::daniel.dan@modul.ac.at::e2a95533-a292-400e-bcf5-c81090ef720f" providerId="AD" clId="Web-{690A8561-0462-61C5-122F-B37E0D33A249}" dt="2022-02-25T17:42:44.401" v="295"/>
-          <ac:picMkLst>
-            <pc:docMk/>
-            <pc:sldMk cId="0" sldId="259"/>
-            <ac:picMk id="102" creationId="{00000000-0000-0000-0000-000000000000}"/>
-          </ac:picMkLst>
-        </pc:picChg>
-      </pc:sldChg>
-      <pc:sldChg chg="addSp delSp modSp">
-        <pc:chgData name="Daniel Dan" userId="S::daniel.dan@modul.ac.at::e2a95533-a292-400e-bcf5-c81090ef720f" providerId="AD" clId="Web-{690A8561-0462-61C5-122F-B37E0D33A249}" dt="2022-02-25T17:47:42.550" v="350" actId="20577"/>
-        <pc:sldMkLst>
-          <pc:docMk/>
-          <pc:sldMk cId="0" sldId="260"/>
-        </pc:sldMkLst>
-        <pc:spChg chg="add mod">
-          <ac:chgData name="Daniel Dan" userId="S::daniel.dan@modul.ac.at::e2a95533-a292-400e-bcf5-c81090ef720f" providerId="AD" clId="Web-{690A8561-0462-61C5-122F-B37E0D33A249}" dt="2022-02-25T17:47:42.550" v="350" actId="20577"/>
-          <ac:spMkLst>
-            <pc:docMk/>
-            <pc:sldMk cId="0" sldId="260"/>
-            <ac:spMk id="2" creationId="{32FF7F9F-5BD7-43AB-9D11-FCEAC2F92173}"/>
-          </ac:spMkLst>
-        </pc:spChg>
-        <pc:spChg chg="mod">
-          <ac:chgData name="Daniel Dan" userId="S::daniel.dan@modul.ac.at::e2a95533-a292-400e-bcf5-c81090ef720f" providerId="AD" clId="Web-{690A8561-0462-61C5-122F-B37E0D33A249}" dt="2022-02-25T17:46:31.313" v="333" actId="20577"/>
-          <ac:spMkLst>
-            <pc:docMk/>
-            <pc:sldMk cId="0" sldId="260"/>
-            <ac:spMk id="108" creationId="{00000000-0000-0000-0000-000000000000}"/>
-          </ac:spMkLst>
-        </pc:spChg>
-        <pc:spChg chg="del mod">
-          <ac:chgData name="Daniel Dan" userId="S::daniel.dan@modul.ac.at::e2a95533-a292-400e-bcf5-c81090ef720f" providerId="AD" clId="Web-{690A8561-0462-61C5-122F-B37E0D33A249}" dt="2022-02-25T17:46:37.986" v="336"/>
-          <ac:spMkLst>
-            <pc:docMk/>
-            <pc:sldMk cId="0" sldId="260"/>
-            <ac:spMk id="109" creationId="{00000000-0000-0000-0000-000000000000}"/>
-          </ac:spMkLst>
-        </pc:spChg>
-      </pc:sldChg>
-      <pc:sldChg chg="addSp delSp modSp">
-        <pc:chgData name="Daniel Dan" userId="S::daniel.dan@modul.ac.at::e2a95533-a292-400e-bcf5-c81090ef720f" providerId="AD" clId="Web-{690A8561-0462-61C5-122F-B37E0D33A249}" dt="2022-02-25T18:00:25.011" v="398" actId="20577"/>
-        <pc:sldMkLst>
-          <pc:docMk/>
-          <pc:sldMk cId="0" sldId="261"/>
-        </pc:sldMkLst>
-        <pc:spChg chg="add mod">
-          <ac:chgData name="Daniel Dan" userId="S::daniel.dan@modul.ac.at::e2a95533-a292-400e-bcf5-c81090ef720f" providerId="AD" clId="Web-{690A8561-0462-61C5-122F-B37E0D33A249}" dt="2022-02-25T17:57:13.850" v="387" actId="20577"/>
-          <ac:spMkLst>
-            <pc:docMk/>
-            <pc:sldMk cId="0" sldId="261"/>
-            <ac:spMk id="2" creationId="{AA3D26AF-68C0-4D87-BDD7-C716EA8FEE9B}"/>
-          </ac:spMkLst>
-        </pc:spChg>
-        <pc:spChg chg="add del mod">
-          <ac:chgData name="Daniel Dan" userId="S::daniel.dan@modul.ac.at::e2a95533-a292-400e-bcf5-c81090ef720f" providerId="AD" clId="Web-{690A8561-0462-61C5-122F-B37E0D33A249}" dt="2022-02-25T18:00:05.198" v="394"/>
-          <ac:spMkLst>
-            <pc:docMk/>
-            <pc:sldMk cId="0" sldId="261"/>
-            <ac:spMk id="4" creationId="{29309802-49C4-4EEF-B1FB-6A6B45A396AF}"/>
-          </ac:spMkLst>
-        </pc:spChg>
-        <pc:spChg chg="add mod">
-          <ac:chgData name="Daniel Dan" userId="S::daniel.dan@modul.ac.at::e2a95533-a292-400e-bcf5-c81090ef720f" providerId="AD" clId="Web-{690A8561-0462-61C5-122F-B37E0D33A249}" dt="2022-02-25T18:00:25.011" v="398" actId="20577"/>
-          <ac:spMkLst>
-            <pc:docMk/>
-            <pc:sldMk cId="0" sldId="261"/>
-            <ac:spMk id="5" creationId="{22FF756C-13B0-4326-B416-4DE81110253F}"/>
-          </ac:spMkLst>
-        </pc:spChg>
-        <pc:spChg chg="mod">
-          <ac:chgData name="Daniel Dan" userId="S::daniel.dan@modul.ac.at::e2a95533-a292-400e-bcf5-c81090ef720f" providerId="AD" clId="Web-{690A8561-0462-61C5-122F-B37E0D33A249}" dt="2022-02-25T17:55:53.332" v="370" actId="20577"/>
-          <ac:spMkLst>
-            <pc:docMk/>
-            <pc:sldMk cId="0" sldId="261"/>
-            <ac:spMk id="115" creationId="{00000000-0000-0000-0000-000000000000}"/>
-          </ac:spMkLst>
-        </pc:spChg>
-        <pc:spChg chg="mod">
-          <ac:chgData name="Daniel Dan" userId="S::daniel.dan@modul.ac.at::e2a95533-a292-400e-bcf5-c81090ef720f" providerId="AD" clId="Web-{690A8561-0462-61C5-122F-B37E0D33A249}" dt="2022-02-25T17:56:12.395" v="373" actId="20577"/>
-          <ac:spMkLst>
-            <pc:docMk/>
-            <pc:sldMk cId="0" sldId="261"/>
-            <ac:spMk id="116" creationId="{00000000-0000-0000-0000-000000000000}"/>
-          </ac:spMkLst>
-        </pc:spChg>
-        <pc:spChg chg="del">
-          <ac:chgData name="Daniel Dan" userId="S::daniel.dan@modul.ac.at::e2a95533-a292-400e-bcf5-c81090ef720f" providerId="AD" clId="Web-{690A8561-0462-61C5-122F-B37E0D33A249}" dt="2022-02-25T17:56:20.739" v="377"/>
-          <ac:spMkLst>
-            <pc:docMk/>
-            <pc:sldMk cId="0" sldId="261"/>
-            <ac:spMk id="117" creationId="{00000000-0000-0000-0000-000000000000}"/>
-          </ac:spMkLst>
-        </pc:spChg>
-        <pc:spChg chg="del">
-          <ac:chgData name="Daniel Dan" userId="S::daniel.dan@modul.ac.at::e2a95533-a292-400e-bcf5-c81090ef720f" providerId="AD" clId="Web-{690A8561-0462-61C5-122F-B37E0D33A249}" dt="2022-02-25T17:56:20.739" v="376"/>
-          <ac:spMkLst>
-            <pc:docMk/>
-            <pc:sldMk cId="0" sldId="261"/>
-            <ac:spMk id="118" creationId="{00000000-0000-0000-0000-000000000000}"/>
-          </ac:spMkLst>
-        </pc:spChg>
-        <pc:spChg chg="del">
-          <ac:chgData name="Daniel Dan" userId="S::daniel.dan@modul.ac.at::e2a95533-a292-400e-bcf5-c81090ef720f" providerId="AD" clId="Web-{690A8561-0462-61C5-122F-B37E0D33A249}" dt="2022-02-25T17:56:39.833" v="378"/>
-          <ac:spMkLst>
-            <pc:docMk/>
-            <pc:sldMk cId="0" sldId="261"/>
-            <ac:spMk id="119" creationId="{00000000-0000-0000-0000-000000000000}"/>
-          </ac:spMkLst>
-        </pc:spChg>
-        <pc:picChg chg="add mod">
-          <ac:chgData name="Daniel Dan" userId="S::daniel.dan@modul.ac.at::e2a95533-a292-400e-bcf5-c81090ef720f" providerId="AD" clId="Web-{690A8561-0462-61C5-122F-B37E0D33A249}" dt="2022-02-25T17:58:50.102" v="390" actId="14100"/>
-          <ac:picMkLst>
-            <pc:docMk/>
-            <pc:sldMk cId="0" sldId="261"/>
-            <ac:picMk id="3" creationId="{4BE485D4-BF09-47D2-A8B4-13ABA91EAB8C}"/>
-          </ac:picMkLst>
-        </pc:picChg>
-        <pc:cxnChg chg="del mod">
-          <ac:chgData name="Daniel Dan" userId="S::daniel.dan@modul.ac.at::e2a95533-a292-400e-bcf5-c81090ef720f" providerId="AD" clId="Web-{690A8561-0462-61C5-122F-B37E0D33A249}" dt="2022-02-25T17:56:20.739" v="375"/>
-          <ac:cxnSpMkLst>
-            <pc:docMk/>
-            <pc:sldMk cId="0" sldId="261"/>
-            <ac:cxnSpMk id="120" creationId="{00000000-0000-0000-0000-000000000000}"/>
-          </ac:cxnSpMkLst>
-        </pc:cxnChg>
-        <pc:cxnChg chg="del mod">
-          <ac:chgData name="Daniel Dan" userId="S::daniel.dan@modul.ac.at::e2a95533-a292-400e-bcf5-c81090ef720f" providerId="AD" clId="Web-{690A8561-0462-61C5-122F-B37E0D33A249}" dt="2022-02-25T17:56:20.739" v="374"/>
-          <ac:cxnSpMkLst>
-            <pc:docMk/>
-            <pc:sldMk cId="0" sldId="261"/>
-            <ac:cxnSpMk id="121" creationId="{00000000-0000-0000-0000-000000000000}"/>
-          </ac:cxnSpMkLst>
-        </pc:cxnChg>
-      </pc:sldChg>
-      <pc:sldChg chg="modSp add replId">
-        <pc:chgData name="Daniel Dan" userId="S::daniel.dan@modul.ac.at::e2a95533-a292-400e-bcf5-c81090ef720f" providerId="AD" clId="Web-{690A8561-0462-61C5-122F-B37E0D33A249}" dt="2022-02-25T17:35:33.085" v="202" actId="20577"/>
-        <pc:sldMkLst>
-          <pc:docMk/>
-          <pc:sldMk cId="862618233" sldId="307"/>
-        </pc:sldMkLst>
-        <pc:spChg chg="mod">
-          <ac:chgData name="Daniel Dan" userId="S::daniel.dan@modul.ac.at::e2a95533-a292-400e-bcf5-c81090ef720f" providerId="AD" clId="Web-{690A8561-0462-61C5-122F-B37E0D33A249}" dt="2022-02-25T17:33:00.638" v="153" actId="20577"/>
-          <ac:spMkLst>
-            <pc:docMk/>
-            <pc:sldMk cId="862618233" sldId="307"/>
-            <ac:spMk id="86" creationId="{00000000-0000-0000-0000-000000000000}"/>
-          </ac:spMkLst>
-        </pc:spChg>
-        <pc:spChg chg="mod">
-          <ac:chgData name="Daniel Dan" userId="S::daniel.dan@modul.ac.at::e2a95533-a292-400e-bcf5-c81090ef720f" providerId="AD" clId="Web-{690A8561-0462-61C5-122F-B37E0D33A249}" dt="2022-02-25T17:35:33.085" v="202" actId="20577"/>
-          <ac:spMkLst>
-            <pc:docMk/>
-            <pc:sldMk cId="862618233" sldId="307"/>
-            <ac:spMk id="87" creationId="{00000000-0000-0000-0000-000000000000}"/>
-          </ac:spMkLst>
-        </pc:spChg>
-      </pc:sldChg>
-      <pc:sldChg chg="addSp delSp modSp add replId">
-        <pc:chgData name="Daniel Dan" userId="S::daniel.dan@modul.ac.at::e2a95533-a292-400e-bcf5-c81090ef720f" providerId="AD" clId="Web-{690A8561-0462-61C5-122F-B37E0D33A249}" dt="2022-02-25T17:54:56.545" v="366" actId="20577"/>
-        <pc:sldMkLst>
-          <pc:docMk/>
-          <pc:sldMk cId="1635341884" sldId="308"/>
-        </pc:sldMkLst>
-        <pc:spChg chg="del mod">
-          <ac:chgData name="Daniel Dan" userId="S::daniel.dan@modul.ac.at::e2a95533-a292-400e-bcf5-c81090ef720f" providerId="AD" clId="Web-{690A8561-0462-61C5-122F-B37E0D33A249}" dt="2022-02-25T17:54:17.091" v="354"/>
-          <ac:spMkLst>
-            <pc:docMk/>
-            <pc:sldMk cId="1635341884" sldId="308"/>
-            <ac:spMk id="2" creationId="{32FF7F9F-5BD7-43AB-9D11-FCEAC2F92173}"/>
-          </ac:spMkLst>
-        </pc:spChg>
-        <pc:spChg chg="add mod">
-          <ac:chgData name="Daniel Dan" userId="S::daniel.dan@modul.ac.at::e2a95533-a292-400e-bcf5-c81090ef720f" providerId="AD" clId="Web-{690A8561-0462-61C5-122F-B37E0D33A249}" dt="2022-02-25T17:54:56.545" v="366" actId="20577"/>
-          <ac:spMkLst>
-            <pc:docMk/>
-            <pc:sldMk cId="1635341884" sldId="308"/>
-            <ac:spMk id="4" creationId="{7BC43673-A9E5-465D-B16A-6019983F8373}"/>
-          </ac:spMkLst>
-        </pc:spChg>
-        <pc:picChg chg="add mod">
-          <ac:chgData name="Daniel Dan" userId="S::daniel.dan@modul.ac.at::e2a95533-a292-400e-bcf5-c81090ef720f" providerId="AD" clId="Web-{690A8561-0462-61C5-122F-B37E0D33A249}" dt="2022-02-25T17:54:32.216" v="358" actId="1076"/>
-          <ac:picMkLst>
-            <pc:docMk/>
-            <pc:sldMk cId="1635341884" sldId="308"/>
-            <ac:picMk id="3" creationId="{7F2C4DF4-3636-442D-8BA9-40DC8304D35B}"/>
-          </ac:picMkLst>
-        </pc:picChg>
-      </pc:sldChg>
-      <pc:sldChg chg="add replId">
-        <pc:chgData name="Daniel Dan" userId="S::daniel.dan@modul.ac.at::e2a95533-a292-400e-bcf5-c81090ef720f" providerId="AD" clId="Web-{690A8561-0462-61C5-122F-B37E0D33A249}" dt="2022-02-25T17:56:05.645" v="371"/>
-        <pc:sldMkLst>
-          <pc:docMk/>
-          <pc:sldMk cId="808992841" sldId="309"/>
-        </pc:sldMkLst>
-      </pc:sldChg>
-    </pc:docChg>
-  </pc:docChgLst>
-  <pc:docChgLst>
-    <pc:chgData name="Daniel Dan" userId="S::daniel.dan@modul.ac.at::e2a95533-a292-400e-bcf5-c81090ef720f" providerId="AD" clId="Web-{6650C529-5FF6-DF91-408E-CA6877BEA450}"/>
-    <pc:docChg chg="modSld">
-      <pc:chgData name="Daniel Dan" userId="S::daniel.dan@modul.ac.at::e2a95533-a292-400e-bcf5-c81090ef720f" providerId="AD" clId="Web-{6650C529-5FF6-DF91-408E-CA6877BEA450}" dt="2022-02-28T12:12:33.858" v="9" actId="20577"/>
-      <pc:docMkLst>
-        <pc:docMk/>
-      </pc:docMkLst>
-      <pc:sldChg chg="modSp">
-        <pc:chgData name="Daniel Dan" userId="S::daniel.dan@modul.ac.at::e2a95533-a292-400e-bcf5-c81090ef720f" providerId="AD" clId="Web-{6650C529-5FF6-DF91-408E-CA6877BEA450}" dt="2022-02-28T12:12:33.858" v="9" actId="20577"/>
-        <pc:sldMkLst>
-          <pc:docMk/>
-          <pc:sldMk cId="0" sldId="305"/>
-        </pc:sldMkLst>
-        <pc:spChg chg="mod">
-          <ac:chgData name="Daniel Dan" userId="S::daniel.dan@modul.ac.at::e2a95533-a292-400e-bcf5-c81090ef720f" providerId="AD" clId="Web-{6650C529-5FF6-DF91-408E-CA6877BEA450}" dt="2022-02-28T12:12:33.858" v="9" actId="20577"/>
-          <ac:spMkLst>
-            <pc:docMk/>
-            <pc:sldMk cId="0" sldId="305"/>
-            <ac:spMk id="438" creationId="{00000000-0000-0000-0000-000000000000}"/>
+            <pc:sldMk cId="3966810098" sldId="535"/>
+            <ac:spMk id="8" creationId="{21A8D102-1C16-49D0-9B80-8EAB675A9A7B}"/>
           </ac:spMkLst>
         </pc:spChg>
       </pc:sldChg>
@@ -15143,7 +13086,7 @@
                   <a:schemeClr val="bg1"/>
                 </a:solidFill>
               </a:rPr>
-              <a:t>‹Nr.›</a:t>
+              <a:t>‹#›</a:t>
             </a:fld>
             <a:r>
               <a:rPr lang="de-AT" dirty="0">
@@ -18956,20 +16899,12 @@
               <a:buChar char="v"/>
             </a:pPr>
             <a:r>
-              <a:rPr lang="de-AT" sz="1800" dirty="0" err="1">
+              <a:rPr lang="de-AT" sz="1800" dirty="0">
                 <a:latin typeface="Calibri" panose="020F0502020204030204" pitchFamily="34" charset="0"/>
                 <a:ea typeface="Calibri" panose="020F0502020204030204" pitchFamily="34" charset="0"/>
                 <a:cs typeface="Calibri" panose="020F0502020204030204" pitchFamily="34" charset="0"/>
               </a:rPr>
-              <a:t>Avarage</a:t>
-            </a:r>
-            <a:r>
-              <a:rPr lang="de-AT" sz="1800" dirty="0">
-                <a:latin typeface="Calibri" panose="020F0502020204030204" pitchFamily="34" charset="0"/>
-                <a:ea typeface="Calibri" panose="020F0502020204030204" pitchFamily="34" charset="0"/>
-                <a:cs typeface="Calibri" panose="020F0502020204030204" pitchFamily="34" charset="0"/>
-              </a:rPr>
-              <a:t>: 	</a:t>
+              <a:t>Average: 	</a:t>
             </a:r>
             <a:r>
               <a:rPr lang="de-AT" sz="1800" dirty="0" err="1">
@@ -20261,12 +18196,20 @@
               <a:buChar char="v"/>
             </a:pPr>
             <a:r>
+              <a:rPr lang="de-DE" sz="1800" dirty="0" err="1">
+                <a:latin typeface="Calibri" panose="020F0502020204030204" pitchFamily="34" charset="0"/>
+                <a:ea typeface="Cambria Math" panose="02040503050406030204" pitchFamily="18" charset="0"/>
+                <a:cs typeface="Calibri" panose="020F0502020204030204" pitchFamily="34" charset="0"/>
+              </a:rPr>
+              <a:t>Less</a:t>
+            </a:r>
+            <a:r>
               <a:rPr lang="de-DE" sz="1800" dirty="0">
                 <a:latin typeface="Calibri" panose="020F0502020204030204" pitchFamily="34" charset="0"/>
                 <a:ea typeface="Cambria Math" panose="02040503050406030204" pitchFamily="18" charset="0"/>
                 <a:cs typeface="Calibri" panose="020F0502020204030204" pitchFamily="34" charset="0"/>
               </a:rPr>
-              <a:t>Small internal </a:t>
+              <a:t> internal </a:t>
             </a:r>
             <a:r>
               <a:rPr lang="de-DE" sz="1800" dirty="0" err="1">
@@ -20276,11 +18219,78 @@
               </a:rPr>
               <a:t>overhead</a:t>
             </a:r>
-            <a:endParaRPr lang="de-DE" sz="1800" dirty="0">
-              <a:latin typeface="Calibri" panose="020F0502020204030204" pitchFamily="34" charset="0"/>
-              <a:ea typeface="Cambria Math" panose="02040503050406030204" pitchFamily="18" charset="0"/>
-              <a:cs typeface="Calibri" panose="020F0502020204030204" pitchFamily="34" charset="0"/>
-            </a:endParaRPr>
+            <a:r>
+              <a:rPr lang="de-DE" sz="1800" dirty="0">
+                <a:latin typeface="Calibri" panose="020F0502020204030204" pitchFamily="34" charset="0"/>
+                <a:ea typeface="Cambria Math" panose="02040503050406030204" pitchFamily="18" charset="0"/>
+                <a:cs typeface="Calibri" panose="020F0502020204030204" pitchFamily="34" charset="0"/>
+              </a:rPr>
+              <a:t> </a:t>
+            </a:r>
+            <a:r>
+              <a:rPr lang="de-DE" sz="1800" dirty="0" err="1">
+                <a:latin typeface="Calibri" panose="020F0502020204030204" pitchFamily="34" charset="0"/>
+                <a:ea typeface="Cambria Math" panose="02040503050406030204" pitchFamily="18" charset="0"/>
+                <a:cs typeface="Calibri" panose="020F0502020204030204" pitchFamily="34" charset="0"/>
+              </a:rPr>
+              <a:t>than</a:t>
+            </a:r>
+            <a:r>
+              <a:rPr lang="de-DE" sz="1800" dirty="0">
+                <a:latin typeface="Calibri" panose="020F0502020204030204" pitchFamily="34" charset="0"/>
+                <a:ea typeface="Cambria Math" panose="02040503050406030204" pitchFamily="18" charset="0"/>
+                <a:cs typeface="Calibri" panose="020F0502020204030204" pitchFamily="34" charset="0"/>
+              </a:rPr>
+              <a:t> </a:t>
+            </a:r>
+            <a:r>
+              <a:rPr lang="de-DE" sz="1800" dirty="0" err="1">
+                <a:latin typeface="Calibri" panose="020F0502020204030204" pitchFamily="34" charset="0"/>
+                <a:ea typeface="Cambria Math" panose="02040503050406030204" pitchFamily="18" charset="0"/>
+                <a:cs typeface="Calibri" panose="020F0502020204030204" pitchFamily="34" charset="0"/>
+              </a:rPr>
+              <a:t>lists</a:t>
+            </a:r>
+            <a:r>
+              <a:rPr lang="de-DE" sz="1800" dirty="0">
+                <a:latin typeface="Calibri" panose="020F0502020204030204" pitchFamily="34" charset="0"/>
+                <a:ea typeface="Cambria Math" panose="02040503050406030204" pitchFamily="18" charset="0"/>
+                <a:cs typeface="Calibri" panose="020F0502020204030204" pitchFamily="34" charset="0"/>
+              </a:rPr>
+              <a:t> (due </a:t>
+            </a:r>
+            <a:r>
+              <a:rPr lang="de-DE" sz="1800" dirty="0" err="1">
+                <a:latin typeface="Calibri" panose="020F0502020204030204" pitchFamily="34" charset="0"/>
+                <a:ea typeface="Cambria Math" panose="02040503050406030204" pitchFamily="18" charset="0"/>
+                <a:cs typeface="Calibri" panose="020F0502020204030204" pitchFamily="34" charset="0"/>
+              </a:rPr>
+              <a:t>to</a:t>
+            </a:r>
+            <a:r>
+              <a:rPr lang="de-DE" sz="1800" dirty="0">
+                <a:latin typeface="Calibri" panose="020F0502020204030204" pitchFamily="34" charset="0"/>
+                <a:ea typeface="Cambria Math" panose="02040503050406030204" pitchFamily="18" charset="0"/>
+                <a:cs typeface="Calibri" panose="020F0502020204030204" pitchFamily="34" charset="0"/>
+              </a:rPr>
+              <a:t> </a:t>
+            </a:r>
+            <a:r>
+              <a:rPr lang="de-DE" sz="1800" dirty="0" err="1">
+                <a:latin typeface="Calibri" panose="020F0502020204030204" pitchFamily="34" charset="0"/>
+                <a:ea typeface="Cambria Math" panose="02040503050406030204" pitchFamily="18" charset="0"/>
+                <a:cs typeface="Calibri" panose="020F0502020204030204" pitchFamily="34" charset="0"/>
+              </a:rPr>
+              <a:t>immutablility</a:t>
+            </a:r>
+            <a:r>
+              <a:rPr lang="de-DE" sz="1800" dirty="0">
+                <a:latin typeface="Calibri" panose="020F0502020204030204" pitchFamily="34" charset="0"/>
+                <a:ea typeface="Cambria Math" panose="02040503050406030204" pitchFamily="18" charset="0"/>
+                <a:cs typeface="Calibri" panose="020F0502020204030204" pitchFamily="34" charset="0"/>
+              </a:rPr>
+              <a:t>)</a:t>
+            </a:r>
           </a:p>
           <a:p>
             <a:pPr marL="285750" indent="-285750">
@@ -20384,6 +18394,76 @@
             </a:endParaRPr>
           </a:p>
           <a:p>
+            <a:pPr marL="742950" lvl="1" indent="-285750">
+              <a:spcBef>
+                <a:spcPts val="640"/>
+              </a:spcBef>
+              <a:buFont typeface="Wingdings" panose="05000000000000000000" pitchFamily="2" charset="2"/>
+              <a:buChar char="v"/>
+            </a:pPr>
+            <a:r>
+              <a:rPr lang="de-DE" sz="1800" dirty="0" err="1">
+                <a:latin typeface="Calibri" panose="020F0502020204030204" pitchFamily="34" charset="0"/>
+                <a:ea typeface="Cambria Math" panose="02040503050406030204" pitchFamily="18" charset="0"/>
+                <a:cs typeface="Calibri" panose="020F0502020204030204" pitchFamily="34" charset="0"/>
+              </a:rPr>
+              <a:t>When</a:t>
+            </a:r>
+            <a:r>
+              <a:rPr lang="de-DE" sz="1800" dirty="0">
+                <a:latin typeface="Calibri" panose="020F0502020204030204" pitchFamily="34" charset="0"/>
+                <a:ea typeface="Cambria Math" panose="02040503050406030204" pitchFamily="18" charset="0"/>
+                <a:cs typeface="Calibri" panose="020F0502020204030204" pitchFamily="34" charset="0"/>
+              </a:rPr>
+              <a:t> </a:t>
+            </a:r>
+            <a:r>
+              <a:rPr lang="de-DE" sz="1800" dirty="0" err="1">
+                <a:latin typeface="Calibri" panose="020F0502020204030204" pitchFamily="34" charset="0"/>
+                <a:ea typeface="Cambria Math" panose="02040503050406030204" pitchFamily="18" charset="0"/>
+                <a:cs typeface="Calibri" panose="020F0502020204030204" pitchFamily="34" charset="0"/>
+              </a:rPr>
+              <a:t>data</a:t>
+            </a:r>
+            <a:r>
+              <a:rPr lang="de-DE" sz="1800" dirty="0">
+                <a:latin typeface="Calibri" panose="020F0502020204030204" pitchFamily="34" charset="0"/>
+                <a:ea typeface="Cambria Math" panose="02040503050406030204" pitchFamily="18" charset="0"/>
+                <a:cs typeface="Calibri" panose="020F0502020204030204" pitchFamily="34" charset="0"/>
+              </a:rPr>
+              <a:t> </a:t>
+            </a:r>
+            <a:r>
+              <a:rPr lang="de-DE" sz="1800" dirty="0" err="1">
+                <a:latin typeface="Calibri" panose="020F0502020204030204" pitchFamily="34" charset="0"/>
+                <a:ea typeface="Cambria Math" panose="02040503050406030204" pitchFamily="18" charset="0"/>
+                <a:cs typeface="Calibri" panose="020F0502020204030204" pitchFamily="34" charset="0"/>
+              </a:rPr>
+              <a:t>stays</a:t>
+            </a:r>
+            <a:r>
+              <a:rPr lang="de-DE" sz="1800" dirty="0">
+                <a:latin typeface="Calibri" panose="020F0502020204030204" pitchFamily="34" charset="0"/>
+                <a:ea typeface="Cambria Math" panose="02040503050406030204" pitchFamily="18" charset="0"/>
+                <a:cs typeface="Calibri" panose="020F0502020204030204" pitchFamily="34" charset="0"/>
+              </a:rPr>
+              <a:t> </a:t>
+            </a:r>
+            <a:r>
+              <a:rPr lang="de-DE" sz="1800" dirty="0" err="1">
+                <a:latin typeface="Calibri" panose="020F0502020204030204" pitchFamily="34" charset="0"/>
+                <a:ea typeface="Cambria Math" panose="02040503050406030204" pitchFamily="18" charset="0"/>
+                <a:cs typeface="Calibri" panose="020F0502020204030204" pitchFamily="34" charset="0"/>
+              </a:rPr>
+              <a:t>constant</a:t>
+            </a:r>
+            <a:endParaRPr lang="de-DE" sz="1800" dirty="0">
+              <a:latin typeface="Calibri" panose="020F0502020204030204" pitchFamily="34" charset="0"/>
+              <a:ea typeface="Cambria Math" panose="02040503050406030204" pitchFamily="18" charset="0"/>
+              <a:cs typeface="Calibri" panose="020F0502020204030204" pitchFamily="34" charset="0"/>
+            </a:endParaRPr>
+          </a:p>
+          <a:p>
             <a:pPr marL="285750" indent="-285750">
               <a:spcBef>
                 <a:spcPts val="640"/>
@@ -20427,24 +18507,25 @@
                 <a:latin typeface="Calibri" panose="020F0502020204030204" pitchFamily="34" charset="0"/>
                 <a:ea typeface="Calibri" panose="020F0502020204030204" pitchFamily="34" charset="0"/>
                 <a:cs typeface="Calibri" panose="020F0502020204030204" pitchFamily="34" charset="0"/>
-                <a:hlinkClick r:id="rId3"/>
-              </a:rPr>
-              <a:t>Notebook </a:t>
+              </a:rPr>
+              <a:t>See unit5.ipynb </a:t>
             </a:r>
             <a:r>
               <a:rPr lang="de-DE" sz="1800" dirty="0" err="1">
                 <a:latin typeface="Calibri" panose="020F0502020204030204" pitchFamily="34" charset="0"/>
                 <a:ea typeface="Calibri" panose="020F0502020204030204" pitchFamily="34" charset="0"/>
                 <a:cs typeface="Calibri" panose="020F0502020204030204" pitchFamily="34" charset="0"/>
-                <a:hlinkClick r:id="rId3"/>
-              </a:rPr>
-              <a:t>examples</a:t>
-            </a:r>
-            <a:endParaRPr lang="de-DE" sz="1800" dirty="0">
-              <a:latin typeface="Calibri" panose="020F0502020204030204" pitchFamily="34" charset="0"/>
-              <a:ea typeface="Calibri" panose="020F0502020204030204" pitchFamily="34" charset="0"/>
-              <a:cs typeface="Calibri" panose="020F0502020204030204" pitchFamily="34" charset="0"/>
-            </a:endParaRPr>
+              </a:rPr>
+              <a:t>notebook</a:t>
+            </a:r>
+            <a:r>
+              <a:rPr lang="de-DE" sz="1800" dirty="0">
+                <a:latin typeface="Calibri" panose="020F0502020204030204" pitchFamily="34" charset="0"/>
+                <a:ea typeface="Calibri" panose="020F0502020204030204" pitchFamily="34" charset="0"/>
+                <a:cs typeface="Calibri" panose="020F0502020204030204" pitchFamily="34" charset="0"/>
+              </a:rPr>
+              <a:t>!</a:t>
+            </a:r>
           </a:p>
         </p:txBody>
       </p:sp>
@@ -22459,6 +20540,13 @@
           </a:effectRef>
           <a:fontRef idx="minor"/>
         </p:style>
+        <p:txBody>
+          <a:bodyPr/>
+          <a:lstStyle/>
+          <a:p>
+            <a:endParaRPr lang="en-AT"/>
+          </a:p>
+        </p:txBody>
       </p:sp>
       <p:sp>
         <p:nvSpPr>
@@ -22500,6 +20588,13 @@
           </a:effectRef>
           <a:fontRef idx="minor"/>
         </p:style>
+        <p:txBody>
+          <a:bodyPr/>
+          <a:lstStyle/>
+          <a:p>
+            <a:endParaRPr lang="en-AT"/>
+          </a:p>
+        </p:txBody>
       </p:sp>
       <p:sp>
         <p:nvSpPr>
@@ -22541,6 +20636,13 @@
           </a:effectRef>
           <a:fontRef idx="minor"/>
         </p:style>
+        <p:txBody>
+          <a:bodyPr/>
+          <a:lstStyle/>
+          <a:p>
+            <a:endParaRPr lang="en-AT"/>
+          </a:p>
+        </p:txBody>
       </p:sp>
       <p:sp>
         <p:nvSpPr>
@@ -22582,6 +20684,13 @@
           </a:effectRef>
           <a:fontRef idx="minor"/>
         </p:style>
+        <p:txBody>
+          <a:bodyPr/>
+          <a:lstStyle/>
+          <a:p>
+            <a:endParaRPr lang="en-AT"/>
+          </a:p>
+        </p:txBody>
       </p:sp>
       <p:sp>
         <p:nvSpPr>
@@ -22623,6 +20732,13 @@
           </a:effectRef>
           <a:fontRef idx="minor"/>
         </p:style>
+        <p:txBody>
+          <a:bodyPr/>
+          <a:lstStyle/>
+          <a:p>
+            <a:endParaRPr lang="en-AT"/>
+          </a:p>
+        </p:txBody>
       </p:sp>
       <p:sp>
         <p:nvSpPr>
@@ -22664,6 +20780,13 @@
           </a:effectRef>
           <a:fontRef idx="minor"/>
         </p:style>
+        <p:txBody>
+          <a:bodyPr/>
+          <a:lstStyle/>
+          <a:p>
+            <a:endParaRPr lang="en-AT"/>
+          </a:p>
+        </p:txBody>
       </p:sp>
     </p:spTree>
     <p:extLst>
@@ -24697,18 +22820,16 @@
                 <a:latin typeface="Calibri" panose="020F0502020204030204" pitchFamily="34" charset="0"/>
                 <a:ea typeface="Calibri" panose="020F0502020204030204" pitchFamily="34" charset="0"/>
                 <a:cs typeface="Calibri" panose="020F0502020204030204" pitchFamily="34" charset="0"/>
-                <a:hlinkClick r:id="rId3"/>
-              </a:rPr>
-              <a:t>Notebook </a:t>
+              </a:rPr>
+              <a:t>See unit5.ipynb </a:t>
             </a:r>
             <a:r>
               <a:rPr lang="de-DE" sz="1800" dirty="0" err="1">
                 <a:latin typeface="Calibri" panose="020F0502020204030204" pitchFamily="34" charset="0"/>
                 <a:ea typeface="Calibri" panose="020F0502020204030204" pitchFamily="34" charset="0"/>
                 <a:cs typeface="Calibri" panose="020F0502020204030204" pitchFamily="34" charset="0"/>
-                <a:hlinkClick r:id="rId3"/>
-              </a:rPr>
-              <a:t>examples</a:t>
+              </a:rPr>
+              <a:t>notebook</a:t>
             </a:r>
             <a:endParaRPr lang="de-DE" sz="1800" dirty="0">
               <a:latin typeface="Calibri" panose="020F0502020204030204" pitchFamily="34" charset="0"/>
@@ -27660,18 +25781,16 @@
                 <a:latin typeface="Calibri" panose="020F0502020204030204" pitchFamily="34" charset="0"/>
                 <a:ea typeface="Calibri" panose="020F0502020204030204" pitchFamily="34" charset="0"/>
                 <a:cs typeface="Calibri" panose="020F0502020204030204" pitchFamily="34" charset="0"/>
-                <a:hlinkClick r:id="rId3"/>
-              </a:rPr>
-              <a:t>Notebook </a:t>
+              </a:rPr>
+              <a:t>See unit5.ipynb </a:t>
             </a:r>
             <a:r>
               <a:rPr lang="de-DE" sz="1800" dirty="0" err="1">
                 <a:latin typeface="Calibri" panose="020F0502020204030204" pitchFamily="34" charset="0"/>
                 <a:ea typeface="Calibri" panose="020F0502020204030204" pitchFamily="34" charset="0"/>
                 <a:cs typeface="Calibri" panose="020F0502020204030204" pitchFamily="34" charset="0"/>
-                <a:hlinkClick r:id="rId3"/>
-              </a:rPr>
-              <a:t>examples</a:t>
+              </a:rPr>
+              <a:t>notebook</a:t>
             </a:r>
             <a:endParaRPr lang="de-DE" sz="1800" dirty="0">
               <a:latin typeface="Calibri" panose="020F0502020204030204" pitchFamily="34" charset="0"/>
@@ -29013,15 +27132,9 @@
                 <a:latin typeface="Calibri" panose="020F0502020204030204" pitchFamily="34" charset="0"/>
                 <a:ea typeface="Calibri" panose="020F0502020204030204" pitchFamily="34" charset="0"/>
                 <a:cs typeface="Calibri" panose="020F0502020204030204" pitchFamily="34" charset="0"/>
-                <a:hlinkClick r:id="rId3"/>
-              </a:rPr>
-              <a:t>Notebook examples</a:t>
-            </a:r>
-            <a:endParaRPr lang="en-US" sz="1800" dirty="0">
-              <a:latin typeface="Calibri" panose="020F0502020204030204" pitchFamily="34" charset="0"/>
-              <a:ea typeface="Calibri" panose="020F0502020204030204" pitchFamily="34" charset="0"/>
-              <a:cs typeface="Calibri" panose="020F0502020204030204" pitchFamily="34" charset="0"/>
-            </a:endParaRPr>
+              </a:rPr>
+              <a:t>See unit5.ipynb notebook</a:t>
+            </a:r>
           </a:p>
         </p:txBody>
       </p:sp>
@@ -30400,7 +28513,7 @@
                 <a:ea typeface="Cambria Math" panose="02040503050406030204" pitchFamily="18" charset="0"/>
                 <a:cs typeface="Calibri" panose="020F0502020204030204" pitchFamily="34" charset="0"/>
               </a:rPr>
-              <a:t> and index – 0 based !</a:t>
+              <a:t> and index – 0 based!</a:t>
             </a:r>
           </a:p>
           <a:p>
@@ -30439,6 +28552,36 @@
               </a:rPr>
               <a:t>Reverse indexing: negative index (-1 is the index of the last element)</a:t>
             </a:r>
+          </a:p>
+          <a:p>
+            <a:pPr marL="285750" indent="-285750">
+              <a:spcBef>
+                <a:spcPts val="640"/>
+              </a:spcBef>
+              <a:buFont typeface="Wingdings" panose="05000000000000000000" pitchFamily="2" charset="2"/>
+              <a:buChar char="v"/>
+            </a:pPr>
+            <a:r>
+              <a:rPr lang="de-DE" sz="1800" dirty="0">
+                <a:latin typeface="Calibri" panose="020F0502020204030204" pitchFamily="34" charset="0"/>
+                <a:ea typeface="Calibri" panose="020F0502020204030204" pitchFamily="34" charset="0"/>
+                <a:cs typeface="Calibri" panose="020F0502020204030204" pitchFamily="34" charset="0"/>
+              </a:rPr>
+              <a:t>See unit5.ipynb </a:t>
+            </a:r>
+            <a:r>
+              <a:rPr lang="de-DE" sz="1800" dirty="0" err="1">
+                <a:latin typeface="Calibri" panose="020F0502020204030204" pitchFamily="34" charset="0"/>
+                <a:ea typeface="Calibri" panose="020F0502020204030204" pitchFamily="34" charset="0"/>
+                <a:cs typeface="Calibri" panose="020F0502020204030204" pitchFamily="34" charset="0"/>
+              </a:rPr>
+              <a:t>notebook</a:t>
+            </a:r>
+            <a:endParaRPr lang="en-US" sz="1800" dirty="0">
+              <a:latin typeface="Calibri" panose="020F0502020204030204" pitchFamily="34" charset="0"/>
+              <a:ea typeface="Cambria Math" panose="02040503050406030204" pitchFamily="18" charset="0"/>
+              <a:cs typeface="Calibri" panose="020F0502020204030204" pitchFamily="34" charset="0"/>
+            </a:endParaRPr>
           </a:p>
           <a:p>
             <a:pPr marL="0" indent="0">
@@ -32523,8 +30666,8 @@
           </a:p>
         </p:txBody>
       </p:sp>
-      <mc:AlternateContent xmlns:mc="http://schemas.openxmlformats.org/markup-compatibility/2006" xmlns:a14="http://schemas.microsoft.com/office/drawing/2010/main">
-        <mc:Choice Requires="a14">
+      <mc:AlternateContent xmlns:mc="http://schemas.openxmlformats.org/markup-compatibility/2006">
+        <mc:Choice xmlns:a14="http://schemas.microsoft.com/office/drawing/2010/main" Requires="a14">
           <p:sp>
             <p:nvSpPr>
               <p:cNvPr id="8" name="Google Shape;87;p2">
@@ -33797,7 +31940,7 @@
                   <a:t> </a:t>
                 </a:r>
                 <a:r>
-                  <a:rPr lang="de-AT" sz="1800" dirty="0" err="1">
+                  <a:rPr lang="de-AT" sz="1800" b="1" dirty="0" err="1">
                     <a:latin typeface="Calibri" panose="020F0502020204030204" pitchFamily="34" charset="0"/>
                     <a:ea typeface="Calibri" panose="020F0502020204030204" pitchFamily="34" charset="0"/>
                     <a:cs typeface="Calibri" panose="020F0502020204030204" pitchFamily="34" charset="0"/>
@@ -33805,7 +31948,7 @@
                   <a:t>gradient</a:t>
                 </a:r>
                 <a:r>
-                  <a:rPr lang="de-AT" sz="1800" dirty="0">
+                  <a:rPr lang="de-AT" sz="1800" b="1" dirty="0">
                     <a:latin typeface="Calibri" panose="020F0502020204030204" pitchFamily="34" charset="0"/>
                     <a:ea typeface="Calibri" panose="020F0502020204030204" pitchFamily="34" charset="0"/>
                     <a:cs typeface="Calibri" panose="020F0502020204030204" pitchFamily="34" charset="0"/>
@@ -33813,7 +31956,7 @@
                   <a:t> </a:t>
                 </a:r>
                 <a:r>
-                  <a:rPr lang="de-AT" sz="1800" dirty="0" err="1">
+                  <a:rPr lang="de-AT" sz="1800" b="1" dirty="0" err="1">
                     <a:latin typeface="Calibri" panose="020F0502020204030204" pitchFamily="34" charset="0"/>
                     <a:ea typeface="Calibri" panose="020F0502020204030204" pitchFamily="34" charset="0"/>
                     <a:cs typeface="Calibri" panose="020F0502020204030204" pitchFamily="34" charset="0"/>
@@ -33821,7 +31964,7 @@
                   <a:t>descent</a:t>
                 </a:r>
                 <a:r>
-                  <a:rPr lang="de-AT" sz="1800" dirty="0">
+                  <a:rPr lang="de-AT" sz="1800" b="1" dirty="0">
                     <a:latin typeface="Calibri" panose="020F0502020204030204" pitchFamily="34" charset="0"/>
                     <a:ea typeface="Calibri" panose="020F0502020204030204" pitchFamily="34" charset="0"/>
                     <a:cs typeface="Calibri" panose="020F0502020204030204" pitchFamily="34" charset="0"/>
@@ -33877,7 +32020,7 @@
             </p:txBody>
           </p:sp>
         </mc:Choice>
-        <mc:Fallback xmlns="">
+        <mc:Fallback>
           <p:sp>
             <p:nvSpPr>
               <p:cNvPr id="8" name="Google Shape;87;p2">
@@ -33905,7 +32048,7 @@
               <a:blipFill>
                 <a:blip r:embed="rId3"/>
                 <a:stretch>
-                  <a:fillRect l="-148"/>
+                  <a:fillRect l="-154" b="-4950"/>
                 </a:stretch>
               </a:blipFill>
               <a:ln>
@@ -33917,7 +32060,7 @@
               <a:lstStyle/>
               <a:p>
                 <a:r>
-                  <a:rPr lang="de-AT">
+                  <a:rPr lang="en-AT">
                     <a:noFill/>
                   </a:rPr>
                   <a:t> </a:t>
@@ -36819,8 +34962,8 @@
           </a:p>
         </p:txBody>
       </p:sp>
-      <mc:AlternateContent xmlns:mc="http://schemas.openxmlformats.org/markup-compatibility/2006" xmlns:a14="http://schemas.microsoft.com/office/drawing/2010/main">
-        <mc:Choice Requires="a14">
+      <mc:AlternateContent xmlns:mc="http://schemas.openxmlformats.org/markup-compatibility/2006">
+        <mc:Choice xmlns:a14="http://schemas.microsoft.com/office/drawing/2010/main" Requires="a14">
           <p:sp>
             <p:nvSpPr>
               <p:cNvPr id="8" name="Google Shape;87;p2">
@@ -38704,22 +36847,20 @@
                   <a:buChar char="v"/>
                 </a:pPr>
                 <a:r>
-                  <a:rPr lang="de-AT" sz="1800" b="0" dirty="0">
+                  <a:rPr lang="de-AT" sz="1800" dirty="0">
                     <a:latin typeface="Calibri" panose="020F0502020204030204" pitchFamily="34" charset="0"/>
                     <a:ea typeface="Calibri" panose="020F0502020204030204" pitchFamily="34" charset="0"/>
                     <a:cs typeface="Calibri" panose="020F0502020204030204" pitchFamily="34" charset="0"/>
-                    <a:hlinkClick r:id="rId3"/>
                   </a:rPr>
-                  <a:t>Notebook </a:t>
+                  <a:t>See unit5.ipynb </a:t>
                 </a:r>
                 <a:r>
-                  <a:rPr lang="de-AT" sz="1800" b="0" dirty="0" err="1">
+                  <a:rPr lang="de-AT" sz="1800" dirty="0" err="1">
                     <a:latin typeface="Calibri" panose="020F0502020204030204" pitchFamily="34" charset="0"/>
                     <a:ea typeface="Calibri" panose="020F0502020204030204" pitchFamily="34" charset="0"/>
                     <a:cs typeface="Calibri" panose="020F0502020204030204" pitchFamily="34" charset="0"/>
-                    <a:hlinkClick r:id="rId3"/>
                   </a:rPr>
-                  <a:t>example</a:t>
+                  <a:t>notebook</a:t>
                 </a:r>
                 <a:endParaRPr lang="de-AT" sz="1800" b="0" dirty="0">
                   <a:latin typeface="Calibri" panose="020F0502020204030204" pitchFamily="34" charset="0"/>
@@ -38730,7 +36871,7 @@
             </p:txBody>
           </p:sp>
         </mc:Choice>
-        <mc:Fallback xmlns="">
+        <mc:Fallback>
           <p:sp>
             <p:nvSpPr>
               <p:cNvPr id="8" name="Google Shape;87;p2">
@@ -38756,9 +36897,9 @@
                 <a:avLst/>
               </a:prstGeom>
               <a:blipFill>
-                <a:blip r:embed="rId4"/>
+                <a:blip r:embed="rId3"/>
                 <a:stretch>
-                  <a:fillRect l="-148" b="-1637"/>
+                  <a:fillRect l="-154" t="-2550" b="-1416"/>
                 </a:stretch>
               </a:blipFill>
               <a:ln>
@@ -38770,7 +36911,7 @@
               <a:lstStyle/>
               <a:p>
                 <a:r>
-                  <a:rPr lang="de-AT">
+                  <a:rPr lang="en-AT">
                     <a:noFill/>
                   </a:rPr>
                   <a:t> </a:t>
@@ -39125,7 +37266,7 @@
                 <a:ea typeface="Cambria Math" panose="02040503050406030204" pitchFamily="18" charset="0"/>
                 <a:cs typeface="Calibri" panose="020F0502020204030204" pitchFamily="34" charset="0"/>
               </a:rPr>
-              <a:t>assinging</a:t>
+              <a:t>assigning</a:t>
             </a:r>
             <a:r>
               <a:rPr lang="de-DE" sz="1800" dirty="0">
@@ -40218,8 +38359,8 @@
           </a:p>
         </p:txBody>
       </p:sp>
-      <mc:AlternateContent xmlns:mc="http://schemas.openxmlformats.org/markup-compatibility/2006">
-        <mc:Choice xmlns:a14="http://schemas.microsoft.com/office/drawing/2010/main" Requires="a14">
+      <mc:AlternateContent xmlns:mc="http://schemas.openxmlformats.org/markup-compatibility/2006" xmlns:a14="http://schemas.microsoft.com/office/drawing/2010/main">
+        <mc:Choice Requires="a14">
           <p:sp>
             <p:nvSpPr>
               <p:cNvPr id="4" name="Textfeld 2">
@@ -40628,7 +38769,7 @@
             </p:txBody>
           </p:sp>
         </mc:Choice>
-        <mc:Fallback>
+        <mc:Fallback xmlns="">
           <p:sp>
             <p:nvSpPr>
               <p:cNvPr id="4" name="Textfeld 2">
@@ -42550,7 +40691,7 @@
                 <a:ea typeface="Cambria Math" panose="02040503050406030204" pitchFamily="18" charset="0"/>
                 <a:cs typeface="Calibri" panose="020F0502020204030204" pitchFamily="34" charset="0"/>
               </a:rPr>
-              <a:t>alwas</a:t>
+              <a:t>always</a:t>
             </a:r>
             <a:r>
               <a:rPr lang="de-DE" sz="1800" dirty="0">
@@ -43626,7 +41767,7 @@
                 <a:ea typeface="Cambria Math" panose="02040503050406030204" pitchFamily="18" charset="0"/>
                 <a:cs typeface="Calibri" panose="020F0502020204030204" pitchFamily="34" charset="0"/>
               </a:rPr>
-              <a:t>start:ende</a:t>
+              <a:t>start:end</a:t>
             </a:r>
             <a:r>
               <a:rPr lang="de-DE" sz="1800" dirty="0">

--- a/Slides/unit_5_prog_2.pptx
+++ b/Slides/unit_5_prog_2.pptx
@@ -324,7 +324,7 @@
       </p15:sldGuideLst>
     </p:ext>
     <p:ext uri="http://customooxmlschemas.google.com/">
-      <go:slidesCustomData xmlns:go="http://customooxmlschemas.google.com/" xmlns:ahyp="http://schemas.microsoft.com/office/drawing/2018/hyperlinkcolor" xmlns:p15="http://schemas.microsoft.com/office/powerpoint/2012/main" xmlns:p14="http://schemas.microsoft.com/office/powerpoint/2010/main" xmlns:com="http://schemas.openxmlformats.org/drawingml/2006/compatibility" xmlns:pvml="urn:schemas-microsoft-com:office:powerpoint" xmlns:v="urn:schemas-microsoft-com:vml" xmlns:o="urn:schemas-microsoft-com:office:office" xmlns:dgm="http://schemas.openxmlformats.org/drawingml/2006/diagram" xmlns:c="http://schemas.openxmlformats.org/drawingml/2006/chart" xmlns:mv="urn:schemas-microsoft-com:mac:vml" xmlns:mc="http://schemas.openxmlformats.org/markup-compatibility/2006" xmlns="" r:id="rId80" roundtripDataSignature="AMtx7milieXwv5OUJdQk1cj/252aZuXcIQ=="/>
+      <go:slidesCustomData xmlns="" xmlns:mc="http://schemas.openxmlformats.org/markup-compatibility/2006" xmlns:mv="urn:schemas-microsoft-com:mac:vml" xmlns:c="http://schemas.openxmlformats.org/drawingml/2006/chart" xmlns:dgm="http://schemas.openxmlformats.org/drawingml/2006/diagram" xmlns:o="urn:schemas-microsoft-com:office:office" xmlns:v="urn:schemas-microsoft-com:vml" xmlns:pvml="urn:schemas-microsoft-com:office:powerpoint" xmlns:com="http://schemas.openxmlformats.org/drawingml/2006/compatibility" xmlns:p14="http://schemas.microsoft.com/office/powerpoint/2010/main" xmlns:p15="http://schemas.microsoft.com/office/powerpoint/2012/main" xmlns:ahyp="http://schemas.microsoft.com/office/drawing/2018/hyperlinkcolor" xmlns:go="http://customooxmlschemas.google.com/" r:id="rId80" roundtripDataSignature="AMtx7milieXwv5OUJdQk1cj/252aZuXcIQ=="/>
     </p:ext>
   </p:extLst>
 </p:presentation>
@@ -343,7 +343,7 @@
   <pc:docChgLst>
     <pc:chgData name="Ingo Frommholz" userId="ee3b4549-206f-4e4f-93a1-b7ff676f0af7" providerId="ADAL" clId="{5F8971C4-3D52-5FAB-A951-9912A46CDBB0}"/>
     <pc:docChg chg="undo custSel modSld">
-      <pc:chgData name="Ingo Frommholz" userId="ee3b4549-206f-4e4f-93a1-b7ff676f0af7" providerId="ADAL" clId="{5F8971C4-3D52-5FAB-A951-9912A46CDBB0}" dt="2025-10-29T15:04:46.856" v="221"/>
+      <pc:chgData name="Ingo Frommholz" userId="ee3b4549-206f-4e4f-93a1-b7ff676f0af7" providerId="ADAL" clId="{5F8971C4-3D52-5FAB-A951-9912A46CDBB0}" dt="2025-10-30T16:47:18.318" v="325" actId="20577"/>
       <pc:docMkLst>
         <pc:docMk/>
       </pc:docMkLst>
@@ -363,13 +363,13 @@
         </pc:spChg>
       </pc:sldChg>
       <pc:sldChg chg="modSp mod">
-        <pc:chgData name="Ingo Frommholz" userId="ee3b4549-206f-4e4f-93a1-b7ff676f0af7" providerId="ADAL" clId="{5F8971C4-3D52-5FAB-A951-9912A46CDBB0}" dt="2025-10-29T10:08:46.025" v="69" actId="20577"/>
+        <pc:chgData name="Ingo Frommholz" userId="ee3b4549-206f-4e4f-93a1-b7ff676f0af7" providerId="ADAL" clId="{5F8971C4-3D52-5FAB-A951-9912A46CDBB0}" dt="2025-10-30T16:47:18.318" v="325" actId="20577"/>
         <pc:sldMkLst>
           <pc:docMk/>
           <pc:sldMk cId="2965119385" sldId="468"/>
         </pc:sldMkLst>
         <pc:spChg chg="mod">
-          <ac:chgData name="Ingo Frommholz" userId="ee3b4549-206f-4e4f-93a1-b7ff676f0af7" providerId="ADAL" clId="{5F8971C4-3D52-5FAB-A951-9912A46CDBB0}" dt="2025-10-29T10:08:46.025" v="69" actId="20577"/>
+          <ac:chgData name="Ingo Frommholz" userId="ee3b4549-206f-4e4f-93a1-b7ff676f0af7" providerId="ADAL" clId="{5F8971C4-3D52-5FAB-A951-9912A46CDBB0}" dt="2025-10-30T16:47:18.318" v="325" actId="20577"/>
           <ac:spMkLst>
             <pc:docMk/>
             <pc:sldMk cId="2965119385" sldId="468"/>
@@ -408,13 +408,13 @@
         </pc:spChg>
       </pc:sldChg>
       <pc:sldChg chg="modSp mod">
-        <pc:chgData name="Ingo Frommholz" userId="ee3b4549-206f-4e4f-93a1-b7ff676f0af7" providerId="ADAL" clId="{5F8971C4-3D52-5FAB-A951-9912A46CDBB0}" dt="2025-10-29T09:46:40.570" v="2" actId="20577"/>
+        <pc:chgData name="Ingo Frommholz" userId="ee3b4549-206f-4e4f-93a1-b7ff676f0af7" providerId="ADAL" clId="{5F8971C4-3D52-5FAB-A951-9912A46CDBB0}" dt="2025-10-30T14:27:48.334" v="309" actId="20577"/>
         <pc:sldMkLst>
           <pc:docMk/>
           <pc:sldMk cId="255500345" sldId="501"/>
         </pc:sldMkLst>
         <pc:spChg chg="mod">
-          <ac:chgData name="Ingo Frommholz" userId="ee3b4549-206f-4e4f-93a1-b7ff676f0af7" providerId="ADAL" clId="{5F8971C4-3D52-5FAB-A951-9912A46CDBB0}" dt="2025-10-29T09:46:40.570" v="2" actId="20577"/>
+          <ac:chgData name="Ingo Frommholz" userId="ee3b4549-206f-4e4f-93a1-b7ff676f0af7" providerId="ADAL" clId="{5F8971C4-3D52-5FAB-A951-9912A46CDBB0}" dt="2025-10-30T14:27:48.334" v="309" actId="20577"/>
           <ac:spMkLst>
             <pc:docMk/>
             <pc:sldMk cId="255500345" sldId="501"/>
@@ -487,6 +487,21 @@
             <pc:docMk/>
             <pc:sldMk cId="1991990786" sldId="511"/>
             <ac:spMk id="8" creationId="{21A8D102-1C16-49D0-9B80-8EAB675A9A7B}"/>
+          </ac:spMkLst>
+        </pc:spChg>
+      </pc:sldChg>
+      <pc:sldChg chg="modSp mod">
+        <pc:chgData name="Ingo Frommholz" userId="ee3b4549-206f-4e4f-93a1-b7ff676f0af7" providerId="ADAL" clId="{5F8971C4-3D52-5FAB-A951-9912A46CDBB0}" dt="2025-10-30T15:33:18.903" v="323" actId="20577"/>
+        <pc:sldMkLst>
+          <pc:docMk/>
+          <pc:sldMk cId="2361308640" sldId="513"/>
+        </pc:sldMkLst>
+        <pc:spChg chg="mod">
+          <ac:chgData name="Ingo Frommholz" userId="ee3b4549-206f-4e4f-93a1-b7ff676f0af7" providerId="ADAL" clId="{5F8971C4-3D52-5FAB-A951-9912A46CDBB0}" dt="2025-10-30T15:33:18.903" v="323" actId="20577"/>
+          <ac:spMkLst>
+            <pc:docMk/>
+            <pc:sldMk cId="2361308640" sldId="513"/>
+            <ac:spMk id="6" creationId="{0804E025-6CC7-44C4-AD79-69A4EA4376F3}"/>
           </ac:spMkLst>
         </pc:spChg>
       </pc:sldChg>
@@ -28385,21 +28400,8 @@
                 <a:ea typeface="Cambria Math" panose="02040503050406030204" pitchFamily="18" charset="0"/>
                 <a:cs typeface="Calibri" panose="020F0502020204030204" pitchFamily="34" charset="0"/>
               </a:rPr>
-              <a:t>Arbitrary data types for </a:t>
-            </a:r>
-            <a:r>
-              <a:rPr lang="en-US" sz="1800" dirty="0" err="1">
-                <a:latin typeface="Calibri" panose="020F0502020204030204" pitchFamily="34" charset="0"/>
-                <a:ea typeface="Cambria Math" panose="02040503050406030204" pitchFamily="18" charset="0"/>
-                <a:cs typeface="Calibri" panose="020F0502020204030204" pitchFamily="34" charset="0"/>
-              </a:rPr>
-              <a:t>elemements</a:t>
-            </a:r>
-            <a:endParaRPr lang="en-US" sz="1800" dirty="0">
-              <a:latin typeface="Calibri" panose="020F0502020204030204" pitchFamily="34" charset="0"/>
-              <a:ea typeface="Cambria Math" panose="02040503050406030204" pitchFamily="18" charset="0"/>
-              <a:cs typeface="Calibri" panose="020F0502020204030204" pitchFamily="34" charset="0"/>
-            </a:endParaRPr>
+              <a:t>Arbitrary data types for elements</a:t>
+            </a:r>
           </a:p>
           <a:p>
             <a:pPr marL="285750" indent="-285750">
@@ -30666,8 +30668,8 @@
           </a:p>
         </p:txBody>
       </p:sp>
-      <mc:AlternateContent xmlns:mc="http://schemas.openxmlformats.org/markup-compatibility/2006">
-        <mc:Choice xmlns:a14="http://schemas.microsoft.com/office/drawing/2010/main" Requires="a14">
+      <mc:AlternateContent xmlns:mc="http://schemas.openxmlformats.org/markup-compatibility/2006" xmlns:a14="http://schemas.microsoft.com/office/drawing/2010/main">
+        <mc:Choice Requires="a14">
           <p:sp>
             <p:nvSpPr>
               <p:cNvPr id="8" name="Google Shape;87;p2">
@@ -32020,7 +32022,7 @@
             </p:txBody>
           </p:sp>
         </mc:Choice>
-        <mc:Fallback>
+        <mc:Fallback xmlns="">
           <p:sp>
             <p:nvSpPr>
               <p:cNvPr id="8" name="Google Shape;87;p2">
@@ -34962,8 +34964,8 @@
           </a:p>
         </p:txBody>
       </p:sp>
-      <mc:AlternateContent xmlns:mc="http://schemas.openxmlformats.org/markup-compatibility/2006">
-        <mc:Choice xmlns:a14="http://schemas.microsoft.com/office/drawing/2010/main" Requires="a14">
+      <mc:AlternateContent xmlns:mc="http://schemas.openxmlformats.org/markup-compatibility/2006" xmlns:a14="http://schemas.microsoft.com/office/drawing/2010/main">
+        <mc:Choice Requires="a14">
           <p:sp>
             <p:nvSpPr>
               <p:cNvPr id="8" name="Google Shape;87;p2">
@@ -36871,7 +36873,7 @@
             </p:txBody>
           </p:sp>
         </mc:Choice>
-        <mc:Fallback>
+        <mc:Fallback xmlns="">
           <p:sp>
             <p:nvSpPr>
               <p:cNvPr id="8" name="Google Shape;87;p2">
@@ -40782,6 +40784,48 @@
               <a:ea typeface="Cambria Math" panose="02040503050406030204" pitchFamily="18" charset="0"/>
               <a:cs typeface="Calibri" panose="020F0502020204030204" pitchFamily="34" charset="0"/>
             </a:endParaRPr>
+          </a:p>
+          <a:p>
+            <a:pPr marL="0" indent="0">
+              <a:spcBef>
+                <a:spcPts val="640"/>
+              </a:spcBef>
+            </a:pPr>
+            <a:endParaRPr lang="en-US" sz="1800" dirty="0">
+              <a:latin typeface="Calibri" panose="020F0502020204030204" pitchFamily="34" charset="0"/>
+              <a:ea typeface="Cambria Math" panose="02040503050406030204" pitchFamily="18" charset="0"/>
+              <a:cs typeface="Calibri" panose="020F0502020204030204" pitchFamily="34" charset="0"/>
+            </a:endParaRPr>
+          </a:p>
+          <a:p>
+            <a:pPr marL="0" indent="0">
+              <a:spcBef>
+                <a:spcPts val="640"/>
+              </a:spcBef>
+            </a:pPr>
+            <a:r>
+              <a:rPr lang="en-US" sz="1800" noProof="0" dirty="0">
+                <a:latin typeface="Calibri" panose="020F0502020204030204" pitchFamily="34" charset="0"/>
+                <a:ea typeface="Cambria Math" panose="02040503050406030204" pitchFamily="18" charset="0"/>
+                <a:cs typeface="Calibri" panose="020F0502020204030204" pitchFamily="34" charset="0"/>
+              </a:rPr>
+              <a:t>[‘red’, ‘green’, ‘blue’</a:t>
+            </a:r>
+            <a:br>
+              <a:rPr lang="en-US" sz="1800" noProof="0" dirty="0">
+                <a:latin typeface="Calibri" panose="020F0502020204030204" pitchFamily="34" charset="0"/>
+                <a:ea typeface="Cambria Math" panose="02040503050406030204" pitchFamily="18" charset="0"/>
+                <a:cs typeface="Calibri" panose="020F0502020204030204" pitchFamily="34" charset="0"/>
+              </a:rPr>
+            </a:br>
+            <a:r>
+              <a:rPr lang="en-US" sz="1800" noProof="0" dirty="0">
+                <a:latin typeface="Calibri" panose="020F0502020204030204" pitchFamily="34" charset="0"/>
+                <a:ea typeface="Cambria Math" panose="02040503050406030204" pitchFamily="18" charset="0"/>
+                <a:cs typeface="Calibri" panose="020F0502020204030204" pitchFamily="34" charset="0"/>
+              </a:rPr>
+              <a:t>    0         1            2</a:t>
+            </a:r>
           </a:p>
         </p:txBody>
       </p:sp>

--- a/Slides/unit_5_prog_2.pptx
+++ b/Slides/unit_5_prog_2.pptx
@@ -5,89 +5,78 @@
     <p:sldMasterId id="2147483648" r:id="rId1"/>
   </p:sldMasterIdLst>
   <p:notesMasterIdLst>
-    <p:notesMasterId r:id="rId4"/>
+    <p:notesMasterId r:id="rId53"/>
   </p:notesMasterIdLst>
   <p:sldIdLst>
-    <p:sldId id="256" r:id="rId3"/>
-    <p:sldId id="408" r:id="rId5"/>
-    <p:sldId id="499" r:id="rId6"/>
-    <p:sldId id="468" r:id="rId7"/>
-    <p:sldId id="469" r:id="rId8"/>
-    <p:sldId id="500" r:id="rId9"/>
-    <p:sldId id="501" r:id="rId10"/>
-    <p:sldId id="502" r:id="rId11"/>
-    <p:sldId id="503" r:id="rId12"/>
-    <p:sldId id="504" r:id="rId13"/>
-    <p:sldId id="505" r:id="rId14"/>
-    <p:sldId id="506" r:id="rId15"/>
-    <p:sldId id="462" r:id="rId16"/>
-    <p:sldId id="472" r:id="rId17"/>
-    <p:sldId id="464" r:id="rId18"/>
-    <p:sldId id="476" r:id="rId19"/>
-    <p:sldId id="507" r:id="rId20"/>
-    <p:sldId id="508" r:id="rId21"/>
-    <p:sldId id="509" r:id="rId22"/>
-    <p:sldId id="510" r:id="rId23"/>
-    <p:sldId id="511" r:id="rId24"/>
-    <p:sldId id="467" r:id="rId25"/>
-    <p:sldId id="516" r:id="rId26"/>
-    <p:sldId id="513" r:id="rId27"/>
-    <p:sldId id="515" r:id="rId28"/>
-    <p:sldId id="517" r:id="rId29"/>
-    <p:sldId id="514" r:id="rId30"/>
-    <p:sldId id="512" r:id="rId31"/>
-    <p:sldId id="518" r:id="rId32"/>
-    <p:sldId id="519" r:id="rId33"/>
-    <p:sldId id="466" r:id="rId34"/>
-    <p:sldId id="520" r:id="rId35"/>
-    <p:sldId id="521" r:id="rId36"/>
-    <p:sldId id="522" r:id="rId37"/>
-    <p:sldId id="460" r:id="rId38"/>
-    <p:sldId id="525" r:id="rId39"/>
-    <p:sldId id="526" r:id="rId40"/>
-    <p:sldId id="527" r:id="rId41"/>
-    <p:sldId id="528" r:id="rId42"/>
-    <p:sldId id="532" r:id="rId43"/>
-    <p:sldId id="530" r:id="rId44"/>
-    <p:sldId id="533" r:id="rId45"/>
-    <p:sldId id="536" r:id="rId46"/>
-    <p:sldId id="537" r:id="rId47"/>
-    <p:sldId id="538" r:id="rId48"/>
-    <p:sldId id="534" r:id="rId49"/>
-    <p:sldId id="524" r:id="rId50"/>
-    <p:sldId id="535" r:id="rId51"/>
-    <p:sldId id="523" r:id="rId52"/>
-    <p:sldId id="461" r:id="rId53"/>
-    <p:sldId id="539" r:id="rId54"/>
+    <p:sldId id="256" r:id="rId2"/>
+    <p:sldId id="408" r:id="rId3"/>
+    <p:sldId id="499" r:id="rId4"/>
+    <p:sldId id="468" r:id="rId5"/>
+    <p:sldId id="469" r:id="rId6"/>
+    <p:sldId id="500" r:id="rId7"/>
+    <p:sldId id="501" r:id="rId8"/>
+    <p:sldId id="502" r:id="rId9"/>
+    <p:sldId id="503" r:id="rId10"/>
+    <p:sldId id="504" r:id="rId11"/>
+    <p:sldId id="505" r:id="rId12"/>
+    <p:sldId id="506" r:id="rId13"/>
+    <p:sldId id="462" r:id="rId14"/>
+    <p:sldId id="472" r:id="rId15"/>
+    <p:sldId id="464" r:id="rId16"/>
+    <p:sldId id="476" r:id="rId17"/>
+    <p:sldId id="507" r:id="rId18"/>
+    <p:sldId id="508" r:id="rId19"/>
+    <p:sldId id="509" r:id="rId20"/>
+    <p:sldId id="510" r:id="rId21"/>
+    <p:sldId id="511" r:id="rId22"/>
+    <p:sldId id="467" r:id="rId23"/>
+    <p:sldId id="516" r:id="rId24"/>
+    <p:sldId id="513" r:id="rId25"/>
+    <p:sldId id="515" r:id="rId26"/>
+    <p:sldId id="517" r:id="rId27"/>
+    <p:sldId id="514" r:id="rId28"/>
+    <p:sldId id="512" r:id="rId29"/>
+    <p:sldId id="518" r:id="rId30"/>
+    <p:sldId id="519" r:id="rId31"/>
+    <p:sldId id="466" r:id="rId32"/>
+    <p:sldId id="520" r:id="rId33"/>
+    <p:sldId id="521" r:id="rId34"/>
+    <p:sldId id="522" r:id="rId35"/>
+    <p:sldId id="460" r:id="rId36"/>
+    <p:sldId id="525" r:id="rId37"/>
+    <p:sldId id="526" r:id="rId38"/>
+    <p:sldId id="527" r:id="rId39"/>
+    <p:sldId id="528" r:id="rId40"/>
+    <p:sldId id="532" r:id="rId41"/>
+    <p:sldId id="530" r:id="rId42"/>
+    <p:sldId id="533" r:id="rId43"/>
+    <p:sldId id="536" r:id="rId44"/>
+    <p:sldId id="537" r:id="rId45"/>
+    <p:sldId id="538" r:id="rId46"/>
+    <p:sldId id="534" r:id="rId47"/>
+    <p:sldId id="524" r:id="rId48"/>
+    <p:sldId id="535" r:id="rId49"/>
+    <p:sldId id="523" r:id="rId50"/>
+    <p:sldId id="461" r:id="rId51"/>
+    <p:sldId id="539" r:id="rId52"/>
   </p:sldIdLst>
   <p:sldSz cx="9144000" cy="6858000" type="screen4x3"/>
-  <p:notesSz cx="7099300" cy="10234295"/>
+  <p:notesSz cx="7099300" cy="10234613"/>
   <p:embeddedFontLst>
     <p:embeddedFont>
-      <p:font typeface="Calibri" panose="020F0502020204030204"/>
-      <p:regular r:id="rId58"/>
-    </p:embeddedFont>
-    <p:embeddedFont>
-      <p:font typeface="Calibri" panose="020F0502020204030204" pitchFamily="34" charset="0"/>
-      <p:regular r:id="rId59"/>
-      <p:bold r:id="rId60"/>
-      <p:italic r:id="rId61"/>
-      <p:boldItalic r:id="rId62"/>
-    </p:embeddedFont>
-    <p:embeddedFont>
-      <p:font typeface="Blackadder ITC" panose="04020505050007020D02" pitchFamily="82" charset="0"/>
-      <p:regular r:id="rId63"/>
+      <p:font typeface="Blackadder ITC" pitchFamily="82" charset="77"/>
+      <p:regular r:id="rId54"/>
     </p:embeddedFont>
     <p:embeddedFont>
       <p:font typeface="Cambria Math" panose="02040503050406030204" pitchFamily="18" charset="0"/>
-      <p:regular r:id="rId64"/>
+      <p:regular r:id="rId55"/>
     </p:embeddedFont>
     <p:embeddedFont>
       <p:font typeface="Consolas" panose="020B0609020204030204" pitchFamily="49" charset="0"/>
-      <p:regular r:id="rId65"/>
-      <p:bold r:id="rId66"/>
-      <p:italic r:id="rId67"/>
-      <p:boldItalic r:id="rId68"/>
+      <p:regular r:id="rId56"/>
+      <p:bold r:id="rId57"/>
+      <p:italic r:id="rId58"/>
+      <p:boldItalic r:id="rId59"/>
     </p:embeddedFont>
   </p:embeddedFontLst>
   <p:defaultTextStyle>
@@ -677,7 +666,9 @@
               </a:defRPr>
             </a:lvl9pPr>
           </a:lstStyle>
-          <a:p/>
+          <a:p>
+            <a:endParaRPr/>
+          </a:p>
         </p:txBody>
       </p:sp>
     </p:spTree>
@@ -916,7 +907,7 @@
 </file>
 
 <file path=ppt/notesSlides/notesSlide1.xml><?xml version="1.0" encoding="utf-8"?>
-<p:notes xmlns:a="http://schemas.openxmlformats.org/drawingml/2006/main" xmlns:r="http://schemas.openxmlformats.org/officeDocument/2006/relationships" xmlns:p="http://schemas.openxmlformats.org/presentationml/2006/main" showMasterPhAnim="0" showMasterSp="0">
+<p:notes xmlns:a="http://schemas.openxmlformats.org/drawingml/2006/main" xmlns:r="http://schemas.openxmlformats.org/officeDocument/2006/relationships" xmlns:p="http://schemas.openxmlformats.org/presentationml/2006/main" showMasterSp="0" showMasterPhAnim="0">
   <p:cSld>
     <p:spTree>
       <p:nvGrpSpPr>
@@ -1046,7 +1037,7 @@
 </file>
 
 <file path=ppt/notesSlides/notesSlide10.xml><?xml version="1.0" encoding="utf-8"?>
-<p:notes xmlns:a="http://schemas.openxmlformats.org/drawingml/2006/main" xmlns:r="http://schemas.openxmlformats.org/officeDocument/2006/relationships" xmlns:p="http://schemas.openxmlformats.org/presentationml/2006/main" showMasterPhAnim="0" showMasterSp="0">
+<p:notes xmlns:a="http://schemas.openxmlformats.org/drawingml/2006/main" xmlns:r="http://schemas.openxmlformats.org/officeDocument/2006/relationships" xmlns:p="http://schemas.openxmlformats.org/presentationml/2006/main" showMasterSp="0" showMasterPhAnim="0">
   <p:cSld>
     <p:spTree>
       <p:nvGrpSpPr>
@@ -1230,6 +1221,7 @@
                 <a:cs typeface="Arial" panose="020B0604020202020204"/>
                 <a:sym typeface="Arial" panose="020B0604020202020204"/>
               </a:rPr>
+              <a:t>9</a:t>
             </a:fld>
             <a:endParaRPr kumimoji="0" sz="1400" b="0" i="0" u="none" strike="noStrike" kern="0" cap="none" spc="0" normalizeH="0" baseline="0" noProof="0">
               <a:ln>
@@ -1258,7 +1250,7 @@
 </file>
 
 <file path=ppt/notesSlides/notesSlide11.xml><?xml version="1.0" encoding="utf-8"?>
-<p:notes xmlns:a="http://schemas.openxmlformats.org/drawingml/2006/main" xmlns:r="http://schemas.openxmlformats.org/officeDocument/2006/relationships" xmlns:p="http://schemas.openxmlformats.org/presentationml/2006/main" showMasterPhAnim="0" showMasterSp="0">
+<p:notes xmlns:a="http://schemas.openxmlformats.org/drawingml/2006/main" xmlns:r="http://schemas.openxmlformats.org/officeDocument/2006/relationships" xmlns:p="http://schemas.openxmlformats.org/presentationml/2006/main" showMasterSp="0" showMasterPhAnim="0">
   <p:cSld>
     <p:spTree>
       <p:nvGrpSpPr>
@@ -1442,6 +1434,7 @@
                 <a:cs typeface="Arial" panose="020B0604020202020204"/>
                 <a:sym typeface="Arial" panose="020B0604020202020204"/>
               </a:rPr>
+              <a:t>10</a:t>
             </a:fld>
             <a:endParaRPr kumimoji="0" sz="1400" b="0" i="0" u="none" strike="noStrike" kern="0" cap="none" spc="0" normalizeH="0" baseline="0" noProof="0">
               <a:ln>
@@ -1470,7 +1463,7 @@
 </file>
 
 <file path=ppt/notesSlides/notesSlide12.xml><?xml version="1.0" encoding="utf-8"?>
-<p:notes xmlns:a="http://schemas.openxmlformats.org/drawingml/2006/main" xmlns:r="http://schemas.openxmlformats.org/officeDocument/2006/relationships" xmlns:p="http://schemas.openxmlformats.org/presentationml/2006/main" showMasterPhAnim="0" showMasterSp="0">
+<p:notes xmlns:a="http://schemas.openxmlformats.org/drawingml/2006/main" xmlns:r="http://schemas.openxmlformats.org/officeDocument/2006/relationships" xmlns:p="http://schemas.openxmlformats.org/presentationml/2006/main" showMasterSp="0" showMasterPhAnim="0">
   <p:cSld>
     <p:spTree>
       <p:nvGrpSpPr>
@@ -1654,6 +1647,7 @@
                 <a:cs typeface="Arial" panose="020B0604020202020204"/>
                 <a:sym typeface="Arial" panose="020B0604020202020204"/>
               </a:rPr>
+              <a:t>11</a:t>
             </a:fld>
             <a:endParaRPr kumimoji="0" sz="1400" b="0" i="0" u="none" strike="noStrike" kern="0" cap="none" spc="0" normalizeH="0" baseline="0" noProof="0">
               <a:ln>
@@ -1682,7 +1676,7 @@
 </file>
 
 <file path=ppt/notesSlides/notesSlide13.xml><?xml version="1.0" encoding="utf-8"?>
-<p:notes xmlns:a="http://schemas.openxmlformats.org/drawingml/2006/main" xmlns:r="http://schemas.openxmlformats.org/officeDocument/2006/relationships" xmlns:p="http://schemas.openxmlformats.org/presentationml/2006/main" showMasterPhAnim="0" showMasterSp="0">
+<p:notes xmlns:a="http://schemas.openxmlformats.org/drawingml/2006/main" xmlns:r="http://schemas.openxmlformats.org/officeDocument/2006/relationships" xmlns:p="http://schemas.openxmlformats.org/presentationml/2006/main" showMasterSp="0" showMasterPhAnim="0">
   <p:cSld>
     <p:spTree>
       <p:nvGrpSpPr>
@@ -1863,6 +1857,7 @@
                 <a:cs typeface="Arial" panose="020B0604020202020204"/>
                 <a:sym typeface="Arial" panose="020B0604020202020204"/>
               </a:rPr>
+              <a:t>12</a:t>
             </a:fld>
             <a:endParaRPr kumimoji="0" sz="1400" b="0" i="0" u="none" strike="noStrike" kern="0" cap="none" spc="0" normalizeH="0" baseline="0" noProof="0" dirty="0">
               <a:ln>
@@ -1890,7 +1885,7 @@
 </file>
 
 <file path=ppt/notesSlides/notesSlide14.xml><?xml version="1.0" encoding="utf-8"?>
-<p:notes xmlns:a="http://schemas.openxmlformats.org/drawingml/2006/main" xmlns:r="http://schemas.openxmlformats.org/officeDocument/2006/relationships" xmlns:p="http://schemas.openxmlformats.org/presentationml/2006/main" showMasterPhAnim="0" showMasterSp="0">
+<p:notes xmlns:a="http://schemas.openxmlformats.org/drawingml/2006/main" xmlns:r="http://schemas.openxmlformats.org/officeDocument/2006/relationships" xmlns:p="http://schemas.openxmlformats.org/presentationml/2006/main" showMasterSp="0" showMasterPhAnim="0">
   <p:cSld>
     <p:spTree>
       <p:nvGrpSpPr>
@@ -2074,6 +2069,7 @@
                 <a:cs typeface="Arial" panose="020B0604020202020204"/>
                 <a:sym typeface="Arial" panose="020B0604020202020204"/>
               </a:rPr>
+              <a:t>13</a:t>
             </a:fld>
             <a:endParaRPr kumimoji="0" sz="1400" b="0" i="0" u="none" strike="noStrike" kern="0" cap="none" spc="0" normalizeH="0" baseline="0" noProof="0">
               <a:ln>
@@ -2102,7 +2098,7 @@
 </file>
 
 <file path=ppt/notesSlides/notesSlide15.xml><?xml version="1.0" encoding="utf-8"?>
-<p:notes xmlns:a="http://schemas.openxmlformats.org/drawingml/2006/main" xmlns:r="http://schemas.openxmlformats.org/officeDocument/2006/relationships" xmlns:p="http://schemas.openxmlformats.org/presentationml/2006/main" showMasterPhAnim="0" showMasterSp="0">
+<p:notes xmlns:a="http://schemas.openxmlformats.org/drawingml/2006/main" xmlns:r="http://schemas.openxmlformats.org/officeDocument/2006/relationships" xmlns:p="http://schemas.openxmlformats.org/presentationml/2006/main" showMasterSp="0" showMasterPhAnim="0">
   <p:cSld>
     <p:spTree>
       <p:nvGrpSpPr>
@@ -2283,6 +2279,7 @@
                 <a:cs typeface="Arial" panose="020B0604020202020204"/>
                 <a:sym typeface="Arial" panose="020B0604020202020204"/>
               </a:rPr>
+              <a:t>14</a:t>
             </a:fld>
             <a:endParaRPr kumimoji="0" sz="1400" b="0" i="0" u="none" strike="noStrike" kern="0" cap="none" spc="0" normalizeH="0" baseline="0" noProof="0" dirty="0">
               <a:ln>
@@ -2310,7 +2307,7 @@
 </file>
 
 <file path=ppt/notesSlides/notesSlide16.xml><?xml version="1.0" encoding="utf-8"?>
-<p:notes xmlns:a="http://schemas.openxmlformats.org/drawingml/2006/main" xmlns:r="http://schemas.openxmlformats.org/officeDocument/2006/relationships" xmlns:p="http://schemas.openxmlformats.org/presentationml/2006/main" showMasterPhAnim="0" showMasterSp="0">
+<p:notes xmlns:a="http://schemas.openxmlformats.org/drawingml/2006/main" xmlns:r="http://schemas.openxmlformats.org/officeDocument/2006/relationships" xmlns:p="http://schemas.openxmlformats.org/presentationml/2006/main" showMasterSp="0" showMasterPhAnim="0">
   <p:cSld>
     <p:spTree>
       <p:nvGrpSpPr>
@@ -2494,6 +2491,7 @@
                 <a:cs typeface="Arial" panose="020B0604020202020204"/>
                 <a:sym typeface="Arial" panose="020B0604020202020204"/>
               </a:rPr>
+              <a:t>15</a:t>
             </a:fld>
             <a:endParaRPr kumimoji="0" sz="1400" b="0" i="0" u="none" strike="noStrike" kern="0" cap="none" spc="0" normalizeH="0" baseline="0" noProof="0">
               <a:ln>
@@ -2522,7 +2520,7 @@
 </file>
 
 <file path=ppt/notesSlides/notesSlide17.xml><?xml version="1.0" encoding="utf-8"?>
-<p:notes xmlns:a="http://schemas.openxmlformats.org/drawingml/2006/main" xmlns:r="http://schemas.openxmlformats.org/officeDocument/2006/relationships" xmlns:p="http://schemas.openxmlformats.org/presentationml/2006/main" showMasterPhAnim="0" showMasterSp="0">
+<p:notes xmlns:a="http://schemas.openxmlformats.org/drawingml/2006/main" xmlns:r="http://schemas.openxmlformats.org/officeDocument/2006/relationships" xmlns:p="http://schemas.openxmlformats.org/presentationml/2006/main" showMasterSp="0" showMasterPhAnim="0">
   <p:cSld>
     <p:spTree>
       <p:nvGrpSpPr>
@@ -2706,6 +2704,7 @@
                 <a:cs typeface="Arial" panose="020B0604020202020204"/>
                 <a:sym typeface="Arial" panose="020B0604020202020204"/>
               </a:rPr>
+              <a:t>16</a:t>
             </a:fld>
             <a:endParaRPr kumimoji="0" sz="1400" b="0" i="0" u="none" strike="noStrike" kern="0" cap="none" spc="0" normalizeH="0" baseline="0" noProof="0">
               <a:ln>
@@ -2734,7 +2733,7 @@
 </file>
 
 <file path=ppt/notesSlides/notesSlide18.xml><?xml version="1.0" encoding="utf-8"?>
-<p:notes xmlns:a="http://schemas.openxmlformats.org/drawingml/2006/main" xmlns:r="http://schemas.openxmlformats.org/officeDocument/2006/relationships" xmlns:p="http://schemas.openxmlformats.org/presentationml/2006/main" showMasterPhAnim="0" showMasterSp="0">
+<p:notes xmlns:a="http://schemas.openxmlformats.org/drawingml/2006/main" xmlns:r="http://schemas.openxmlformats.org/officeDocument/2006/relationships" xmlns:p="http://schemas.openxmlformats.org/presentationml/2006/main" showMasterSp="0" showMasterPhAnim="0">
   <p:cSld>
     <p:spTree>
       <p:nvGrpSpPr>
@@ -2918,6 +2917,7 @@
                 <a:cs typeface="Arial" panose="020B0604020202020204"/>
                 <a:sym typeface="Arial" panose="020B0604020202020204"/>
               </a:rPr>
+              <a:t>17</a:t>
             </a:fld>
             <a:endParaRPr kumimoji="0" sz="1400" b="0" i="0" u="none" strike="noStrike" kern="0" cap="none" spc="0" normalizeH="0" baseline="0" noProof="0">
               <a:ln>
@@ -2946,7 +2946,7 @@
 </file>
 
 <file path=ppt/notesSlides/notesSlide19.xml><?xml version="1.0" encoding="utf-8"?>
-<p:notes xmlns:a="http://schemas.openxmlformats.org/drawingml/2006/main" xmlns:r="http://schemas.openxmlformats.org/officeDocument/2006/relationships" xmlns:p="http://schemas.openxmlformats.org/presentationml/2006/main" showMasterPhAnim="0" showMasterSp="0">
+<p:notes xmlns:a="http://schemas.openxmlformats.org/drawingml/2006/main" xmlns:r="http://schemas.openxmlformats.org/officeDocument/2006/relationships" xmlns:p="http://schemas.openxmlformats.org/presentationml/2006/main" showMasterSp="0" showMasterPhAnim="0">
   <p:cSld>
     <p:spTree>
       <p:nvGrpSpPr>
@@ -3130,6 +3130,7 @@
                 <a:cs typeface="Arial" panose="020B0604020202020204"/>
                 <a:sym typeface="Arial" panose="020B0604020202020204"/>
               </a:rPr>
+              <a:t>18</a:t>
             </a:fld>
             <a:endParaRPr kumimoji="0" sz="1400" b="0" i="0" u="none" strike="noStrike" kern="0" cap="none" spc="0" normalizeH="0" baseline="0" noProof="0">
               <a:ln>
@@ -3158,7 +3159,7 @@
 </file>
 
 <file path=ppt/notesSlides/notesSlide2.xml><?xml version="1.0" encoding="utf-8"?>
-<p:notes xmlns:a="http://schemas.openxmlformats.org/drawingml/2006/main" xmlns:r="http://schemas.openxmlformats.org/officeDocument/2006/relationships" xmlns:p="http://schemas.openxmlformats.org/presentationml/2006/main" showMasterPhAnim="0" showMasterSp="0">
+<p:notes xmlns:a="http://schemas.openxmlformats.org/drawingml/2006/main" xmlns:r="http://schemas.openxmlformats.org/officeDocument/2006/relationships" xmlns:p="http://schemas.openxmlformats.org/presentationml/2006/main" showMasterSp="0" showMasterPhAnim="0">
   <p:cSld>
     <p:spTree>
       <p:nvGrpSpPr>
@@ -3339,6 +3340,7 @@
                 <a:cs typeface="Arial" panose="020B0604020202020204"/>
                 <a:sym typeface="Arial" panose="020B0604020202020204"/>
               </a:rPr>
+              <a:t>1</a:t>
             </a:fld>
             <a:endParaRPr kumimoji="0" sz="1400" b="0" i="0" u="none" strike="noStrike" kern="0" cap="none" spc="0" normalizeH="0" baseline="0" noProof="0" dirty="0">
               <a:ln>
@@ -3366,7 +3368,7 @@
 </file>
 
 <file path=ppt/notesSlides/notesSlide20.xml><?xml version="1.0" encoding="utf-8"?>
-<p:notes xmlns:a="http://schemas.openxmlformats.org/drawingml/2006/main" xmlns:r="http://schemas.openxmlformats.org/officeDocument/2006/relationships" xmlns:p="http://schemas.openxmlformats.org/presentationml/2006/main" showMasterPhAnim="0" showMasterSp="0">
+<p:notes xmlns:a="http://schemas.openxmlformats.org/drawingml/2006/main" xmlns:r="http://schemas.openxmlformats.org/officeDocument/2006/relationships" xmlns:p="http://schemas.openxmlformats.org/presentationml/2006/main" showMasterSp="0" showMasterPhAnim="0">
   <p:cSld>
     <p:spTree>
       <p:nvGrpSpPr>
@@ -3550,6 +3552,7 @@
                 <a:cs typeface="Arial" panose="020B0604020202020204"/>
                 <a:sym typeface="Arial" panose="020B0604020202020204"/>
               </a:rPr>
+              <a:t>19</a:t>
             </a:fld>
             <a:endParaRPr kumimoji="0" sz="1400" b="0" i="0" u="none" strike="noStrike" kern="0" cap="none" spc="0" normalizeH="0" baseline="0" noProof="0">
               <a:ln>
@@ -3578,7 +3581,7 @@
 </file>
 
 <file path=ppt/notesSlides/notesSlide21.xml><?xml version="1.0" encoding="utf-8"?>
-<p:notes xmlns:a="http://schemas.openxmlformats.org/drawingml/2006/main" xmlns:r="http://schemas.openxmlformats.org/officeDocument/2006/relationships" xmlns:p="http://schemas.openxmlformats.org/presentationml/2006/main" showMasterPhAnim="0" showMasterSp="0">
+<p:notes xmlns:a="http://schemas.openxmlformats.org/drawingml/2006/main" xmlns:r="http://schemas.openxmlformats.org/officeDocument/2006/relationships" xmlns:p="http://schemas.openxmlformats.org/presentationml/2006/main" showMasterSp="0" showMasterPhAnim="0">
   <p:cSld>
     <p:spTree>
       <p:nvGrpSpPr>
@@ -3762,6 +3765,7 @@
                 <a:cs typeface="Arial" panose="020B0604020202020204"/>
                 <a:sym typeface="Arial" panose="020B0604020202020204"/>
               </a:rPr>
+              <a:t>20</a:t>
             </a:fld>
             <a:endParaRPr kumimoji="0" sz="1400" b="0" i="0" u="none" strike="noStrike" kern="0" cap="none" spc="0" normalizeH="0" baseline="0" noProof="0">
               <a:ln>
@@ -3790,7 +3794,7 @@
 </file>
 
 <file path=ppt/notesSlides/notesSlide22.xml><?xml version="1.0" encoding="utf-8"?>
-<p:notes xmlns:a="http://schemas.openxmlformats.org/drawingml/2006/main" xmlns:r="http://schemas.openxmlformats.org/officeDocument/2006/relationships" xmlns:p="http://schemas.openxmlformats.org/presentationml/2006/main" showMasterPhAnim="0" showMasterSp="0">
+<p:notes xmlns:a="http://schemas.openxmlformats.org/drawingml/2006/main" xmlns:r="http://schemas.openxmlformats.org/officeDocument/2006/relationships" xmlns:p="http://schemas.openxmlformats.org/presentationml/2006/main" showMasterSp="0" showMasterPhAnim="0">
   <p:cSld>
     <p:spTree>
       <p:nvGrpSpPr>
@@ -3971,6 +3975,7 @@
                 <a:cs typeface="Arial" panose="020B0604020202020204"/>
                 <a:sym typeface="Arial" panose="020B0604020202020204"/>
               </a:rPr>
+              <a:t>21</a:t>
             </a:fld>
             <a:endParaRPr kumimoji="0" sz="1400" b="0" i="0" u="none" strike="noStrike" kern="0" cap="none" spc="0" normalizeH="0" baseline="0" noProof="0" dirty="0">
               <a:ln>
@@ -3998,7 +4003,7 @@
 </file>
 
 <file path=ppt/notesSlides/notesSlide23.xml><?xml version="1.0" encoding="utf-8"?>
-<p:notes xmlns:a="http://schemas.openxmlformats.org/drawingml/2006/main" xmlns:r="http://schemas.openxmlformats.org/officeDocument/2006/relationships" xmlns:p="http://schemas.openxmlformats.org/presentationml/2006/main" showMasterPhAnim="0" showMasterSp="0">
+<p:notes xmlns:a="http://schemas.openxmlformats.org/drawingml/2006/main" xmlns:r="http://schemas.openxmlformats.org/officeDocument/2006/relationships" xmlns:p="http://schemas.openxmlformats.org/presentationml/2006/main" showMasterSp="0" showMasterPhAnim="0">
   <p:cSld>
     <p:spTree>
       <p:nvGrpSpPr>
@@ -4182,6 +4187,7 @@
                 <a:cs typeface="Arial" panose="020B0604020202020204"/>
                 <a:sym typeface="Arial" panose="020B0604020202020204"/>
               </a:rPr>
+              <a:t>22</a:t>
             </a:fld>
             <a:endParaRPr kumimoji="0" sz="1400" b="0" i="0" u="none" strike="noStrike" kern="0" cap="none" spc="0" normalizeH="0" baseline="0" noProof="0">
               <a:ln>
@@ -4210,7 +4216,7 @@
 </file>
 
 <file path=ppt/notesSlides/notesSlide24.xml><?xml version="1.0" encoding="utf-8"?>
-<p:notes xmlns:a="http://schemas.openxmlformats.org/drawingml/2006/main" xmlns:r="http://schemas.openxmlformats.org/officeDocument/2006/relationships" xmlns:p="http://schemas.openxmlformats.org/presentationml/2006/main" showMasterPhAnim="0" showMasterSp="0">
+<p:notes xmlns:a="http://schemas.openxmlformats.org/drawingml/2006/main" xmlns:r="http://schemas.openxmlformats.org/officeDocument/2006/relationships" xmlns:p="http://schemas.openxmlformats.org/presentationml/2006/main" showMasterSp="0" showMasterPhAnim="0">
   <p:cSld>
     <p:spTree>
       <p:nvGrpSpPr>
@@ -4394,6 +4400,7 @@
                 <a:cs typeface="Arial" panose="020B0604020202020204"/>
                 <a:sym typeface="Arial" panose="020B0604020202020204"/>
               </a:rPr>
+              <a:t>23</a:t>
             </a:fld>
             <a:endParaRPr kumimoji="0" sz="1400" b="0" i="0" u="none" strike="noStrike" kern="0" cap="none" spc="0" normalizeH="0" baseline="0" noProof="0">
               <a:ln>
@@ -4422,7 +4429,7 @@
 </file>
 
 <file path=ppt/notesSlides/notesSlide25.xml><?xml version="1.0" encoding="utf-8"?>
-<p:notes xmlns:a="http://schemas.openxmlformats.org/drawingml/2006/main" xmlns:r="http://schemas.openxmlformats.org/officeDocument/2006/relationships" xmlns:p="http://schemas.openxmlformats.org/presentationml/2006/main" showMasterPhAnim="0" showMasterSp="0">
+<p:notes xmlns:a="http://schemas.openxmlformats.org/drawingml/2006/main" xmlns:r="http://schemas.openxmlformats.org/officeDocument/2006/relationships" xmlns:p="http://schemas.openxmlformats.org/presentationml/2006/main" showMasterSp="0" showMasterPhAnim="0">
   <p:cSld>
     <p:spTree>
       <p:nvGrpSpPr>
@@ -4606,6 +4613,7 @@
                 <a:cs typeface="Arial" panose="020B0604020202020204"/>
                 <a:sym typeface="Arial" panose="020B0604020202020204"/>
               </a:rPr>
+              <a:t>24</a:t>
             </a:fld>
             <a:endParaRPr kumimoji="0" sz="1400" b="0" i="0" u="none" strike="noStrike" kern="0" cap="none" spc="0" normalizeH="0" baseline="0" noProof="0">
               <a:ln>
@@ -4634,7 +4642,7 @@
 </file>
 
 <file path=ppt/notesSlides/notesSlide26.xml><?xml version="1.0" encoding="utf-8"?>
-<p:notes xmlns:a="http://schemas.openxmlformats.org/drawingml/2006/main" xmlns:r="http://schemas.openxmlformats.org/officeDocument/2006/relationships" xmlns:p="http://schemas.openxmlformats.org/presentationml/2006/main" showMasterPhAnim="0" showMasterSp="0">
+<p:notes xmlns:a="http://schemas.openxmlformats.org/drawingml/2006/main" xmlns:r="http://schemas.openxmlformats.org/officeDocument/2006/relationships" xmlns:p="http://schemas.openxmlformats.org/presentationml/2006/main" showMasterSp="0" showMasterPhAnim="0">
   <p:cSld>
     <p:spTree>
       <p:nvGrpSpPr>
@@ -4818,6 +4826,7 @@
                 <a:cs typeface="Arial" panose="020B0604020202020204"/>
                 <a:sym typeface="Arial" panose="020B0604020202020204"/>
               </a:rPr>
+              <a:t>25</a:t>
             </a:fld>
             <a:endParaRPr kumimoji="0" sz="1400" b="0" i="0" u="none" strike="noStrike" kern="0" cap="none" spc="0" normalizeH="0" baseline="0" noProof="0">
               <a:ln>
@@ -4846,7 +4855,7 @@
 </file>
 
 <file path=ppt/notesSlides/notesSlide27.xml><?xml version="1.0" encoding="utf-8"?>
-<p:notes xmlns:a="http://schemas.openxmlformats.org/drawingml/2006/main" xmlns:r="http://schemas.openxmlformats.org/officeDocument/2006/relationships" xmlns:p="http://schemas.openxmlformats.org/presentationml/2006/main" showMasterPhAnim="0" showMasterSp="0">
+<p:notes xmlns:a="http://schemas.openxmlformats.org/drawingml/2006/main" xmlns:r="http://schemas.openxmlformats.org/officeDocument/2006/relationships" xmlns:p="http://schemas.openxmlformats.org/presentationml/2006/main" showMasterSp="0" showMasterPhAnim="0">
   <p:cSld>
     <p:spTree>
       <p:nvGrpSpPr>
@@ -5030,6 +5039,7 @@
                 <a:cs typeface="Arial" panose="020B0604020202020204"/>
                 <a:sym typeface="Arial" panose="020B0604020202020204"/>
               </a:rPr>
+              <a:t>26</a:t>
             </a:fld>
             <a:endParaRPr kumimoji="0" sz="1400" b="0" i="0" u="none" strike="noStrike" kern="0" cap="none" spc="0" normalizeH="0" baseline="0" noProof="0">
               <a:ln>
@@ -5058,7 +5068,7 @@
 </file>
 
 <file path=ppt/notesSlides/notesSlide28.xml><?xml version="1.0" encoding="utf-8"?>
-<p:notes xmlns:a="http://schemas.openxmlformats.org/drawingml/2006/main" xmlns:r="http://schemas.openxmlformats.org/officeDocument/2006/relationships" xmlns:p="http://schemas.openxmlformats.org/presentationml/2006/main" showMasterPhAnim="0" showMasterSp="0">
+<p:notes xmlns:a="http://schemas.openxmlformats.org/drawingml/2006/main" xmlns:r="http://schemas.openxmlformats.org/officeDocument/2006/relationships" xmlns:p="http://schemas.openxmlformats.org/presentationml/2006/main" showMasterSp="0" showMasterPhAnim="0">
   <p:cSld>
     <p:spTree>
       <p:nvGrpSpPr>
@@ -5239,6 +5249,7 @@
                 <a:cs typeface="Arial" panose="020B0604020202020204"/>
                 <a:sym typeface="Arial" panose="020B0604020202020204"/>
               </a:rPr>
+              <a:t>27</a:t>
             </a:fld>
             <a:endParaRPr kumimoji="0" sz="1400" b="0" i="0" u="none" strike="noStrike" kern="0" cap="none" spc="0" normalizeH="0" baseline="0" noProof="0" dirty="0">
               <a:ln>
@@ -5266,7 +5277,7 @@
 </file>
 
 <file path=ppt/notesSlides/notesSlide29.xml><?xml version="1.0" encoding="utf-8"?>
-<p:notes xmlns:a="http://schemas.openxmlformats.org/drawingml/2006/main" xmlns:r="http://schemas.openxmlformats.org/officeDocument/2006/relationships" xmlns:p="http://schemas.openxmlformats.org/presentationml/2006/main" showMasterPhAnim="0" showMasterSp="0">
+<p:notes xmlns:a="http://schemas.openxmlformats.org/drawingml/2006/main" xmlns:r="http://schemas.openxmlformats.org/officeDocument/2006/relationships" xmlns:p="http://schemas.openxmlformats.org/presentationml/2006/main" showMasterSp="0" showMasterPhAnim="0">
   <p:cSld>
     <p:spTree>
       <p:nvGrpSpPr>
@@ -5450,6 +5461,7 @@
                 <a:cs typeface="Arial" panose="020B0604020202020204"/>
                 <a:sym typeface="Arial" panose="020B0604020202020204"/>
               </a:rPr>
+              <a:t>28</a:t>
             </a:fld>
             <a:endParaRPr kumimoji="0" sz="1400" b="0" i="0" u="none" strike="noStrike" kern="0" cap="none" spc="0" normalizeH="0" baseline="0" noProof="0">
               <a:ln>
@@ -5478,7 +5490,7 @@
 </file>
 
 <file path=ppt/notesSlides/notesSlide3.xml><?xml version="1.0" encoding="utf-8"?>
-<p:notes xmlns:a="http://schemas.openxmlformats.org/drawingml/2006/main" xmlns:r="http://schemas.openxmlformats.org/officeDocument/2006/relationships" xmlns:p="http://schemas.openxmlformats.org/presentationml/2006/main" showMasterPhAnim="0" showMasterSp="0">
+<p:notes xmlns:a="http://schemas.openxmlformats.org/drawingml/2006/main" xmlns:r="http://schemas.openxmlformats.org/officeDocument/2006/relationships" xmlns:p="http://schemas.openxmlformats.org/presentationml/2006/main" showMasterSp="0" showMasterPhAnim="0">
   <p:cSld>
     <p:spTree>
       <p:nvGrpSpPr>
@@ -5659,6 +5671,7 @@
                 <a:cs typeface="Arial" panose="020B0604020202020204"/>
                 <a:sym typeface="Arial" panose="020B0604020202020204"/>
               </a:rPr>
+              <a:t>2</a:t>
             </a:fld>
             <a:endParaRPr kumimoji="0" sz="1400" b="0" i="0" u="none" strike="noStrike" kern="0" cap="none" spc="0" normalizeH="0" baseline="0" noProof="0" dirty="0">
               <a:ln>
@@ -5686,7 +5699,7 @@
 </file>
 
 <file path=ppt/notesSlides/notesSlide30.xml><?xml version="1.0" encoding="utf-8"?>
-<p:notes xmlns:a="http://schemas.openxmlformats.org/drawingml/2006/main" xmlns:r="http://schemas.openxmlformats.org/officeDocument/2006/relationships" xmlns:p="http://schemas.openxmlformats.org/presentationml/2006/main" showMasterPhAnim="0" showMasterSp="0">
+<p:notes xmlns:a="http://schemas.openxmlformats.org/drawingml/2006/main" xmlns:r="http://schemas.openxmlformats.org/officeDocument/2006/relationships" xmlns:p="http://schemas.openxmlformats.org/presentationml/2006/main" showMasterSp="0" showMasterPhAnim="0">
   <p:cSld>
     <p:spTree>
       <p:nvGrpSpPr>
@@ -5870,6 +5883,7 @@
                 <a:cs typeface="Arial" panose="020B0604020202020204"/>
                 <a:sym typeface="Arial" panose="020B0604020202020204"/>
               </a:rPr>
+              <a:t>29</a:t>
             </a:fld>
             <a:endParaRPr kumimoji="0" sz="1400" b="0" i="0" u="none" strike="noStrike" kern="0" cap="none" spc="0" normalizeH="0" baseline="0" noProof="0">
               <a:ln>
@@ -5898,7 +5912,7 @@
 </file>
 
 <file path=ppt/notesSlides/notesSlide31.xml><?xml version="1.0" encoding="utf-8"?>
-<p:notes xmlns:a="http://schemas.openxmlformats.org/drawingml/2006/main" xmlns:r="http://schemas.openxmlformats.org/officeDocument/2006/relationships" xmlns:p="http://schemas.openxmlformats.org/presentationml/2006/main" showMasterPhAnim="0" showMasterSp="0">
+<p:notes xmlns:a="http://schemas.openxmlformats.org/drawingml/2006/main" xmlns:r="http://schemas.openxmlformats.org/officeDocument/2006/relationships" xmlns:p="http://schemas.openxmlformats.org/presentationml/2006/main" showMasterSp="0" showMasterPhAnim="0">
   <p:cSld>
     <p:spTree>
       <p:nvGrpSpPr>
@@ -6079,6 +6093,7 @@
                 <a:cs typeface="Arial" panose="020B0604020202020204"/>
                 <a:sym typeface="Arial" panose="020B0604020202020204"/>
               </a:rPr>
+              <a:t>30</a:t>
             </a:fld>
             <a:endParaRPr kumimoji="0" sz="1400" b="0" i="0" u="none" strike="noStrike" kern="0" cap="none" spc="0" normalizeH="0" baseline="0" noProof="0" dirty="0">
               <a:ln>
@@ -6106,7 +6121,7 @@
 </file>
 
 <file path=ppt/notesSlides/notesSlide32.xml><?xml version="1.0" encoding="utf-8"?>
-<p:notes xmlns:a="http://schemas.openxmlformats.org/drawingml/2006/main" xmlns:r="http://schemas.openxmlformats.org/officeDocument/2006/relationships" xmlns:p="http://schemas.openxmlformats.org/presentationml/2006/main" showMasterPhAnim="0" showMasterSp="0">
+<p:notes xmlns:a="http://schemas.openxmlformats.org/drawingml/2006/main" xmlns:r="http://schemas.openxmlformats.org/officeDocument/2006/relationships" xmlns:p="http://schemas.openxmlformats.org/presentationml/2006/main" showMasterSp="0" showMasterPhAnim="0">
   <p:cSld>
     <p:spTree>
       <p:nvGrpSpPr>
@@ -6215,7 +6230,7 @@
               <a:buSzPts val="1400"/>
               <a:buNone/>
             </a:pPr>
-            <a:endParaRPr sz="1100" b="0" i="0" u="none" strike="noStrike" cap="none">
+            <a:endParaRPr sz="1100" b="0" i="0" u="none" strike="noStrike" cap="none" dirty="0">
               <a:solidFill>
                 <a:schemeClr val="dk1"/>
               </a:solidFill>
@@ -6290,6 +6305,7 @@
                 <a:cs typeface="Arial" panose="020B0604020202020204"/>
                 <a:sym typeface="Arial" panose="020B0604020202020204"/>
               </a:rPr>
+              <a:t>31</a:t>
             </a:fld>
             <a:endParaRPr kumimoji="0" sz="1400" b="0" i="0" u="none" strike="noStrike" kern="0" cap="none" spc="0" normalizeH="0" baseline="0" noProof="0">
               <a:ln>
@@ -6318,7 +6334,7 @@
 </file>
 
 <file path=ppt/notesSlides/notesSlide33.xml><?xml version="1.0" encoding="utf-8"?>
-<p:notes xmlns:a="http://schemas.openxmlformats.org/drawingml/2006/main" xmlns:r="http://schemas.openxmlformats.org/officeDocument/2006/relationships" xmlns:p="http://schemas.openxmlformats.org/presentationml/2006/main" showMasterPhAnim="0" showMasterSp="0">
+<p:notes xmlns:a="http://schemas.openxmlformats.org/drawingml/2006/main" xmlns:r="http://schemas.openxmlformats.org/officeDocument/2006/relationships" xmlns:p="http://schemas.openxmlformats.org/presentationml/2006/main" showMasterSp="0" showMasterPhAnim="0">
   <p:cSld>
     <p:spTree>
       <p:nvGrpSpPr>
@@ -6502,6 +6518,7 @@
                 <a:cs typeface="Arial" panose="020B0604020202020204"/>
                 <a:sym typeface="Arial" panose="020B0604020202020204"/>
               </a:rPr>
+              <a:t>32</a:t>
             </a:fld>
             <a:endParaRPr kumimoji="0" sz="1400" b="0" i="0" u="none" strike="noStrike" kern="0" cap="none" spc="0" normalizeH="0" baseline="0" noProof="0">
               <a:ln>
@@ -6530,7 +6547,7 @@
 </file>
 
 <file path=ppt/notesSlides/notesSlide34.xml><?xml version="1.0" encoding="utf-8"?>
-<p:notes xmlns:a="http://schemas.openxmlformats.org/drawingml/2006/main" xmlns:r="http://schemas.openxmlformats.org/officeDocument/2006/relationships" xmlns:p="http://schemas.openxmlformats.org/presentationml/2006/main" showMasterPhAnim="0" showMasterSp="0">
+<p:notes xmlns:a="http://schemas.openxmlformats.org/drawingml/2006/main" xmlns:r="http://schemas.openxmlformats.org/officeDocument/2006/relationships" xmlns:p="http://schemas.openxmlformats.org/presentationml/2006/main" showMasterSp="0" showMasterPhAnim="0">
   <p:cSld>
     <p:spTree>
       <p:nvGrpSpPr>
@@ -6714,6 +6731,7 @@
                 <a:cs typeface="Arial" panose="020B0604020202020204"/>
                 <a:sym typeface="Arial" panose="020B0604020202020204"/>
               </a:rPr>
+              <a:t>33</a:t>
             </a:fld>
             <a:endParaRPr kumimoji="0" sz="1400" b="0" i="0" u="none" strike="noStrike" kern="0" cap="none" spc="0" normalizeH="0" baseline="0" noProof="0">
               <a:ln>
@@ -6742,7 +6760,7 @@
 </file>
 
 <file path=ppt/notesSlides/notesSlide35.xml><?xml version="1.0" encoding="utf-8"?>
-<p:notes xmlns:a="http://schemas.openxmlformats.org/drawingml/2006/main" xmlns:r="http://schemas.openxmlformats.org/officeDocument/2006/relationships" xmlns:p="http://schemas.openxmlformats.org/presentationml/2006/main" showMasterPhAnim="0" showMasterSp="0">
+<p:notes xmlns:a="http://schemas.openxmlformats.org/drawingml/2006/main" xmlns:r="http://schemas.openxmlformats.org/officeDocument/2006/relationships" xmlns:p="http://schemas.openxmlformats.org/presentationml/2006/main" showMasterSp="0" showMasterPhAnim="0">
   <p:cSld>
     <p:spTree>
       <p:nvGrpSpPr>
@@ -6923,6 +6941,7 @@
                 <a:cs typeface="Arial" panose="020B0604020202020204"/>
                 <a:sym typeface="Arial" panose="020B0604020202020204"/>
               </a:rPr>
+              <a:t>34</a:t>
             </a:fld>
             <a:endParaRPr kumimoji="0" sz="1400" b="0" i="0" u="none" strike="noStrike" kern="0" cap="none" spc="0" normalizeH="0" baseline="0" noProof="0" dirty="0">
               <a:ln>
@@ -6950,7 +6969,7 @@
 </file>
 
 <file path=ppt/notesSlides/notesSlide36.xml><?xml version="1.0" encoding="utf-8"?>
-<p:notes xmlns:a="http://schemas.openxmlformats.org/drawingml/2006/main" xmlns:r="http://schemas.openxmlformats.org/officeDocument/2006/relationships" xmlns:p="http://schemas.openxmlformats.org/presentationml/2006/main" showMasterPhAnim="0" showMasterSp="0">
+<p:notes xmlns:a="http://schemas.openxmlformats.org/drawingml/2006/main" xmlns:r="http://schemas.openxmlformats.org/officeDocument/2006/relationships" xmlns:p="http://schemas.openxmlformats.org/presentationml/2006/main" showMasterSp="0" showMasterPhAnim="0">
   <p:cSld>
     <p:spTree>
       <p:nvGrpSpPr>
@@ -7134,6 +7153,7 @@
                 <a:cs typeface="Arial" panose="020B0604020202020204"/>
                 <a:sym typeface="Arial" panose="020B0604020202020204"/>
               </a:rPr>
+              <a:t>35</a:t>
             </a:fld>
             <a:endParaRPr kumimoji="0" sz="1400" b="0" i="0" u="none" strike="noStrike" kern="0" cap="none" spc="0" normalizeH="0" baseline="0" noProof="0">
               <a:ln>
@@ -7162,7 +7182,7 @@
 </file>
 
 <file path=ppt/notesSlides/notesSlide37.xml><?xml version="1.0" encoding="utf-8"?>
-<p:notes xmlns:a="http://schemas.openxmlformats.org/drawingml/2006/main" xmlns:r="http://schemas.openxmlformats.org/officeDocument/2006/relationships" xmlns:p="http://schemas.openxmlformats.org/presentationml/2006/main" showMasterPhAnim="0" showMasterSp="0">
+<p:notes xmlns:a="http://schemas.openxmlformats.org/drawingml/2006/main" xmlns:r="http://schemas.openxmlformats.org/officeDocument/2006/relationships" xmlns:p="http://schemas.openxmlformats.org/presentationml/2006/main" showMasterSp="0" showMasterPhAnim="0">
   <p:cSld>
     <p:spTree>
       <p:nvGrpSpPr>
@@ -7346,6 +7366,7 @@
                 <a:cs typeface="Arial" panose="020B0604020202020204"/>
                 <a:sym typeface="Arial" panose="020B0604020202020204"/>
               </a:rPr>
+              <a:t>36</a:t>
             </a:fld>
             <a:endParaRPr kumimoji="0" sz="1400" b="0" i="0" u="none" strike="noStrike" kern="0" cap="none" spc="0" normalizeH="0" baseline="0" noProof="0">
               <a:ln>
@@ -7374,7 +7395,7 @@
 </file>
 
 <file path=ppt/notesSlides/notesSlide38.xml><?xml version="1.0" encoding="utf-8"?>
-<p:notes xmlns:a="http://schemas.openxmlformats.org/drawingml/2006/main" xmlns:r="http://schemas.openxmlformats.org/officeDocument/2006/relationships" xmlns:p="http://schemas.openxmlformats.org/presentationml/2006/main" showMasterPhAnim="0" showMasterSp="0">
+<p:notes xmlns:a="http://schemas.openxmlformats.org/drawingml/2006/main" xmlns:r="http://schemas.openxmlformats.org/officeDocument/2006/relationships" xmlns:p="http://schemas.openxmlformats.org/presentationml/2006/main" showMasterSp="0" showMasterPhAnim="0">
   <p:cSld>
     <p:spTree>
       <p:nvGrpSpPr>
@@ -7558,6 +7579,7 @@
                 <a:cs typeface="Arial" panose="020B0604020202020204"/>
                 <a:sym typeface="Arial" panose="020B0604020202020204"/>
               </a:rPr>
+              <a:t>37</a:t>
             </a:fld>
             <a:endParaRPr kumimoji="0" sz="1400" b="0" i="0" u="none" strike="noStrike" kern="0" cap="none" spc="0" normalizeH="0" baseline="0" noProof="0">
               <a:ln>
@@ -7586,7 +7608,7 @@
 </file>
 
 <file path=ppt/notesSlides/notesSlide39.xml><?xml version="1.0" encoding="utf-8"?>
-<p:notes xmlns:a="http://schemas.openxmlformats.org/drawingml/2006/main" xmlns:r="http://schemas.openxmlformats.org/officeDocument/2006/relationships" xmlns:p="http://schemas.openxmlformats.org/presentationml/2006/main" showMasterPhAnim="0" showMasterSp="0">
+<p:notes xmlns:a="http://schemas.openxmlformats.org/drawingml/2006/main" xmlns:r="http://schemas.openxmlformats.org/officeDocument/2006/relationships" xmlns:p="http://schemas.openxmlformats.org/presentationml/2006/main" showMasterSp="0" showMasterPhAnim="0">
   <p:cSld>
     <p:spTree>
       <p:nvGrpSpPr>
@@ -7770,6 +7792,7 @@
                 <a:cs typeface="Arial" panose="020B0604020202020204"/>
                 <a:sym typeface="Arial" panose="020B0604020202020204"/>
               </a:rPr>
+              <a:t>38</a:t>
             </a:fld>
             <a:endParaRPr kumimoji="0" sz="1400" b="0" i="0" u="none" strike="noStrike" kern="0" cap="none" spc="0" normalizeH="0" baseline="0" noProof="0">
               <a:ln>
@@ -7798,7 +7821,7 @@
 </file>
 
 <file path=ppt/notesSlides/notesSlide4.xml><?xml version="1.0" encoding="utf-8"?>
-<p:notes xmlns:a="http://schemas.openxmlformats.org/drawingml/2006/main" xmlns:r="http://schemas.openxmlformats.org/officeDocument/2006/relationships" xmlns:p="http://schemas.openxmlformats.org/presentationml/2006/main" showMasterPhAnim="0" showMasterSp="0">
+<p:notes xmlns:a="http://schemas.openxmlformats.org/drawingml/2006/main" xmlns:r="http://schemas.openxmlformats.org/officeDocument/2006/relationships" xmlns:p="http://schemas.openxmlformats.org/presentationml/2006/main" showMasterSp="0" showMasterPhAnim="0">
   <p:cSld>
     <p:spTree>
       <p:nvGrpSpPr>
@@ -7982,6 +8005,7 @@
                 <a:cs typeface="Arial" panose="020B0604020202020204"/>
                 <a:sym typeface="Arial" panose="020B0604020202020204"/>
               </a:rPr>
+              <a:t>3</a:t>
             </a:fld>
             <a:endParaRPr kumimoji="0" sz="1400" b="0" i="0" u="none" strike="noStrike" kern="0" cap="none" spc="0" normalizeH="0" baseline="0" noProof="0">
               <a:ln>
@@ -8010,7 +8034,7 @@
 </file>
 
 <file path=ppt/notesSlides/notesSlide40.xml><?xml version="1.0" encoding="utf-8"?>
-<p:notes xmlns:a="http://schemas.openxmlformats.org/drawingml/2006/main" xmlns:r="http://schemas.openxmlformats.org/officeDocument/2006/relationships" xmlns:p="http://schemas.openxmlformats.org/presentationml/2006/main" showMasterPhAnim="0" showMasterSp="0">
+<p:notes xmlns:a="http://schemas.openxmlformats.org/drawingml/2006/main" xmlns:r="http://schemas.openxmlformats.org/officeDocument/2006/relationships" xmlns:p="http://schemas.openxmlformats.org/presentationml/2006/main" showMasterSp="0" showMasterPhAnim="0">
   <p:cSld>
     <p:spTree>
       <p:nvGrpSpPr>
@@ -8194,6 +8218,7 @@
                 <a:cs typeface="Arial" panose="020B0604020202020204"/>
                 <a:sym typeface="Arial" panose="020B0604020202020204"/>
               </a:rPr>
+              <a:t>39</a:t>
             </a:fld>
             <a:endParaRPr kumimoji="0" sz="1400" b="0" i="0" u="none" strike="noStrike" kern="0" cap="none" spc="0" normalizeH="0" baseline="0" noProof="0">
               <a:ln>
@@ -8222,7 +8247,7 @@
 </file>
 
 <file path=ppt/notesSlides/notesSlide41.xml><?xml version="1.0" encoding="utf-8"?>
-<p:notes xmlns:a="http://schemas.openxmlformats.org/drawingml/2006/main" xmlns:r="http://schemas.openxmlformats.org/officeDocument/2006/relationships" xmlns:p="http://schemas.openxmlformats.org/presentationml/2006/main" showMasterPhAnim="0" showMasterSp="0">
+<p:notes xmlns:a="http://schemas.openxmlformats.org/drawingml/2006/main" xmlns:r="http://schemas.openxmlformats.org/officeDocument/2006/relationships" xmlns:p="http://schemas.openxmlformats.org/presentationml/2006/main" showMasterSp="0" showMasterPhAnim="0">
   <p:cSld>
     <p:spTree>
       <p:nvGrpSpPr>
@@ -8406,6 +8431,7 @@
                 <a:cs typeface="Arial" panose="020B0604020202020204"/>
                 <a:sym typeface="Arial" panose="020B0604020202020204"/>
               </a:rPr>
+              <a:t>40</a:t>
             </a:fld>
             <a:endParaRPr kumimoji="0" sz="1400" b="0" i="0" u="none" strike="noStrike" kern="0" cap="none" spc="0" normalizeH="0" baseline="0" noProof="0">
               <a:ln>
@@ -8434,7 +8460,7 @@
 </file>
 
 <file path=ppt/notesSlides/notesSlide42.xml><?xml version="1.0" encoding="utf-8"?>
-<p:notes xmlns:a="http://schemas.openxmlformats.org/drawingml/2006/main" xmlns:r="http://schemas.openxmlformats.org/officeDocument/2006/relationships" xmlns:p="http://schemas.openxmlformats.org/presentationml/2006/main" showMasterPhAnim="0" showMasterSp="0">
+<p:notes xmlns:a="http://schemas.openxmlformats.org/drawingml/2006/main" xmlns:r="http://schemas.openxmlformats.org/officeDocument/2006/relationships" xmlns:p="http://schemas.openxmlformats.org/presentationml/2006/main" showMasterSp="0" showMasterPhAnim="0">
   <p:cSld>
     <p:spTree>
       <p:nvGrpSpPr>
@@ -8618,6 +8644,7 @@
                 <a:cs typeface="Arial" panose="020B0604020202020204"/>
                 <a:sym typeface="Arial" panose="020B0604020202020204"/>
               </a:rPr>
+              <a:t>41</a:t>
             </a:fld>
             <a:endParaRPr kumimoji="0" sz="1400" b="0" i="0" u="none" strike="noStrike" kern="0" cap="none" spc="0" normalizeH="0" baseline="0" noProof="0">
               <a:ln>
@@ -8646,7 +8673,7 @@
 </file>
 
 <file path=ppt/notesSlides/notesSlide43.xml><?xml version="1.0" encoding="utf-8"?>
-<p:notes xmlns:a="http://schemas.openxmlformats.org/drawingml/2006/main" xmlns:r="http://schemas.openxmlformats.org/officeDocument/2006/relationships" xmlns:p="http://schemas.openxmlformats.org/presentationml/2006/main" showMasterPhAnim="0" showMasterSp="0">
+<p:notes xmlns:a="http://schemas.openxmlformats.org/drawingml/2006/main" xmlns:r="http://schemas.openxmlformats.org/officeDocument/2006/relationships" xmlns:p="http://schemas.openxmlformats.org/presentationml/2006/main" showMasterSp="0" showMasterPhAnim="0">
   <p:cSld>
     <p:spTree>
       <p:nvGrpSpPr>
@@ -8830,6 +8857,7 @@
                 <a:cs typeface="Arial" panose="020B0604020202020204"/>
                 <a:sym typeface="Arial" panose="020B0604020202020204"/>
               </a:rPr>
+              <a:t>42</a:t>
             </a:fld>
             <a:endParaRPr kumimoji="0" sz="1400" b="0" i="0" u="none" strike="noStrike" kern="0" cap="none" spc="0" normalizeH="0" baseline="0" noProof="0">
               <a:ln>
@@ -8858,7 +8886,7 @@
 </file>
 
 <file path=ppt/notesSlides/notesSlide44.xml><?xml version="1.0" encoding="utf-8"?>
-<p:notes xmlns:a="http://schemas.openxmlformats.org/drawingml/2006/main" xmlns:r="http://schemas.openxmlformats.org/officeDocument/2006/relationships" xmlns:p="http://schemas.openxmlformats.org/presentationml/2006/main" showMasterPhAnim="0" showMasterSp="0">
+<p:notes xmlns:a="http://schemas.openxmlformats.org/drawingml/2006/main" xmlns:r="http://schemas.openxmlformats.org/officeDocument/2006/relationships" xmlns:p="http://schemas.openxmlformats.org/presentationml/2006/main" showMasterSp="0" showMasterPhAnim="0">
   <p:cSld>
     <p:spTree>
       <p:nvGrpSpPr>
@@ -9042,6 +9070,7 @@
                 <a:cs typeface="Arial" panose="020B0604020202020204"/>
                 <a:sym typeface="Arial" panose="020B0604020202020204"/>
               </a:rPr>
+              <a:t>43</a:t>
             </a:fld>
             <a:endParaRPr kumimoji="0" sz="1400" b="0" i="0" u="none" strike="noStrike" kern="0" cap="none" spc="0" normalizeH="0" baseline="0" noProof="0">
               <a:ln>
@@ -9070,7 +9099,7 @@
 </file>
 
 <file path=ppt/notesSlides/notesSlide45.xml><?xml version="1.0" encoding="utf-8"?>
-<p:notes xmlns:a="http://schemas.openxmlformats.org/drawingml/2006/main" xmlns:r="http://schemas.openxmlformats.org/officeDocument/2006/relationships" xmlns:p="http://schemas.openxmlformats.org/presentationml/2006/main" showMasterPhAnim="0" showMasterSp="0">
+<p:notes xmlns:a="http://schemas.openxmlformats.org/drawingml/2006/main" xmlns:r="http://schemas.openxmlformats.org/officeDocument/2006/relationships" xmlns:p="http://schemas.openxmlformats.org/presentationml/2006/main" showMasterSp="0" showMasterPhAnim="0">
   <p:cSld>
     <p:spTree>
       <p:nvGrpSpPr>
@@ -9254,6 +9283,7 @@
                 <a:cs typeface="Arial" panose="020B0604020202020204"/>
                 <a:sym typeface="Arial" panose="020B0604020202020204"/>
               </a:rPr>
+              <a:t>44</a:t>
             </a:fld>
             <a:endParaRPr kumimoji="0" sz="1400" b="0" i="0" u="none" strike="noStrike" kern="0" cap="none" spc="0" normalizeH="0" baseline="0" noProof="0">
               <a:ln>
@@ -9282,7 +9312,7 @@
 </file>
 
 <file path=ppt/notesSlides/notesSlide46.xml><?xml version="1.0" encoding="utf-8"?>
-<p:notes xmlns:a="http://schemas.openxmlformats.org/drawingml/2006/main" xmlns:r="http://schemas.openxmlformats.org/officeDocument/2006/relationships" xmlns:p="http://schemas.openxmlformats.org/presentationml/2006/main" showMasterPhAnim="0" showMasterSp="0">
+<p:notes xmlns:a="http://schemas.openxmlformats.org/drawingml/2006/main" xmlns:r="http://schemas.openxmlformats.org/officeDocument/2006/relationships" xmlns:p="http://schemas.openxmlformats.org/presentationml/2006/main" showMasterSp="0" showMasterPhAnim="0">
   <p:cSld>
     <p:spTree>
       <p:nvGrpSpPr>
@@ -9466,6 +9496,7 @@
                 <a:cs typeface="Arial" panose="020B0604020202020204"/>
                 <a:sym typeface="Arial" panose="020B0604020202020204"/>
               </a:rPr>
+              <a:t>45</a:t>
             </a:fld>
             <a:endParaRPr kumimoji="0" sz="1400" b="0" i="0" u="none" strike="noStrike" kern="0" cap="none" spc="0" normalizeH="0" baseline="0" noProof="0">
               <a:ln>
@@ -9494,7 +9525,7 @@
 </file>
 
 <file path=ppt/notesSlides/notesSlide47.xml><?xml version="1.0" encoding="utf-8"?>
-<p:notes xmlns:a="http://schemas.openxmlformats.org/drawingml/2006/main" xmlns:r="http://schemas.openxmlformats.org/officeDocument/2006/relationships" xmlns:p="http://schemas.openxmlformats.org/presentationml/2006/main" showMasterPhAnim="0" showMasterSp="0">
+<p:notes xmlns:a="http://schemas.openxmlformats.org/drawingml/2006/main" xmlns:r="http://schemas.openxmlformats.org/officeDocument/2006/relationships" xmlns:p="http://schemas.openxmlformats.org/presentationml/2006/main" showMasterSp="0" showMasterPhAnim="0">
   <p:cSld>
     <p:spTree>
       <p:nvGrpSpPr>
@@ -9678,6 +9709,7 @@
                 <a:cs typeface="Arial" panose="020B0604020202020204"/>
                 <a:sym typeface="Arial" panose="020B0604020202020204"/>
               </a:rPr>
+              <a:t>46</a:t>
             </a:fld>
             <a:endParaRPr kumimoji="0" sz="1400" b="0" i="0" u="none" strike="noStrike" kern="0" cap="none" spc="0" normalizeH="0" baseline="0" noProof="0">
               <a:ln>
@@ -9706,7 +9738,7 @@
 </file>
 
 <file path=ppt/notesSlides/notesSlide48.xml><?xml version="1.0" encoding="utf-8"?>
-<p:notes xmlns:a="http://schemas.openxmlformats.org/drawingml/2006/main" xmlns:r="http://schemas.openxmlformats.org/officeDocument/2006/relationships" xmlns:p="http://schemas.openxmlformats.org/presentationml/2006/main" showMasterPhAnim="0" showMasterSp="0">
+<p:notes xmlns:a="http://schemas.openxmlformats.org/drawingml/2006/main" xmlns:r="http://schemas.openxmlformats.org/officeDocument/2006/relationships" xmlns:p="http://schemas.openxmlformats.org/presentationml/2006/main" showMasterSp="0" showMasterPhAnim="0">
   <p:cSld>
     <p:spTree>
       <p:nvGrpSpPr>
@@ -9890,6 +9922,7 @@
                 <a:cs typeface="Arial" panose="020B0604020202020204"/>
                 <a:sym typeface="Arial" panose="020B0604020202020204"/>
               </a:rPr>
+              <a:t>47</a:t>
             </a:fld>
             <a:endParaRPr kumimoji="0" sz="1400" b="0" i="0" u="none" strike="noStrike" kern="0" cap="none" spc="0" normalizeH="0" baseline="0" noProof="0">
               <a:ln>
@@ -9918,7 +9951,7 @@
 </file>
 
 <file path=ppt/notesSlides/notesSlide49.xml><?xml version="1.0" encoding="utf-8"?>
-<p:notes xmlns:a="http://schemas.openxmlformats.org/drawingml/2006/main" xmlns:r="http://schemas.openxmlformats.org/officeDocument/2006/relationships" xmlns:p="http://schemas.openxmlformats.org/presentationml/2006/main" showMasterPhAnim="0" showMasterSp="0">
+<p:notes xmlns:a="http://schemas.openxmlformats.org/drawingml/2006/main" xmlns:r="http://schemas.openxmlformats.org/officeDocument/2006/relationships" xmlns:p="http://schemas.openxmlformats.org/presentationml/2006/main" showMasterSp="0" showMasterPhAnim="0">
   <p:cSld>
     <p:spTree>
       <p:nvGrpSpPr>
@@ -10099,6 +10132,7 @@
                 <a:cs typeface="Arial" panose="020B0604020202020204"/>
                 <a:sym typeface="Arial" panose="020B0604020202020204"/>
               </a:rPr>
+              <a:t>48</a:t>
             </a:fld>
             <a:endParaRPr kumimoji="0" sz="1400" b="0" i="0" u="none" strike="noStrike" kern="0" cap="none" spc="0" normalizeH="0" baseline="0" noProof="0" dirty="0">
               <a:ln>
@@ -10126,7 +10160,7 @@
 </file>
 
 <file path=ppt/notesSlides/notesSlide5.xml><?xml version="1.0" encoding="utf-8"?>
-<p:notes xmlns:a="http://schemas.openxmlformats.org/drawingml/2006/main" xmlns:r="http://schemas.openxmlformats.org/officeDocument/2006/relationships" xmlns:p="http://schemas.openxmlformats.org/presentationml/2006/main" showMasterPhAnim="0" showMasterSp="0">
+<p:notes xmlns:a="http://schemas.openxmlformats.org/drawingml/2006/main" xmlns:r="http://schemas.openxmlformats.org/officeDocument/2006/relationships" xmlns:p="http://schemas.openxmlformats.org/presentationml/2006/main" showMasterSp="0" showMasterPhAnim="0">
   <p:cSld>
     <p:spTree>
       <p:nvGrpSpPr>
@@ -10310,6 +10344,7 @@
                 <a:cs typeface="Arial" panose="020B0604020202020204"/>
                 <a:sym typeface="Arial" panose="020B0604020202020204"/>
               </a:rPr>
+              <a:t>4</a:t>
             </a:fld>
             <a:endParaRPr kumimoji="0" sz="1400" b="0" i="0" u="none" strike="noStrike" kern="0" cap="none" spc="0" normalizeH="0" baseline="0" noProof="0">
               <a:ln>
@@ -10388,7 +10423,7 @@
 </file>
 
 <file path=ppt/notesSlides/notesSlide6.xml><?xml version="1.0" encoding="utf-8"?>
-<p:notes xmlns:a="http://schemas.openxmlformats.org/drawingml/2006/main" xmlns:r="http://schemas.openxmlformats.org/officeDocument/2006/relationships" xmlns:p="http://schemas.openxmlformats.org/presentationml/2006/main" showMasterPhAnim="0" showMasterSp="0">
+<p:notes xmlns:a="http://schemas.openxmlformats.org/drawingml/2006/main" xmlns:r="http://schemas.openxmlformats.org/officeDocument/2006/relationships" xmlns:p="http://schemas.openxmlformats.org/presentationml/2006/main" showMasterSp="0" showMasterPhAnim="0">
   <p:cSld>
     <p:spTree>
       <p:nvGrpSpPr>
@@ -10572,6 +10607,7 @@
                 <a:cs typeface="Arial" panose="020B0604020202020204"/>
                 <a:sym typeface="Arial" panose="020B0604020202020204"/>
               </a:rPr>
+              <a:t>5</a:t>
             </a:fld>
             <a:endParaRPr kumimoji="0" sz="1400" b="0" i="0" u="none" strike="noStrike" kern="0" cap="none" spc="0" normalizeH="0" baseline="0" noProof="0">
               <a:ln>
@@ -10600,7 +10636,7 @@
 </file>
 
 <file path=ppt/notesSlides/notesSlide7.xml><?xml version="1.0" encoding="utf-8"?>
-<p:notes xmlns:a="http://schemas.openxmlformats.org/drawingml/2006/main" xmlns:r="http://schemas.openxmlformats.org/officeDocument/2006/relationships" xmlns:p="http://schemas.openxmlformats.org/presentationml/2006/main" showMasterPhAnim="0" showMasterSp="0">
+<p:notes xmlns:a="http://schemas.openxmlformats.org/drawingml/2006/main" xmlns:r="http://schemas.openxmlformats.org/officeDocument/2006/relationships" xmlns:p="http://schemas.openxmlformats.org/presentationml/2006/main" showMasterSp="0" showMasterPhAnim="0">
   <p:cSld>
     <p:spTree>
       <p:nvGrpSpPr>
@@ -10784,6 +10820,7 @@
                 <a:cs typeface="Arial" panose="020B0604020202020204"/>
                 <a:sym typeface="Arial" panose="020B0604020202020204"/>
               </a:rPr>
+              <a:t>6</a:t>
             </a:fld>
             <a:endParaRPr kumimoji="0" sz="1400" b="0" i="0" u="none" strike="noStrike" kern="0" cap="none" spc="0" normalizeH="0" baseline="0" noProof="0">
               <a:ln>
@@ -10812,7 +10849,7 @@
 </file>
 
 <file path=ppt/notesSlides/notesSlide8.xml><?xml version="1.0" encoding="utf-8"?>
-<p:notes xmlns:a="http://schemas.openxmlformats.org/drawingml/2006/main" xmlns:r="http://schemas.openxmlformats.org/officeDocument/2006/relationships" xmlns:p="http://schemas.openxmlformats.org/presentationml/2006/main" showMasterPhAnim="0" showMasterSp="0">
+<p:notes xmlns:a="http://schemas.openxmlformats.org/drawingml/2006/main" xmlns:r="http://schemas.openxmlformats.org/officeDocument/2006/relationships" xmlns:p="http://schemas.openxmlformats.org/presentationml/2006/main" showMasterSp="0" showMasterPhAnim="0">
   <p:cSld>
     <p:spTree>
       <p:nvGrpSpPr>
@@ -10996,6 +11033,7 @@
                 <a:cs typeface="Arial" panose="020B0604020202020204"/>
                 <a:sym typeface="Arial" panose="020B0604020202020204"/>
               </a:rPr>
+              <a:t>7</a:t>
             </a:fld>
             <a:endParaRPr kumimoji="0" sz="1400" b="0" i="0" u="none" strike="noStrike" kern="0" cap="none" spc="0" normalizeH="0" baseline="0" noProof="0">
               <a:ln>
@@ -11024,7 +11062,7 @@
 </file>
 
 <file path=ppt/notesSlides/notesSlide9.xml><?xml version="1.0" encoding="utf-8"?>
-<p:notes xmlns:a="http://schemas.openxmlformats.org/drawingml/2006/main" xmlns:r="http://schemas.openxmlformats.org/officeDocument/2006/relationships" xmlns:p="http://schemas.openxmlformats.org/presentationml/2006/main" showMasterPhAnim="0" showMasterSp="0">
+<p:notes xmlns:a="http://schemas.openxmlformats.org/drawingml/2006/main" xmlns:r="http://schemas.openxmlformats.org/officeDocument/2006/relationships" xmlns:p="http://schemas.openxmlformats.org/presentationml/2006/main" showMasterSp="0" showMasterPhAnim="0">
   <p:cSld>
     <p:spTree>
       <p:nvGrpSpPr>
@@ -11208,6 +11246,7 @@
                 <a:cs typeface="Arial" panose="020B0604020202020204"/>
                 <a:sym typeface="Arial" panose="020B0604020202020204"/>
               </a:rPr>
+              <a:t>8</a:t>
             </a:fld>
             <a:endParaRPr kumimoji="0" sz="1400" b="0" i="0" u="none" strike="noStrike" kern="0" cap="none" spc="0" normalizeH="0" baseline="0" noProof="0">
               <a:ln>
@@ -11236,7 +11275,7 @@
 </file>
 
 <file path=ppt/slideLayouts/slideLayout1.xml><?xml version="1.0" encoding="utf-8"?>
-<p:sldLayout xmlns:a="http://schemas.openxmlformats.org/drawingml/2006/main" xmlns:r="http://schemas.openxmlformats.org/officeDocument/2006/relationships" xmlns:p="http://schemas.openxmlformats.org/presentationml/2006/main" type="obj" matchingName="Title, Content">
+<p:sldLayout xmlns:a="http://schemas.openxmlformats.org/drawingml/2006/main" xmlns:r="http://schemas.openxmlformats.org/officeDocument/2006/relationships" xmlns:p="http://schemas.openxmlformats.org/presentationml/2006/main" matchingName="Title, Content" type="obj">
   <p:cSld name="OBJECT">
     <p:spTree>
       <p:nvGrpSpPr>
@@ -11407,7 +11446,9 @@
               <a:defRPr/>
             </a:lvl9pPr>
           </a:lstStyle>
-          <a:p/>
+          <a:p>
+            <a:endParaRPr/>
+          </a:p>
         </p:txBody>
       </p:sp>
       <p:sp>
@@ -11598,6 +11639,7 @@
                   <a:schemeClr val="bg1"/>
                 </a:solidFill>
               </a:rPr>
+              <a:t>‹#›</a:t>
             </a:fld>
             <a:r>
               <a:rPr lang="de-AT" dirty="0">
@@ -11607,11 +11649,6 @@
               </a:rPr>
               <a:t> / 50</a:t>
             </a:r>
-            <a:endParaRPr lang="de-AT" dirty="0">
-              <a:solidFill>
-                <a:schemeClr val="bg1"/>
-              </a:solidFill>
-            </a:endParaRPr>
           </a:p>
         </p:txBody>
       </p:sp>
@@ -11629,7 +11666,7 @@
     <p:bg>
       <p:bgPr>
         <a:blipFill dpi="0" rotWithShape="1">
-          <a:blip r:embed="rId2"/>
+          <a:blip r:embed="rId3"/>
           <a:srcRect/>
           <a:stretch>
             <a:fillRect/>
@@ -11659,7 +11696,7 @@
           <p:nvPr/>
         </p:nvPicPr>
         <p:blipFill rotWithShape="1">
-          <a:blip r:embed="rId3"/>
+          <a:blip r:embed="rId4"/>
           <a:srcRect/>
           <a:stretch>
             <a:fillRect/>
@@ -11686,7 +11723,7 @@
           <p:nvPr/>
         </p:nvPicPr>
         <p:blipFill rotWithShape="1">
-          <a:blip r:embed="rId4"/>
+          <a:blip r:embed="rId5"/>
           <a:srcRect/>
           <a:stretch>
             <a:fillRect/>
@@ -12483,7 +12520,7 @@
           <p:nvPr/>
         </p:nvPicPr>
         <p:blipFill rotWithShape="1">
-          <a:blip r:embed="rId1"/>
+          <a:blip r:embed="rId3"/>
           <a:srcRect/>
           <a:stretch>
             <a:fillRect/>
@@ -12563,15 +12600,6 @@
               </a:rPr>
               <a:t>Fundamentals of Computer Science and Programming</a:t>
             </a:r>
-            <a:endParaRPr lang="en-US" sz="4400" b="1" noProof="0" dirty="0">
-              <a:solidFill>
-                <a:schemeClr val="lt1"/>
-              </a:solidFill>
-              <a:latin typeface="Calibri" panose="020F0502020204030204"/>
-              <a:ea typeface="Calibri" panose="020F0502020204030204"/>
-              <a:cs typeface="Calibri" panose="020F0502020204030204"/>
-              <a:sym typeface="Calibri" panose="020F0502020204030204"/>
-            </a:endParaRPr>
           </a:p>
           <a:p>
             <a:pPr marL="0" marR="0" lvl="0" indent="0" algn="ctr" rtl="0">
@@ -12984,17 +13012,6 @@
               </a:rPr>
               <a:t>()</a:t>
             </a:r>
-            <a:endParaRPr lang="de-DE" sz="1800" dirty="0">
-              <a:solidFill>
-                <a:schemeClr val="tx1"/>
-              </a:solidFill>
-              <a:highlight>
-                <a:srgbClr val="DAE3F3"/>
-              </a:highlight>
-              <a:latin typeface="Consolas" panose="020B0609020204030204" pitchFamily="49" charset="0"/>
-              <a:ea typeface="Cambria Math" panose="02040503050406030204" pitchFamily="18" charset="0"/>
-              <a:cs typeface="Calibri" panose="020F0502020204030204" pitchFamily="34" charset="0"/>
-            </a:endParaRPr>
           </a:p>
           <a:p>
             <a:pPr marL="1200150" lvl="2" indent="-285750">
@@ -13032,17 +13049,6 @@
               </a:rPr>
               <a:t>()</a:t>
             </a:r>
-            <a:endParaRPr lang="de-DE" sz="1800" dirty="0">
-              <a:solidFill>
-                <a:schemeClr val="tx1"/>
-              </a:solidFill>
-              <a:highlight>
-                <a:srgbClr val="DAE3F3"/>
-              </a:highlight>
-              <a:latin typeface="Consolas" panose="020B0609020204030204" pitchFamily="49" charset="0"/>
-              <a:ea typeface="Cambria Math" panose="02040503050406030204" pitchFamily="18" charset="0"/>
-              <a:cs typeface="Calibri" panose="020F0502020204030204" pitchFamily="34" charset="0"/>
-            </a:endParaRPr>
           </a:p>
           <a:p>
             <a:pPr marL="742950" lvl="1" indent="-285750">
@@ -13190,17 +13196,6 @@
               </a:rPr>
               <a:t>()</a:t>
             </a:r>
-            <a:endParaRPr lang="de-DE" sz="1800" dirty="0">
-              <a:solidFill>
-                <a:schemeClr val="tx1"/>
-              </a:solidFill>
-              <a:highlight>
-                <a:srgbClr val="DAE3F3"/>
-              </a:highlight>
-              <a:latin typeface="Consolas" panose="020B0609020204030204" pitchFamily="49" charset="0"/>
-              <a:ea typeface="Cambria Math" panose="02040503050406030204" pitchFamily="18" charset="0"/>
-              <a:cs typeface="Calibri" panose="020F0502020204030204" pitchFamily="34" charset="0"/>
-            </a:endParaRPr>
           </a:p>
           <a:p>
             <a:pPr marL="1200150" lvl="2" indent="-285750">
@@ -13294,17 +13289,6 @@
               </a:rPr>
               <a:t>)</a:t>
             </a:r>
-            <a:endParaRPr lang="de-DE" sz="1800" dirty="0">
-              <a:solidFill>
-                <a:schemeClr val="tx1"/>
-              </a:solidFill>
-              <a:highlight>
-                <a:srgbClr val="DAE3F3"/>
-              </a:highlight>
-              <a:latin typeface="Consolas" panose="020B0609020204030204" pitchFamily="49" charset="0"/>
-              <a:ea typeface="Cambria Math" panose="02040503050406030204" pitchFamily="18" charset="0"/>
-              <a:cs typeface="Calibri" panose="020F0502020204030204" pitchFamily="34" charset="0"/>
-            </a:endParaRPr>
           </a:p>
           <a:p>
             <a:pPr marL="742950" lvl="1" indent="-285750">
@@ -13731,17 +13715,6 @@
               </a:rPr>
               <a:t>()</a:t>
             </a:r>
-            <a:endParaRPr lang="de-DE" sz="1800" dirty="0">
-              <a:solidFill>
-                <a:schemeClr val="tx1"/>
-              </a:solidFill>
-              <a:highlight>
-                <a:srgbClr val="DAE3F3"/>
-              </a:highlight>
-              <a:latin typeface="Consolas" panose="020B0609020204030204" pitchFamily="49" charset="0"/>
-              <a:ea typeface="Cambria Math" panose="02040503050406030204" pitchFamily="18" charset="0"/>
-              <a:cs typeface="Calibri" panose="020F0502020204030204" pitchFamily="34" charset="0"/>
-            </a:endParaRPr>
           </a:p>
           <a:p>
             <a:pPr marL="742950" lvl="1" indent="-285750">
@@ -13779,17 +13752,6 @@
               </a:rPr>
               <a:t>()</a:t>
             </a:r>
-            <a:endParaRPr lang="de-DE" sz="1800" dirty="0">
-              <a:solidFill>
-                <a:schemeClr val="tx1"/>
-              </a:solidFill>
-              <a:highlight>
-                <a:srgbClr val="DAE3F3"/>
-              </a:highlight>
-              <a:latin typeface="Consolas" panose="020B0609020204030204" pitchFamily="49" charset="0"/>
-              <a:ea typeface="Cambria Math" panose="02040503050406030204" pitchFamily="18" charset="0"/>
-              <a:cs typeface="Calibri" panose="020F0502020204030204" pitchFamily="34" charset="0"/>
-            </a:endParaRPr>
           </a:p>
           <a:p>
             <a:pPr marL="742950" lvl="1" indent="-285750">
@@ -13911,17 +13873,6 @@
               </a:rPr>
               <a:t>))</a:t>
             </a:r>
-            <a:endParaRPr lang="de-DE" sz="1800" dirty="0">
-              <a:solidFill>
-                <a:schemeClr val="tx1"/>
-              </a:solidFill>
-              <a:highlight>
-                <a:srgbClr val="DAE3F3"/>
-              </a:highlight>
-              <a:latin typeface="Consolas" panose="020B0609020204030204" pitchFamily="49" charset="0"/>
-              <a:ea typeface="Cambria Math" panose="02040503050406030204" pitchFamily="18" charset="0"/>
-              <a:cs typeface="Calibri" panose="020F0502020204030204" pitchFamily="34" charset="0"/>
-            </a:endParaRPr>
           </a:p>
           <a:p>
             <a:pPr marL="1200150" lvl="2" indent="-285750">
@@ -13981,17 +13932,6 @@
               </a:rPr>
               <a:t>[::-1]</a:t>
             </a:r>
-            <a:endParaRPr lang="de-DE" sz="1800" dirty="0">
-              <a:solidFill>
-                <a:schemeClr val="tx1"/>
-              </a:solidFill>
-              <a:highlight>
-                <a:srgbClr val="DAE3F3"/>
-              </a:highlight>
-              <a:latin typeface="Consolas" panose="020B0609020204030204" pitchFamily="49" charset="0"/>
-              <a:ea typeface="Cambria Math" panose="02040503050406030204" pitchFamily="18" charset="0"/>
-              <a:cs typeface="Calibri" panose="020F0502020204030204" pitchFamily="34" charset="0"/>
-            </a:endParaRPr>
           </a:p>
           <a:p>
             <a:pPr marL="285750" indent="-285750">
@@ -14310,17 +14250,6 @@
               </a:rPr>
               <a:t>()</a:t>
             </a:r>
-            <a:endParaRPr lang="de-DE" sz="1800" dirty="0">
-              <a:solidFill>
-                <a:schemeClr val="tx1"/>
-              </a:solidFill>
-              <a:highlight>
-                <a:srgbClr val="DAE3F3"/>
-              </a:highlight>
-              <a:latin typeface="Consolas" panose="020B0609020204030204" pitchFamily="49" charset="0"/>
-              <a:ea typeface="Cambria Math" panose="02040503050406030204" pitchFamily="18" charset="0"/>
-              <a:cs typeface="Calibri" panose="020F0502020204030204" pitchFamily="34" charset="0"/>
-            </a:endParaRPr>
           </a:p>
           <a:p>
             <a:pPr marL="742950" lvl="1" indent="-285750">
@@ -14406,6 +14335,189 @@
                 <a:cs typeface="Calibri" panose="020F0502020204030204" pitchFamily="34" charset="0"/>
               </a:rPr>
               <a:t>): </a:t>
+            </a:r>
+          </a:p>
+          <a:p>
+            <a:pPr marL="1200150" lvl="2" indent="-285750">
+              <a:spcBef>
+                <a:spcPts val="640"/>
+              </a:spcBef>
+              <a:buFont typeface="Wingdings" panose="05000000000000000000" pitchFamily="2" charset="2"/>
+              <a:buChar char="v"/>
+            </a:pPr>
+            <a:r>
+              <a:rPr lang="de-DE" sz="1800" dirty="0">
+                <a:solidFill>
+                  <a:schemeClr val="tx1"/>
+                </a:solidFill>
+                <a:latin typeface="Calibri" panose="020F0502020204030204" pitchFamily="34" charset="0"/>
+                <a:ea typeface="Cambria Math" panose="02040503050406030204" pitchFamily="18" charset="0"/>
+                <a:cs typeface="Calibri" panose="020F0502020204030204" pitchFamily="34" charset="0"/>
+              </a:rPr>
+              <a:t>Start (optional, </a:t>
+            </a:r>
+            <a:r>
+              <a:rPr lang="de-DE" sz="1800" dirty="0" err="1">
+                <a:solidFill>
+                  <a:schemeClr val="tx1"/>
+                </a:solidFill>
+                <a:latin typeface="Calibri" panose="020F0502020204030204" pitchFamily="34" charset="0"/>
+                <a:ea typeface="Cambria Math" panose="02040503050406030204" pitchFamily="18" charset="0"/>
+                <a:cs typeface="Calibri" panose="020F0502020204030204" pitchFamily="34" charset="0"/>
+              </a:rPr>
+              <a:t>default</a:t>
+            </a:r>
+            <a:r>
+              <a:rPr lang="de-DE" sz="1800" dirty="0">
+                <a:solidFill>
+                  <a:schemeClr val="tx1"/>
+                </a:solidFill>
+                <a:latin typeface="Calibri" panose="020F0502020204030204" pitchFamily="34" charset="0"/>
+                <a:ea typeface="Cambria Math" panose="02040503050406030204" pitchFamily="18" charset="0"/>
+                <a:cs typeface="Calibri" panose="020F0502020204030204" pitchFamily="34" charset="0"/>
+              </a:rPr>
+              <a:t> </a:t>
+            </a:r>
+            <a:r>
+              <a:rPr lang="de-DE" sz="1800" dirty="0" err="1">
+                <a:solidFill>
+                  <a:schemeClr val="tx1"/>
+                </a:solidFill>
+                <a:latin typeface="Calibri" panose="020F0502020204030204" pitchFamily="34" charset="0"/>
+                <a:ea typeface="Cambria Math" panose="02040503050406030204" pitchFamily="18" charset="0"/>
+                <a:cs typeface="Calibri" panose="020F0502020204030204" pitchFamily="34" charset="0"/>
+              </a:rPr>
+              <a:t>value</a:t>
+            </a:r>
+            <a:r>
+              <a:rPr lang="de-DE" sz="1800" dirty="0">
+                <a:solidFill>
+                  <a:schemeClr val="tx1"/>
+                </a:solidFill>
+                <a:latin typeface="Calibri" panose="020F0502020204030204" pitchFamily="34" charset="0"/>
+                <a:ea typeface="Cambria Math" panose="02040503050406030204" pitchFamily="18" charset="0"/>
+                <a:cs typeface="Calibri" panose="020F0502020204030204" pitchFamily="34" charset="0"/>
+              </a:rPr>
+              <a:t> 0), end, </a:t>
+            </a:r>
+            <a:r>
+              <a:rPr lang="de-DE" sz="1800" dirty="0" err="1">
+                <a:solidFill>
+                  <a:schemeClr val="tx1"/>
+                </a:solidFill>
+                <a:latin typeface="Calibri" panose="020F0502020204030204" pitchFamily="34" charset="0"/>
+                <a:ea typeface="Cambria Math" panose="02040503050406030204" pitchFamily="18" charset="0"/>
+                <a:cs typeface="Calibri" panose="020F0502020204030204" pitchFamily="34" charset="0"/>
+              </a:rPr>
+              <a:t>step</a:t>
+            </a:r>
+            <a:r>
+              <a:rPr lang="de-DE" sz="1800" dirty="0">
+                <a:solidFill>
+                  <a:schemeClr val="tx1"/>
+                </a:solidFill>
+                <a:latin typeface="Calibri" panose="020F0502020204030204" pitchFamily="34" charset="0"/>
+                <a:ea typeface="Cambria Math" panose="02040503050406030204" pitchFamily="18" charset="0"/>
+                <a:cs typeface="Calibri" panose="020F0502020204030204" pitchFamily="34" charset="0"/>
+              </a:rPr>
+              <a:t> </a:t>
+            </a:r>
+            <a:r>
+              <a:rPr lang="de-DE" sz="1800" dirty="0" err="1">
+                <a:solidFill>
+                  <a:schemeClr val="tx1"/>
+                </a:solidFill>
+                <a:latin typeface="Calibri" panose="020F0502020204030204" pitchFamily="34" charset="0"/>
+                <a:ea typeface="Cambria Math" panose="02040503050406030204" pitchFamily="18" charset="0"/>
+                <a:cs typeface="Calibri" panose="020F0502020204030204" pitchFamily="34" charset="0"/>
+              </a:rPr>
+              <a:t>size</a:t>
+            </a:r>
+            <a:r>
+              <a:rPr lang="de-DE" sz="1800" dirty="0">
+                <a:solidFill>
+                  <a:schemeClr val="tx1"/>
+                </a:solidFill>
+                <a:latin typeface="Calibri" panose="020F0502020204030204" pitchFamily="34" charset="0"/>
+                <a:ea typeface="Cambria Math" panose="02040503050406030204" pitchFamily="18" charset="0"/>
+                <a:cs typeface="Calibri" panose="020F0502020204030204" pitchFamily="34" charset="0"/>
+              </a:rPr>
+              <a:t> (optional)</a:t>
+            </a:r>
+          </a:p>
+          <a:p>
+            <a:pPr marL="1200150" lvl="2" indent="-285750">
+              <a:spcBef>
+                <a:spcPts val="640"/>
+              </a:spcBef>
+              <a:buFont typeface="Wingdings" panose="05000000000000000000" pitchFamily="2" charset="2"/>
+              <a:buChar char="v"/>
+            </a:pPr>
+            <a:r>
+              <a:rPr lang="de-DE" sz="1800" dirty="0">
+                <a:solidFill>
+                  <a:schemeClr val="tx1"/>
+                </a:solidFill>
+                <a:latin typeface="Calibri" panose="020F0502020204030204" pitchFamily="34" charset="0"/>
+                <a:ea typeface="Cambria Math" panose="02040503050406030204" pitchFamily="18" charset="0"/>
+                <a:cs typeface="Calibri" panose="020F0502020204030204" pitchFamily="34" charset="0"/>
+              </a:rPr>
+              <a:t>Start </a:t>
+            </a:r>
+            <a:r>
+              <a:rPr lang="de-DE" sz="1800" dirty="0" err="1">
+                <a:solidFill>
+                  <a:schemeClr val="tx1"/>
+                </a:solidFill>
+                <a:latin typeface="Calibri" panose="020F0502020204030204" pitchFamily="34" charset="0"/>
+                <a:ea typeface="Cambria Math" panose="02040503050406030204" pitchFamily="18" charset="0"/>
+                <a:cs typeface="Calibri" panose="020F0502020204030204" pitchFamily="34" charset="0"/>
+              </a:rPr>
+              <a:t>is</a:t>
+            </a:r>
+            <a:r>
+              <a:rPr lang="de-DE" sz="1800" dirty="0">
+                <a:solidFill>
+                  <a:schemeClr val="tx1"/>
+                </a:solidFill>
+                <a:latin typeface="Calibri" panose="020F0502020204030204" pitchFamily="34" charset="0"/>
+                <a:ea typeface="Cambria Math" panose="02040503050406030204" pitchFamily="18" charset="0"/>
+                <a:cs typeface="Calibri" panose="020F0502020204030204" pitchFamily="34" charset="0"/>
+              </a:rPr>
+              <a:t> inclusive, end </a:t>
+            </a:r>
+            <a:r>
+              <a:rPr lang="de-DE" sz="1800" dirty="0" err="1">
+                <a:solidFill>
+                  <a:schemeClr val="tx1"/>
+                </a:solidFill>
+                <a:latin typeface="Calibri" panose="020F0502020204030204" pitchFamily="34" charset="0"/>
+                <a:ea typeface="Cambria Math" panose="02040503050406030204" pitchFamily="18" charset="0"/>
+                <a:cs typeface="Calibri" panose="020F0502020204030204" pitchFamily="34" charset="0"/>
+              </a:rPr>
+              <a:t>is</a:t>
+            </a:r>
+            <a:r>
+              <a:rPr lang="de-DE" sz="1800" dirty="0">
+                <a:solidFill>
+                  <a:schemeClr val="tx1"/>
+                </a:solidFill>
+                <a:latin typeface="Calibri" panose="020F0502020204030204" pitchFamily="34" charset="0"/>
+                <a:ea typeface="Cambria Math" panose="02040503050406030204" pitchFamily="18" charset="0"/>
+                <a:cs typeface="Calibri" panose="020F0502020204030204" pitchFamily="34" charset="0"/>
+              </a:rPr>
+              <a:t> </a:t>
+            </a:r>
+            <a:r>
+              <a:rPr lang="de-DE" sz="1800" dirty="0" err="1">
+                <a:solidFill>
+                  <a:schemeClr val="tx1"/>
+                </a:solidFill>
+                <a:latin typeface="Calibri" panose="020F0502020204030204" pitchFamily="34" charset="0"/>
+                <a:ea typeface="Cambria Math" panose="02040503050406030204" pitchFamily="18" charset="0"/>
+                <a:cs typeface="Calibri" panose="020F0502020204030204" pitchFamily="34" charset="0"/>
+              </a:rPr>
+              <a:t>exclusive</a:t>
             </a:r>
             <a:endParaRPr lang="de-DE" sz="1800" dirty="0">
               <a:solidFill>
@@ -14417,205 +14529,6 @@
             </a:endParaRPr>
           </a:p>
           <a:p>
-            <a:pPr marL="1200150" lvl="2" indent="-285750">
-              <a:spcBef>
-                <a:spcPts val="640"/>
-              </a:spcBef>
-              <a:buFont typeface="Wingdings" panose="05000000000000000000" pitchFamily="2" charset="2"/>
-              <a:buChar char="v"/>
-            </a:pPr>
-            <a:r>
-              <a:rPr lang="de-DE" sz="1800" dirty="0">
-                <a:solidFill>
-                  <a:schemeClr val="tx1"/>
-                </a:solidFill>
-                <a:latin typeface="Calibri" panose="020F0502020204030204" pitchFamily="34" charset="0"/>
-                <a:ea typeface="Cambria Math" panose="02040503050406030204" pitchFamily="18" charset="0"/>
-                <a:cs typeface="Calibri" panose="020F0502020204030204" pitchFamily="34" charset="0"/>
-              </a:rPr>
-              <a:t>Start (optional, </a:t>
-            </a:r>
-            <a:r>
-              <a:rPr lang="de-DE" sz="1800" dirty="0" err="1">
-                <a:solidFill>
-                  <a:schemeClr val="tx1"/>
-                </a:solidFill>
-                <a:latin typeface="Calibri" panose="020F0502020204030204" pitchFamily="34" charset="0"/>
-                <a:ea typeface="Cambria Math" panose="02040503050406030204" pitchFamily="18" charset="0"/>
-                <a:cs typeface="Calibri" panose="020F0502020204030204" pitchFamily="34" charset="0"/>
-              </a:rPr>
-              <a:t>default</a:t>
-            </a:r>
-            <a:r>
-              <a:rPr lang="de-DE" sz="1800" dirty="0">
-                <a:solidFill>
-                  <a:schemeClr val="tx1"/>
-                </a:solidFill>
-                <a:latin typeface="Calibri" panose="020F0502020204030204" pitchFamily="34" charset="0"/>
-                <a:ea typeface="Cambria Math" panose="02040503050406030204" pitchFamily="18" charset="0"/>
-                <a:cs typeface="Calibri" panose="020F0502020204030204" pitchFamily="34" charset="0"/>
-              </a:rPr>
-              <a:t> </a:t>
-            </a:r>
-            <a:r>
-              <a:rPr lang="de-DE" sz="1800" dirty="0" err="1">
-                <a:solidFill>
-                  <a:schemeClr val="tx1"/>
-                </a:solidFill>
-                <a:latin typeface="Calibri" panose="020F0502020204030204" pitchFamily="34" charset="0"/>
-                <a:ea typeface="Cambria Math" panose="02040503050406030204" pitchFamily="18" charset="0"/>
-                <a:cs typeface="Calibri" panose="020F0502020204030204" pitchFamily="34" charset="0"/>
-              </a:rPr>
-              <a:t>value</a:t>
-            </a:r>
-            <a:r>
-              <a:rPr lang="de-DE" sz="1800" dirty="0">
-                <a:solidFill>
-                  <a:schemeClr val="tx1"/>
-                </a:solidFill>
-                <a:latin typeface="Calibri" panose="020F0502020204030204" pitchFamily="34" charset="0"/>
-                <a:ea typeface="Cambria Math" panose="02040503050406030204" pitchFamily="18" charset="0"/>
-                <a:cs typeface="Calibri" panose="020F0502020204030204" pitchFamily="34" charset="0"/>
-              </a:rPr>
-              <a:t> 0), end, </a:t>
-            </a:r>
-            <a:r>
-              <a:rPr lang="de-DE" sz="1800" dirty="0" err="1">
-                <a:solidFill>
-                  <a:schemeClr val="tx1"/>
-                </a:solidFill>
-                <a:latin typeface="Calibri" panose="020F0502020204030204" pitchFamily="34" charset="0"/>
-                <a:ea typeface="Cambria Math" panose="02040503050406030204" pitchFamily="18" charset="0"/>
-                <a:cs typeface="Calibri" panose="020F0502020204030204" pitchFamily="34" charset="0"/>
-              </a:rPr>
-              <a:t>step</a:t>
-            </a:r>
-            <a:r>
-              <a:rPr lang="de-DE" sz="1800" dirty="0">
-                <a:solidFill>
-                  <a:schemeClr val="tx1"/>
-                </a:solidFill>
-                <a:latin typeface="Calibri" panose="020F0502020204030204" pitchFamily="34" charset="0"/>
-                <a:ea typeface="Cambria Math" panose="02040503050406030204" pitchFamily="18" charset="0"/>
-                <a:cs typeface="Calibri" panose="020F0502020204030204" pitchFamily="34" charset="0"/>
-              </a:rPr>
-              <a:t> </a:t>
-            </a:r>
-            <a:r>
-              <a:rPr lang="de-DE" sz="1800" dirty="0" err="1">
-                <a:solidFill>
-                  <a:schemeClr val="tx1"/>
-                </a:solidFill>
-                <a:latin typeface="Calibri" panose="020F0502020204030204" pitchFamily="34" charset="0"/>
-                <a:ea typeface="Cambria Math" panose="02040503050406030204" pitchFamily="18" charset="0"/>
-                <a:cs typeface="Calibri" panose="020F0502020204030204" pitchFamily="34" charset="0"/>
-              </a:rPr>
-              <a:t>size</a:t>
-            </a:r>
-            <a:r>
-              <a:rPr lang="de-DE" sz="1800" dirty="0">
-                <a:solidFill>
-                  <a:schemeClr val="tx1"/>
-                </a:solidFill>
-                <a:latin typeface="Calibri" panose="020F0502020204030204" pitchFamily="34" charset="0"/>
-                <a:ea typeface="Cambria Math" panose="02040503050406030204" pitchFamily="18" charset="0"/>
-                <a:cs typeface="Calibri" panose="020F0502020204030204" pitchFamily="34" charset="0"/>
-              </a:rPr>
-              <a:t> (optional)</a:t>
-            </a:r>
-            <a:endParaRPr lang="de-DE" sz="1800" dirty="0">
-              <a:solidFill>
-                <a:schemeClr val="tx1"/>
-              </a:solidFill>
-              <a:latin typeface="Calibri" panose="020F0502020204030204" pitchFamily="34" charset="0"/>
-              <a:ea typeface="Cambria Math" panose="02040503050406030204" pitchFamily="18" charset="0"/>
-              <a:cs typeface="Calibri" panose="020F0502020204030204" pitchFamily="34" charset="0"/>
-            </a:endParaRPr>
-          </a:p>
-          <a:p>
-            <a:pPr marL="1200150" lvl="2" indent="-285750">
-              <a:spcBef>
-                <a:spcPts val="640"/>
-              </a:spcBef>
-              <a:buFont typeface="Wingdings" panose="05000000000000000000" pitchFamily="2" charset="2"/>
-              <a:buChar char="v"/>
-            </a:pPr>
-            <a:r>
-              <a:rPr lang="de-DE" sz="1800" dirty="0">
-                <a:solidFill>
-                  <a:schemeClr val="tx1"/>
-                </a:solidFill>
-                <a:latin typeface="Calibri" panose="020F0502020204030204" pitchFamily="34" charset="0"/>
-                <a:ea typeface="Cambria Math" panose="02040503050406030204" pitchFamily="18" charset="0"/>
-                <a:cs typeface="Calibri" panose="020F0502020204030204" pitchFamily="34" charset="0"/>
-              </a:rPr>
-              <a:t>Start </a:t>
-            </a:r>
-            <a:r>
-              <a:rPr lang="de-DE" sz="1800" dirty="0" err="1">
-                <a:solidFill>
-                  <a:schemeClr val="tx1"/>
-                </a:solidFill>
-                <a:latin typeface="Calibri" panose="020F0502020204030204" pitchFamily="34" charset="0"/>
-                <a:ea typeface="Cambria Math" panose="02040503050406030204" pitchFamily="18" charset="0"/>
-                <a:cs typeface="Calibri" panose="020F0502020204030204" pitchFamily="34" charset="0"/>
-              </a:rPr>
-              <a:t>is</a:t>
-            </a:r>
-            <a:r>
-              <a:rPr lang="de-DE" sz="1800" dirty="0">
-                <a:solidFill>
-                  <a:schemeClr val="tx1"/>
-                </a:solidFill>
-                <a:latin typeface="Calibri" panose="020F0502020204030204" pitchFamily="34" charset="0"/>
-                <a:ea typeface="Cambria Math" panose="02040503050406030204" pitchFamily="18" charset="0"/>
-                <a:cs typeface="Calibri" panose="020F0502020204030204" pitchFamily="34" charset="0"/>
-              </a:rPr>
-              <a:t> inclusive, end </a:t>
-            </a:r>
-            <a:r>
-              <a:rPr lang="de-DE" sz="1800" dirty="0" err="1">
-                <a:solidFill>
-                  <a:schemeClr val="tx1"/>
-                </a:solidFill>
-                <a:latin typeface="Calibri" panose="020F0502020204030204" pitchFamily="34" charset="0"/>
-                <a:ea typeface="Cambria Math" panose="02040503050406030204" pitchFamily="18" charset="0"/>
-                <a:cs typeface="Calibri" panose="020F0502020204030204" pitchFamily="34" charset="0"/>
-              </a:rPr>
-              <a:t>is</a:t>
-            </a:r>
-            <a:r>
-              <a:rPr lang="de-DE" sz="1800" dirty="0">
-                <a:solidFill>
-                  <a:schemeClr val="tx1"/>
-                </a:solidFill>
-                <a:latin typeface="Calibri" panose="020F0502020204030204" pitchFamily="34" charset="0"/>
-                <a:ea typeface="Cambria Math" panose="02040503050406030204" pitchFamily="18" charset="0"/>
-                <a:cs typeface="Calibri" panose="020F0502020204030204" pitchFamily="34" charset="0"/>
-              </a:rPr>
-              <a:t> </a:t>
-            </a:r>
-            <a:r>
-              <a:rPr lang="de-DE" sz="1800" dirty="0" err="1">
-                <a:solidFill>
-                  <a:schemeClr val="tx1"/>
-                </a:solidFill>
-                <a:latin typeface="Calibri" panose="020F0502020204030204" pitchFamily="34" charset="0"/>
-                <a:ea typeface="Cambria Math" panose="02040503050406030204" pitchFamily="18" charset="0"/>
-                <a:cs typeface="Calibri" panose="020F0502020204030204" pitchFamily="34" charset="0"/>
-              </a:rPr>
-              <a:t>exclusive</a:t>
-            </a:r>
-            <a:endParaRPr lang="de-DE" sz="1800" dirty="0">
-              <a:solidFill>
-                <a:schemeClr val="tx1"/>
-              </a:solidFill>
-              <a:latin typeface="Calibri" panose="020F0502020204030204" pitchFamily="34" charset="0"/>
-              <a:ea typeface="Cambria Math" panose="02040503050406030204" pitchFamily="18" charset="0"/>
-              <a:cs typeface="Calibri" panose="020F0502020204030204" pitchFamily="34" charset="0"/>
-            </a:endParaRPr>
-          </a:p>
-          <a:p>
             <a:pPr marL="285750" indent="-285750">
               <a:spcBef>
                 <a:spcPts val="640"/>
@@ -14645,14 +14558,6 @@
               </a:rPr>
               <a:t>:</a:t>
             </a:r>
-            <a:endParaRPr lang="de-DE" sz="1800" dirty="0">
-              <a:solidFill>
-                <a:schemeClr val="tx1"/>
-              </a:solidFill>
-              <a:latin typeface="Calibri" panose="020F0502020204030204" pitchFamily="34" charset="0"/>
-              <a:ea typeface="Cambria Math" panose="02040503050406030204" pitchFamily="18" charset="0"/>
-              <a:cs typeface="Calibri" panose="020F0502020204030204" pitchFamily="34" charset="0"/>
-            </a:endParaRPr>
           </a:p>
           <a:p>
             <a:pPr marL="742950" lvl="1" indent="-285750">
@@ -14684,14 +14589,6 @@
               </a:rPr>
               <a:t>(4)</a:t>
             </a:r>
-            <a:endParaRPr lang="de-DE" sz="1800" dirty="0">
-              <a:solidFill>
-                <a:schemeClr val="tx1"/>
-              </a:solidFill>
-              <a:latin typeface="Consolas" panose="020B0609020204030204" pitchFamily="49" charset="0"/>
-              <a:ea typeface="Cambria Math" panose="02040503050406030204" pitchFamily="18" charset="0"/>
-              <a:cs typeface="Calibri" panose="020F0502020204030204" pitchFamily="34" charset="0"/>
-            </a:endParaRPr>
           </a:p>
           <a:p>
             <a:pPr marL="742950" lvl="1" indent="-285750">
@@ -14723,14 +14620,6 @@
               </a:rPr>
               <a:t>(1,4)</a:t>
             </a:r>
-            <a:endParaRPr lang="de-DE" sz="1800" dirty="0">
-              <a:solidFill>
-                <a:schemeClr val="tx1"/>
-              </a:solidFill>
-              <a:latin typeface="Consolas" panose="020B0609020204030204" pitchFamily="49" charset="0"/>
-              <a:ea typeface="Cambria Math" panose="02040503050406030204" pitchFamily="18" charset="0"/>
-              <a:cs typeface="Calibri" panose="020F0502020204030204" pitchFamily="34" charset="0"/>
-            </a:endParaRPr>
           </a:p>
           <a:p>
             <a:pPr marL="742950" lvl="1" indent="-285750">
@@ -14762,14 +14651,6 @@
               </a:rPr>
               <a:t>(1, 10, 3)</a:t>
             </a:r>
-            <a:endParaRPr lang="de-DE" sz="1800" dirty="0">
-              <a:solidFill>
-                <a:schemeClr val="tx1"/>
-              </a:solidFill>
-              <a:latin typeface="Consolas" panose="020B0609020204030204" pitchFamily="49" charset="0"/>
-              <a:ea typeface="Cambria Math" panose="02040503050406030204" pitchFamily="18" charset="0"/>
-              <a:cs typeface="Calibri" panose="020F0502020204030204" pitchFamily="34" charset="0"/>
-            </a:endParaRPr>
           </a:p>
           <a:p>
             <a:pPr marL="285750" indent="-285750">
@@ -14956,17 +14837,6 @@
               </a:rPr>
               <a:t>())</a:t>
             </a:r>
-            <a:endParaRPr lang="de-DE" sz="1800" dirty="0">
-              <a:solidFill>
-                <a:schemeClr val="tx1"/>
-              </a:solidFill>
-              <a:highlight>
-                <a:srgbClr val="DAE3F3"/>
-              </a:highlight>
-              <a:latin typeface="Consolas" panose="020B0609020204030204" pitchFamily="49" charset="0"/>
-              <a:ea typeface="Cambria Math" panose="02040503050406030204" pitchFamily="18" charset="0"/>
-              <a:cs typeface="Calibri" panose="020F0502020204030204" pitchFamily="34" charset="0"/>
-            </a:endParaRPr>
           </a:p>
           <a:p>
             <a:pPr marL="0" indent="0">
@@ -15409,14 +15279,6 @@
               </a:rPr>
               <a:t>)</a:t>
             </a:r>
-            <a:endParaRPr lang="de-AT" sz="1800" dirty="0">
-              <a:highlight>
-                <a:srgbClr val="DAE3F3"/>
-              </a:highlight>
-              <a:latin typeface="Consolas" panose="020B0609020204030204" pitchFamily="49" charset="0"/>
-              <a:ea typeface="Calibri" panose="020F0502020204030204" pitchFamily="34" charset="0"/>
-              <a:cs typeface="Calibri" panose="020F0502020204030204" pitchFamily="34" charset="0"/>
-            </a:endParaRPr>
           </a:p>
           <a:p>
             <a:pPr marL="0" indent="-285750">
@@ -15475,14 +15337,6 @@
               </a:rPr>
               <a:t>)</a:t>
             </a:r>
-            <a:endParaRPr lang="de-AT" sz="1800" dirty="0">
-              <a:highlight>
-                <a:srgbClr val="DAE3F3"/>
-              </a:highlight>
-              <a:latin typeface="Consolas" panose="020B0609020204030204" pitchFamily="49" charset="0"/>
-              <a:ea typeface="Calibri" panose="020F0502020204030204" pitchFamily="34" charset="0"/>
-              <a:cs typeface="Calibri" panose="020F0502020204030204" pitchFamily="34" charset="0"/>
-            </a:endParaRPr>
           </a:p>
           <a:p>
             <a:pPr marL="0" indent="-285750">
@@ -15549,14 +15403,6 @@
               </a:rPr>
               <a:t>)</a:t>
             </a:r>
-            <a:endParaRPr lang="de-AT" sz="1800" dirty="0">
-              <a:highlight>
-                <a:srgbClr val="DAE3F3"/>
-              </a:highlight>
-              <a:latin typeface="Consolas" panose="020B0609020204030204" pitchFamily="49" charset="0"/>
-              <a:ea typeface="Calibri" panose="020F0502020204030204" pitchFamily="34" charset="0"/>
-              <a:cs typeface="Calibri" panose="020F0502020204030204" pitchFamily="34" charset="0"/>
-            </a:endParaRPr>
           </a:p>
           <a:p>
             <a:pPr marL="0" indent="-285750">
@@ -15659,14 +15505,6 @@
               </a:rPr>
               <a:t>)</a:t>
             </a:r>
-            <a:endParaRPr lang="de-AT" sz="1800" dirty="0">
-              <a:highlight>
-                <a:srgbClr val="DAE3F3"/>
-              </a:highlight>
-              <a:latin typeface="Consolas" panose="020B0609020204030204" pitchFamily="49" charset="0"/>
-              <a:ea typeface="Calibri" panose="020F0502020204030204" pitchFamily="34" charset="0"/>
-              <a:cs typeface="Calibri" panose="020F0502020204030204" pitchFamily="34" charset="0"/>
-            </a:endParaRPr>
           </a:p>
           <a:p>
             <a:pPr marL="0" indent="0">
@@ -16825,14 +16663,6 @@
               </a:rPr>
               <a:t>[1]</a:t>
             </a:r>
-            <a:endParaRPr lang="de-DE" sz="1800" dirty="0">
-              <a:highlight>
-                <a:srgbClr val="DAE3F3"/>
-              </a:highlight>
-              <a:latin typeface="Consolas" panose="020B0609020204030204" pitchFamily="49" charset="0"/>
-              <a:ea typeface="Cambria Math" panose="02040503050406030204" pitchFamily="18" charset="0"/>
-              <a:cs typeface="Calibri" panose="020F0502020204030204" pitchFamily="34" charset="0"/>
-            </a:endParaRPr>
           </a:p>
           <a:p>
             <a:pPr marL="285750" indent="-285750">
@@ -16938,11 +16768,6 @@
               </a:rPr>
               <a:t>)</a:t>
             </a:r>
-            <a:endParaRPr lang="de-DE" sz="1800" dirty="0">
-              <a:latin typeface="Calibri" panose="020F0502020204030204" pitchFamily="34" charset="0"/>
-              <a:ea typeface="Cambria Math" panose="02040503050406030204" pitchFamily="18" charset="0"/>
-              <a:cs typeface="Calibri" panose="020F0502020204030204" pitchFamily="34" charset="0"/>
-            </a:endParaRPr>
           </a:p>
           <a:p>
             <a:pPr marL="285750" indent="-285750">
@@ -16984,11 +16809,6 @@
               </a:rPr>
               <a:t>:</a:t>
             </a:r>
-            <a:endParaRPr lang="de-DE" sz="1800" dirty="0">
-              <a:latin typeface="Calibri" panose="020F0502020204030204" pitchFamily="34" charset="0"/>
-              <a:ea typeface="Cambria Math" panose="02040503050406030204" pitchFamily="18" charset="0"/>
-              <a:cs typeface="Calibri" panose="020F0502020204030204" pitchFamily="34" charset="0"/>
-            </a:endParaRPr>
           </a:p>
           <a:p>
             <a:pPr marL="742950" lvl="1" indent="-285750">
@@ -17150,14 +16970,6 @@
               </a:rPr>
               <a:t>()</a:t>
             </a:r>
-            <a:endParaRPr lang="de-DE" sz="1800" dirty="0">
-              <a:highlight>
-                <a:srgbClr val="DAE3F3"/>
-              </a:highlight>
-              <a:latin typeface="Consolas" panose="020B0609020204030204" pitchFamily="49" charset="0"/>
-              <a:ea typeface="Cambria Math" panose="02040503050406030204" pitchFamily="18" charset="0"/>
-              <a:cs typeface="Calibri" panose="020F0502020204030204" pitchFamily="34" charset="0"/>
-            </a:endParaRPr>
           </a:p>
           <a:p>
             <a:pPr marL="285750" indent="-285750">
@@ -17191,11 +17003,6 @@
               </a:rPr>
               <a:t>!</a:t>
             </a:r>
-            <a:endParaRPr lang="de-DE" sz="1800" dirty="0">
-              <a:latin typeface="Calibri" panose="020F0502020204030204" pitchFamily="34" charset="0"/>
-              <a:ea typeface="Calibri" panose="020F0502020204030204" pitchFamily="34" charset="0"/>
-              <a:cs typeface="Calibri" panose="020F0502020204030204" pitchFamily="34" charset="0"/>
-            </a:endParaRPr>
           </a:p>
         </p:txBody>
       </p:sp>
@@ -17617,11 +17424,6 @@
               </a:rPr>
               <a:t>Iterating (traversing) sequences (e. g., lists)</a:t>
             </a:r>
-            <a:endParaRPr lang="en-US" sz="1800" dirty="0">
-              <a:latin typeface="Calibri" panose="020F0502020204030204" pitchFamily="34" charset="0"/>
-              <a:ea typeface="Calibri" panose="020F0502020204030204" pitchFamily="34" charset="0"/>
-              <a:cs typeface="Calibri" panose="020F0502020204030204" pitchFamily="34" charset="0"/>
-            </a:endParaRPr>
           </a:p>
           <a:p>
             <a:pPr marL="285750" indent="-285750">
@@ -17663,11 +17465,6 @@
               </a:rPr>
               <a:t> a sequence:</a:t>
             </a:r>
-            <a:endParaRPr lang="en-US" sz="1800" dirty="0">
-              <a:latin typeface="Calibri" panose="020F0502020204030204" pitchFamily="34" charset="0"/>
-              <a:ea typeface="Calibri" panose="020F0502020204030204" pitchFamily="34" charset="0"/>
-              <a:cs typeface="Calibri" panose="020F0502020204030204" pitchFamily="34" charset="0"/>
-            </a:endParaRPr>
           </a:p>
           <a:p>
             <a:pPr marL="742950" lvl="1" indent="-285750">
@@ -17685,11 +17482,6 @@
               </a:rPr>
               <a:t>Execute instructions</a:t>
             </a:r>
-            <a:endParaRPr lang="en-US" sz="1800" dirty="0">
-              <a:latin typeface="Calibri" panose="020F0502020204030204" pitchFamily="34" charset="0"/>
-              <a:ea typeface="Calibri" panose="020F0502020204030204" pitchFamily="34" charset="0"/>
-              <a:cs typeface="Calibri" panose="020F0502020204030204" pitchFamily="34" charset="0"/>
-            </a:endParaRPr>
           </a:p>
           <a:p>
             <a:pPr marL="285750" indent="-285750">
@@ -17723,11 +17515,6 @@
               </a:rPr>
               <a:t> loops:</a:t>
             </a:r>
-            <a:endParaRPr lang="en-US" sz="1800" dirty="0">
-              <a:latin typeface="Calibri" panose="020F0502020204030204" pitchFamily="34" charset="0"/>
-              <a:ea typeface="Calibri" panose="020F0502020204030204" pitchFamily="34" charset="0"/>
-              <a:cs typeface="Calibri" panose="020F0502020204030204" pitchFamily="34" charset="0"/>
-            </a:endParaRPr>
           </a:p>
           <a:p>
             <a:pPr marL="457200" lvl="1" indent="0">
@@ -17768,14 +17555,6 @@
               </a:rPr>
               <a:t>:</a:t>
             </a:r>
-            <a:endParaRPr lang="en-US" sz="1800" dirty="0">
-              <a:highlight>
-                <a:srgbClr val="DAE3F3"/>
-              </a:highlight>
-              <a:latin typeface="Consolas" panose="020B0609020204030204" pitchFamily="49" charset="0"/>
-              <a:ea typeface="Calibri" panose="020F0502020204030204" pitchFamily="34" charset="0"/>
-              <a:cs typeface="Calibri" panose="020F0502020204030204" pitchFamily="34" charset="0"/>
-            </a:endParaRPr>
           </a:p>
           <a:p>
             <a:pPr marL="914400" lvl="2" indent="0">
@@ -17816,11 +17595,6 @@
               </a:rPr>
               <a:t>Loop (iterating) variables can have arbitrary names</a:t>
             </a:r>
-            <a:endParaRPr lang="en-US" sz="1800" dirty="0">
-              <a:latin typeface="Calibri" panose="020F0502020204030204" pitchFamily="34" charset="0"/>
-              <a:ea typeface="Calibri" panose="020F0502020204030204" pitchFamily="34" charset="0"/>
-              <a:cs typeface="Calibri" panose="020F0502020204030204" pitchFamily="34" charset="0"/>
-            </a:endParaRPr>
           </a:p>
           <a:p>
             <a:pPr marL="285750" indent="-285750">
@@ -17838,11 +17612,6 @@
               </a:rPr>
               <a:t>Repeated code block with arbitrary number of instructions</a:t>
             </a:r>
-            <a:endParaRPr lang="en-US" sz="1800" dirty="0">
-              <a:latin typeface="Calibri" panose="020F0502020204030204" pitchFamily="34" charset="0"/>
-              <a:ea typeface="Calibri" panose="020F0502020204030204" pitchFamily="34" charset="0"/>
-              <a:cs typeface="Calibri" panose="020F0502020204030204" pitchFamily="34" charset="0"/>
-            </a:endParaRPr>
           </a:p>
         </p:txBody>
       </p:sp>
@@ -17991,6 +17760,8 @@
               </a:rPr>
               <a:t>', 'English', 'Computer Science']</a:t>
             </a:r>
+          </a:p>
+          <a:p>
             <a:endParaRPr lang="en-US" sz="1800" spc="-1" dirty="0">
               <a:solidFill>
                 <a:srgbClr val="0F0F0F"/>
@@ -17999,14 +17770,6 @@
             </a:endParaRPr>
           </a:p>
           <a:p>
-            <a:endParaRPr lang="en-US" sz="1800" spc="-1" dirty="0">
-              <a:solidFill>
-                <a:srgbClr val="0F0F0F"/>
-              </a:solidFill>
-              <a:latin typeface="Consolas" panose="020B0609020204030204" pitchFamily="49" charset="0"/>
-            </a:endParaRPr>
-          </a:p>
-          <a:p>
             <a:r>
               <a:rPr lang="en-US" sz="1800" spc="-1" dirty="0">
                 <a:solidFill>
@@ -18016,12 +17779,6 @@
               </a:rPr>
               <a:t>for lecture in lectures:</a:t>
             </a:r>
-            <a:endParaRPr lang="en-US" sz="1800" spc="-1" dirty="0">
-              <a:solidFill>
-                <a:srgbClr val="0F0F0F"/>
-              </a:solidFill>
-              <a:latin typeface="Consolas" panose="020B0609020204030204" pitchFamily="49" charset="0"/>
-            </a:endParaRPr>
           </a:p>
           <a:p>
             <a:r>
@@ -18051,12 +17808,6 @@
               </a:rPr>
               <a:t> love {lecture}')</a:t>
             </a:r>
-            <a:endParaRPr lang="en-US" sz="1800" spc="-1" dirty="0">
-              <a:solidFill>
-                <a:srgbClr val="0F0F0F"/>
-              </a:solidFill>
-              <a:latin typeface="Consolas" panose="020B0609020204030204" pitchFamily="49" charset="0"/>
-            </a:endParaRPr>
           </a:p>
         </p:txBody>
       </p:sp>
@@ -20104,12 +19855,6 @@
               </a:rPr>
               <a:t>print('Count from one to ten!')</a:t>
             </a:r>
-            <a:endParaRPr lang="en-US" sz="1800" spc="-1" dirty="0">
-              <a:solidFill>
-                <a:srgbClr val="0F0F0F"/>
-              </a:solidFill>
-              <a:latin typeface="Consolas" panose="020B0609020204030204" pitchFamily="49" charset="0"/>
-            </a:endParaRPr>
           </a:p>
           <a:p>
             <a:r>
@@ -20121,12 +19866,6 @@
               </a:rPr>
               <a:t>for number in range(1, 11):</a:t>
             </a:r>
-            <a:endParaRPr lang="en-US" sz="1800" spc="-1" dirty="0">
-              <a:solidFill>
-                <a:srgbClr val="0F0F0F"/>
-              </a:solidFill>
-              <a:latin typeface="Consolas" panose="020B0609020204030204" pitchFamily="49" charset="0"/>
-            </a:endParaRPr>
           </a:p>
           <a:p>
             <a:r>
@@ -20138,12 +19877,6 @@
               </a:rPr>
               <a:t>    print(number)</a:t>
             </a:r>
-            <a:endParaRPr lang="en-US" sz="1800" spc="-1" dirty="0">
-              <a:solidFill>
-                <a:srgbClr val="0F0F0F"/>
-              </a:solidFill>
-              <a:latin typeface="Consolas" panose="020B0609020204030204" pitchFamily="49" charset="0"/>
-            </a:endParaRPr>
           </a:p>
         </p:txBody>
       </p:sp>
@@ -20274,6 +20007,8 @@
               </a:rPr>
               <a:t>lectures = ['Maths', 'English', 'Computer Science']</a:t>
             </a:r>
+          </a:p>
+          <a:p>
             <a:endParaRPr lang="en-US" sz="1800" spc="-1">
               <a:solidFill>
                 <a:srgbClr val="0F0F0F"/>
@@ -20282,14 +20017,6 @@
             </a:endParaRPr>
           </a:p>
           <a:p>
-            <a:endParaRPr lang="en-US" sz="1800" spc="-1">
-              <a:solidFill>
-                <a:srgbClr val="0F0F0F"/>
-              </a:solidFill>
-              <a:latin typeface="Consolas" panose="020B0609020204030204" pitchFamily="49" charset="0"/>
-            </a:endParaRPr>
-          </a:p>
-          <a:p>
             <a:r>
               <a:rPr lang="en-US" sz="1800" spc="-1">
                 <a:solidFill>
@@ -20299,12 +20026,6 @@
               </a:rPr>
               <a:t>for index, lecture in enumerate(lectures):</a:t>
             </a:r>
-            <a:endParaRPr lang="en-US" sz="1800" spc="-1">
-              <a:solidFill>
-                <a:srgbClr val="0F0F0F"/>
-              </a:solidFill>
-              <a:latin typeface="Consolas" panose="020B0609020204030204" pitchFamily="49" charset="0"/>
-            </a:endParaRPr>
           </a:p>
           <a:p>
             <a:r>
@@ -20478,7 +20199,7 @@
               <a:rPr lang="en-US" sz="1800" dirty="0">
                 <a:latin typeface="Calibri" panose="020F0502020204030204" pitchFamily="34" charset="0"/>
                 <a:cs typeface="Calibri" panose="020F0502020204030204" pitchFamily="34" charset="0"/>
-                <a:hlinkClick r:id="rId1" action="ppaction://hlinksldjump"/>
+                <a:hlinkClick r:id="rId3" action="ppaction://hlinksldjump"/>
               </a:rPr>
               <a:t>Lists</a:t>
             </a:r>
@@ -20496,7 +20217,7 @@
               <a:rPr lang="en-US" sz="1800" dirty="0">
                 <a:latin typeface="Calibri" panose="020F0502020204030204" pitchFamily="34" charset="0"/>
                 <a:cs typeface="Calibri" panose="020F0502020204030204" pitchFamily="34" charset="0"/>
-                <a:hlinkClick r:id="rId2" action="ppaction://hlinksldjump"/>
+                <a:hlinkClick r:id="rId4" action="ppaction://hlinksldjump"/>
               </a:rPr>
               <a:t>Tuples</a:t>
             </a:r>
@@ -20514,7 +20235,7 @@
               <a:rPr lang="en-US" sz="1800" dirty="0">
                 <a:latin typeface="Calibri" panose="020F0502020204030204" pitchFamily="34" charset="0"/>
                 <a:cs typeface="Calibri" panose="020F0502020204030204" pitchFamily="34" charset="0"/>
-                <a:hlinkClick r:id="rId3" action="ppaction://hlinksldjump"/>
+                <a:hlinkClick r:id="rId5" action="ppaction://hlinksldjump"/>
               </a:rPr>
               <a:t>for loops</a:t>
             </a:r>
@@ -20532,7 +20253,7 @@
               <a:rPr lang="en-US" sz="1800" dirty="0">
                 <a:latin typeface="Calibri" panose="020F0502020204030204" pitchFamily="34" charset="0"/>
                 <a:cs typeface="Calibri" panose="020F0502020204030204" pitchFamily="34" charset="0"/>
-                <a:hlinkClick r:id="rId4" action="ppaction://hlinksldjump"/>
+                <a:hlinkClick r:id="rId6" action="ppaction://hlinksldjump"/>
               </a:rPr>
               <a:t>Some common mistakes</a:t>
             </a:r>
@@ -20550,7 +20271,7 @@
               <a:rPr lang="en-US" sz="1800" dirty="0">
                 <a:latin typeface="Calibri" panose="020F0502020204030204" pitchFamily="34" charset="0"/>
                 <a:cs typeface="Calibri" panose="020F0502020204030204" pitchFamily="34" charset="0"/>
-                <a:hlinkClick r:id="rId4" action="ppaction://hlinksldjump"/>
+                <a:hlinkClick r:id="rId6" action="ppaction://hlinksldjump"/>
               </a:rPr>
               <a:t>Input</a:t>
             </a:r>
@@ -20568,7 +20289,7 @@
               <a:rPr lang="en-US" sz="1800" dirty="0">
                 <a:latin typeface="Calibri" panose="020F0502020204030204" pitchFamily="34" charset="0"/>
                 <a:cs typeface="Calibri" panose="020F0502020204030204" pitchFamily="34" charset="0"/>
-                <a:hlinkClick r:id="rId5" action="ppaction://hlinksldjump"/>
+                <a:hlinkClick r:id="rId7" action="ppaction://hlinksldjump"/>
               </a:rPr>
               <a:t>while loops</a:t>
             </a:r>
@@ -20586,7 +20307,7 @@
               <a:rPr lang="en-US" sz="1800" dirty="0">
                 <a:latin typeface="Calibri" panose="020F0502020204030204" pitchFamily="34" charset="0"/>
                 <a:cs typeface="Calibri" panose="020F0502020204030204" pitchFamily="34" charset="0"/>
-                <a:hlinkClick r:id="rId6" action="ppaction://hlinksldjump"/>
+                <a:hlinkClick r:id="rId8" action="ppaction://hlinksldjump"/>
               </a:rPr>
               <a:t>Putting it all together</a:t>
             </a:r>
@@ -20604,7 +20325,7 @@
               <a:rPr lang="en-US" sz="1800" dirty="0">
                 <a:latin typeface="Calibri" panose="020F0502020204030204" pitchFamily="34" charset="0"/>
                 <a:cs typeface="Calibri" panose="020F0502020204030204" pitchFamily="34" charset="0"/>
-                <a:hlinkClick r:id="rId6" action="ppaction://hlinksldjump"/>
+                <a:hlinkClick r:id="rId8" action="ppaction://hlinksldjump"/>
               </a:rPr>
               <a:t>Exercise</a:t>
             </a:r>
@@ -20742,6 +20463,8 @@
               </a:rPr>
               <a:t>string = 'Fundamentals of CS and programming'</a:t>
             </a:r>
+          </a:p>
+          <a:p>
             <a:endParaRPr lang="en-US" sz="1800" spc="-1" dirty="0">
               <a:solidFill>
                 <a:srgbClr val="0F0F0F"/>
@@ -20750,14 +20473,6 @@
             </a:endParaRPr>
           </a:p>
           <a:p>
-            <a:endParaRPr lang="en-US" sz="1800" spc="-1" dirty="0">
-              <a:solidFill>
-                <a:srgbClr val="0F0F0F"/>
-              </a:solidFill>
-              <a:latin typeface="Consolas" panose="020B0609020204030204" pitchFamily="49" charset="0"/>
-            </a:endParaRPr>
-          </a:p>
-          <a:p>
             <a:r>
               <a:rPr lang="en-US" sz="1800" spc="-1" dirty="0">
                 <a:solidFill>
@@ -20767,12 +20482,6 @@
               </a:rPr>
               <a:t>for char in string:</a:t>
             </a:r>
-            <a:endParaRPr lang="en-US" sz="1800" spc="-1" dirty="0">
-              <a:solidFill>
-                <a:srgbClr val="0F0F0F"/>
-              </a:solidFill>
-              <a:latin typeface="Consolas" panose="020B0609020204030204" pitchFamily="49" charset="0"/>
-            </a:endParaRPr>
           </a:p>
           <a:p>
             <a:r>
@@ -20784,12 +20493,6 @@
               </a:rPr>
               <a:t>    print(char)</a:t>
             </a:r>
-            <a:endParaRPr lang="en-US" sz="1800" spc="-1" dirty="0">
-              <a:solidFill>
-                <a:srgbClr val="0F0F0F"/>
-              </a:solidFill>
-              <a:latin typeface="Consolas" panose="020B0609020204030204" pitchFamily="49" charset="0"/>
-            </a:endParaRPr>
           </a:p>
         </p:txBody>
       </p:sp>
@@ -20930,14 +20633,6 @@
               </a:rPr>
               <a:t>pass</a:t>
             </a:r>
-            <a:endParaRPr lang="de-DE" sz="1800" dirty="0">
-              <a:highlight>
-                <a:srgbClr val="DAE3F3"/>
-              </a:highlight>
-              <a:latin typeface="Consolas" panose="020B0609020204030204" pitchFamily="49" charset="0"/>
-              <a:ea typeface="Calibri" panose="020F0502020204030204" pitchFamily="34" charset="0"/>
-              <a:cs typeface="Calibri" panose="020F0502020204030204" pitchFamily="34" charset="0"/>
-            </a:endParaRPr>
           </a:p>
           <a:p>
             <a:pPr marL="742950" lvl="1" indent="-285750">
@@ -21003,11 +20698,6 @@
               </a:rPr>
               <a:t> </a:t>
             </a:r>
-            <a:endParaRPr lang="de-DE" sz="1800" dirty="0">
-              <a:latin typeface="Calibri" panose="020F0502020204030204" pitchFamily="34" charset="0"/>
-              <a:ea typeface="Calibri" panose="020F0502020204030204" pitchFamily="34" charset="0"/>
-              <a:cs typeface="Calibri" panose="020F0502020204030204" pitchFamily="34" charset="0"/>
-            </a:endParaRPr>
           </a:p>
           <a:p>
             <a:pPr marL="285750" indent="-285750">
@@ -21028,14 +20718,6 @@
               </a:rPr>
               <a:t>break</a:t>
             </a:r>
-            <a:endParaRPr lang="de-DE" sz="1800" dirty="0">
-              <a:highlight>
-                <a:srgbClr val="DAE3F3"/>
-              </a:highlight>
-              <a:latin typeface="Consolas" panose="020B0609020204030204" pitchFamily="49" charset="0"/>
-              <a:ea typeface="Calibri" panose="020F0502020204030204" pitchFamily="34" charset="0"/>
-              <a:cs typeface="Calibri" panose="020F0502020204030204" pitchFamily="34" charset="0"/>
-            </a:endParaRPr>
           </a:p>
           <a:p>
             <a:pPr marL="742950" lvl="1" indent="-285750">
@@ -21149,11 +20831,6 @@
               </a:rPr>
               <a:t> loop</a:t>
             </a:r>
-            <a:endParaRPr lang="de-DE" sz="1800" dirty="0">
-              <a:latin typeface="Calibri" panose="020F0502020204030204" pitchFamily="34" charset="0"/>
-              <a:ea typeface="Calibri" panose="020F0502020204030204" pitchFamily="34" charset="0"/>
-              <a:cs typeface="Calibri" panose="020F0502020204030204" pitchFamily="34" charset="0"/>
-            </a:endParaRPr>
           </a:p>
           <a:p>
             <a:pPr marL="742950" lvl="1" indent="-285750">
@@ -21235,11 +20912,6 @@
               </a:rPr>
               <a:t> loop </a:t>
             </a:r>
-            <a:endParaRPr lang="de-DE" sz="1800" dirty="0">
-              <a:latin typeface="Calibri" panose="020F0502020204030204" pitchFamily="34" charset="0"/>
-              <a:ea typeface="Calibri" panose="020F0502020204030204" pitchFamily="34" charset="0"/>
-              <a:cs typeface="Calibri" panose="020F0502020204030204" pitchFamily="34" charset="0"/>
-            </a:endParaRPr>
           </a:p>
           <a:p>
             <a:pPr marL="285750" indent="-285750">
@@ -21746,6 +21418,26 @@
               </a:rPr>
               <a:t> = [1, 13, 42]</a:t>
             </a:r>
+          </a:p>
+          <a:p>
+            <a:r>
+              <a:rPr lang="en-US" sz="1800" spc="-1" dirty="0">
+                <a:solidFill>
+                  <a:srgbClr val="0F0F0F"/>
+                </a:solidFill>
+                <a:latin typeface="Consolas" panose="020B0609020204030204" pitchFamily="49" charset="0"/>
+              </a:rPr>
+              <a:t>for item in </a:t>
+            </a:r>
+            <a:r>
+              <a:rPr lang="en-US" sz="1800" spc="-1" dirty="0" err="1">
+                <a:solidFill>
+                  <a:srgbClr val="0F0F0F"/>
+                </a:solidFill>
+                <a:latin typeface="Consolas" panose="020B0609020204030204" pitchFamily="49" charset="0"/>
+              </a:rPr>
+              <a:t>item_list</a:t>
+            </a:r>
             <a:endParaRPr lang="en-US" sz="1800" spc="-1" dirty="0">
               <a:solidFill>
                 <a:srgbClr val="0F0F0F"/>
@@ -21761,17 +21453,10 @@
                 </a:solidFill>
                 <a:latin typeface="Consolas" panose="020B0609020204030204" pitchFamily="49" charset="0"/>
               </a:rPr>
-              <a:t>for item in </a:t>
-            </a:r>
-            <a:r>
-              <a:rPr lang="en-US" sz="1800" spc="-1" dirty="0" err="1">
-                <a:solidFill>
-                  <a:srgbClr val="0F0F0F"/>
-                </a:solidFill>
-                <a:latin typeface="Consolas" panose="020B0609020204030204" pitchFamily="49" charset="0"/>
-              </a:rPr>
-              <a:t>item_list</a:t>
-            </a:r>
+              <a:t>    print(item)</a:t>
+            </a:r>
+          </a:p>
+          <a:p>
             <a:endParaRPr lang="en-US" sz="1800" spc="-1" dirty="0">
               <a:solidFill>
                 <a:srgbClr val="0F0F0F"/>
@@ -21787,7 +21472,27 @@
                 </a:solidFill>
                 <a:latin typeface="Consolas" panose="020B0609020204030204" pitchFamily="49" charset="0"/>
               </a:rPr>
-              <a:t>    print(item)</a:t>
+              <a:t>  File "&lt;stdin&gt;", line 1</a:t>
+            </a:r>
+          </a:p>
+          <a:p>
+            <a:r>
+              <a:rPr lang="en-US" sz="1800" spc="-1" dirty="0">
+                <a:solidFill>
+                  <a:srgbClr val="0F0F0F"/>
+                </a:solidFill>
+                <a:latin typeface="Consolas" panose="020B0609020204030204" pitchFamily="49" charset="0"/>
+              </a:rPr>
+              <a:t>    for item in </a:t>
+            </a:r>
+            <a:r>
+              <a:rPr lang="en-US" sz="1800" spc="-1" dirty="0" err="1">
+                <a:solidFill>
+                  <a:srgbClr val="0F0F0F"/>
+                </a:solidFill>
+                <a:latin typeface="Consolas" panose="020B0609020204030204" pitchFamily="49" charset="0"/>
+              </a:rPr>
+              <a:t>item_list</a:t>
             </a:r>
             <a:endParaRPr lang="en-US" sz="1800" spc="-1" dirty="0">
               <a:solidFill>
@@ -21797,14 +21502,6 @@
             </a:endParaRPr>
           </a:p>
           <a:p>
-            <a:endParaRPr lang="en-US" sz="1800" spc="-1" dirty="0">
-              <a:solidFill>
-                <a:srgbClr val="0F0F0F"/>
-              </a:solidFill>
-              <a:latin typeface="Consolas" panose="020B0609020204030204" pitchFamily="49" charset="0"/>
-            </a:endParaRPr>
-          </a:p>
-          <a:p>
             <a:r>
               <a:rPr lang="en-US" sz="1800" spc="-1" dirty="0">
                 <a:solidFill>
@@ -21812,16 +21509,19 @@
                 </a:solidFill>
                 <a:latin typeface="Consolas" panose="020B0609020204030204" pitchFamily="49" charset="0"/>
               </a:rPr>
-              <a:t>  File "&lt;stdin&gt;", line 1</a:t>
-            </a:r>
-            <a:endParaRPr lang="en-US" sz="1800" spc="-1" dirty="0">
-              <a:solidFill>
-                <a:srgbClr val="0F0F0F"/>
-              </a:solidFill>
-              <a:latin typeface="Consolas" panose="020B0609020204030204" pitchFamily="49" charset="0"/>
-            </a:endParaRPr>
-          </a:p>
-          <a:p>
+              <a:t>                        ^</a:t>
+            </a:r>
+          </a:p>
+          <a:p>
+            <a:r>
+              <a:rPr lang="en-US" sz="1800" spc="-1" dirty="0" err="1">
+                <a:solidFill>
+                  <a:srgbClr val="0F0F0F"/>
+                </a:solidFill>
+                <a:latin typeface="Consolas" panose="020B0609020204030204" pitchFamily="49" charset="0"/>
+              </a:rPr>
+              <a:t>SyntaxError</a:t>
+            </a:r>
             <a:r>
               <a:rPr lang="en-US" sz="1800" spc="-1" dirty="0">
                 <a:solidFill>
@@ -21829,66 +21529,8 @@
                 </a:solidFill>
                 <a:latin typeface="Consolas" panose="020B0609020204030204" pitchFamily="49" charset="0"/>
               </a:rPr>
-              <a:t>    for item in </a:t>
-            </a:r>
-            <a:r>
-              <a:rPr lang="en-US" sz="1800" spc="-1" dirty="0" err="1">
-                <a:solidFill>
-                  <a:srgbClr val="0F0F0F"/>
-                </a:solidFill>
-                <a:latin typeface="Consolas" panose="020B0609020204030204" pitchFamily="49" charset="0"/>
-              </a:rPr>
-              <a:t>item_list</a:t>
-            </a:r>
-            <a:endParaRPr lang="en-US" sz="1800" spc="-1" dirty="0">
-              <a:solidFill>
-                <a:srgbClr val="0F0F0F"/>
-              </a:solidFill>
-              <a:latin typeface="Consolas" panose="020B0609020204030204" pitchFamily="49" charset="0"/>
-            </a:endParaRPr>
-          </a:p>
-          <a:p>
-            <a:r>
-              <a:rPr lang="en-US" sz="1800" spc="-1" dirty="0">
-                <a:solidFill>
-                  <a:srgbClr val="0F0F0F"/>
-                </a:solidFill>
-                <a:latin typeface="Consolas" panose="020B0609020204030204" pitchFamily="49" charset="0"/>
-              </a:rPr>
-              <a:t>                        ^</a:t>
-            </a:r>
-            <a:endParaRPr lang="en-US" sz="1800" spc="-1" dirty="0">
-              <a:solidFill>
-                <a:srgbClr val="0F0F0F"/>
-              </a:solidFill>
-              <a:latin typeface="Consolas" panose="020B0609020204030204" pitchFamily="49" charset="0"/>
-            </a:endParaRPr>
-          </a:p>
-          <a:p>
-            <a:r>
-              <a:rPr lang="en-US" sz="1800" spc="-1" dirty="0" err="1">
-                <a:solidFill>
-                  <a:srgbClr val="0F0F0F"/>
-                </a:solidFill>
-                <a:latin typeface="Consolas" panose="020B0609020204030204" pitchFamily="49" charset="0"/>
-              </a:rPr>
-              <a:t>SyntaxError</a:t>
-            </a:r>
-            <a:r>
-              <a:rPr lang="en-US" sz="1800" spc="-1" dirty="0">
-                <a:solidFill>
-                  <a:srgbClr val="0F0F0F"/>
-                </a:solidFill>
-                <a:latin typeface="Consolas" panose="020B0609020204030204" pitchFamily="49" charset="0"/>
-              </a:rPr>
               <a:t>: invalid syntax</a:t>
             </a:r>
-            <a:endParaRPr lang="en-US" sz="1800" spc="-1" dirty="0">
-              <a:solidFill>
-                <a:srgbClr val="0F0F0F"/>
-              </a:solidFill>
-              <a:latin typeface="Consolas" panose="020B0609020204030204" pitchFamily="49" charset="0"/>
-            </a:endParaRPr>
           </a:p>
         </p:txBody>
       </p:sp>
@@ -22028,6 +21670,48 @@
               </a:rPr>
               <a:t> = [1, 13, 42]</a:t>
             </a:r>
+          </a:p>
+          <a:p>
+            <a:r>
+              <a:rPr lang="en-US" sz="1800" spc="-1" dirty="0">
+                <a:solidFill>
+                  <a:srgbClr val="0F0F0F"/>
+                </a:solidFill>
+                <a:latin typeface="Consolas" panose="020B0609020204030204" pitchFamily="49" charset="0"/>
+              </a:rPr>
+              <a:t>for item in </a:t>
+            </a:r>
+            <a:r>
+              <a:rPr lang="en-US" sz="1800" spc="-1" dirty="0" err="1">
+                <a:solidFill>
+                  <a:srgbClr val="0F0F0F"/>
+                </a:solidFill>
+                <a:latin typeface="Consolas" panose="020B0609020204030204" pitchFamily="49" charset="0"/>
+              </a:rPr>
+              <a:t>item_list</a:t>
+            </a:r>
+            <a:r>
+              <a:rPr lang="en-US" sz="1800" spc="-1" dirty="0">
+                <a:solidFill>
+                  <a:srgbClr val="0F0F0F"/>
+                </a:solidFill>
+                <a:latin typeface="Consolas" panose="020B0609020204030204" pitchFamily="49" charset="0"/>
+              </a:rPr>
+              <a:t>:</a:t>
+            </a:r>
+          </a:p>
+          <a:p>
+            <a:r>
+              <a:rPr lang="en-US" sz="1800" spc="-1" dirty="0">
+                <a:solidFill>
+                  <a:srgbClr val="0F0F0F"/>
+                </a:solidFill>
+                <a:latin typeface="Consolas" panose="020B0609020204030204" pitchFamily="49" charset="0"/>
+              </a:rPr>
+              <a:t>print(item)</a:t>
+            </a:r>
+          </a:p>
+          <a:p>
             <a:endParaRPr lang="en-US" sz="1800" spc="-1" dirty="0">
               <a:solidFill>
                 <a:srgbClr val="0F0F0F"/>
@@ -22043,8 +21727,32 @@
                 </a:solidFill>
                 <a:latin typeface="Consolas" panose="020B0609020204030204" pitchFamily="49" charset="0"/>
               </a:rPr>
-              <a:t>for item in </a:t>
-            </a:r>
+              <a:t>  File "&lt;stdin&gt;", line 2</a:t>
+            </a:r>
+          </a:p>
+          <a:p>
+            <a:r>
+              <a:rPr lang="en-US" sz="1800" spc="-1" dirty="0">
+                <a:solidFill>
+                  <a:srgbClr val="0F0F0F"/>
+                </a:solidFill>
+                <a:latin typeface="Consolas" panose="020B0609020204030204" pitchFamily="49" charset="0"/>
+              </a:rPr>
+              <a:t>    print(item)</a:t>
+            </a:r>
+          </a:p>
+          <a:p>
+            <a:r>
+              <a:rPr lang="en-US" sz="1800" spc="-1" dirty="0">
+                <a:solidFill>
+                  <a:srgbClr val="0F0F0F"/>
+                </a:solidFill>
+                <a:latin typeface="Consolas" panose="020B0609020204030204" pitchFamily="49" charset="0"/>
+              </a:rPr>
+              <a:t>        ^</a:t>
+            </a:r>
+          </a:p>
+          <a:p>
             <a:r>
               <a:rPr lang="en-US" sz="1800" spc="-1" dirty="0" err="1">
                 <a:solidFill>
@@ -22052,7 +21760,7 @@
                 </a:solidFill>
                 <a:latin typeface="Consolas" panose="020B0609020204030204" pitchFamily="49" charset="0"/>
               </a:rPr>
-              <a:t>item_list</a:t>
+              <a:t>IndentationError</a:t>
             </a:r>
             <a:r>
               <a:rPr lang="en-US" sz="1800" spc="-1" dirty="0">
@@ -22061,116 +21769,8 @@
                 </a:solidFill>
                 <a:latin typeface="Consolas" panose="020B0609020204030204" pitchFamily="49" charset="0"/>
               </a:rPr>
-              <a:t>:</a:t>
-            </a:r>
-            <a:endParaRPr lang="en-US" sz="1800" spc="-1" dirty="0">
-              <a:solidFill>
-                <a:srgbClr val="0F0F0F"/>
-              </a:solidFill>
-              <a:latin typeface="Consolas" panose="020B0609020204030204" pitchFamily="49" charset="0"/>
-            </a:endParaRPr>
-          </a:p>
-          <a:p>
-            <a:r>
-              <a:rPr lang="en-US" sz="1800" spc="-1" dirty="0">
-                <a:solidFill>
-                  <a:srgbClr val="0F0F0F"/>
-                </a:solidFill>
-                <a:latin typeface="Consolas" panose="020B0609020204030204" pitchFamily="49" charset="0"/>
-              </a:rPr>
-              <a:t>print(item)</a:t>
-            </a:r>
-            <a:endParaRPr lang="en-US" sz="1800" spc="-1" dirty="0">
-              <a:solidFill>
-                <a:srgbClr val="0F0F0F"/>
-              </a:solidFill>
-              <a:latin typeface="Consolas" panose="020B0609020204030204" pitchFamily="49" charset="0"/>
-            </a:endParaRPr>
-          </a:p>
-          <a:p>
-            <a:endParaRPr lang="en-US" sz="1800" spc="-1" dirty="0">
-              <a:solidFill>
-                <a:srgbClr val="0F0F0F"/>
-              </a:solidFill>
-              <a:latin typeface="Consolas" panose="020B0609020204030204" pitchFamily="49" charset="0"/>
-            </a:endParaRPr>
-          </a:p>
-          <a:p>
-            <a:r>
-              <a:rPr lang="en-US" sz="1800" spc="-1" dirty="0">
-                <a:solidFill>
-                  <a:srgbClr val="0F0F0F"/>
-                </a:solidFill>
-                <a:latin typeface="Consolas" panose="020B0609020204030204" pitchFamily="49" charset="0"/>
-              </a:rPr>
-              <a:t>  File "&lt;stdin&gt;", line 2</a:t>
-            </a:r>
-            <a:endParaRPr lang="en-US" sz="1800" spc="-1" dirty="0">
-              <a:solidFill>
-                <a:srgbClr val="0F0F0F"/>
-              </a:solidFill>
-              <a:latin typeface="Consolas" panose="020B0609020204030204" pitchFamily="49" charset="0"/>
-            </a:endParaRPr>
-          </a:p>
-          <a:p>
-            <a:r>
-              <a:rPr lang="en-US" sz="1800" spc="-1" dirty="0">
-                <a:solidFill>
-                  <a:srgbClr val="0F0F0F"/>
-                </a:solidFill>
-                <a:latin typeface="Consolas" panose="020B0609020204030204" pitchFamily="49" charset="0"/>
-              </a:rPr>
-              <a:t>    print(item)</a:t>
-            </a:r>
-            <a:endParaRPr lang="en-US" sz="1800" spc="-1" dirty="0">
-              <a:solidFill>
-                <a:srgbClr val="0F0F0F"/>
-              </a:solidFill>
-              <a:latin typeface="Consolas" panose="020B0609020204030204" pitchFamily="49" charset="0"/>
-            </a:endParaRPr>
-          </a:p>
-          <a:p>
-            <a:r>
-              <a:rPr lang="en-US" sz="1800" spc="-1" dirty="0">
-                <a:solidFill>
-                  <a:srgbClr val="0F0F0F"/>
-                </a:solidFill>
-                <a:latin typeface="Consolas" panose="020B0609020204030204" pitchFamily="49" charset="0"/>
-              </a:rPr>
-              <a:t>        ^</a:t>
-            </a:r>
-            <a:endParaRPr lang="en-US" sz="1800" spc="-1" dirty="0">
-              <a:solidFill>
-                <a:srgbClr val="0F0F0F"/>
-              </a:solidFill>
-              <a:latin typeface="Consolas" panose="020B0609020204030204" pitchFamily="49" charset="0"/>
-            </a:endParaRPr>
-          </a:p>
-          <a:p>
-            <a:r>
-              <a:rPr lang="en-US" sz="1800" spc="-1" dirty="0" err="1">
-                <a:solidFill>
-                  <a:srgbClr val="0F0F0F"/>
-                </a:solidFill>
-                <a:latin typeface="Consolas" panose="020B0609020204030204" pitchFamily="49" charset="0"/>
-              </a:rPr>
-              <a:t>IndentationError</a:t>
-            </a:r>
-            <a:r>
-              <a:rPr lang="en-US" sz="1800" spc="-1" dirty="0">
-                <a:solidFill>
-                  <a:srgbClr val="0F0F0F"/>
-                </a:solidFill>
-                <a:latin typeface="Consolas" panose="020B0609020204030204" pitchFamily="49" charset="0"/>
-              </a:rPr>
               <a:t>: expected an indented block</a:t>
             </a:r>
-            <a:endParaRPr lang="en-US" sz="1800" spc="-1" dirty="0">
-              <a:solidFill>
-                <a:srgbClr val="0F0F0F"/>
-              </a:solidFill>
-              <a:latin typeface="Consolas" panose="020B0609020204030204" pitchFamily="49" charset="0"/>
-            </a:endParaRPr>
           </a:p>
           <a:p>
             <a:endParaRPr lang="en-US" sz="1800" spc="-1" dirty="0">
@@ -22318,6 +21918,55 @@
               </a:rPr>
               <a:t> = [1, 13, 42]</a:t>
             </a:r>
+          </a:p>
+          <a:p>
+            <a:r>
+              <a:rPr lang="en-US" sz="1800" spc="-1" dirty="0">
+                <a:solidFill>
+                  <a:srgbClr val="0F0F0F"/>
+                </a:solidFill>
+                <a:latin typeface="Consolas" panose="020B0609020204030204" pitchFamily="49" charset="0"/>
+              </a:rPr>
+              <a:t>    print(</a:t>
+            </a:r>
+            <a:r>
+              <a:rPr lang="en-US" sz="1800" spc="-1" dirty="0" err="1">
+                <a:solidFill>
+                  <a:srgbClr val="0F0F0F"/>
+                </a:solidFill>
+                <a:latin typeface="Consolas" panose="020B0609020204030204" pitchFamily="49" charset="0"/>
+              </a:rPr>
+              <a:t>f'Here</a:t>
+            </a:r>
+            <a:r>
+              <a:rPr lang="en-US" sz="1800" spc="-1" dirty="0">
+                <a:solidFill>
+                  <a:srgbClr val="0F0F0F"/>
+                </a:solidFill>
+                <a:latin typeface="Consolas" panose="020B0609020204030204" pitchFamily="49" charset="0"/>
+              </a:rPr>
+              <a:t> is index 0: {</a:t>
+            </a:r>
+            <a:r>
+              <a:rPr lang="en-US" sz="1800" spc="-1" dirty="0" err="1">
+                <a:solidFill>
+                  <a:srgbClr val="0F0F0F"/>
+                </a:solidFill>
+                <a:latin typeface="Consolas" panose="020B0609020204030204" pitchFamily="49" charset="0"/>
+              </a:rPr>
+              <a:t>item_list</a:t>
+            </a:r>
+            <a:r>
+              <a:rPr lang="en-US" sz="1800" spc="-1" dirty="0">
+                <a:solidFill>
+                  <a:srgbClr val="0F0F0F"/>
+                </a:solidFill>
+                <a:latin typeface="Consolas" panose="020B0609020204030204" pitchFamily="49" charset="0"/>
+              </a:rPr>
+              <a:t>[0]}')</a:t>
+            </a:r>
+          </a:p>
+          <a:p>
             <a:endParaRPr lang="en-US" sz="1800" spc="-1" dirty="0">
               <a:solidFill>
                 <a:srgbClr val="0F0F0F"/>
@@ -22333,6 +21982,17 @@
                 </a:solidFill>
                 <a:latin typeface="Consolas" panose="020B0609020204030204" pitchFamily="49" charset="0"/>
               </a:rPr>
+              <a:t>  File "&lt;stdin&gt;", line 1</a:t>
+            </a:r>
+          </a:p>
+          <a:p>
+            <a:r>
+              <a:rPr lang="en-US" sz="1800" spc="-1" dirty="0">
+                <a:solidFill>
+                  <a:srgbClr val="0F0F0F"/>
+                </a:solidFill>
+                <a:latin typeface="Consolas" panose="020B0609020204030204" pitchFamily="49" charset="0"/>
+              </a:rPr>
               <a:t>    print(</a:t>
             </a:r>
             <a:r>
@@ -22371,20 +22031,6 @@
               </a:rPr>
               <a:t>[0]}')</a:t>
             </a:r>
-            <a:endParaRPr lang="en-US" sz="1800" spc="-1" dirty="0">
-              <a:solidFill>
-                <a:srgbClr val="0F0F0F"/>
-              </a:solidFill>
-              <a:latin typeface="Consolas" panose="020B0609020204030204" pitchFamily="49" charset="0"/>
-            </a:endParaRPr>
-          </a:p>
-          <a:p>
-            <a:endParaRPr lang="en-US" sz="1800" spc="-1" dirty="0">
-              <a:solidFill>
-                <a:srgbClr val="0F0F0F"/>
-              </a:solidFill>
-              <a:latin typeface="Consolas" panose="020B0609020204030204" pitchFamily="49" charset="0"/>
-            </a:endParaRPr>
           </a:p>
           <a:p>
             <a:r>
@@ -22394,16 +22040,19 @@
                 </a:solidFill>
                 <a:latin typeface="Consolas" panose="020B0609020204030204" pitchFamily="49" charset="0"/>
               </a:rPr>
-              <a:t>  File "&lt;stdin&gt;", line 1</a:t>
-            </a:r>
-            <a:endParaRPr lang="en-US" sz="1800" spc="-1" dirty="0">
-              <a:solidFill>
-                <a:srgbClr val="0F0F0F"/>
-              </a:solidFill>
-              <a:latin typeface="Consolas" panose="020B0609020204030204" pitchFamily="49" charset="0"/>
-            </a:endParaRPr>
-          </a:p>
-          <a:p>
+              <a:t>    ^</a:t>
+            </a:r>
+          </a:p>
+          <a:p>
+            <a:r>
+              <a:rPr lang="en-US" sz="1800" spc="-1" dirty="0" err="1">
+                <a:solidFill>
+                  <a:srgbClr val="0F0F0F"/>
+                </a:solidFill>
+                <a:latin typeface="Consolas" panose="020B0609020204030204" pitchFamily="49" charset="0"/>
+              </a:rPr>
+              <a:t>IndentationError</a:t>
+            </a:r>
             <a:r>
               <a:rPr lang="en-US" sz="1800" spc="-1" dirty="0">
                 <a:solidFill>
@@ -22411,93 +22060,8 @@
                 </a:solidFill>
                 <a:latin typeface="Consolas" panose="020B0609020204030204" pitchFamily="49" charset="0"/>
               </a:rPr>
-              <a:t>    print(</a:t>
-            </a:r>
-            <a:r>
-              <a:rPr lang="en-US" sz="1800" spc="-1" dirty="0" err="1">
-                <a:solidFill>
-                  <a:srgbClr val="0F0F0F"/>
-                </a:solidFill>
-                <a:latin typeface="Consolas" panose="020B0609020204030204" pitchFamily="49" charset="0"/>
-              </a:rPr>
-              <a:t>f'Here</a:t>
-            </a:r>
-            <a:r>
-              <a:rPr lang="en-US" sz="1800" spc="-1" dirty="0">
-                <a:solidFill>
-                  <a:srgbClr val="0F0F0F"/>
-                </a:solidFill>
-                <a:latin typeface="Consolas" panose="020B0609020204030204" pitchFamily="49" charset="0"/>
-              </a:rPr>
-              <a:t> is index 0: {</a:t>
-            </a:r>
-            <a:r>
-              <a:rPr lang="en-US" sz="1800" spc="-1" dirty="0" err="1">
-                <a:solidFill>
-                  <a:srgbClr val="0F0F0F"/>
-                </a:solidFill>
-                <a:latin typeface="Consolas" panose="020B0609020204030204" pitchFamily="49" charset="0"/>
-              </a:rPr>
-              <a:t>item_list</a:t>
-            </a:r>
-            <a:r>
-              <a:rPr lang="en-US" sz="1800" spc="-1" dirty="0">
-                <a:solidFill>
-                  <a:srgbClr val="0F0F0F"/>
-                </a:solidFill>
-                <a:latin typeface="Consolas" panose="020B0609020204030204" pitchFamily="49" charset="0"/>
-              </a:rPr>
-              <a:t>[0]}')</a:t>
-            </a:r>
-            <a:endParaRPr lang="en-US" sz="1800" spc="-1" dirty="0">
-              <a:solidFill>
-                <a:srgbClr val="0F0F0F"/>
-              </a:solidFill>
-              <a:latin typeface="Consolas" panose="020B0609020204030204" pitchFamily="49" charset="0"/>
-            </a:endParaRPr>
-          </a:p>
-          <a:p>
-            <a:r>
-              <a:rPr lang="en-US" sz="1800" spc="-1" dirty="0">
-                <a:solidFill>
-                  <a:srgbClr val="0F0F0F"/>
-                </a:solidFill>
-                <a:latin typeface="Consolas" panose="020B0609020204030204" pitchFamily="49" charset="0"/>
-              </a:rPr>
-              <a:t>    ^</a:t>
-            </a:r>
-            <a:endParaRPr lang="en-US" sz="1800" spc="-1" dirty="0">
-              <a:solidFill>
-                <a:srgbClr val="0F0F0F"/>
-              </a:solidFill>
-              <a:latin typeface="Consolas" panose="020B0609020204030204" pitchFamily="49" charset="0"/>
-            </a:endParaRPr>
-          </a:p>
-          <a:p>
-            <a:r>
-              <a:rPr lang="en-US" sz="1800" spc="-1" dirty="0" err="1">
-                <a:solidFill>
-                  <a:srgbClr val="0F0F0F"/>
-                </a:solidFill>
-                <a:latin typeface="Consolas" panose="020B0609020204030204" pitchFamily="49" charset="0"/>
-              </a:rPr>
-              <a:t>IndentationError</a:t>
-            </a:r>
-            <a:r>
-              <a:rPr lang="en-US" sz="1800" spc="-1" dirty="0">
-                <a:solidFill>
-                  <a:srgbClr val="0F0F0F"/>
-                </a:solidFill>
-                <a:latin typeface="Consolas" panose="020B0609020204030204" pitchFamily="49" charset="0"/>
-              </a:rPr>
               <a:t>: unexpected indent</a:t>
             </a:r>
-            <a:endParaRPr lang="en-US" sz="1800" spc="-1" dirty="0">
-              <a:solidFill>
-                <a:srgbClr val="0F0F0F"/>
-              </a:solidFill>
-              <a:latin typeface="Consolas" panose="020B0609020204030204" pitchFamily="49" charset="0"/>
-            </a:endParaRPr>
           </a:p>
         </p:txBody>
       </p:sp>
@@ -22637,6 +22201,88 @@
               </a:rPr>
               <a:t> = [13, 42]</a:t>
             </a:r>
+          </a:p>
+          <a:p>
+            <a:r>
+              <a:rPr lang="en-US" sz="1800" spc="-1" dirty="0">
+                <a:solidFill>
+                  <a:srgbClr val="0F0F0F"/>
+                </a:solidFill>
+                <a:latin typeface="Consolas" panose="020B0609020204030204" pitchFamily="49" charset="0"/>
+              </a:rPr>
+              <a:t>for item in </a:t>
+            </a:r>
+            <a:r>
+              <a:rPr lang="en-US" sz="1800" spc="-1" dirty="0" err="1">
+                <a:solidFill>
+                  <a:srgbClr val="0F0F0F"/>
+                </a:solidFill>
+                <a:latin typeface="Consolas" panose="020B0609020204030204" pitchFamily="49" charset="0"/>
+              </a:rPr>
+              <a:t>item_list</a:t>
+            </a:r>
+            <a:r>
+              <a:rPr lang="en-US" sz="1800" spc="-1" dirty="0">
+                <a:solidFill>
+                  <a:srgbClr val="0F0F0F"/>
+                </a:solidFill>
+                <a:latin typeface="Consolas" panose="020B0609020204030204" pitchFamily="49" charset="0"/>
+              </a:rPr>
+              <a:t>:</a:t>
+            </a:r>
+          </a:p>
+          <a:p>
+            <a:r>
+              <a:rPr lang="en-US" sz="1800" spc="-1" dirty="0">
+                <a:solidFill>
+                  <a:srgbClr val="0F0F0F"/>
+                </a:solidFill>
+                <a:latin typeface="Consolas" panose="020B0609020204030204" pitchFamily="49" charset="0"/>
+              </a:rPr>
+              <a:t>    print(</a:t>
+            </a:r>
+            <a:r>
+              <a:rPr lang="en-US" sz="1800" spc="-1" dirty="0" err="1">
+                <a:solidFill>
+                  <a:srgbClr val="0F0F0F"/>
+                </a:solidFill>
+                <a:latin typeface="Consolas" panose="020B0609020204030204" pitchFamily="49" charset="0"/>
+              </a:rPr>
+              <a:t>f'Here</a:t>
+            </a:r>
+            <a:r>
+              <a:rPr lang="en-US" sz="1800" spc="-1" dirty="0">
+                <a:solidFill>
+                  <a:srgbClr val="0F0F0F"/>
+                </a:solidFill>
+                <a:latin typeface="Consolas" panose="020B0609020204030204" pitchFamily="49" charset="0"/>
+              </a:rPr>
+              <a:t> comes the next item… {item}')</a:t>
+            </a:r>
+          </a:p>
+          <a:p>
+            <a:r>
+              <a:rPr lang="en-US" sz="1800" spc="-1" dirty="0">
+                <a:solidFill>
+                  <a:srgbClr val="0F0F0F"/>
+                </a:solidFill>
+                <a:latin typeface="Consolas" panose="020B0609020204030204" pitchFamily="49" charset="0"/>
+              </a:rPr>
+              <a:t>  </a:t>
+            </a:r>
+          </a:p>
+          <a:p>
+            <a:r>
+              <a:rPr lang="en-US" sz="1800" spc="-1" dirty="0">
+                <a:solidFill>
+                  <a:srgbClr val="0F0F0F"/>
+                </a:solidFill>
+                <a:latin typeface="Consolas" panose="020B0609020204030204" pitchFamily="49" charset="0"/>
+              </a:rPr>
+              <a:t>    print('These were all items!')</a:t>
+            </a:r>
+          </a:p>
+          <a:p>
             <a:endParaRPr lang="en-US" sz="1800" spc="-1" dirty="0">
               <a:solidFill>
                 <a:srgbClr val="0F0F0F"/>
@@ -22652,17 +22298,21 @@
                 </a:solidFill>
                 <a:latin typeface="Consolas" panose="020B0609020204030204" pitchFamily="49" charset="0"/>
               </a:rPr>
-              <a:t>for item in </a:t>
-            </a:r>
-            <a:r>
-              <a:rPr lang="en-US" sz="1800" spc="-1" dirty="0" err="1">
+              <a:t>Here comes the next item… 13</a:t>
+            </a:r>
+          </a:p>
+          <a:p>
+            <a:r>
+              <a:rPr lang="en-US" sz="1800" spc="-1" dirty="0">
                 <a:solidFill>
                   <a:srgbClr val="0F0F0F"/>
                 </a:solidFill>
                 <a:latin typeface="Consolas" panose="020B0609020204030204" pitchFamily="49" charset="0"/>
               </a:rPr>
-              <a:t>item_list</a:t>
-            </a:r>
+              <a:t>These were all items!</a:t>
+            </a:r>
+          </a:p>
+          <a:p>
             <a:r>
               <a:rPr lang="en-US" sz="1800" spc="-1" dirty="0">
                 <a:solidFill>
@@ -22670,14 +22320,8 @@
                 </a:solidFill>
                 <a:latin typeface="Consolas" panose="020B0609020204030204" pitchFamily="49" charset="0"/>
               </a:rPr>
-              <a:t>:</a:t>
-            </a:r>
-            <a:endParaRPr lang="en-US" sz="1800" spc="-1" dirty="0">
-              <a:solidFill>
-                <a:srgbClr val="0F0F0F"/>
-              </a:solidFill>
-              <a:latin typeface="Consolas" panose="020B0609020204030204" pitchFamily="49" charset="0"/>
-            </a:endParaRPr>
+              <a:t>Here comes the next item… 42</a:t>
+            </a:r>
           </a:p>
           <a:p>
             <a:r>
@@ -22687,142 +22331,8 @@
                 </a:solidFill>
                 <a:latin typeface="Consolas" panose="020B0609020204030204" pitchFamily="49" charset="0"/>
               </a:rPr>
-              <a:t>    print(</a:t>
-            </a:r>
-            <a:r>
-              <a:rPr lang="en-US" sz="1800" spc="-1" dirty="0" err="1">
-                <a:solidFill>
-                  <a:srgbClr val="0F0F0F"/>
-                </a:solidFill>
-                <a:latin typeface="Consolas" panose="020B0609020204030204" pitchFamily="49" charset="0"/>
-              </a:rPr>
-              <a:t>f'Here</a:t>
-            </a:r>
-            <a:r>
-              <a:rPr lang="en-US" sz="1800" spc="-1" dirty="0">
-                <a:solidFill>
-                  <a:srgbClr val="0F0F0F"/>
-                </a:solidFill>
-                <a:latin typeface="Consolas" panose="020B0609020204030204" pitchFamily="49" charset="0"/>
-              </a:rPr>
-              <a:t> comes the next item… {item}')</a:t>
-            </a:r>
-            <a:endParaRPr lang="en-US" sz="1800" spc="-1" dirty="0">
-              <a:solidFill>
-                <a:srgbClr val="0F0F0F"/>
-              </a:solidFill>
-              <a:latin typeface="Consolas" panose="020B0609020204030204" pitchFamily="49" charset="0"/>
-            </a:endParaRPr>
-          </a:p>
-          <a:p>
-            <a:r>
-              <a:rPr lang="en-US" sz="1800" spc="-1" dirty="0">
-                <a:solidFill>
-                  <a:srgbClr val="0F0F0F"/>
-                </a:solidFill>
-                <a:latin typeface="Consolas" panose="020B0609020204030204" pitchFamily="49" charset="0"/>
-              </a:rPr>
-              <a:t>  </a:t>
-            </a:r>
-            <a:endParaRPr lang="en-US" sz="1800" spc="-1" dirty="0">
-              <a:solidFill>
-                <a:srgbClr val="0F0F0F"/>
-              </a:solidFill>
-              <a:latin typeface="Consolas" panose="020B0609020204030204" pitchFamily="49" charset="0"/>
-            </a:endParaRPr>
-          </a:p>
-          <a:p>
-            <a:r>
-              <a:rPr lang="en-US" sz="1800" spc="-1" dirty="0">
-                <a:solidFill>
-                  <a:srgbClr val="0F0F0F"/>
-                </a:solidFill>
-                <a:latin typeface="Consolas" panose="020B0609020204030204" pitchFamily="49" charset="0"/>
-              </a:rPr>
-              <a:t>    print('These were all items!')</a:t>
-            </a:r>
-            <a:endParaRPr lang="en-US" sz="1800" spc="-1" dirty="0">
-              <a:solidFill>
-                <a:srgbClr val="0F0F0F"/>
-              </a:solidFill>
-              <a:latin typeface="Consolas" panose="020B0609020204030204" pitchFamily="49" charset="0"/>
-            </a:endParaRPr>
-          </a:p>
-          <a:p>
-            <a:endParaRPr lang="en-US" sz="1800" spc="-1" dirty="0">
-              <a:solidFill>
-                <a:srgbClr val="0F0F0F"/>
-              </a:solidFill>
-              <a:latin typeface="Consolas" panose="020B0609020204030204" pitchFamily="49" charset="0"/>
-            </a:endParaRPr>
-          </a:p>
-          <a:p>
-            <a:r>
-              <a:rPr lang="en-US" sz="1800" spc="-1" dirty="0">
-                <a:solidFill>
-                  <a:srgbClr val="0F0F0F"/>
-                </a:solidFill>
-                <a:latin typeface="Consolas" panose="020B0609020204030204" pitchFamily="49" charset="0"/>
-              </a:rPr>
-              <a:t>Here comes the next item… 13</a:t>
-            </a:r>
-            <a:endParaRPr lang="en-US" sz="1800" spc="-1" dirty="0">
-              <a:solidFill>
-                <a:srgbClr val="0F0F0F"/>
-              </a:solidFill>
-              <a:latin typeface="Consolas" panose="020B0609020204030204" pitchFamily="49" charset="0"/>
-            </a:endParaRPr>
-          </a:p>
-          <a:p>
-            <a:r>
-              <a:rPr lang="en-US" sz="1800" spc="-1" dirty="0">
-                <a:solidFill>
-                  <a:srgbClr val="0F0F0F"/>
-                </a:solidFill>
-                <a:latin typeface="Consolas" panose="020B0609020204030204" pitchFamily="49" charset="0"/>
-              </a:rPr>
               <a:t>These were all items!</a:t>
             </a:r>
-            <a:endParaRPr lang="en-US" sz="1800" spc="-1" dirty="0">
-              <a:solidFill>
-                <a:srgbClr val="0F0F0F"/>
-              </a:solidFill>
-              <a:latin typeface="Consolas" panose="020B0609020204030204" pitchFamily="49" charset="0"/>
-            </a:endParaRPr>
-          </a:p>
-          <a:p>
-            <a:r>
-              <a:rPr lang="en-US" sz="1800" spc="-1" dirty="0">
-                <a:solidFill>
-                  <a:srgbClr val="0F0F0F"/>
-                </a:solidFill>
-                <a:latin typeface="Consolas" panose="020B0609020204030204" pitchFamily="49" charset="0"/>
-              </a:rPr>
-              <a:t>Here comes the next item… 42</a:t>
-            </a:r>
-            <a:endParaRPr lang="en-US" sz="1800" spc="-1" dirty="0">
-              <a:solidFill>
-                <a:srgbClr val="0F0F0F"/>
-              </a:solidFill>
-              <a:latin typeface="Consolas" panose="020B0609020204030204" pitchFamily="49" charset="0"/>
-            </a:endParaRPr>
-          </a:p>
-          <a:p>
-            <a:r>
-              <a:rPr lang="en-US" sz="1800" spc="-1" dirty="0">
-                <a:solidFill>
-                  <a:srgbClr val="0F0F0F"/>
-                </a:solidFill>
-                <a:latin typeface="Consolas" panose="020B0609020204030204" pitchFamily="49" charset="0"/>
-              </a:rPr>
-              <a:t>These were all items!</a:t>
-            </a:r>
-            <a:endParaRPr lang="en-US" sz="1800" spc="-1" dirty="0">
-              <a:solidFill>
-                <a:srgbClr val="0F0F0F"/>
-              </a:solidFill>
-              <a:latin typeface="Consolas" panose="020B0609020204030204" pitchFamily="49" charset="0"/>
-            </a:endParaRPr>
           </a:p>
         </p:txBody>
       </p:sp>
@@ -22962,6 +22472,77 @@
               </a:rPr>
               <a:t> = [1, 13, 42]</a:t>
             </a:r>
+          </a:p>
+          <a:p>
+            <a:r>
+              <a:rPr lang="en-US" sz="1800" spc="-1" dirty="0">
+                <a:solidFill>
+                  <a:srgbClr val="0F0F0F"/>
+                </a:solidFill>
+                <a:latin typeface="Consolas" panose="020B0609020204030204" pitchFamily="49" charset="0"/>
+              </a:rPr>
+              <a:t>for item in </a:t>
+            </a:r>
+            <a:r>
+              <a:rPr lang="en-US" sz="1800" spc="-1" dirty="0" err="1">
+                <a:solidFill>
+                  <a:srgbClr val="0F0F0F"/>
+                </a:solidFill>
+                <a:latin typeface="Consolas" panose="020B0609020204030204" pitchFamily="49" charset="0"/>
+              </a:rPr>
+              <a:t>item_list</a:t>
+            </a:r>
+            <a:r>
+              <a:rPr lang="en-US" sz="1800" spc="-1" dirty="0">
+                <a:solidFill>
+                  <a:srgbClr val="0F0F0F"/>
+                </a:solidFill>
+                <a:latin typeface="Consolas" panose="020B0609020204030204" pitchFamily="49" charset="0"/>
+              </a:rPr>
+              <a:t>:</a:t>
+            </a:r>
+          </a:p>
+          <a:p>
+            <a:r>
+              <a:rPr lang="en-US" sz="1800" spc="-1" dirty="0">
+                <a:solidFill>
+                  <a:srgbClr val="0F0F0F"/>
+                </a:solidFill>
+                <a:latin typeface="Consolas" panose="020B0609020204030204" pitchFamily="49" charset="0"/>
+              </a:rPr>
+              <a:t>    print('Here comes the next item…')</a:t>
+            </a:r>
+          </a:p>
+          <a:p>
+            <a:r>
+              <a:rPr lang="en-US" sz="1800" spc="-1" dirty="0">
+                <a:solidFill>
+                  <a:srgbClr val="0F0F0F"/>
+                </a:solidFill>
+                <a:latin typeface="Consolas" panose="020B0609020204030204" pitchFamily="49" charset="0"/>
+              </a:rPr>
+              <a:t>print(</a:t>
+            </a:r>
+            <a:r>
+              <a:rPr lang="en-US" sz="1800" spc="-1" dirty="0" err="1">
+                <a:solidFill>
+                  <a:srgbClr val="0F0F0F"/>
+                </a:solidFill>
+                <a:latin typeface="Consolas" panose="020B0609020204030204" pitchFamily="49" charset="0"/>
+              </a:rPr>
+              <a:t>f'Here</a:t>
+            </a:r>
+            <a:r>
+              <a:rPr lang="en-US" sz="1800" spc="-1" dirty="0">
+                <a:solidFill>
+                  <a:srgbClr val="0F0F0F"/>
+                </a:solidFill>
+                <a:latin typeface="Consolas" panose="020B0609020204030204" pitchFamily="49" charset="0"/>
+              </a:rPr>
+              <a:t> it is: {item}')</a:t>
+            </a:r>
+          </a:p>
+          <a:p>
             <a:endParaRPr lang="en-US" sz="1800" spc="-1" dirty="0">
               <a:solidFill>
                 <a:srgbClr val="0F0F0F"/>
@@ -22977,17 +22558,21 @@
                 </a:solidFill>
                 <a:latin typeface="Consolas" panose="020B0609020204030204" pitchFamily="49" charset="0"/>
               </a:rPr>
-              <a:t>for item in </a:t>
-            </a:r>
-            <a:r>
-              <a:rPr lang="en-US" sz="1800" spc="-1" dirty="0" err="1">
+              <a:t>Here comes the next item…</a:t>
+            </a:r>
+          </a:p>
+          <a:p>
+            <a:r>
+              <a:rPr lang="en-US" sz="1800" spc="-1" dirty="0">
                 <a:solidFill>
                   <a:srgbClr val="0F0F0F"/>
                 </a:solidFill>
                 <a:latin typeface="Consolas" panose="020B0609020204030204" pitchFamily="49" charset="0"/>
               </a:rPr>
-              <a:t>item_list</a:t>
-            </a:r>
+              <a:t>Here comes the next item…</a:t>
+            </a:r>
+          </a:p>
+          <a:p>
             <a:r>
               <a:rPr lang="en-US" sz="1800" spc="-1" dirty="0">
                 <a:solidFill>
@@ -22995,14 +22580,8 @@
                 </a:solidFill>
                 <a:latin typeface="Consolas" panose="020B0609020204030204" pitchFamily="49" charset="0"/>
               </a:rPr>
-              <a:t>:</a:t>
-            </a:r>
-            <a:endParaRPr lang="en-US" sz="1800" spc="-1" dirty="0">
-              <a:solidFill>
-                <a:srgbClr val="0F0F0F"/>
-              </a:solidFill>
-              <a:latin typeface="Consolas" panose="020B0609020204030204" pitchFamily="49" charset="0"/>
-            </a:endParaRPr>
+              <a:t>Here comes the next item…</a:t>
+            </a:r>
           </a:p>
           <a:p>
             <a:r>
@@ -23012,125 +22591,8 @@
                 </a:solidFill>
                 <a:latin typeface="Consolas" panose="020B0609020204030204" pitchFamily="49" charset="0"/>
               </a:rPr>
-              <a:t>    print('Here comes the next item…')</a:t>
-            </a:r>
-            <a:endParaRPr lang="en-US" sz="1800" spc="-1" dirty="0">
-              <a:solidFill>
-                <a:srgbClr val="0F0F0F"/>
-              </a:solidFill>
-              <a:latin typeface="Consolas" panose="020B0609020204030204" pitchFamily="49" charset="0"/>
-            </a:endParaRPr>
-          </a:p>
-          <a:p>
-            <a:r>
-              <a:rPr lang="en-US" sz="1800" spc="-1" dirty="0">
-                <a:solidFill>
-                  <a:srgbClr val="0F0F0F"/>
-                </a:solidFill>
-                <a:latin typeface="Consolas" panose="020B0609020204030204" pitchFamily="49" charset="0"/>
-              </a:rPr>
-              <a:t>print(</a:t>
-            </a:r>
-            <a:r>
-              <a:rPr lang="en-US" sz="1800" spc="-1" dirty="0" err="1">
-                <a:solidFill>
-                  <a:srgbClr val="0F0F0F"/>
-                </a:solidFill>
-                <a:latin typeface="Consolas" panose="020B0609020204030204" pitchFamily="49" charset="0"/>
-              </a:rPr>
-              <a:t>f'Here</a:t>
-            </a:r>
-            <a:r>
-              <a:rPr lang="en-US" sz="1800" spc="-1" dirty="0">
-                <a:solidFill>
-                  <a:srgbClr val="0F0F0F"/>
-                </a:solidFill>
-                <a:latin typeface="Consolas" panose="020B0609020204030204" pitchFamily="49" charset="0"/>
-              </a:rPr>
-              <a:t> it is: {item}')</a:t>
-            </a:r>
-            <a:endParaRPr lang="en-US" sz="1800" spc="-1" dirty="0">
-              <a:solidFill>
-                <a:srgbClr val="0F0F0F"/>
-              </a:solidFill>
-              <a:latin typeface="Consolas" panose="020B0609020204030204" pitchFamily="49" charset="0"/>
-            </a:endParaRPr>
-          </a:p>
-          <a:p>
-            <a:endParaRPr lang="en-US" sz="1800" spc="-1" dirty="0">
-              <a:solidFill>
-                <a:srgbClr val="0F0F0F"/>
-              </a:solidFill>
-              <a:latin typeface="Consolas" panose="020B0609020204030204" pitchFamily="49" charset="0"/>
-            </a:endParaRPr>
-          </a:p>
-          <a:p>
-            <a:r>
-              <a:rPr lang="en-US" sz="1800" spc="-1" dirty="0">
-                <a:solidFill>
-                  <a:srgbClr val="0F0F0F"/>
-                </a:solidFill>
-                <a:latin typeface="Consolas" panose="020B0609020204030204" pitchFamily="49" charset="0"/>
-              </a:rPr>
-              <a:t>Here comes the next item…</a:t>
-            </a:r>
-            <a:endParaRPr lang="en-US" sz="1800" spc="-1" dirty="0">
-              <a:solidFill>
-                <a:srgbClr val="0F0F0F"/>
-              </a:solidFill>
-              <a:latin typeface="Consolas" panose="020B0609020204030204" pitchFamily="49" charset="0"/>
-            </a:endParaRPr>
-          </a:p>
-          <a:p>
-            <a:r>
-              <a:rPr lang="en-US" sz="1800" spc="-1" dirty="0">
-                <a:solidFill>
-                  <a:srgbClr val="0F0F0F"/>
-                </a:solidFill>
-                <a:latin typeface="Consolas" panose="020B0609020204030204" pitchFamily="49" charset="0"/>
-              </a:rPr>
-              <a:t>Here comes the next item…</a:t>
-            </a:r>
-            <a:endParaRPr lang="en-US" sz="1800" spc="-1" dirty="0">
-              <a:solidFill>
-                <a:srgbClr val="0F0F0F"/>
-              </a:solidFill>
-              <a:latin typeface="Consolas" panose="020B0609020204030204" pitchFamily="49" charset="0"/>
-            </a:endParaRPr>
-          </a:p>
-          <a:p>
-            <a:r>
-              <a:rPr lang="en-US" sz="1800" spc="-1" dirty="0">
-                <a:solidFill>
-                  <a:srgbClr val="0F0F0F"/>
-                </a:solidFill>
-                <a:latin typeface="Consolas" panose="020B0609020204030204" pitchFamily="49" charset="0"/>
-              </a:rPr>
-              <a:t>Here comes the next item…</a:t>
-            </a:r>
-            <a:endParaRPr lang="en-US" sz="1800" spc="-1" dirty="0">
-              <a:solidFill>
-                <a:srgbClr val="0F0F0F"/>
-              </a:solidFill>
-              <a:latin typeface="Consolas" panose="020B0609020204030204" pitchFamily="49" charset="0"/>
-            </a:endParaRPr>
-          </a:p>
-          <a:p>
-            <a:r>
-              <a:rPr lang="en-US" sz="1800" spc="-1" dirty="0">
-                <a:solidFill>
-                  <a:srgbClr val="0F0F0F"/>
-                </a:solidFill>
-                <a:latin typeface="Consolas" panose="020B0609020204030204" pitchFamily="49" charset="0"/>
-              </a:rPr>
               <a:t>Here it is: 42</a:t>
             </a:r>
-            <a:endParaRPr lang="en-US" sz="1800" spc="-1" dirty="0">
-              <a:solidFill>
-                <a:srgbClr val="0F0F0F"/>
-              </a:solidFill>
-              <a:latin typeface="Consolas" panose="020B0609020204030204" pitchFamily="49" charset="0"/>
-            </a:endParaRPr>
           </a:p>
         </p:txBody>
       </p:sp>
@@ -23527,7 +22989,7 @@
                 <a:ea typeface="Calibri" panose="020F0502020204030204" pitchFamily="34" charset="0"/>
                 <a:cs typeface="Calibri" panose="020F0502020204030204" pitchFamily="34" charset="0"/>
               </a:rPr>
-              <a:t>Rading </a:t>
+              <a:t>Reading </a:t>
             </a:r>
             <a:r>
               <a:rPr lang="de-DE" sz="1800" dirty="0" err="1">
@@ -23645,11 +23107,6 @@
               </a:rPr>
               <a:t> </a:t>
             </a:r>
-            <a:endParaRPr lang="de-DE" sz="1800" dirty="0">
-              <a:latin typeface="Calibri" panose="020F0502020204030204" pitchFamily="34" charset="0"/>
-              <a:ea typeface="Calibri" panose="020F0502020204030204" pitchFamily="34" charset="0"/>
-              <a:cs typeface="Calibri" panose="020F0502020204030204" pitchFamily="34" charset="0"/>
-            </a:endParaRPr>
           </a:p>
         </p:txBody>
       </p:sp>
@@ -23701,12 +23158,6 @@
               </a:rPr>
               <a:t>name = input('Tell me your name!')</a:t>
             </a:r>
-            <a:endParaRPr lang="en-US" sz="1800" spc="-1" dirty="0">
-              <a:solidFill>
-                <a:srgbClr val="0F0F0F"/>
-              </a:solidFill>
-              <a:latin typeface="Consolas" panose="020B0609020204030204" pitchFamily="49" charset="0"/>
-            </a:endParaRPr>
           </a:p>
           <a:p>
             <a:r>
@@ -23736,12 +23187,6 @@
               </a:rPr>
               <a:t>, hi {name}!')</a:t>
             </a:r>
-            <a:endParaRPr lang="en-US" sz="1800" spc="-1" dirty="0">
-              <a:solidFill>
-                <a:srgbClr val="0F0F0F"/>
-              </a:solidFill>
-              <a:latin typeface="Consolas" panose="020B0609020204030204" pitchFamily="49" charset="0"/>
-            </a:endParaRPr>
           </a:p>
         </p:txBody>
       </p:sp>
@@ -24293,11 +23738,6 @@
               </a:rPr>
               <a:t>)</a:t>
             </a:r>
-            <a:endParaRPr lang="de-DE" sz="1800" dirty="0">
-              <a:latin typeface="Calibri" panose="020F0502020204030204" pitchFamily="34" charset="0"/>
-              <a:ea typeface="Calibri" panose="020F0502020204030204" pitchFamily="34" charset="0"/>
-              <a:cs typeface="Calibri" panose="020F0502020204030204" pitchFamily="34" charset="0"/>
-            </a:endParaRPr>
           </a:p>
           <a:p>
             <a:pPr marL="285750" indent="-285750">
@@ -24363,11 +23803,6 @@
               </a:rPr>
               <a:t> type</a:t>
             </a:r>
-            <a:endParaRPr lang="de-DE" sz="1800" dirty="0">
-              <a:latin typeface="Calibri" panose="020F0502020204030204" pitchFamily="34" charset="0"/>
-              <a:ea typeface="Calibri" panose="020F0502020204030204" pitchFamily="34" charset="0"/>
-              <a:cs typeface="Calibri" panose="020F0502020204030204" pitchFamily="34" charset="0"/>
-            </a:endParaRPr>
           </a:p>
           <a:p>
             <a:pPr marL="285750" indent="-285750">
@@ -24469,11 +23904,6 @@
               </a:rPr>
               <a:t>)</a:t>
             </a:r>
-            <a:endParaRPr lang="de-DE" sz="1800" dirty="0">
-              <a:latin typeface="Calibri" panose="020F0502020204030204" pitchFamily="34" charset="0"/>
-              <a:ea typeface="Calibri" panose="020F0502020204030204" pitchFamily="34" charset="0"/>
-              <a:cs typeface="Calibri" panose="020F0502020204030204" pitchFamily="34" charset="0"/>
-            </a:endParaRPr>
           </a:p>
           <a:p>
             <a:pPr marL="285750" indent="-285750">
@@ -24491,11 +23921,6 @@
               </a:rPr>
               <a:t>etc.</a:t>
             </a:r>
-            <a:endParaRPr lang="de-DE" sz="1800" dirty="0">
-              <a:latin typeface="Calibri" panose="020F0502020204030204" pitchFamily="34" charset="0"/>
-              <a:ea typeface="Calibri" panose="020F0502020204030204" pitchFamily="34" charset="0"/>
-              <a:cs typeface="Calibri" panose="020F0502020204030204" pitchFamily="34" charset="0"/>
-            </a:endParaRPr>
           </a:p>
           <a:p>
             <a:pPr marL="285750" indent="-285750">
@@ -24701,12 +24126,6 @@
               </a:rPr>
               <a:t>()</a:t>
             </a:r>
-            <a:endParaRPr lang="en-US" sz="1800" spc="-1" dirty="0">
-              <a:solidFill>
-                <a:srgbClr val="0F0F0F"/>
-              </a:solidFill>
-              <a:latin typeface="Consolas" panose="020B0609020204030204" pitchFamily="49" charset="0"/>
-            </a:endParaRPr>
           </a:p>
           <a:p>
             <a:r>
@@ -24745,12 +24164,6 @@
               </a:rPr>
               <a:t>()</a:t>
             </a:r>
-            <a:endParaRPr lang="en-US" sz="1800" spc="-1" dirty="0">
-              <a:solidFill>
-                <a:srgbClr val="0F0F0F"/>
-              </a:solidFill>
-              <a:latin typeface="Consolas" panose="020B0609020204030204" pitchFamily="49" charset="0"/>
-            </a:endParaRPr>
           </a:p>
         </p:txBody>
       </p:sp>
@@ -25004,11 +24417,6 @@
               </a:rPr>
               <a:t>Executing instruction while condition is satisfied</a:t>
             </a:r>
-            <a:endParaRPr lang="en-US" sz="1800" dirty="0">
-              <a:latin typeface="Calibri" panose="020F0502020204030204" pitchFamily="34" charset="0"/>
-              <a:ea typeface="Calibri" panose="020F0502020204030204" pitchFamily="34" charset="0"/>
-              <a:cs typeface="Calibri" panose="020F0502020204030204" pitchFamily="34" charset="0"/>
-            </a:endParaRPr>
           </a:p>
           <a:p>
             <a:pPr marL="742950" lvl="1" indent="-285750">
@@ -25026,11 +24434,6 @@
               </a:rPr>
               <a:t>Or in other words: as long as condition is satisfied</a:t>
             </a:r>
-            <a:endParaRPr lang="en-US" sz="1800" dirty="0">
-              <a:latin typeface="Calibri" panose="020F0502020204030204" pitchFamily="34" charset="0"/>
-              <a:ea typeface="Calibri" panose="020F0502020204030204" pitchFamily="34" charset="0"/>
-              <a:cs typeface="Calibri" panose="020F0502020204030204" pitchFamily="34" charset="0"/>
-            </a:endParaRPr>
           </a:p>
           <a:p>
             <a:pPr marL="285750" indent="-285750">
@@ -25056,11 +24459,6 @@
               </a:rPr>
               <a:t> condition satisfied:</a:t>
             </a:r>
-            <a:endParaRPr lang="en-US" sz="1800" dirty="0">
-              <a:latin typeface="Calibri" panose="020F0502020204030204" pitchFamily="34" charset="0"/>
-              <a:ea typeface="Calibri" panose="020F0502020204030204" pitchFamily="34" charset="0"/>
-              <a:cs typeface="Calibri" panose="020F0502020204030204" pitchFamily="34" charset="0"/>
-            </a:endParaRPr>
           </a:p>
           <a:p>
             <a:pPr marL="742950" lvl="1" indent="-285750">
@@ -25078,11 +24476,6 @@
               </a:rPr>
               <a:t>Execute instructions</a:t>
             </a:r>
-            <a:endParaRPr lang="en-US" sz="1800" dirty="0">
-              <a:latin typeface="Calibri" panose="020F0502020204030204" pitchFamily="34" charset="0"/>
-              <a:ea typeface="Calibri" panose="020F0502020204030204" pitchFamily="34" charset="0"/>
-              <a:cs typeface="Calibri" panose="020F0502020204030204" pitchFamily="34" charset="0"/>
-            </a:endParaRPr>
           </a:p>
           <a:p>
             <a:pPr marL="285750" indent="-285750">
@@ -25116,11 +24509,6 @@
               </a:rPr>
               <a:t> loops:</a:t>
             </a:r>
-            <a:endParaRPr lang="en-US" sz="1800" dirty="0">
-              <a:latin typeface="Calibri" panose="020F0502020204030204" pitchFamily="34" charset="0"/>
-              <a:ea typeface="Calibri" panose="020F0502020204030204" pitchFamily="34" charset="0"/>
-              <a:cs typeface="Calibri" panose="020F0502020204030204" pitchFamily="34" charset="0"/>
-            </a:endParaRPr>
           </a:p>
           <a:p>
             <a:pPr marL="457200" lvl="1" indent="0">
@@ -25139,14 +24527,6 @@
               </a:rPr>
               <a:t>while condition:</a:t>
             </a:r>
-            <a:endParaRPr lang="en-US" sz="1800" dirty="0">
-              <a:highlight>
-                <a:srgbClr val="DAE3F3"/>
-              </a:highlight>
-              <a:latin typeface="Consolas" panose="020B0609020204030204" pitchFamily="49" charset="0"/>
-              <a:ea typeface="Calibri" panose="020F0502020204030204" pitchFamily="34" charset="0"/>
-              <a:cs typeface="Calibri" panose="020F0502020204030204" pitchFamily="34" charset="0"/>
-            </a:endParaRPr>
           </a:p>
           <a:p>
             <a:pPr marL="914400" lvl="2" indent="0">
@@ -25187,11 +24567,6 @@
               </a:rPr>
               <a:t>No explicit loop (iterating) variable</a:t>
             </a:r>
-            <a:endParaRPr lang="en-US" sz="1800" dirty="0">
-              <a:latin typeface="Calibri" panose="020F0502020204030204" pitchFamily="34" charset="0"/>
-              <a:ea typeface="Calibri" panose="020F0502020204030204" pitchFamily="34" charset="0"/>
-              <a:cs typeface="Calibri" panose="020F0502020204030204" pitchFamily="34" charset="0"/>
-            </a:endParaRPr>
           </a:p>
           <a:p>
             <a:pPr marL="285750" indent="-285750">
@@ -25209,11 +24584,6 @@
               </a:rPr>
               <a:t>Repeated code block with arbitrary number of instructions</a:t>
             </a:r>
-            <a:endParaRPr lang="en-US" sz="1800" dirty="0">
-              <a:latin typeface="Calibri" panose="020F0502020204030204" pitchFamily="34" charset="0"/>
-              <a:ea typeface="Calibri" panose="020F0502020204030204" pitchFamily="34" charset="0"/>
-              <a:cs typeface="Calibri" panose="020F0502020204030204" pitchFamily="34" charset="0"/>
-            </a:endParaRPr>
           </a:p>
         </p:txBody>
       </p:sp>
@@ -25265,12 +24635,6 @@
               </a:rPr>
               <a:t>x = 0</a:t>
             </a:r>
-            <a:endParaRPr lang="en-US" sz="1800" spc="-1" dirty="0">
-              <a:solidFill>
-                <a:srgbClr val="0F0F0F"/>
-              </a:solidFill>
-              <a:latin typeface="Consolas" panose="020B0609020204030204" pitchFamily="49" charset="0"/>
-            </a:endParaRPr>
           </a:p>
           <a:p>
             <a:r>
@@ -25282,12 +24646,6 @@
               </a:rPr>
               <a:t>while x &lt; 3:</a:t>
             </a:r>
-            <a:endParaRPr lang="en-US" sz="1800" spc="-1" dirty="0">
-              <a:solidFill>
-                <a:srgbClr val="0F0F0F"/>
-              </a:solidFill>
-              <a:latin typeface="Consolas" panose="020B0609020204030204" pitchFamily="49" charset="0"/>
-            </a:endParaRPr>
           </a:p>
           <a:p>
             <a:r>
@@ -25299,12 +24657,6 @@
               </a:rPr>
               <a:t>    print(x)</a:t>
             </a:r>
-            <a:endParaRPr lang="en-US" sz="1800" spc="-1" dirty="0">
-              <a:solidFill>
-                <a:srgbClr val="0F0F0F"/>
-              </a:solidFill>
-              <a:latin typeface="Consolas" panose="020B0609020204030204" pitchFamily="49" charset="0"/>
-            </a:endParaRPr>
           </a:p>
           <a:p>
             <a:r>
@@ -25316,12 +24668,6 @@
               </a:rPr>
               <a:t>    x = x + 1</a:t>
             </a:r>
-            <a:endParaRPr lang="en-US" sz="1800" spc="-1" dirty="0">
-              <a:solidFill>
-                <a:srgbClr val="0F0F0F"/>
-              </a:solidFill>
-              <a:latin typeface="Consolas" panose="020B0609020204030204" pitchFamily="49" charset="0"/>
-            </a:endParaRPr>
           </a:p>
           <a:p>
             <a:r>
@@ -25333,12 +24679,6 @@
               </a:rPr>
               <a:t>print(x)</a:t>
             </a:r>
-            <a:endParaRPr lang="en-US" sz="1800" spc="-1" dirty="0">
-              <a:solidFill>
-                <a:srgbClr val="0F0F0F"/>
-              </a:solidFill>
-              <a:latin typeface="Consolas" panose="020B0609020204030204" pitchFamily="49" charset="0"/>
-            </a:endParaRPr>
           </a:p>
         </p:txBody>
       </p:sp>
@@ -25487,11 +24827,6 @@
               </a:rPr>
               <a:t>Ask user for input as long as the user enters a specific input</a:t>
             </a:r>
-            <a:endParaRPr lang="en-US" sz="1800" dirty="0">
-              <a:latin typeface="Calibri" panose="020F0502020204030204" pitchFamily="34" charset="0"/>
-              <a:ea typeface="Calibri" panose="020F0502020204030204" pitchFamily="34" charset="0"/>
-              <a:cs typeface="Calibri" panose="020F0502020204030204" pitchFamily="34" charset="0"/>
-            </a:endParaRPr>
           </a:p>
           <a:p>
             <a:pPr marL="285750" indent="-285750">
@@ -25582,12 +24917,6 @@
               </a:rPr>
               <a:t> = ''</a:t>
             </a:r>
-            <a:endParaRPr lang="en-US" sz="1800" spc="-1" dirty="0">
-              <a:solidFill>
-                <a:srgbClr val="0F0F0F"/>
-              </a:solidFill>
-              <a:latin typeface="Consolas" panose="020B0609020204030204" pitchFamily="49" charset="0"/>
-            </a:endParaRPr>
           </a:p>
           <a:p>
             <a:r>
@@ -25617,12 +24946,6 @@
               </a:rPr>
               <a:t> != 'quit':</a:t>
             </a:r>
-            <a:endParaRPr lang="en-US" sz="1800" spc="-1" dirty="0">
-              <a:solidFill>
-                <a:srgbClr val="0F0F0F"/>
-              </a:solidFill>
-              <a:latin typeface="Consolas" panose="020B0609020204030204" pitchFamily="49" charset="0"/>
-            </a:endParaRPr>
           </a:p>
           <a:p>
             <a:r>
@@ -25652,12 +24975,6 @@
               </a:rPr>
               <a:t> = input('What are you saying?') </a:t>
             </a:r>
-            <a:endParaRPr lang="en-US" sz="1800" spc="-1" dirty="0">
-              <a:solidFill>
-                <a:srgbClr val="0F0F0F"/>
-              </a:solidFill>
-              <a:latin typeface="Consolas" panose="020B0609020204030204" pitchFamily="49" charset="0"/>
-            </a:endParaRPr>
           </a:p>
           <a:p>
             <a:r>
@@ -25687,12 +25004,6 @@
               </a:rPr>
               <a:t>)</a:t>
             </a:r>
-            <a:endParaRPr lang="en-US" sz="1800" spc="-1" dirty="0">
-              <a:solidFill>
-                <a:srgbClr val="0F0F0F"/>
-              </a:solidFill>
-              <a:latin typeface="Consolas" panose="020B0609020204030204" pitchFamily="49" charset="0"/>
-            </a:endParaRPr>
           </a:p>
         </p:txBody>
       </p:sp>
@@ -25819,11 +25130,6 @@
               </a:rPr>
               <a:t>Program runs forever</a:t>
             </a:r>
-            <a:endParaRPr lang="en-US" sz="1800" dirty="0">
-              <a:latin typeface="Calibri" panose="020F0502020204030204" pitchFamily="34" charset="0"/>
-              <a:ea typeface="Calibri" panose="020F0502020204030204" pitchFamily="34" charset="0"/>
-              <a:cs typeface="Calibri" panose="020F0502020204030204" pitchFamily="34" charset="0"/>
-            </a:endParaRPr>
           </a:p>
           <a:p>
             <a:pPr marL="742950" lvl="1" indent="-285750">
@@ -25844,14 +25150,6 @@
               </a:rPr>
               <a:t>while True:</a:t>
             </a:r>
-            <a:endParaRPr lang="en-US" sz="1800" dirty="0">
-              <a:highlight>
-                <a:srgbClr val="DAE3F3"/>
-              </a:highlight>
-              <a:latin typeface="Consolas" panose="020B0609020204030204" pitchFamily="49" charset="0"/>
-              <a:ea typeface="Calibri" panose="020F0502020204030204" pitchFamily="34" charset="0"/>
-              <a:cs typeface="Calibri" panose="020F0502020204030204" pitchFamily="34" charset="0"/>
-            </a:endParaRPr>
           </a:p>
           <a:p>
             <a:pPr marL="285750" indent="-285750">
@@ -25880,14 +25178,6 @@
               </a:rPr>
               <a:t>break</a:t>
             </a:r>
-            <a:endParaRPr lang="en-US" sz="1800" dirty="0">
-              <a:highlight>
-                <a:srgbClr val="DAE3F3"/>
-              </a:highlight>
-              <a:latin typeface="Consolas" panose="020B0609020204030204" pitchFamily="49" charset="0"/>
-              <a:ea typeface="Calibri" panose="020F0502020204030204" pitchFamily="34" charset="0"/>
-              <a:cs typeface="Calibri" panose="020F0502020204030204" pitchFamily="34" charset="0"/>
-            </a:endParaRPr>
           </a:p>
           <a:p>
             <a:pPr marL="285750" indent="-285750">
@@ -26005,11 +25295,6 @@
               </a:rPr>
               <a:t>See unit5.ipynb notebook</a:t>
             </a:r>
-            <a:endParaRPr lang="en-US" sz="1800" dirty="0">
-              <a:latin typeface="Calibri" panose="020F0502020204030204" pitchFamily="34" charset="0"/>
-              <a:ea typeface="Calibri" panose="020F0502020204030204" pitchFamily="34" charset="0"/>
-              <a:cs typeface="Calibri" panose="020F0502020204030204" pitchFamily="34" charset="0"/>
-            </a:endParaRPr>
           </a:p>
         </p:txBody>
       </p:sp>
@@ -26061,12 +25346,6 @@
               </a:rPr>
               <a:t>while True:</a:t>
             </a:r>
-            <a:endParaRPr lang="en-US" sz="1800" spc="-1" dirty="0">
-              <a:solidFill>
-                <a:srgbClr val="0F0F0F"/>
-              </a:solidFill>
-              <a:latin typeface="Consolas" panose="020B0609020204030204" pitchFamily="49" charset="0"/>
-            </a:endParaRPr>
           </a:p>
           <a:p>
             <a:r>
@@ -26096,12 +25375,6 @@
               </a:rPr>
               <a:t> = input('What are you saying?') </a:t>
             </a:r>
-            <a:endParaRPr lang="en-US" sz="1800" spc="-1" dirty="0">
-              <a:solidFill>
-                <a:srgbClr val="0F0F0F"/>
-              </a:solidFill>
-              <a:latin typeface="Consolas" panose="020B0609020204030204" pitchFamily="49" charset="0"/>
-            </a:endParaRPr>
           </a:p>
           <a:p>
             <a:r>
@@ -26131,12 +25404,6 @@
               </a:rPr>
               <a:t>)</a:t>
             </a:r>
-            <a:endParaRPr lang="en-US" sz="1800" spc="-1" dirty="0">
-              <a:solidFill>
-                <a:srgbClr val="0F0F0F"/>
-              </a:solidFill>
-              <a:latin typeface="Consolas" panose="020B0609020204030204" pitchFamily="49" charset="0"/>
-            </a:endParaRPr>
           </a:p>
           <a:p>
             <a:r>
@@ -26166,12 +25433,6 @@
               </a:rPr>
               <a:t> == 'quit':</a:t>
             </a:r>
-            <a:endParaRPr lang="en-US" sz="1800" spc="-1" dirty="0">
-              <a:solidFill>
-                <a:srgbClr val="0F0F0F"/>
-              </a:solidFill>
-              <a:latin typeface="Consolas" panose="020B0609020204030204" pitchFamily="49" charset="0"/>
-            </a:endParaRPr>
           </a:p>
           <a:p>
             <a:r>
@@ -26183,12 +25444,6 @@
               </a:rPr>
               <a:t>      break</a:t>
             </a:r>
-            <a:endParaRPr lang="en-US" sz="1800" spc="-1" dirty="0">
-              <a:solidFill>
-                <a:srgbClr val="0F0F0F"/>
-              </a:solidFill>
-              <a:latin typeface="Consolas" panose="020B0609020204030204" pitchFamily="49" charset="0"/>
-            </a:endParaRPr>
           </a:p>
         </p:txBody>
       </p:sp>
@@ -26420,11 +25675,6 @@
               </a:rPr>
               <a:t>Suppose we collect some experimental data</a:t>
             </a:r>
-            <a:endParaRPr lang="en-US" sz="1800" dirty="0">
-              <a:latin typeface="Calibri" panose="020F0502020204030204" pitchFamily="34" charset="0"/>
-              <a:ea typeface="Calibri" panose="020F0502020204030204" pitchFamily="34" charset="0"/>
-              <a:cs typeface="Calibri" panose="020F0502020204030204" pitchFamily="34" charset="0"/>
-            </a:endParaRPr>
           </a:p>
           <a:p>
             <a:pPr marL="742950" lvl="1" indent="-285750">
@@ -26442,11 +25692,6 @@
               </a:rPr>
               <a:t>Measurements of temperature, air pressure</a:t>
             </a:r>
-            <a:endParaRPr lang="en-US" sz="1800" dirty="0">
-              <a:latin typeface="Calibri" panose="020F0502020204030204" pitchFamily="34" charset="0"/>
-              <a:ea typeface="Calibri" panose="020F0502020204030204" pitchFamily="34" charset="0"/>
-              <a:cs typeface="Calibri" panose="020F0502020204030204" pitchFamily="34" charset="0"/>
-            </a:endParaRPr>
           </a:p>
           <a:p>
             <a:pPr marL="742950" lvl="1" indent="-285750">
@@ -26464,11 +25709,6 @@
               </a:rPr>
               <a:t>Sales data of e.g., video games, music, movies</a:t>
             </a:r>
-            <a:endParaRPr lang="en-US" sz="1800" dirty="0">
-              <a:latin typeface="Calibri" panose="020F0502020204030204" pitchFamily="34" charset="0"/>
-              <a:ea typeface="Calibri" panose="020F0502020204030204" pitchFamily="34" charset="0"/>
-              <a:cs typeface="Calibri" panose="020F0502020204030204" pitchFamily="34" charset="0"/>
-            </a:endParaRPr>
           </a:p>
           <a:p>
             <a:pPr marL="742950" lvl="1" indent="-285750">
@@ -26486,11 +25726,6 @@
               </a:rPr>
               <a:t>Prices of houses, apartments</a:t>
             </a:r>
-            <a:endParaRPr lang="en-US" sz="1800" dirty="0">
-              <a:latin typeface="Calibri" panose="020F0502020204030204" pitchFamily="34" charset="0"/>
-              <a:ea typeface="Calibri" panose="020F0502020204030204" pitchFamily="34" charset="0"/>
-              <a:cs typeface="Calibri" panose="020F0502020204030204" pitchFamily="34" charset="0"/>
-            </a:endParaRPr>
           </a:p>
           <a:p>
             <a:pPr marL="742950" lvl="1" indent="-285750">
@@ -26508,11 +25743,6 @@
               </a:rPr>
               <a:t>etc.</a:t>
             </a:r>
-            <a:endParaRPr lang="en-US" sz="1800" dirty="0">
-              <a:latin typeface="Calibri" panose="020F0502020204030204" pitchFamily="34" charset="0"/>
-              <a:ea typeface="Calibri" panose="020F0502020204030204" pitchFamily="34" charset="0"/>
-              <a:cs typeface="Calibri" panose="020F0502020204030204" pitchFamily="34" charset="0"/>
-            </a:endParaRPr>
           </a:p>
           <a:p>
             <a:pPr marL="285750" indent="-285750">
@@ -26555,11 +25785,6 @@
               </a:rPr>
               <a:t>Temperature is associated with the air pressure</a:t>
             </a:r>
-            <a:endParaRPr lang="en-US" sz="1800" dirty="0">
-              <a:latin typeface="Calibri" panose="020F0502020204030204" pitchFamily="34" charset="0"/>
-              <a:ea typeface="Calibri" panose="020F0502020204030204" pitchFamily="34" charset="0"/>
-              <a:cs typeface="Calibri" panose="020F0502020204030204" pitchFamily="34" charset="0"/>
-            </a:endParaRPr>
           </a:p>
           <a:p>
             <a:pPr marL="742950" lvl="1" indent="-285750">
@@ -26577,11 +25802,6 @@
               </a:rPr>
               <a:t>Music sales are associated with the movie sales</a:t>
             </a:r>
-            <a:endParaRPr lang="en-US" sz="1800" dirty="0">
-              <a:latin typeface="Calibri" panose="020F0502020204030204" pitchFamily="34" charset="0"/>
-              <a:ea typeface="Calibri" panose="020F0502020204030204" pitchFamily="34" charset="0"/>
-              <a:cs typeface="Calibri" panose="020F0502020204030204" pitchFamily="34" charset="0"/>
-            </a:endParaRPr>
           </a:p>
           <a:p>
             <a:pPr marL="742950" lvl="1" indent="-285750">
@@ -26599,11 +25819,6 @@
               </a:rPr>
               <a:t>House price is associated with the area of the house</a:t>
             </a:r>
-            <a:endParaRPr lang="en-US" sz="1800" dirty="0">
-              <a:latin typeface="Calibri" panose="020F0502020204030204" pitchFamily="34" charset="0"/>
-              <a:ea typeface="Calibri" panose="020F0502020204030204" pitchFamily="34" charset="0"/>
-              <a:cs typeface="Calibri" panose="020F0502020204030204" pitchFamily="34" charset="0"/>
-            </a:endParaRPr>
           </a:p>
           <a:p>
             <a:pPr marL="742950" lvl="1" indent="-285750">
@@ -26621,11 +25836,6 @@
               </a:rPr>
               <a:t>etc.</a:t>
             </a:r>
-            <a:endParaRPr lang="en-US" sz="1800" dirty="0">
-              <a:latin typeface="Calibri" panose="020F0502020204030204" pitchFamily="34" charset="0"/>
-              <a:ea typeface="Calibri" panose="020F0502020204030204" pitchFamily="34" charset="0"/>
-              <a:cs typeface="Calibri" panose="020F0502020204030204" pitchFamily="34" charset="0"/>
-            </a:endParaRPr>
           </a:p>
         </p:txBody>
       </p:sp>
@@ -26752,11 +25962,6 @@
               </a:rPr>
               <a:t>Typically we will plot the data first to explore the associations</a:t>
             </a:r>
-            <a:endParaRPr lang="en-US" sz="1800" dirty="0">
-              <a:latin typeface="Calibri" panose="020F0502020204030204" pitchFamily="34" charset="0"/>
-              <a:ea typeface="Calibri" panose="020F0502020204030204" pitchFamily="34" charset="0"/>
-              <a:cs typeface="Calibri" panose="020F0502020204030204" pitchFamily="34" charset="0"/>
-            </a:endParaRPr>
           </a:p>
         </p:txBody>
       </p:sp>
@@ -26769,7 +25974,7 @@
           <p:nvPr/>
         </p:nvPicPr>
         <p:blipFill>
-          <a:blip r:embed="rId1"/>
+          <a:blip r:embed="rId3"/>
           <a:stretch>
             <a:fillRect/>
           </a:stretch>
@@ -26907,11 +26112,6 @@
               </a:rPr>
               <a:t>Next, we can fit a curve to data to represent the association, e.g., we can fit a line</a:t>
             </a:r>
-            <a:endParaRPr lang="en-US" sz="1800" dirty="0">
-              <a:latin typeface="Calibri" panose="020F0502020204030204" pitchFamily="34" charset="0"/>
-              <a:ea typeface="Calibri" panose="020F0502020204030204" pitchFamily="34" charset="0"/>
-              <a:cs typeface="Calibri" panose="020F0502020204030204" pitchFamily="34" charset="0"/>
-            </a:endParaRPr>
           </a:p>
         </p:txBody>
       </p:sp>
@@ -26924,7 +26124,7 @@
           <p:nvPr/>
         </p:nvPicPr>
         <p:blipFill>
-          <a:blip r:embed="rId1"/>
+          <a:blip r:embed="rId3"/>
           <a:stretch>
             <a:fillRect/>
           </a:stretch>
@@ -27062,11 +26262,6 @@
               </a:rPr>
               <a:t>But, what is the “best” line to fit?</a:t>
             </a:r>
-            <a:endParaRPr lang="en-US" sz="1800" dirty="0">
-              <a:latin typeface="Calibri" panose="020F0502020204030204" pitchFamily="34" charset="0"/>
-              <a:ea typeface="Calibri" panose="020F0502020204030204" pitchFamily="34" charset="0"/>
-              <a:cs typeface="Calibri" panose="020F0502020204030204" pitchFamily="34" charset="0"/>
-            </a:endParaRPr>
           </a:p>
         </p:txBody>
       </p:sp>
@@ -27079,7 +26274,7 @@
           <p:nvPr/>
         </p:nvPicPr>
         <p:blipFill>
-          <a:blip r:embed="rId1"/>
+          <a:blip r:embed="rId3"/>
           <a:stretch>
             <a:fillRect/>
           </a:stretch>
@@ -27228,11 +26423,6 @@
               </a:rPr>
               <a:t>Array (sequence) of elements</a:t>
             </a:r>
-            <a:endParaRPr lang="en-US" sz="1800" dirty="0">
-              <a:latin typeface="Calibri" panose="020F0502020204030204" pitchFamily="34" charset="0"/>
-              <a:ea typeface="Cambria Math" panose="02040503050406030204" pitchFamily="18" charset="0"/>
-              <a:cs typeface="Calibri" panose="020F0502020204030204" pitchFamily="34" charset="0"/>
-            </a:endParaRPr>
           </a:p>
           <a:p>
             <a:pPr marL="285750" indent="-285750">
@@ -27250,11 +26440,6 @@
               </a:rPr>
               <a:t>Ordered and mutable</a:t>
             </a:r>
-            <a:endParaRPr lang="en-US" sz="1800" b="1" dirty="0">
-              <a:latin typeface="Calibri" panose="020F0502020204030204" pitchFamily="34" charset="0"/>
-              <a:ea typeface="Cambria Math" panose="02040503050406030204" pitchFamily="18" charset="0"/>
-              <a:cs typeface="Calibri" panose="020F0502020204030204" pitchFamily="34" charset="0"/>
-            </a:endParaRPr>
           </a:p>
           <a:p>
             <a:pPr marL="285750" indent="-285750">
@@ -27280,11 +26465,6 @@
               </a:rPr>
               <a:t> data types for elements</a:t>
             </a:r>
-            <a:endParaRPr lang="en-US" sz="1800" dirty="0">
-              <a:latin typeface="Calibri" panose="020F0502020204030204" pitchFamily="34" charset="0"/>
-              <a:ea typeface="Cambria Math" panose="02040503050406030204" pitchFamily="18" charset="0"/>
-              <a:cs typeface="Calibri" panose="020F0502020204030204" pitchFamily="34" charset="0"/>
-            </a:endParaRPr>
           </a:p>
           <a:p>
             <a:pPr marL="285750" indent="-285750">
@@ -27313,11 +26493,6 @@
               </a:rPr>
               <a:t> creates a list, elements are separated with commas</a:t>
             </a:r>
-            <a:endParaRPr lang="en-US" sz="1800" dirty="0">
-              <a:latin typeface="Calibri" panose="020F0502020204030204" pitchFamily="34" charset="0"/>
-              <a:ea typeface="Cambria Math" panose="02040503050406030204" pitchFamily="18" charset="0"/>
-              <a:cs typeface="Calibri" panose="020F0502020204030204" pitchFamily="34" charset="0"/>
-            </a:endParaRPr>
           </a:p>
           <a:p>
             <a:pPr marL="742950" lvl="1" indent="-285750">
@@ -27338,14 +26513,6 @@
               </a:rPr>
               <a:t>colors = ['blue', 'red', 'green']</a:t>
             </a:r>
-            <a:endParaRPr lang="en-US" sz="1800" dirty="0">
-              <a:highlight>
-                <a:srgbClr val="DAE3F3"/>
-              </a:highlight>
-              <a:latin typeface="Consolas" panose="020B0609020204030204" pitchFamily="49" charset="0"/>
-              <a:ea typeface="Cambria Math" panose="02040503050406030204" pitchFamily="18" charset="0"/>
-              <a:cs typeface="Calibri" panose="020F0502020204030204" pitchFamily="34" charset="0"/>
-            </a:endParaRPr>
           </a:p>
           <a:p>
             <a:pPr marL="742950" lvl="1" indent="-285750">
@@ -27377,14 +26544,6 @@
               </a:rPr>
               <a:t> = []</a:t>
             </a:r>
-            <a:endParaRPr lang="en-US" sz="1800" dirty="0">
-              <a:highlight>
-                <a:srgbClr val="DAE3F3"/>
-              </a:highlight>
-              <a:latin typeface="Consolas" panose="020B0609020204030204" pitchFamily="49" charset="0"/>
-              <a:ea typeface="Cambria Math" panose="02040503050406030204" pitchFamily="18" charset="0"/>
-              <a:cs typeface="Calibri" panose="020F0502020204030204" pitchFamily="34" charset="0"/>
-            </a:endParaRPr>
           </a:p>
           <a:p>
             <a:pPr marL="285750" indent="-285750">
@@ -27421,11 +26580,6 @@
               </a:rPr>
               <a:t> and index – 0 based!</a:t>
             </a:r>
-            <a:endParaRPr lang="en-US" sz="1800" dirty="0">
-              <a:latin typeface="Calibri" panose="020F0502020204030204" pitchFamily="34" charset="0"/>
-              <a:ea typeface="Cambria Math" panose="02040503050406030204" pitchFamily="18" charset="0"/>
-              <a:cs typeface="Calibri" panose="020F0502020204030204" pitchFamily="34" charset="0"/>
-            </a:endParaRPr>
           </a:p>
           <a:p>
             <a:pPr marL="742950" lvl="1" indent="-285750">
@@ -27446,14 +26600,6 @@
               </a:rPr>
               <a:t>colors[1] =&gt; 'red’</a:t>
             </a:r>
-            <a:endParaRPr lang="en-US" sz="1800" dirty="0">
-              <a:highlight>
-                <a:srgbClr val="DAE3F3"/>
-              </a:highlight>
-              <a:latin typeface="Consolas" panose="020B0609020204030204" pitchFamily="49" charset="0"/>
-              <a:ea typeface="Cambria Math" panose="02040503050406030204" pitchFamily="18" charset="0"/>
-              <a:cs typeface="Calibri" panose="020F0502020204030204" pitchFamily="34" charset="0"/>
-            </a:endParaRPr>
           </a:p>
           <a:p>
             <a:pPr marL="742950" lvl="1" indent="-285750">
@@ -27471,11 +26617,6 @@
               </a:rPr>
               <a:t>Reverse indexing: negative index (-1 is the index of the last element)</a:t>
             </a:r>
-            <a:endParaRPr lang="en-US" sz="1800" dirty="0">
-              <a:latin typeface="Calibri" panose="020F0502020204030204" pitchFamily="34" charset="0"/>
-              <a:ea typeface="Cambria Math" panose="02040503050406030204" pitchFamily="18" charset="0"/>
-              <a:cs typeface="Calibri" panose="020F0502020204030204" pitchFamily="34" charset="0"/>
-            </a:endParaRPr>
           </a:p>
           <a:p>
             <a:pPr marL="285750" indent="-285750">
@@ -27644,11 +26785,6 @@
               </a:rPr>
               <a:t>But, what is the “best” line to fit?</a:t>
             </a:r>
-            <a:endParaRPr lang="en-US" sz="1800" dirty="0">
-              <a:latin typeface="Calibri" panose="020F0502020204030204" pitchFamily="34" charset="0"/>
-              <a:ea typeface="Calibri" panose="020F0502020204030204" pitchFamily="34" charset="0"/>
-              <a:cs typeface="Calibri" panose="020F0502020204030204" pitchFamily="34" charset="0"/>
-            </a:endParaRPr>
           </a:p>
         </p:txBody>
       </p:sp>
@@ -27661,7 +26797,7 @@
           <p:nvPr/>
         </p:nvPicPr>
         <p:blipFill>
-          <a:blip r:embed="rId1"/>
+          <a:blip r:embed="rId3"/>
           <a:stretch>
             <a:fillRect/>
           </a:stretch>
@@ -27799,11 +26935,6 @@
               </a:rPr>
               <a:t>But, what is the “best” line to fit?</a:t>
             </a:r>
-            <a:endParaRPr lang="en-US" sz="1800" dirty="0">
-              <a:latin typeface="Calibri" panose="020F0502020204030204" pitchFamily="34" charset="0"/>
-              <a:ea typeface="Calibri" panose="020F0502020204030204" pitchFamily="34" charset="0"/>
-              <a:cs typeface="Calibri" panose="020F0502020204030204" pitchFamily="34" charset="0"/>
-            </a:endParaRPr>
           </a:p>
         </p:txBody>
       </p:sp>
@@ -27816,7 +26947,7 @@
           <p:nvPr/>
         </p:nvPicPr>
         <p:blipFill>
-          <a:blip r:embed="rId1"/>
+          <a:blip r:embed="rId3"/>
           <a:stretch>
             <a:fillRect/>
           </a:stretch>
@@ -27910,8 +27041,8 @@
           </a:p>
         </p:txBody>
       </p:sp>
-      <mc:AlternateContent xmlns:mc="http://schemas.openxmlformats.org/markup-compatibility/2006">
-        <mc:Choice xmlns:a14="http://schemas.microsoft.com/office/drawing/2010/main" Requires="a14">
+      <mc:AlternateContent xmlns:mc="http://schemas.openxmlformats.org/markup-compatibility/2006" xmlns:a14="http://schemas.microsoft.com/office/drawing/2010/main">
+        <mc:Choice Requires="a14">
           <p:sp>
             <p:nvSpPr>
               <p:cNvPr id="8" name="Google Shape;87;p2"/>
@@ -27956,11 +27087,6 @@
                   </a:rPr>
                   <a:t>We are approximating the data with a line and need to measure the approx. error</a:t>
                 </a:r>
-                <a:endParaRPr lang="en-US" sz="1800" dirty="0">
-                  <a:latin typeface="Calibri" panose="020F0502020204030204" pitchFamily="34" charset="0"/>
-                  <a:ea typeface="Calibri" panose="020F0502020204030204" pitchFamily="34" charset="0"/>
-                  <a:cs typeface="Calibri" panose="020F0502020204030204" pitchFamily="34" charset="0"/>
-                </a:endParaRPr>
               </a:p>
               <a:p>
                 <a:pPr marL="285750" indent="-285750">
@@ -27978,11 +27104,6 @@
                   </a:rPr>
                   <a:t>There are multiple ways of how to measure error</a:t>
                 </a:r>
-                <a:endParaRPr lang="en-US" sz="1800" dirty="0">
-                  <a:latin typeface="Calibri" panose="020F0502020204030204" pitchFamily="34" charset="0"/>
-                  <a:ea typeface="Calibri" panose="020F0502020204030204" pitchFamily="34" charset="0"/>
-                  <a:cs typeface="Calibri" panose="020F0502020204030204" pitchFamily="34" charset="0"/>
-                </a:endParaRPr>
               </a:p>
               <a:p>
                 <a:pPr marL="285750" indent="-285750">
@@ -28000,11 +27121,6 @@
                   </a:rPr>
                   <a:t>But, we can start with a basic approach</a:t>
                 </a:r>
-                <a:endParaRPr lang="en-US" sz="1800" dirty="0">
-                  <a:latin typeface="Calibri" panose="020F0502020204030204" pitchFamily="34" charset="0"/>
-                  <a:ea typeface="Calibri" panose="020F0502020204030204" pitchFamily="34" charset="0"/>
-                  <a:cs typeface="Calibri" panose="020F0502020204030204" pitchFamily="34" charset="0"/>
-                </a:endParaRPr>
               </a:p>
               <a:p>
                 <a:pPr marL="285750" indent="-285750">
@@ -28022,11 +27138,6 @@
                   </a:rPr>
                   <a:t>Our line represents prediction of house prices as a function of the area</a:t>
                 </a:r>
-                <a:endParaRPr lang="en-US" sz="1800" dirty="0">
-                  <a:latin typeface="Calibri" panose="020F0502020204030204" pitchFamily="34" charset="0"/>
-                  <a:ea typeface="Calibri" panose="020F0502020204030204" pitchFamily="34" charset="0"/>
-                  <a:cs typeface="Calibri" panose="020F0502020204030204" pitchFamily="34" charset="0"/>
-                </a:endParaRPr>
               </a:p>
               <a:p>
                 <a:pPr marL="285750" indent="-285750">
@@ -28105,6 +27216,7 @@
                   <m:oMath xmlns:m="http://schemas.openxmlformats.org/officeDocument/2006/math">
                     <m:acc>
                       <m:accPr>
+                        <m:chr m:val="̂"/>
                         <m:ctrlPr>
                           <a:rPr lang="en-US" sz="1800" i="1" smtClean="0">
                             <a:latin typeface="Cambria Math" panose="02040503050406030204" pitchFamily="18" charset="0"/>
@@ -28168,6 +27280,7 @@
                   <m:oMath xmlns:m="http://schemas.openxmlformats.org/officeDocument/2006/math">
                     <m:acc>
                       <m:accPr>
+                        <m:chr m:val="̂"/>
                         <m:ctrlPr>
                           <a:rPr lang="en-US" sz="1800" i="1">
                             <a:latin typeface="Cambria Math" panose="02040503050406030204" pitchFamily="18" charset="0"/>
@@ -28256,11 +27369,6 @@
                   </a:rPr>
                   <a:t> </a:t>
                 </a:r>
-                <a:endParaRPr lang="de-AT" sz="1800" b="0" dirty="0">
-                  <a:latin typeface="Calibri" panose="020F0502020204030204" pitchFamily="34" charset="0"/>
-                  <a:ea typeface="Calibri" panose="020F0502020204030204" pitchFamily="34" charset="0"/>
-                  <a:cs typeface="Calibri" panose="020F0502020204030204" pitchFamily="34" charset="0"/>
-                </a:endParaRPr>
               </a:p>
               <a:p>
                 <a:pPr marL="285750" indent="-285750">
@@ -28590,6 +27698,7 @@
                     </m:r>
                     <m:acc>
                       <m:accPr>
+                        <m:chr m:val="̂"/>
                         <m:ctrlPr>
                           <a:rPr lang="en-US" sz="1800" i="1">
                             <a:latin typeface="Cambria Math" panose="02040503050406030204" pitchFamily="18" charset="0"/>
@@ -28694,11 +27803,6 @@
                   </a:rPr>
                   <a:t> </a:t>
                 </a:r>
-                <a:endParaRPr lang="de-AT" sz="1800" dirty="0">
-                  <a:latin typeface="Calibri" panose="020F0502020204030204" pitchFamily="34" charset="0"/>
-                  <a:ea typeface="Calibri" panose="020F0502020204030204" pitchFamily="34" charset="0"/>
-                  <a:cs typeface="Calibri" panose="020F0502020204030204" pitchFamily="34" charset="0"/>
-                </a:endParaRPr>
               </a:p>
               <a:p>
                 <a:pPr marL="285750" indent="-285750">
@@ -28732,11 +27836,6 @@
                   </a:rPr>
                   <a:t>:</a:t>
                 </a:r>
-                <a:endParaRPr lang="de-AT" sz="1800" dirty="0">
-                  <a:latin typeface="Calibri" panose="020F0502020204030204" pitchFamily="34" charset="0"/>
-                  <a:ea typeface="Calibri" panose="020F0502020204030204" pitchFamily="34" charset="0"/>
-                  <a:cs typeface="Calibri" panose="020F0502020204030204" pitchFamily="34" charset="0"/>
-                </a:endParaRPr>
               </a:p>
               <a:p>
                 <a:pPr marL="2286000" lvl="5" indent="0">
@@ -28795,15 +27894,7 @@
                               <a:ea typeface="Calibri" panose="020F0502020204030204" pitchFamily="34" charset="0"/>
                               <a:cs typeface="Calibri" panose="020F0502020204030204" pitchFamily="34" charset="0"/>
                             </a:rPr>
-                            <m:t>=</m:t>
-                          </m:r>
-                          <m:r>
-                            <a:rPr lang="de-AT" sz="1800" i="1" smtClean="0">
-                              <a:latin typeface="Cambria Math" panose="02040503050406030204" pitchFamily="18" charset="0"/>
-                              <a:ea typeface="Calibri" panose="020F0502020204030204" pitchFamily="34" charset="0"/>
-                              <a:cs typeface="Calibri" panose="020F0502020204030204" pitchFamily="34" charset="0"/>
-                            </a:rPr>
-                            <m:t>0</m:t>
+                            <m:t>=0</m:t>
                           </m:r>
                         </m:sub>
                         <m:sup>
@@ -28827,6 +27918,7 @@
                           </m:r>
                           <m:acc>
                             <m:accPr>
+                              <m:chr m:val="̂"/>
                               <m:ctrlPr>
                                 <a:rPr lang="en-US" sz="1800" i="1">
                                   <a:latin typeface="Cambria Math" panose="02040503050406030204" pitchFamily="18" charset="0"/>
@@ -28959,7 +28051,7 @@
             </p:txBody>
           </p:sp>
         </mc:Choice>
-        <mc:Fallback>
+        <mc:Fallback xmlns="">
           <p:sp>
             <p:nvSpPr>
               <p:cNvPr id="8" name="Google Shape;87;p2"/>
@@ -28979,7 +28071,7 @@
                 <a:avLst/>
               </a:prstGeom>
               <a:blipFill rotWithShape="1">
-                <a:blip r:embed="rId1"/>
+                <a:blip r:embed="rId3"/>
                 <a:stretch>
                   <a:fillRect t="-7" b="-6350"/>
                 </a:stretch>
@@ -29126,11 +28218,6 @@
               </a:rPr>
               <a:t>Sum of squared errors</a:t>
             </a:r>
-            <a:endParaRPr lang="en-US" sz="1800" dirty="0">
-              <a:latin typeface="Calibri" panose="020F0502020204030204" pitchFamily="34" charset="0"/>
-              <a:ea typeface="Calibri" panose="020F0502020204030204" pitchFamily="34" charset="0"/>
-              <a:cs typeface="Calibri" panose="020F0502020204030204" pitchFamily="34" charset="0"/>
-            </a:endParaRPr>
           </a:p>
         </p:txBody>
       </p:sp>
@@ -29143,7 +28230,7 @@
           <p:nvPr/>
         </p:nvPicPr>
         <p:blipFill>
-          <a:blip r:embed="rId1"/>
+          <a:blip r:embed="rId3"/>
           <a:stretch>
             <a:fillRect/>
           </a:stretch>
@@ -29281,11 +28368,6 @@
               </a:rPr>
               <a:t>Sum of squared errors</a:t>
             </a:r>
-            <a:endParaRPr lang="en-US" sz="1800" dirty="0">
-              <a:latin typeface="Calibri" panose="020F0502020204030204" pitchFamily="34" charset="0"/>
-              <a:ea typeface="Calibri" panose="020F0502020204030204" pitchFamily="34" charset="0"/>
-              <a:cs typeface="Calibri" panose="020F0502020204030204" pitchFamily="34" charset="0"/>
-            </a:endParaRPr>
           </a:p>
         </p:txBody>
       </p:sp>
@@ -29298,7 +28380,7 @@
           <p:nvPr/>
         </p:nvPicPr>
         <p:blipFill>
-          <a:blip r:embed="rId1"/>
+          <a:blip r:embed="rId3"/>
           <a:stretch>
             <a:fillRect/>
           </a:stretch>
@@ -29436,11 +28518,6 @@
               </a:rPr>
               <a:t>Sum of squared errors</a:t>
             </a:r>
-            <a:endParaRPr lang="en-US" sz="1800" dirty="0">
-              <a:latin typeface="Calibri" panose="020F0502020204030204" pitchFamily="34" charset="0"/>
-              <a:ea typeface="Calibri" panose="020F0502020204030204" pitchFamily="34" charset="0"/>
-              <a:cs typeface="Calibri" panose="020F0502020204030204" pitchFamily="34" charset="0"/>
-            </a:endParaRPr>
           </a:p>
         </p:txBody>
       </p:sp>
@@ -29453,7 +28530,7 @@
           <p:nvPr/>
         </p:nvPicPr>
         <p:blipFill>
-          <a:blip r:embed="rId1"/>
+          <a:blip r:embed="rId3"/>
           <a:stretch>
             <a:fillRect/>
           </a:stretch>
@@ -29547,8 +28624,8 @@
           </a:p>
         </p:txBody>
       </p:sp>
-      <mc:AlternateContent xmlns:mc="http://schemas.openxmlformats.org/markup-compatibility/2006">
-        <mc:Choice xmlns:a14="http://schemas.microsoft.com/office/drawing/2010/main" Requires="a14">
+      <mc:AlternateContent xmlns:mc="http://schemas.openxmlformats.org/markup-compatibility/2006" xmlns:a14="http://schemas.microsoft.com/office/drawing/2010/main">
+        <mc:Choice Requires="a14">
           <p:sp>
             <p:nvSpPr>
               <p:cNvPr id="8" name="Google Shape;87;p2"/>
@@ -29633,11 +28710,6 @@
                   </a:rPr>
                   <a:t>)</a:t>
                 </a:r>
-                <a:endParaRPr lang="en-US" sz="1800" dirty="0">
-                  <a:latin typeface="Calibri" panose="020F0502020204030204" pitchFamily="34" charset="0"/>
-                  <a:ea typeface="Calibri" panose="020F0502020204030204" pitchFamily="34" charset="0"/>
-                  <a:cs typeface="Calibri" panose="020F0502020204030204" pitchFamily="34" charset="0"/>
-                </a:endParaRPr>
               </a:p>
               <a:p>
                 <a:pPr marL="285750" indent="-285750">
@@ -29691,6 +28763,7 @@
                   <m:oMath xmlns:m="http://schemas.openxmlformats.org/officeDocument/2006/math">
                     <m:acc>
                       <m:accPr>
+                        <m:chr m:val="̂"/>
                         <m:ctrlPr>
                           <a:rPr lang="en-US" sz="1800" i="1" smtClean="0">
                             <a:latin typeface="Cambria Math" panose="02040503050406030204" pitchFamily="18" charset="0"/>
@@ -29799,11 +28872,6 @@
                   </a:rPr>
                   <a:t>  </a:t>
                 </a:r>
-                <a:endParaRPr lang="de-AT" sz="1800" b="0" dirty="0">
-                  <a:latin typeface="Calibri" panose="020F0502020204030204" pitchFamily="34" charset="0"/>
-                  <a:ea typeface="Calibri" panose="020F0502020204030204" pitchFamily="34" charset="0"/>
-                  <a:cs typeface="Calibri" panose="020F0502020204030204" pitchFamily="34" charset="0"/>
-                </a:endParaRPr>
               </a:p>
               <a:p>
                 <a:pPr marL="285750" indent="-285750">
@@ -29949,11 +29017,6 @@
                   </a:rPr>
                   <a:t>:</a:t>
                 </a:r>
-                <a:endParaRPr lang="de-AT" sz="1800" dirty="0">
-                  <a:latin typeface="Calibri" panose="020F0502020204030204" pitchFamily="34" charset="0"/>
-                  <a:ea typeface="Calibri" panose="020F0502020204030204" pitchFamily="34" charset="0"/>
-                  <a:cs typeface="Calibri" panose="020F0502020204030204" pitchFamily="34" charset="0"/>
-                </a:endParaRPr>
               </a:p>
               <a:p>
                 <a:pPr marL="2286000" lvl="5" indent="0">
@@ -30041,15 +29104,7 @@
                               <a:ea typeface="Calibri" panose="020F0502020204030204" pitchFamily="34" charset="0"/>
                               <a:cs typeface="Calibri" panose="020F0502020204030204" pitchFamily="34" charset="0"/>
                             </a:rPr>
-                            <m:t>=</m:t>
-                          </m:r>
-                          <m:r>
-                            <a:rPr lang="de-AT" sz="1800" i="1" smtClean="0">
-                              <a:latin typeface="Cambria Math" panose="02040503050406030204" pitchFamily="18" charset="0"/>
-                              <a:ea typeface="Calibri" panose="020F0502020204030204" pitchFamily="34" charset="0"/>
-                              <a:cs typeface="Calibri" panose="020F0502020204030204" pitchFamily="34" charset="0"/>
-                            </a:rPr>
-                            <m:t>0</m:t>
+                            <m:t>=0</m:t>
                           </m:r>
                         </m:sub>
                         <m:sup>
@@ -30073,6 +29128,7 @@
                           </m:r>
                           <m:acc>
                             <m:accPr>
+                              <m:chr m:val="̂"/>
                               <m:ctrlPr>
                                 <a:rPr lang="en-US" sz="1800" i="1">
                                   <a:latin typeface="Cambria Math" panose="02040503050406030204" pitchFamily="18" charset="0"/>
@@ -30274,15 +29330,7 @@
                               <a:ea typeface="Calibri" panose="020F0502020204030204" pitchFamily="34" charset="0"/>
                               <a:cs typeface="Calibri" panose="020F0502020204030204" pitchFamily="34" charset="0"/>
                             </a:rPr>
-                            <m:t>=</m:t>
-                          </m:r>
-                          <m:r>
-                            <a:rPr lang="de-AT" sz="1800" i="1">
-                              <a:latin typeface="Cambria Math" panose="02040503050406030204" pitchFamily="18" charset="0"/>
-                              <a:ea typeface="Calibri" panose="020F0502020204030204" pitchFamily="34" charset="0"/>
-                              <a:cs typeface="Calibri" panose="020F0502020204030204" pitchFamily="34" charset="0"/>
-                            </a:rPr>
-                            <m:t>0</m:t>
+                            <m:t>=0</m:t>
                           </m:r>
                         </m:sub>
                         <m:sup>
@@ -30652,11 +29700,6 @@
                   </a:rPr>
                   <a:t> minimal</a:t>
                 </a:r>
-                <a:endParaRPr lang="de-AT" sz="1800" b="0" dirty="0">
-                  <a:latin typeface="Calibri" panose="020F0502020204030204" pitchFamily="34" charset="0"/>
-                  <a:ea typeface="Calibri" panose="020F0502020204030204" pitchFamily="34" charset="0"/>
-                  <a:cs typeface="Calibri" panose="020F0502020204030204" pitchFamily="34" charset="0"/>
-                </a:endParaRPr>
               </a:p>
               <a:p>
                 <a:pPr marL="285750" indent="-285750">
@@ -30929,7 +29972,7 @@
             </p:txBody>
           </p:sp>
         </mc:Choice>
-        <mc:Fallback>
+        <mc:Fallback xmlns="">
           <p:sp>
             <p:nvSpPr>
               <p:cNvPr id="8" name="Google Shape;87;p2"/>
@@ -30949,7 +29992,7 @@
                 <a:avLst/>
               </a:prstGeom>
               <a:blipFill rotWithShape="1">
-                <a:blip r:embed="rId1"/>
+                <a:blip r:embed="rId3"/>
                 <a:stretch>
                   <a:fillRect t="-8" b="7"/>
                 </a:stretch>
@@ -31061,7 +30104,7 @@
           <p:nvPr/>
         </p:nvPicPr>
         <p:blipFill>
-          <a:blip r:embed="rId1"/>
+          <a:blip r:embed="rId3"/>
           <a:stretch>
             <a:fillRect/>
           </a:stretch>
@@ -31175,8 +30218,8 @@
           </a:fontRef>
         </p:style>
       </p:cxnSp>
-      <mc:AlternateContent xmlns:mc="http://schemas.openxmlformats.org/markup-compatibility/2006">
-        <mc:Choice xmlns:a14="http://schemas.microsoft.com/office/drawing/2010/main" Requires="a14">
+      <mc:AlternateContent xmlns:mc="http://schemas.openxmlformats.org/markup-compatibility/2006" xmlns:a14="http://schemas.microsoft.com/office/drawing/2010/main">
+        <mc:Choice Requires="a14">
           <p:sp>
             <p:nvSpPr>
               <p:cNvPr id="15" name="Textfeld 14"/>
@@ -31199,6 +30242,7 @@
               </a:bodyPr>
               <a:lstStyle/>
               <a:p>
+                <a:pPr/>
                 <a14:m>
                   <m:oMathPara xmlns:m="http://schemas.openxmlformats.org/officeDocument/2006/math">
                     <m:oMathParaPr>
@@ -31238,7 +30282,7 @@
             </p:txBody>
           </p:sp>
         </mc:Choice>
-        <mc:Fallback>
+        <mc:Fallback xmlns="">
           <p:sp>
             <p:nvSpPr>
               <p:cNvPr id="15" name="Textfeld 14"/>
@@ -31256,7 +30300,7 @@
                 <a:avLst/>
               </a:prstGeom>
               <a:blipFill rotWithShape="1">
-                <a:blip r:embed="rId2"/>
+                <a:blip r:embed="rId4"/>
                 <a:stretch>
                   <a:fillRect l="-4" t="-23" r="31" b="165"/>
                 </a:stretch>
@@ -31277,8 +30321,8 @@
           </p:sp>
         </mc:Fallback>
       </mc:AlternateContent>
-      <mc:AlternateContent xmlns:mc="http://schemas.openxmlformats.org/markup-compatibility/2006">
-        <mc:Choice xmlns:a14="http://schemas.microsoft.com/office/drawing/2010/main" Requires="a14">
+      <mc:AlternateContent xmlns:mc="http://schemas.openxmlformats.org/markup-compatibility/2006" xmlns:a14="http://schemas.microsoft.com/office/drawing/2010/main">
+        <mc:Choice Requires="a14">
           <p:sp>
             <p:nvSpPr>
               <p:cNvPr id="17" name="Textfeld 16"/>
@@ -31301,6 +30345,7 @@
               </a:bodyPr>
               <a:lstStyle/>
               <a:p>
+                <a:pPr/>
                 <a14:m>
                   <m:oMathPara xmlns:m="http://schemas.openxmlformats.org/officeDocument/2006/math">
                     <m:oMathParaPr>
@@ -31358,7 +30403,7 @@
             </p:txBody>
           </p:sp>
         </mc:Choice>
-        <mc:Fallback>
+        <mc:Fallback xmlns="">
           <p:sp>
             <p:nvSpPr>
               <p:cNvPr id="17" name="Textfeld 16"/>
@@ -31376,7 +30421,7 @@
                 <a:avLst/>
               </a:prstGeom>
               <a:blipFill rotWithShape="1">
-                <a:blip r:embed="rId3"/>
+                <a:blip r:embed="rId5"/>
                 <a:stretch>
                   <a:fillRect l="-3" t="-140" r="43" b="75"/>
                 </a:stretch>
@@ -33649,8 +32694,8 @@
           </a:p>
         </p:txBody>
       </p:sp>
-      <mc:AlternateContent xmlns:mc="http://schemas.openxmlformats.org/markup-compatibility/2006">
-        <mc:Choice xmlns:a14="http://schemas.microsoft.com/office/drawing/2010/main" Requires="a14">
+      <mc:AlternateContent xmlns:mc="http://schemas.openxmlformats.org/markup-compatibility/2006" xmlns:a14="http://schemas.microsoft.com/office/drawing/2010/main">
+        <mc:Choice Requires="a14">
           <p:sp>
             <p:nvSpPr>
               <p:cNvPr id="8" name="Google Shape;87;p2"/>
@@ -34010,7 +33055,7 @@
                   </m:oMath>
                 </a14:m>
                 <a:r>
-                  <a:rPr lang="en-US" altLang="de-AT" sz="1800" smtClean="0">
+                  <a:rPr lang="en-US" altLang="de-AT" sz="1800">
                     <a:latin typeface="Cambria Math" panose="02040503050406030204" pitchFamily="18" charset="0"/>
                     <a:ea typeface="Calibri" panose="020F0502020204030204" pitchFamily="34" charset="0"/>
                     <a:cs typeface="Calibri" panose="020F0502020204030204" pitchFamily="34" charset="0"/>
@@ -34112,15 +33157,7 @@
                         <a:ea typeface="Calibri" panose="020F0502020204030204" pitchFamily="34" charset="0"/>
                         <a:cs typeface="Calibri" panose="020F0502020204030204" pitchFamily="34" charset="0"/>
                       </a:rPr>
-                      <m:t>=</m:t>
-                    </m:r>
-                    <m:r>
-                      <a:rPr lang="de-AT" sz="1800" b="0" i="1" smtClean="0">
-                        <a:latin typeface="Cambria Math" panose="02040503050406030204" pitchFamily="18" charset="0"/>
-                        <a:ea typeface="Calibri" panose="020F0502020204030204" pitchFamily="34" charset="0"/>
-                        <a:cs typeface="Calibri" panose="020F0502020204030204" pitchFamily="34" charset="0"/>
-                      </a:rPr>
-                      <m:t>2</m:t>
+                      <m:t>=2</m:t>
                     </m:r>
                     <m:nary>
                       <m:naryPr>
@@ -34148,15 +33185,7 @@
                             <a:ea typeface="Calibri" panose="020F0502020204030204" pitchFamily="34" charset="0"/>
                             <a:cs typeface="Calibri" panose="020F0502020204030204" pitchFamily="34" charset="0"/>
                           </a:rPr>
-                          <m:t>=</m:t>
-                        </m:r>
-                        <m:r>
-                          <a:rPr lang="de-AT" sz="1800" i="1" smtClean="0">
-                            <a:latin typeface="Cambria Math" panose="02040503050406030204" pitchFamily="18" charset="0"/>
-                            <a:ea typeface="Calibri" panose="020F0502020204030204" pitchFamily="34" charset="0"/>
-                            <a:cs typeface="Calibri" panose="020F0502020204030204" pitchFamily="34" charset="0"/>
-                          </a:rPr>
-                          <m:t>0</m:t>
+                          <m:t>=0</m:t>
                         </m:r>
                       </m:sub>
                       <m:sup>
@@ -34340,7 +33369,7 @@
                         <a:ea typeface="Calibri" panose="020F0502020204030204" pitchFamily="34" charset="0"/>
                         <a:cs typeface="Calibri" panose="020F0502020204030204" pitchFamily="34" charset="0"/>
                       </a:rPr>
-                      <m:t>   </m:t>
+                      <m:t>   </m:t>
                     </m:r>
                     <m:r>
                       <a:rPr lang="en-US" altLang="de-AT" sz="1800" b="0" i="1" smtClean="0">
@@ -34356,7 +33385,7 @@
                         <a:ea typeface="Calibri" panose="020F0502020204030204" pitchFamily="34" charset="0"/>
                         <a:cs typeface="Calibri" panose="020F0502020204030204" pitchFamily="34" charset="0"/>
                       </a:rPr>
-                      <m:t> = </m:t>
+                      <m:t> = </m:t>
                     </m:r>
                     <m:r>
                       <a:rPr lang="en-US" altLang="de-AT" sz="1800" b="0" i="1" smtClean="0">
@@ -34372,23 +33401,7 @@
                         <a:ea typeface="Calibri" panose="020F0502020204030204" pitchFamily="34" charset="0"/>
                         <a:cs typeface="Calibri" panose="020F0502020204030204" pitchFamily="34" charset="0"/>
                       </a:rPr>
-                      <m:t> </m:t>
-                    </m:r>
-                    <m:r>
-                      <a:rPr lang="en-US" altLang="de-AT" sz="1800" b="0" i="1" smtClean="0">
-                        <a:latin typeface="Cambria Math" panose="02040503050406030204" pitchFamily="18" charset="0"/>
-                        <a:ea typeface="Calibri" panose="020F0502020204030204" pitchFamily="34" charset="0"/>
-                        <a:cs typeface="Calibri" panose="020F0502020204030204" pitchFamily="34" charset="0"/>
-                      </a:rPr>
-                      <m:t>−</m:t>
-                    </m:r>
-                    <m:r>
-                      <a:rPr lang="en-US" altLang="de-AT" sz="1800" b="0" i="1" smtClean="0">
-                        <a:latin typeface="Cambria Math" panose="02040503050406030204" pitchFamily="18" charset="0"/>
-                        <a:ea typeface="Calibri" panose="020F0502020204030204" pitchFamily="34" charset="0"/>
-                        <a:cs typeface="Calibri" panose="020F0502020204030204" pitchFamily="34" charset="0"/>
-                      </a:rPr>
-                      <m:t> </m:t>
+                      <m:t> − </m:t>
                     </m:r>
                     <m:r>
                       <a:rPr lang="en-US" altLang="de-AT" sz="1800" b="0" i="1" smtClean="0">
@@ -34404,7 +33417,7 @@
                         <a:ea typeface="Calibri" panose="020F0502020204030204" pitchFamily="34" charset="0"/>
                         <a:cs typeface="Calibri" panose="020F0502020204030204" pitchFamily="34" charset="0"/>
                       </a:rPr>
-                      <m:t> </m:t>
+                      <m:t> </m:t>
                     </m:r>
                     <m:r>
                       <a:rPr lang="en-US" altLang="de-AT" sz="1800" b="0" i="1" smtClean="0">
@@ -34420,7 +33433,7 @@
                         <a:ea typeface="Calibri" panose="020F0502020204030204" pitchFamily="34" charset="0"/>
                         <a:cs typeface="Calibri" panose="020F0502020204030204" pitchFamily="34" charset="0"/>
                       </a:rPr>
-                      <m:t> </m:t>
+                      <m:t> </m:t>
                     </m:r>
                     <m:r>
                       <a:rPr lang="zh-CN" altLang="en-US" sz="1800" b="0" i="1" smtClean="0">
@@ -34436,7 +33449,7 @@
                         <a:ea typeface="MS Mincho" charset="0"/>
                         <a:cs typeface="Cambria Math" panose="02040503050406030204" pitchFamily="18" charset="0"/>
                       </a:rPr>
-                      <m:t> </m:t>
+                      <m:t> </m:t>
                     </m:r>
                     <m:f>
                       <m:fPr>
@@ -34527,7 +33540,7 @@
                     </m:f>
                   </m:oMath>
                 </a14:m>
-                <a:endParaRPr lang="de-AT" sz="1800" b="0" i="1" smtClean="0">
+                <a:endParaRPr lang="de-AT" sz="1800" b="0" i="1">
                   <a:latin typeface="Cambria Math" panose="02040503050406030204" pitchFamily="18" charset="0"/>
                   <a:ea typeface="Cambria Math" panose="02040503050406030204" pitchFamily="18" charset="0"/>
                   <a:cs typeface="Calibri" panose="020F0502020204030204" pitchFamily="34" charset="0"/>
@@ -34556,7 +33569,7 @@
                         <a:ea typeface="Calibri" panose="020F0502020204030204" pitchFamily="34" charset="0"/>
                         <a:cs typeface="Calibri" panose="020F0502020204030204" pitchFamily="34" charset="0"/>
                       </a:rPr>
-                      <m:t>    </m:t>
+                      <m:t>    </m:t>
                     </m:r>
                     <m:f>
                       <m:fPr>
@@ -34651,15 +33664,7 @@
                         <a:ea typeface="Calibri" panose="020F0502020204030204" pitchFamily="34" charset="0"/>
                         <a:cs typeface="Calibri" panose="020F0502020204030204" pitchFamily="34" charset="0"/>
                       </a:rPr>
-                      <m:t>=</m:t>
-                    </m:r>
-                    <m:r>
-                      <a:rPr lang="de-AT" sz="1800" i="1">
-                        <a:latin typeface="Cambria Math" panose="02040503050406030204" pitchFamily="18" charset="0"/>
-                        <a:ea typeface="Calibri" panose="020F0502020204030204" pitchFamily="34" charset="0"/>
-                        <a:cs typeface="Calibri" panose="020F0502020204030204" pitchFamily="34" charset="0"/>
-                      </a:rPr>
-                      <m:t>2</m:t>
+                      <m:t>=2</m:t>
                     </m:r>
                     <m:nary>
                       <m:naryPr>
@@ -34687,15 +33692,7 @@
                             <a:ea typeface="Calibri" panose="020F0502020204030204" pitchFamily="34" charset="0"/>
                             <a:cs typeface="Calibri" panose="020F0502020204030204" pitchFamily="34" charset="0"/>
                           </a:rPr>
-                          <m:t>=</m:t>
-                        </m:r>
-                        <m:r>
-                          <a:rPr lang="de-AT" sz="1800" i="1">
-                            <a:latin typeface="Cambria Math" panose="02040503050406030204" pitchFamily="18" charset="0"/>
-                            <a:ea typeface="Calibri" panose="020F0502020204030204" pitchFamily="34" charset="0"/>
-                            <a:cs typeface="Calibri" panose="020F0502020204030204" pitchFamily="34" charset="0"/>
-                          </a:rPr>
-                          <m:t>0</m:t>
+                          <m:t>=0</m:t>
                         </m:r>
                       </m:sub>
                       <m:sup>
@@ -34830,15 +33827,23 @@
                             <a:ea typeface="Calibri" panose="020F0502020204030204" pitchFamily="34" charset="0"/>
                             <a:cs typeface="Calibri" panose="020F0502020204030204" pitchFamily="34" charset="0"/>
                           </a:rPr>
-                          <m:t>  ； </m:t>
+                          <m:t>  </m:t>
                         </m:r>
                         <m:r>
-                          <a:rPr lang="de-AT" sz="1800" i="1">
+                          <a:rPr lang="en-US" altLang="de-AT" sz="1800" i="1">
                             <a:latin typeface="Cambria Math" panose="02040503050406030204" pitchFamily="18" charset="0"/>
                             <a:ea typeface="Calibri" panose="020F0502020204030204" pitchFamily="34" charset="0"/>
                             <a:cs typeface="Calibri" panose="020F0502020204030204" pitchFamily="34" charset="0"/>
                           </a:rPr>
-                          <m:t> </m:t>
+                          <m:t>；</m:t>
+                        </m:r>
+                        <m:r>
+                          <a:rPr lang="en-US" altLang="de-AT" sz="1800" i="1">
+                            <a:latin typeface="Cambria Math" panose="02040503050406030204" pitchFamily="18" charset="0"/>
+                            <a:ea typeface="Calibri" panose="020F0502020204030204" pitchFamily="34" charset="0"/>
+                            <a:cs typeface="Calibri" panose="020F0502020204030204" pitchFamily="34" charset="0"/>
+                          </a:rPr>
+                          <m:t>  </m:t>
                         </m:r>
                       </m:e>
                     </m:nary>
@@ -35117,11 +34122,6 @@
                   </a:rPr>
                   <a:t>:</a:t>
                 </a:r>
-                <a:endParaRPr lang="de-AT" sz="1800" dirty="0">
-                  <a:latin typeface="Calibri" panose="020F0502020204030204" pitchFamily="34" charset="0"/>
-                  <a:ea typeface="Calibri" panose="020F0502020204030204" pitchFamily="34" charset="0"/>
-                  <a:cs typeface="Calibri" panose="020F0502020204030204" pitchFamily="34" charset="0"/>
-                </a:endParaRPr>
               </a:p>
               <a:p>
                 <a:pPr marL="800100" lvl="1" indent="-342900">
@@ -35877,11 +34877,6 @@
                   </a:rPr>
                   <a:t>!</a:t>
                 </a:r>
-                <a:endParaRPr lang="de-AT" sz="1800" dirty="0">
-                  <a:latin typeface="Calibri" panose="020F0502020204030204" pitchFamily="34" charset="0"/>
-                  <a:ea typeface="Calibri" panose="020F0502020204030204" pitchFamily="34" charset="0"/>
-                  <a:cs typeface="Calibri" panose="020F0502020204030204" pitchFamily="34" charset="0"/>
-                </a:endParaRPr>
               </a:p>
               <a:p>
                 <a:pPr marL="342900" indent="-342900">
@@ -35916,7 +34911,7 @@
             </p:txBody>
           </p:sp>
         </mc:Choice>
-        <mc:Fallback>
+        <mc:Fallback xmlns="">
           <p:sp>
             <p:nvSpPr>
               <p:cNvPr id="8" name="Google Shape;87;p2"/>
@@ -35936,7 +34931,7 @@
                 <a:avLst/>
               </a:prstGeom>
               <a:blipFill rotWithShape="1">
-                <a:blip r:embed="rId1"/>
+                <a:blip r:embed="rId3"/>
                 <a:stretch>
                   <a:fillRect t="-7" b="10"/>
                 </a:stretch>
@@ -36340,6 +35335,71 @@
               </a:rPr>
               <a:t>:</a:t>
             </a:r>
+          </a:p>
+          <a:p>
+            <a:pPr marL="742950" lvl="1" indent="-285750">
+              <a:spcBef>
+                <a:spcPts val="640"/>
+              </a:spcBef>
+              <a:buFont typeface="Wingdings" panose="05000000000000000000" pitchFamily="2" charset="2"/>
+              <a:buChar char="v"/>
+            </a:pPr>
+            <a:r>
+              <a:rPr lang="de-DE" sz="1800" dirty="0" err="1">
+                <a:solidFill>
+                  <a:schemeClr val="tx1"/>
+                </a:solidFill>
+                <a:highlight>
+                  <a:srgbClr val="DAE3F3"/>
+                </a:highlight>
+                <a:latin typeface="Consolas" panose="020B0609020204030204" pitchFamily="49" charset="0"/>
+                <a:ea typeface="Cambria Math" panose="02040503050406030204" pitchFamily="18" charset="0"/>
+                <a:cs typeface="Calibri" panose="020F0502020204030204" pitchFamily="34" charset="0"/>
+              </a:rPr>
+              <a:t>colors</a:t>
+            </a:r>
+            <a:r>
+              <a:rPr lang="de-DE" sz="1800" dirty="0">
+                <a:solidFill>
+                  <a:schemeClr val="tx1"/>
+                </a:solidFill>
+                <a:highlight>
+                  <a:srgbClr val="DAE3F3"/>
+                </a:highlight>
+                <a:latin typeface="Consolas" panose="020B0609020204030204" pitchFamily="49" charset="0"/>
+                <a:ea typeface="Cambria Math" panose="02040503050406030204" pitchFamily="18" charset="0"/>
+                <a:cs typeface="Calibri" panose="020F0502020204030204" pitchFamily="34" charset="0"/>
+              </a:rPr>
+              <a:t>[0] = '</a:t>
+            </a:r>
+            <a:r>
+              <a:rPr lang="de-DE" sz="1800" dirty="0" err="1">
+                <a:solidFill>
+                  <a:schemeClr val="tx1"/>
+                </a:solidFill>
+                <a:highlight>
+                  <a:srgbClr val="DAE3F3"/>
+                </a:highlight>
+                <a:latin typeface="Consolas" panose="020B0609020204030204" pitchFamily="49" charset="0"/>
+                <a:ea typeface="Cambria Math" panose="02040503050406030204" pitchFamily="18" charset="0"/>
+                <a:cs typeface="Calibri" panose="020F0502020204030204" pitchFamily="34" charset="0"/>
+              </a:rPr>
+              <a:t>grey</a:t>
+            </a:r>
+            <a:r>
+              <a:rPr lang="de-DE" sz="1800" dirty="0">
+                <a:solidFill>
+                  <a:schemeClr val="tx1"/>
+                </a:solidFill>
+                <a:highlight>
+                  <a:srgbClr val="DAE3F3"/>
+                </a:highlight>
+                <a:latin typeface="Consolas" panose="020B0609020204030204" pitchFamily="49" charset="0"/>
+                <a:ea typeface="Cambria Math" panose="02040503050406030204" pitchFamily="18" charset="0"/>
+                <a:cs typeface="Calibri" panose="020F0502020204030204" pitchFamily="34" charset="0"/>
+              </a:rPr>
+              <a:t>'</a:t>
+            </a:r>
             <a:endParaRPr lang="de-DE" sz="1800" dirty="0">
               <a:solidFill>
                 <a:schemeClr val="tx1"/>
@@ -36350,7 +35410,7 @@
             </a:endParaRPr>
           </a:p>
           <a:p>
-            <a:pPr marL="742950" lvl="1" indent="-285750">
+            <a:pPr marL="285750" indent="-285750">
               <a:spcBef>
                 <a:spcPts val="640"/>
               </a:spcBef>
@@ -36362,56 +35422,55 @@
                 <a:solidFill>
                   <a:schemeClr val="tx1"/>
                 </a:solidFill>
-                <a:highlight>
-                  <a:srgbClr val="DAE3F3"/>
-                </a:highlight>
-                <a:latin typeface="Consolas" panose="020B0609020204030204" pitchFamily="49" charset="0"/>
-                <a:ea typeface="Cambria Math" panose="02040503050406030204" pitchFamily="18" charset="0"/>
-                <a:cs typeface="Calibri" panose="020F0502020204030204" pitchFamily="34" charset="0"/>
-              </a:rPr>
-              <a:t>colors</a:t>
+                <a:latin typeface="Calibri" panose="020F0502020204030204" pitchFamily="34" charset="0"/>
+                <a:ea typeface="Cambria Math" panose="02040503050406030204" pitchFamily="18" charset="0"/>
+                <a:cs typeface="Calibri" panose="020F0502020204030204" pitchFamily="34" charset="0"/>
+              </a:rPr>
+              <a:t>Inserting</a:t>
             </a:r>
             <a:r>
               <a:rPr lang="de-DE" sz="1800" dirty="0">
                 <a:solidFill>
                   <a:schemeClr val="tx1"/>
                 </a:solidFill>
-                <a:highlight>
-                  <a:srgbClr val="DAE3F3"/>
-                </a:highlight>
-                <a:latin typeface="Consolas" panose="020B0609020204030204" pitchFamily="49" charset="0"/>
-                <a:ea typeface="Cambria Math" panose="02040503050406030204" pitchFamily="18" charset="0"/>
-                <a:cs typeface="Calibri" panose="020F0502020204030204" pitchFamily="34" charset="0"/>
-              </a:rPr>
-              <a:t>[0] = '</a:t>
+                <a:latin typeface="Calibri" panose="020F0502020204030204" pitchFamily="34" charset="0"/>
+                <a:ea typeface="Cambria Math" panose="02040503050406030204" pitchFamily="18" charset="0"/>
+                <a:cs typeface="Calibri" panose="020F0502020204030204" pitchFamily="34" charset="0"/>
+              </a:rPr>
+              <a:t> </a:t>
             </a:r>
             <a:r>
               <a:rPr lang="de-DE" sz="1800" dirty="0" err="1">
                 <a:solidFill>
                   <a:schemeClr val="tx1"/>
                 </a:solidFill>
-                <a:highlight>
-                  <a:srgbClr val="DAE3F3"/>
-                </a:highlight>
-                <a:latin typeface="Consolas" panose="020B0609020204030204" pitchFamily="49" charset="0"/>
-                <a:ea typeface="Cambria Math" panose="02040503050406030204" pitchFamily="18" charset="0"/>
-                <a:cs typeface="Calibri" panose="020F0502020204030204" pitchFamily="34" charset="0"/>
-              </a:rPr>
-              <a:t>grey</a:t>
+                <a:latin typeface="Calibri" panose="020F0502020204030204" pitchFamily="34" charset="0"/>
+                <a:ea typeface="Cambria Math" panose="02040503050406030204" pitchFamily="18" charset="0"/>
+                <a:cs typeface="Calibri" panose="020F0502020204030204" pitchFamily="34" charset="0"/>
+              </a:rPr>
+              <a:t>new</a:t>
             </a:r>
             <a:r>
               <a:rPr lang="de-DE" sz="1800" dirty="0">
                 <a:solidFill>
                   <a:schemeClr val="tx1"/>
                 </a:solidFill>
-                <a:highlight>
-                  <a:srgbClr val="DAE3F3"/>
-                </a:highlight>
-                <a:latin typeface="Consolas" panose="020B0609020204030204" pitchFamily="49" charset="0"/>
-                <a:ea typeface="Cambria Math" panose="02040503050406030204" pitchFamily="18" charset="0"/>
-                <a:cs typeface="Calibri" panose="020F0502020204030204" pitchFamily="34" charset="0"/>
-              </a:rPr>
-              <a:t>'</a:t>
+                <a:latin typeface="Calibri" panose="020F0502020204030204" pitchFamily="34" charset="0"/>
+                <a:ea typeface="Cambria Math" panose="02040503050406030204" pitchFamily="18" charset="0"/>
+                <a:cs typeface="Calibri" panose="020F0502020204030204" pitchFamily="34" charset="0"/>
+              </a:rPr>
+              <a:t> </a:t>
+            </a:r>
+            <a:r>
+              <a:rPr lang="de-DE" sz="1800" dirty="0" err="1">
+                <a:solidFill>
+                  <a:schemeClr val="tx1"/>
+                </a:solidFill>
+                <a:latin typeface="Calibri" panose="020F0502020204030204" pitchFamily="34" charset="0"/>
+                <a:ea typeface="Cambria Math" panose="02040503050406030204" pitchFamily="18" charset="0"/>
+                <a:cs typeface="Calibri" panose="020F0502020204030204" pitchFamily="34" charset="0"/>
+              </a:rPr>
+              <a:t>elements</a:t>
             </a:r>
             <a:endParaRPr lang="de-DE" sz="1800" dirty="0">
               <a:solidFill>
@@ -36423,78 +35482,6 @@
             </a:endParaRPr>
           </a:p>
           <a:p>
-            <a:pPr marL="285750" indent="-285750">
-              <a:spcBef>
-                <a:spcPts val="640"/>
-              </a:spcBef>
-              <a:buFont typeface="Wingdings" panose="05000000000000000000" pitchFamily="2" charset="2"/>
-              <a:buChar char="v"/>
-            </a:pPr>
-            <a:r>
-              <a:rPr lang="de-DE" sz="1800" dirty="0" err="1">
-                <a:solidFill>
-                  <a:schemeClr val="tx1"/>
-                </a:solidFill>
-                <a:latin typeface="Calibri" panose="020F0502020204030204" pitchFamily="34" charset="0"/>
-                <a:ea typeface="Cambria Math" panose="02040503050406030204" pitchFamily="18" charset="0"/>
-                <a:cs typeface="Calibri" panose="020F0502020204030204" pitchFamily="34" charset="0"/>
-              </a:rPr>
-              <a:t>Inserting</a:t>
-            </a:r>
-            <a:r>
-              <a:rPr lang="de-DE" sz="1800" dirty="0">
-                <a:solidFill>
-                  <a:schemeClr val="tx1"/>
-                </a:solidFill>
-                <a:latin typeface="Calibri" panose="020F0502020204030204" pitchFamily="34" charset="0"/>
-                <a:ea typeface="Cambria Math" panose="02040503050406030204" pitchFamily="18" charset="0"/>
-                <a:cs typeface="Calibri" panose="020F0502020204030204" pitchFamily="34" charset="0"/>
-              </a:rPr>
-              <a:t> </a:t>
-            </a:r>
-            <a:r>
-              <a:rPr lang="de-DE" sz="1800" dirty="0" err="1">
-                <a:solidFill>
-                  <a:schemeClr val="tx1"/>
-                </a:solidFill>
-                <a:latin typeface="Calibri" panose="020F0502020204030204" pitchFamily="34" charset="0"/>
-                <a:ea typeface="Cambria Math" panose="02040503050406030204" pitchFamily="18" charset="0"/>
-                <a:cs typeface="Calibri" panose="020F0502020204030204" pitchFamily="34" charset="0"/>
-              </a:rPr>
-              <a:t>new</a:t>
-            </a:r>
-            <a:r>
-              <a:rPr lang="de-DE" sz="1800" dirty="0">
-                <a:solidFill>
-                  <a:schemeClr val="tx1"/>
-                </a:solidFill>
-                <a:latin typeface="Calibri" panose="020F0502020204030204" pitchFamily="34" charset="0"/>
-                <a:ea typeface="Cambria Math" panose="02040503050406030204" pitchFamily="18" charset="0"/>
-                <a:cs typeface="Calibri" panose="020F0502020204030204" pitchFamily="34" charset="0"/>
-              </a:rPr>
-              <a:t> </a:t>
-            </a:r>
-            <a:r>
-              <a:rPr lang="de-DE" sz="1800" dirty="0" err="1">
-                <a:solidFill>
-                  <a:schemeClr val="tx1"/>
-                </a:solidFill>
-                <a:latin typeface="Calibri" panose="020F0502020204030204" pitchFamily="34" charset="0"/>
-                <a:ea typeface="Cambria Math" panose="02040503050406030204" pitchFamily="18" charset="0"/>
-                <a:cs typeface="Calibri" panose="020F0502020204030204" pitchFamily="34" charset="0"/>
-              </a:rPr>
-              <a:t>elements</a:t>
-            </a:r>
-            <a:endParaRPr lang="de-DE" sz="1800" dirty="0">
-              <a:solidFill>
-                <a:schemeClr val="tx1"/>
-              </a:solidFill>
-              <a:latin typeface="Calibri" panose="020F0502020204030204" pitchFamily="34" charset="0"/>
-              <a:ea typeface="Cambria Math" panose="02040503050406030204" pitchFamily="18" charset="0"/>
-              <a:cs typeface="Calibri" panose="020F0502020204030204" pitchFamily="34" charset="0"/>
-            </a:endParaRPr>
-          </a:p>
-          <a:p>
             <a:pPr marL="742950" lvl="1" indent="-285750">
               <a:spcBef>
                 <a:spcPts val="640"/>
@@ -36651,17 +35638,6 @@
               </a:rPr>
               <a:t>()</a:t>
             </a:r>
-            <a:endParaRPr lang="de-DE" sz="1800" dirty="0">
-              <a:solidFill>
-                <a:schemeClr val="tx1"/>
-              </a:solidFill>
-              <a:highlight>
-                <a:srgbClr val="DAE3F3"/>
-              </a:highlight>
-              <a:latin typeface="Consolas" panose="020B0609020204030204" pitchFamily="49" charset="0"/>
-              <a:ea typeface="Cambria Math" panose="02040503050406030204" pitchFamily="18" charset="0"/>
-              <a:cs typeface="Calibri" panose="020F0502020204030204" pitchFamily="34" charset="0"/>
-            </a:endParaRPr>
           </a:p>
           <a:p>
             <a:pPr marL="1200150" lvl="2" indent="-285750">
@@ -36699,17 +35675,6 @@
               </a:rPr>
               <a:t>('orange‘)</a:t>
             </a:r>
-            <a:endParaRPr lang="de-DE" sz="1800" dirty="0">
-              <a:solidFill>
-                <a:schemeClr val="tx1"/>
-              </a:solidFill>
-              <a:highlight>
-                <a:srgbClr val="DAE3F3"/>
-              </a:highlight>
-              <a:latin typeface="Calibri" panose="020F0502020204030204" pitchFamily="34" charset="0"/>
-              <a:ea typeface="Cambria Math" panose="02040503050406030204" pitchFamily="18" charset="0"/>
-              <a:cs typeface="Calibri" panose="020F0502020204030204" pitchFamily="34" charset="0"/>
-            </a:endParaRPr>
           </a:p>
           <a:p>
             <a:pPr marL="742950" lvl="1" indent="-285750">
@@ -36802,17 +35767,6 @@
               </a:rPr>
               <a:t>()</a:t>
             </a:r>
-            <a:endParaRPr lang="de-DE" sz="1800" dirty="0">
-              <a:solidFill>
-                <a:schemeClr val="tx1"/>
-              </a:solidFill>
-              <a:highlight>
-                <a:srgbClr val="DAE3F3"/>
-              </a:highlight>
-              <a:latin typeface="Calibri" panose="020F0502020204030204" pitchFamily="34" charset="0"/>
-              <a:ea typeface="Cambria Math" panose="02040503050406030204" pitchFamily="18" charset="0"/>
-              <a:cs typeface="Calibri" panose="020F0502020204030204" pitchFamily="34" charset="0"/>
-            </a:endParaRPr>
           </a:p>
           <a:p>
             <a:pPr marL="1200150" lvl="2" indent="-285750">
@@ -36949,10 +35903,6 @@
               </a:rPr>
               <a:t>Student task</a:t>
             </a:r>
-            <a:endParaRPr lang="en-GB" sz="2800" b="1" dirty="0">
-              <a:latin typeface="Calibri" panose="020F0502020204030204" pitchFamily="34" charset="0"/>
-              <a:cs typeface="Calibri" panose="020F0502020204030204" pitchFamily="34" charset="0"/>
-            </a:endParaRPr>
           </a:p>
         </p:txBody>
       </p:sp>
@@ -37238,10 +36188,6 @@
               </a:rPr>
               <a:t>Calculate the sum of a list or a tuple and print the resulting sum. Solve this problem:</a:t>
             </a:r>
-            <a:endParaRPr lang="en-US" sz="1800" dirty="0">
-              <a:latin typeface="Calibri" panose="020F0502020204030204" pitchFamily="34" charset="0"/>
-              <a:cs typeface="Calibri" panose="020F0502020204030204" pitchFamily="34" charset="0"/>
-            </a:endParaRPr>
           </a:p>
           <a:p>
             <a:pPr marL="342900" lvl="0" indent="-342900">
@@ -37256,10 +36202,6 @@
               </a:rPr>
               <a:t>without using sum() for lists or tuples,</a:t>
             </a:r>
-            <a:endParaRPr lang="en-US" sz="1800" dirty="0">
-              <a:latin typeface="Calibri" panose="020F0502020204030204" pitchFamily="34" charset="0"/>
-              <a:cs typeface="Calibri" panose="020F0502020204030204" pitchFamily="34" charset="0"/>
-            </a:endParaRPr>
           </a:p>
           <a:p>
             <a:pPr marL="342900" lvl="0" indent="-342900">
@@ -37274,10 +36216,6 @@
               </a:rPr>
               <a:t>with using sum(). </a:t>
             </a:r>
-            <a:endParaRPr lang="en-US" sz="1800" dirty="0">
-              <a:latin typeface="Calibri" panose="020F0502020204030204" pitchFamily="34" charset="0"/>
-              <a:cs typeface="Calibri" panose="020F0502020204030204" pitchFamily="34" charset="0"/>
-            </a:endParaRPr>
           </a:p>
           <a:p>
             <a:pPr lvl="0">
@@ -37303,9 +36241,9 @@
               <a:rPr lang="en-US" sz="1800" dirty="0">
                 <a:latin typeface="Calibri" panose="020F0502020204030204" pitchFamily="34" charset="0"/>
                 <a:cs typeface="Calibri" panose="020F0502020204030204" pitchFamily="34" charset="0"/>
-                <a:hlinkClick r:id="rId1"/>
-              </a:rPr>
-              <a:t>https://docs.python.org/3.9/library/functions.html</a:t>
+                <a:hlinkClick r:id="rId3"/>
+              </a:rPr>
+              <a:t>https://docs.python.org/3.13/library/functions.html</a:t>
             </a:r>
             <a:endParaRPr lang="en-US" sz="1800" dirty="0">
               <a:latin typeface="Calibri" panose="020F0502020204030204" pitchFamily="34" charset="0"/>
@@ -37332,10 +36270,6 @@
               </a:rPr>
               <a:t>Example:</a:t>
             </a:r>
-            <a:endParaRPr lang="en-US" sz="1800" dirty="0">
-              <a:latin typeface="Calibri" panose="020F0502020204030204" pitchFamily="34" charset="0"/>
-              <a:cs typeface="Calibri" panose="020F0502020204030204" pitchFamily="34" charset="0"/>
-            </a:endParaRPr>
           </a:p>
           <a:p>
             <a:pPr lvl="0">
@@ -37348,10 +36282,6 @@
               </a:rPr>
               <a:t>[1,2,3] -&gt; 6</a:t>
             </a:r>
-            <a:endParaRPr lang="en-US" dirty="0">
-              <a:latin typeface="Consolas" panose="020B0609020204030204" pitchFamily="49" charset="0"/>
-              <a:cs typeface="Calibri" panose="020F0502020204030204" pitchFamily="34" charset="0"/>
-            </a:endParaRPr>
           </a:p>
           <a:p>
             <a:pPr lvl="0">
@@ -37364,10 +36294,6 @@
               </a:rPr>
               <a:t>(6, 90, 10, 15, 114, 25, 18, 91, 51) -&gt; 420</a:t>
             </a:r>
-            <a:endParaRPr lang="en-US" dirty="0">
-              <a:latin typeface="Consolas" panose="020B0609020204030204" pitchFamily="49" charset="0"/>
-              <a:cs typeface="Calibri" panose="020F0502020204030204" pitchFamily="34" charset="0"/>
-            </a:endParaRPr>
           </a:p>
           <a:p>
             <a:pPr lvl="0">
@@ -37436,15 +36362,11 @@
               </a:rPr>
               <a:t>Student task</a:t>
             </a:r>
-            <a:endParaRPr lang="en-GB" sz="2800" b="1" dirty="0">
-              <a:latin typeface="Calibri" panose="020F0502020204030204" pitchFamily="34" charset="0"/>
-              <a:cs typeface="Calibri" panose="020F0502020204030204" pitchFamily="34" charset="0"/>
-            </a:endParaRPr>
           </a:p>
         </p:txBody>
       </p:sp>
-      <mc:AlternateContent xmlns:mc="http://schemas.openxmlformats.org/markup-compatibility/2006">
-        <mc:Choice xmlns:a14="http://schemas.microsoft.com/office/drawing/2010/main" Requires="a14">
+      <mc:AlternateContent xmlns:mc="http://schemas.openxmlformats.org/markup-compatibility/2006" xmlns:a14="http://schemas.microsoft.com/office/drawing/2010/main">
+        <mc:Choice Requires="a14">
           <p:sp>
             <p:nvSpPr>
               <p:cNvPr id="4" name="Textfeld 2"/>
@@ -37748,10 +36670,6 @@
                   </a:rPr>
                   <a:t>that works on a list of lists of integers and adds up the elements from all of the nested lists. Test your code by initializing at least three integer lists.</a:t>
                 </a:r>
-                <a:endParaRPr lang="en-US" sz="1800" dirty="0">
-                  <a:latin typeface="Calibri" panose="020F0502020204030204" pitchFamily="34" charset="0"/>
-                  <a:cs typeface="Calibri" panose="020F0502020204030204" pitchFamily="34" charset="0"/>
-                </a:endParaRPr>
               </a:p>
               <a:p>
                 <a:pPr lvl="0">
@@ -37828,15 +36746,7 @@
                             <a:ea typeface="Cambria Math" panose="02040503050406030204" pitchFamily="18" charset="0"/>
                             <a:cs typeface="Calibri" panose="020F0502020204030204" pitchFamily="34" charset="0"/>
                           </a:rPr>
-                          <m:t>−</m:t>
-                        </m:r>
-                        <m:r>
-                          <a:rPr lang="de-AT" sz="1800" b="0" i="1" smtClean="0">
-                            <a:latin typeface="Cambria Math" panose="02040503050406030204" pitchFamily="18" charset="0"/>
-                            <a:ea typeface="Cambria Math" panose="02040503050406030204" pitchFamily="18" charset="0"/>
-                            <a:cs typeface="Calibri" panose="020F0502020204030204" pitchFamily="34" charset="0"/>
-                          </a:rPr>
-                          <m:t>2</m:t>
+                          <m:t>−2</m:t>
                         </m:r>
                       </m:sup>
                     </m:sSup>
@@ -37859,7 +36769,7 @@
             </p:txBody>
           </p:sp>
         </mc:Choice>
-        <mc:Fallback>
+        <mc:Fallback xmlns="">
           <p:sp>
             <p:nvSpPr>
               <p:cNvPr id="4" name="Textfeld 2"/>
@@ -37877,7 +36787,7 @@
                 <a:avLst/>
               </a:prstGeom>
               <a:blipFill rotWithShape="1">
-                <a:blip r:embed="rId1"/>
+                <a:blip r:embed="rId3"/>
                 <a:stretch>
                   <a:fillRect l="-4" t="-13" r="4" b="23"/>
                 </a:stretch>
@@ -38302,17 +37212,6 @@
               </a:rPr>
               <a:t>()</a:t>
             </a:r>
-            <a:endParaRPr lang="de-DE" sz="1800" dirty="0">
-              <a:solidFill>
-                <a:schemeClr val="tx1"/>
-              </a:solidFill>
-              <a:highlight>
-                <a:srgbClr val="DAE3F3"/>
-              </a:highlight>
-              <a:latin typeface="Consolas" panose="020B0609020204030204" pitchFamily="49" charset="0"/>
-              <a:ea typeface="Cambria Math" panose="02040503050406030204" pitchFamily="18" charset="0"/>
-              <a:cs typeface="Calibri" panose="020F0502020204030204" pitchFamily="34" charset="0"/>
-            </a:endParaRPr>
           </a:p>
           <a:p>
             <a:pPr marL="1200150" lvl="2" indent="-285750">
@@ -38454,14 +37353,6 @@
               </a:rPr>
               <a:t>      </a:t>
             </a:r>
-            <a:endParaRPr lang="de-DE" sz="1800" dirty="0">
-              <a:solidFill>
-                <a:schemeClr val="tx1"/>
-              </a:solidFill>
-              <a:latin typeface="Calibri" panose="020F0502020204030204" pitchFamily="34" charset="0"/>
-              <a:ea typeface="Calibri" panose="020F0502020204030204" pitchFamily="34" charset="0"/>
-              <a:cs typeface="Calibri" panose="020F0502020204030204" pitchFamily="34" charset="0"/>
-            </a:endParaRPr>
           </a:p>
           <a:p>
             <a:pPr marL="1200150" lvl="2" indent="-285750">
@@ -38527,17 +37418,6 @@
               </a:rPr>
               <a:t>()</a:t>
             </a:r>
-            <a:endParaRPr lang="de-DE" sz="1800" dirty="0">
-              <a:solidFill>
-                <a:schemeClr val="tx1"/>
-              </a:solidFill>
-              <a:highlight>
-                <a:srgbClr val="DAE3F3"/>
-              </a:highlight>
-              <a:latin typeface="Consolas" panose="020B0609020204030204" pitchFamily="49" charset="0"/>
-              <a:ea typeface="Cambria Math" panose="02040503050406030204" pitchFamily="18" charset="0"/>
-              <a:cs typeface="Calibri" panose="020F0502020204030204" pitchFamily="34" charset="0"/>
-            </a:endParaRPr>
           </a:p>
           <a:p>
             <a:pPr marL="1200150" lvl="2" indent="-285750">
@@ -38603,17 +37483,6 @@
               </a:rPr>
               <a:t>(1)</a:t>
             </a:r>
-            <a:endParaRPr lang="de-DE" sz="1800" dirty="0">
-              <a:solidFill>
-                <a:schemeClr val="tx1"/>
-              </a:solidFill>
-              <a:highlight>
-                <a:srgbClr val="DAE3F3"/>
-              </a:highlight>
-              <a:latin typeface="Consolas" panose="020B0609020204030204" pitchFamily="49" charset="0"/>
-              <a:ea typeface="Cambria Math" panose="02040503050406030204" pitchFamily="18" charset="0"/>
-              <a:cs typeface="Calibri" panose="020F0502020204030204" pitchFamily="34" charset="0"/>
-            </a:endParaRPr>
           </a:p>
           <a:p>
             <a:pPr marL="742950" lvl="1" indent="-285750">
@@ -38739,17 +37608,6 @@
               </a:rPr>
               <a:t>()</a:t>
             </a:r>
-            <a:endParaRPr lang="de-DE" sz="1800" dirty="0">
-              <a:solidFill>
-                <a:schemeClr val="tx1"/>
-              </a:solidFill>
-              <a:highlight>
-                <a:srgbClr val="DAE3F3"/>
-              </a:highlight>
-              <a:latin typeface="Consolas" panose="020B0609020204030204" pitchFamily="49" charset="0"/>
-              <a:ea typeface="Cambria Math" panose="02040503050406030204" pitchFamily="18" charset="0"/>
-              <a:cs typeface="Calibri" panose="020F0502020204030204" pitchFamily="34" charset="0"/>
-            </a:endParaRPr>
           </a:p>
           <a:p>
             <a:pPr marL="1200150" lvl="2" indent="-285750">
@@ -38815,17 +37673,6 @@
               </a:rPr>
               <a:t>') </a:t>
             </a:r>
-            <a:endParaRPr lang="de-DE" sz="1800" dirty="0">
-              <a:solidFill>
-                <a:schemeClr val="tx1"/>
-              </a:solidFill>
-              <a:highlight>
-                <a:srgbClr val="DAE3F3"/>
-              </a:highlight>
-              <a:latin typeface="Consolas" panose="020B0609020204030204" pitchFamily="49" charset="0"/>
-              <a:ea typeface="Cambria Math" panose="02040503050406030204" pitchFamily="18" charset="0"/>
-              <a:cs typeface="Calibri" panose="020F0502020204030204" pitchFamily="34" charset="0"/>
-            </a:endParaRPr>
           </a:p>
           <a:p>
             <a:pPr marL="285750" indent="-285750">
@@ -38973,17 +37820,6 @@
               </a:rPr>
               <a:t>()</a:t>
             </a:r>
-            <a:endParaRPr lang="de-DE" sz="1800" dirty="0">
-              <a:solidFill>
-                <a:schemeClr val="tx1"/>
-              </a:solidFill>
-              <a:highlight>
-                <a:srgbClr val="DAE3F3"/>
-              </a:highlight>
-              <a:latin typeface="Consolas" panose="020B0609020204030204" pitchFamily="49" charset="0"/>
-              <a:ea typeface="Cambria Math" panose="02040503050406030204" pitchFamily="18" charset="0"/>
-              <a:cs typeface="Calibri" panose="020F0502020204030204" pitchFamily="34" charset="0"/>
-            </a:endParaRPr>
           </a:p>
           <a:p>
             <a:pPr marL="0" indent="0">
@@ -39279,6 +38115,473 @@
               </a:rPr>
               <a:t>)</a:t>
             </a:r>
+          </a:p>
+          <a:p>
+            <a:pPr marL="742950" lvl="1" indent="-285750">
+              <a:spcBef>
+                <a:spcPts val="640"/>
+              </a:spcBef>
+              <a:buFont typeface="Wingdings" panose="05000000000000000000" pitchFamily="2" charset="2"/>
+              <a:buChar char="v"/>
+            </a:pPr>
+            <a:r>
+              <a:rPr lang="de-DE" sz="1800" dirty="0" err="1">
+                <a:solidFill>
+                  <a:schemeClr val="tx1"/>
+                </a:solidFill>
+                <a:highlight>
+                  <a:srgbClr val="DAE3F3"/>
+                </a:highlight>
+                <a:latin typeface="Consolas" panose="020B0609020204030204" pitchFamily="49" charset="0"/>
+                <a:ea typeface="Cambria Math" panose="02040503050406030204" pitchFamily="18" charset="0"/>
+                <a:cs typeface="Calibri" panose="020F0502020204030204" pitchFamily="34" charset="0"/>
+              </a:rPr>
+              <a:t>numbers</a:t>
+            </a:r>
+            <a:r>
+              <a:rPr lang="de-DE" sz="1800" dirty="0">
+                <a:solidFill>
+                  <a:schemeClr val="tx1"/>
+                </a:solidFill>
+                <a:highlight>
+                  <a:srgbClr val="DAE3F3"/>
+                </a:highlight>
+                <a:latin typeface="Consolas" panose="020B0609020204030204" pitchFamily="49" charset="0"/>
+                <a:ea typeface="Cambria Math" panose="02040503050406030204" pitchFamily="18" charset="0"/>
+                <a:cs typeface="Calibri" panose="020F0502020204030204" pitchFamily="34" charset="0"/>
+              </a:rPr>
+              <a:t> = [1, 13, 42]</a:t>
+            </a:r>
+          </a:p>
+          <a:p>
+            <a:pPr marL="742950" lvl="1" indent="-285750">
+              <a:spcBef>
+                <a:spcPts val="640"/>
+              </a:spcBef>
+              <a:buFont typeface="Wingdings" panose="05000000000000000000" pitchFamily="2" charset="2"/>
+              <a:buChar char="v"/>
+            </a:pPr>
+            <a:r>
+              <a:rPr lang="de-DE" sz="1800" dirty="0" err="1">
+                <a:solidFill>
+                  <a:schemeClr val="tx1"/>
+                </a:solidFill>
+                <a:highlight>
+                  <a:srgbClr val="DAE3F3"/>
+                </a:highlight>
+                <a:latin typeface="Consolas" panose="020B0609020204030204" pitchFamily="49" charset="0"/>
+                <a:ea typeface="Cambria Math" panose="02040503050406030204" pitchFamily="18" charset="0"/>
+                <a:cs typeface="Calibri" panose="020F0502020204030204" pitchFamily="34" charset="0"/>
+              </a:rPr>
+              <a:t>print</a:t>
+            </a:r>
+            <a:r>
+              <a:rPr lang="de-DE" sz="1800" dirty="0">
+                <a:solidFill>
+                  <a:schemeClr val="tx1"/>
+                </a:solidFill>
+                <a:highlight>
+                  <a:srgbClr val="DAE3F3"/>
+                </a:highlight>
+                <a:latin typeface="Consolas" panose="020B0609020204030204" pitchFamily="49" charset="0"/>
+                <a:ea typeface="Cambria Math" panose="02040503050406030204" pitchFamily="18" charset="0"/>
+                <a:cs typeface="Calibri" panose="020F0502020204030204" pitchFamily="34" charset="0"/>
+              </a:rPr>
+              <a:t>(</a:t>
+            </a:r>
+            <a:r>
+              <a:rPr lang="de-DE" sz="1800" dirty="0" err="1">
+                <a:solidFill>
+                  <a:schemeClr val="tx1"/>
+                </a:solidFill>
+                <a:highlight>
+                  <a:srgbClr val="DAE3F3"/>
+                </a:highlight>
+                <a:latin typeface="Consolas" panose="020B0609020204030204" pitchFamily="49" charset="0"/>
+                <a:ea typeface="Cambria Math" panose="02040503050406030204" pitchFamily="18" charset="0"/>
+                <a:cs typeface="Calibri" panose="020F0502020204030204" pitchFamily="34" charset="0"/>
+              </a:rPr>
+              <a:t>numbers</a:t>
+            </a:r>
+            <a:r>
+              <a:rPr lang="de-DE" sz="1800" dirty="0">
+                <a:solidFill>
+                  <a:schemeClr val="tx1"/>
+                </a:solidFill>
+                <a:highlight>
+                  <a:srgbClr val="DAE3F3"/>
+                </a:highlight>
+                <a:latin typeface="Consolas" panose="020B0609020204030204" pitchFamily="49" charset="0"/>
+                <a:ea typeface="Cambria Math" panose="02040503050406030204" pitchFamily="18" charset="0"/>
+                <a:cs typeface="Calibri" panose="020F0502020204030204" pitchFamily="34" charset="0"/>
+              </a:rPr>
+              <a:t>[3])</a:t>
+            </a:r>
+          </a:p>
+          <a:p>
+            <a:pPr marL="285750" indent="-285750">
+              <a:spcBef>
+                <a:spcPts val="640"/>
+              </a:spcBef>
+              <a:buFont typeface="Wingdings" panose="05000000000000000000" pitchFamily="2" charset="2"/>
+              <a:buChar char="v"/>
+            </a:pPr>
+            <a:r>
+              <a:rPr lang="de-DE" sz="1800" dirty="0" err="1">
+                <a:solidFill>
+                  <a:schemeClr val="tx1"/>
+                </a:solidFill>
+                <a:latin typeface="Calibri" panose="020F0502020204030204" pitchFamily="34" charset="0"/>
+                <a:ea typeface="Cambria Math" panose="02040503050406030204" pitchFamily="18" charset="0"/>
+                <a:cs typeface="Calibri" panose="020F0502020204030204" pitchFamily="34" charset="0"/>
+              </a:rPr>
+              <a:t>Indexing</a:t>
+            </a:r>
+            <a:r>
+              <a:rPr lang="de-DE" sz="1800" dirty="0">
+                <a:solidFill>
+                  <a:schemeClr val="tx1"/>
+                </a:solidFill>
+                <a:latin typeface="Calibri" panose="020F0502020204030204" pitchFamily="34" charset="0"/>
+                <a:ea typeface="Cambria Math" panose="02040503050406030204" pitchFamily="18" charset="0"/>
+                <a:cs typeface="Calibri" panose="020F0502020204030204" pitchFamily="34" charset="0"/>
+              </a:rPr>
+              <a:t> </a:t>
+            </a:r>
+            <a:r>
+              <a:rPr lang="de-DE" sz="1800" dirty="0" err="1">
+                <a:solidFill>
+                  <a:schemeClr val="tx1"/>
+                </a:solidFill>
+                <a:latin typeface="Calibri" panose="020F0502020204030204" pitchFamily="34" charset="0"/>
+                <a:ea typeface="Cambria Math" panose="02040503050406030204" pitchFamily="18" charset="0"/>
+                <a:cs typeface="Calibri" panose="020F0502020204030204" pitchFamily="34" charset="0"/>
+              </a:rPr>
+              <a:t>with</a:t>
+            </a:r>
+            <a:r>
+              <a:rPr lang="de-DE" sz="1800" dirty="0">
+                <a:solidFill>
+                  <a:schemeClr val="tx1"/>
+                </a:solidFill>
+                <a:latin typeface="Calibri" panose="020F0502020204030204" pitchFamily="34" charset="0"/>
+                <a:ea typeface="Cambria Math" panose="02040503050406030204" pitchFamily="18" charset="0"/>
+                <a:cs typeface="Calibri" panose="020F0502020204030204" pitchFamily="34" charset="0"/>
+              </a:rPr>
+              <a:t> </a:t>
+            </a:r>
+            <a:r>
+              <a:rPr lang="de-DE" sz="1800" dirty="0">
+                <a:solidFill>
+                  <a:schemeClr val="tx1"/>
+                </a:solidFill>
+                <a:highlight>
+                  <a:srgbClr val="DAE3F3"/>
+                </a:highlight>
+                <a:latin typeface="Calibri" panose="020F0502020204030204" pitchFamily="34" charset="0"/>
+                <a:ea typeface="Cambria Math" panose="02040503050406030204" pitchFamily="18" charset="0"/>
+                <a:cs typeface="Calibri" panose="020F0502020204030204" pitchFamily="34" charset="0"/>
+              </a:rPr>
+              <a:t>[-1] </a:t>
+            </a:r>
+            <a:r>
+              <a:rPr lang="de-DE" sz="1800" dirty="0">
+                <a:solidFill>
+                  <a:schemeClr val="tx1"/>
+                </a:solidFill>
+                <a:latin typeface="Calibri" panose="020F0502020204030204" pitchFamily="34" charset="0"/>
+                <a:ea typeface="Cambria Math" panose="02040503050406030204" pitchFamily="18" charset="0"/>
+                <a:cs typeface="Calibri" panose="020F0502020204030204" pitchFamily="34" charset="0"/>
+              </a:rPr>
+              <a:t> </a:t>
+            </a:r>
+            <a:r>
+              <a:rPr lang="de-DE" sz="1800" dirty="0" err="1">
+                <a:solidFill>
+                  <a:schemeClr val="tx1"/>
+                </a:solidFill>
+                <a:latin typeface="Calibri" panose="020F0502020204030204" pitchFamily="34" charset="0"/>
+                <a:ea typeface="Cambria Math" panose="02040503050406030204" pitchFamily="18" charset="0"/>
+                <a:cs typeface="Calibri" panose="020F0502020204030204" pitchFamily="34" charset="0"/>
+              </a:rPr>
+              <a:t>returns</a:t>
+            </a:r>
+            <a:r>
+              <a:rPr lang="de-DE" sz="1800" dirty="0">
+                <a:solidFill>
+                  <a:schemeClr val="tx1"/>
+                </a:solidFill>
+                <a:latin typeface="Calibri" panose="020F0502020204030204" pitchFamily="34" charset="0"/>
+                <a:ea typeface="Cambria Math" panose="02040503050406030204" pitchFamily="18" charset="0"/>
+                <a:cs typeface="Calibri" panose="020F0502020204030204" pitchFamily="34" charset="0"/>
+              </a:rPr>
+              <a:t> </a:t>
+            </a:r>
+            <a:r>
+              <a:rPr lang="de-DE" sz="1800" dirty="0" err="1">
+                <a:solidFill>
+                  <a:schemeClr val="tx1"/>
+                </a:solidFill>
+                <a:latin typeface="Calibri" panose="020F0502020204030204" pitchFamily="34" charset="0"/>
+                <a:ea typeface="Cambria Math" panose="02040503050406030204" pitchFamily="18" charset="0"/>
+                <a:cs typeface="Calibri" panose="020F0502020204030204" pitchFamily="34" charset="0"/>
+              </a:rPr>
+              <a:t>always</a:t>
+            </a:r>
+            <a:r>
+              <a:rPr lang="de-DE" sz="1800" dirty="0">
+                <a:solidFill>
+                  <a:schemeClr val="tx1"/>
+                </a:solidFill>
+                <a:latin typeface="Calibri" panose="020F0502020204030204" pitchFamily="34" charset="0"/>
+                <a:ea typeface="Cambria Math" panose="02040503050406030204" pitchFamily="18" charset="0"/>
+                <a:cs typeface="Calibri" panose="020F0502020204030204" pitchFamily="34" charset="0"/>
+              </a:rPr>
+              <a:t> </a:t>
+            </a:r>
+            <a:r>
+              <a:rPr lang="de-DE" sz="1800" dirty="0" err="1">
+                <a:solidFill>
+                  <a:schemeClr val="tx1"/>
+                </a:solidFill>
+                <a:latin typeface="Calibri" panose="020F0502020204030204" pitchFamily="34" charset="0"/>
+                <a:ea typeface="Cambria Math" panose="02040503050406030204" pitchFamily="18" charset="0"/>
+                <a:cs typeface="Calibri" panose="020F0502020204030204" pitchFamily="34" charset="0"/>
+              </a:rPr>
+              <a:t>the</a:t>
+            </a:r>
+            <a:r>
+              <a:rPr lang="de-DE" sz="1800" dirty="0">
+                <a:solidFill>
+                  <a:schemeClr val="tx1"/>
+                </a:solidFill>
+                <a:latin typeface="Calibri" panose="020F0502020204030204" pitchFamily="34" charset="0"/>
+                <a:ea typeface="Cambria Math" panose="02040503050406030204" pitchFamily="18" charset="0"/>
+                <a:cs typeface="Calibri" panose="020F0502020204030204" pitchFamily="34" charset="0"/>
+              </a:rPr>
+              <a:t> last </a:t>
+            </a:r>
+            <a:r>
+              <a:rPr lang="de-DE" sz="1800" dirty="0" err="1">
+                <a:solidFill>
+                  <a:schemeClr val="tx1"/>
+                </a:solidFill>
+                <a:latin typeface="Calibri" panose="020F0502020204030204" pitchFamily="34" charset="0"/>
+                <a:ea typeface="Cambria Math" panose="02040503050406030204" pitchFamily="18" charset="0"/>
+                <a:cs typeface="Calibri" panose="020F0502020204030204" pitchFamily="34" charset="0"/>
+              </a:rPr>
+              <a:t>element</a:t>
+            </a:r>
+            <a:r>
+              <a:rPr lang="de-DE" sz="1800" dirty="0">
+                <a:solidFill>
+                  <a:schemeClr val="tx1"/>
+                </a:solidFill>
+                <a:latin typeface="Calibri" panose="020F0502020204030204" pitchFamily="34" charset="0"/>
+                <a:ea typeface="Cambria Math" panose="02040503050406030204" pitchFamily="18" charset="0"/>
+                <a:cs typeface="Calibri" panose="020F0502020204030204" pitchFamily="34" charset="0"/>
+              </a:rPr>
+              <a:t> (</a:t>
+            </a:r>
+            <a:r>
+              <a:rPr lang="de-DE" sz="1800" dirty="0" err="1">
+                <a:solidFill>
+                  <a:schemeClr val="tx1"/>
+                </a:solidFill>
+                <a:latin typeface="Calibri" panose="020F0502020204030204" pitchFamily="34" charset="0"/>
+                <a:ea typeface="Cambria Math" panose="02040503050406030204" pitchFamily="18" charset="0"/>
+                <a:cs typeface="Calibri" panose="020F0502020204030204" pitchFamily="34" charset="0"/>
+              </a:rPr>
+              <a:t>recollect</a:t>
+            </a:r>
+            <a:r>
+              <a:rPr lang="de-DE" sz="1800" dirty="0">
+                <a:solidFill>
+                  <a:schemeClr val="tx1"/>
+                </a:solidFill>
+                <a:latin typeface="Calibri" panose="020F0502020204030204" pitchFamily="34" charset="0"/>
+                <a:ea typeface="Cambria Math" panose="02040503050406030204" pitchFamily="18" charset="0"/>
+                <a:cs typeface="Calibri" panose="020F0502020204030204" pitchFamily="34" charset="0"/>
+              </a:rPr>
+              <a:t> </a:t>
+            </a:r>
+            <a:r>
+              <a:rPr lang="de-DE" sz="1800" dirty="0" err="1">
+                <a:solidFill>
+                  <a:schemeClr val="tx1"/>
+                </a:solidFill>
+                <a:latin typeface="Calibri" panose="020F0502020204030204" pitchFamily="34" charset="0"/>
+                <a:ea typeface="Cambria Math" panose="02040503050406030204" pitchFamily="18" charset="0"/>
+                <a:cs typeface="Calibri" panose="020F0502020204030204" pitchFamily="34" charset="0"/>
+              </a:rPr>
+              <a:t>string</a:t>
+            </a:r>
+            <a:r>
+              <a:rPr lang="de-DE" sz="1800" dirty="0">
+                <a:solidFill>
+                  <a:schemeClr val="tx1"/>
+                </a:solidFill>
+                <a:latin typeface="Calibri" panose="020F0502020204030204" pitchFamily="34" charset="0"/>
+                <a:ea typeface="Cambria Math" panose="02040503050406030204" pitchFamily="18" charset="0"/>
+                <a:cs typeface="Calibri" panose="020F0502020204030204" pitchFamily="34" charset="0"/>
+              </a:rPr>
+              <a:t> </a:t>
+            </a:r>
+            <a:r>
+              <a:rPr lang="de-DE" sz="1800" dirty="0" err="1">
+                <a:solidFill>
+                  <a:schemeClr val="tx1"/>
+                </a:solidFill>
+                <a:latin typeface="Calibri" panose="020F0502020204030204" pitchFamily="34" charset="0"/>
+                <a:ea typeface="Cambria Math" panose="02040503050406030204" pitchFamily="18" charset="0"/>
+                <a:cs typeface="Calibri" panose="020F0502020204030204" pitchFamily="34" charset="0"/>
+              </a:rPr>
+              <a:t>slicing</a:t>
+            </a:r>
+            <a:r>
+              <a:rPr lang="de-DE" sz="1800" dirty="0">
+                <a:solidFill>
+                  <a:schemeClr val="tx1"/>
+                </a:solidFill>
+                <a:latin typeface="Calibri" panose="020F0502020204030204" pitchFamily="34" charset="0"/>
+                <a:ea typeface="Cambria Math" panose="02040503050406030204" pitchFamily="18" charset="0"/>
+                <a:cs typeface="Calibri" panose="020F0502020204030204" pitchFamily="34" charset="0"/>
+              </a:rPr>
+              <a:t>!)</a:t>
+            </a:r>
+          </a:p>
+          <a:p>
+            <a:pPr marL="285750" indent="-285750">
+              <a:spcBef>
+                <a:spcPts val="640"/>
+              </a:spcBef>
+              <a:buFont typeface="Wingdings" panose="05000000000000000000" pitchFamily="2" charset="2"/>
+              <a:buChar char="v"/>
+            </a:pPr>
+            <a:r>
+              <a:rPr lang="de-DE" sz="1800" dirty="0" err="1">
+                <a:solidFill>
+                  <a:schemeClr val="tx1"/>
+                </a:solidFill>
+                <a:highlight>
+                  <a:srgbClr val="DAE3F3"/>
+                </a:highlight>
+                <a:latin typeface="Calibri" panose="020F0502020204030204" pitchFamily="34" charset="0"/>
+                <a:ea typeface="Cambria Math" panose="02040503050406030204" pitchFamily="18" charset="0"/>
+                <a:cs typeface="Calibri" panose="020F0502020204030204" pitchFamily="34" charset="0"/>
+              </a:rPr>
+              <a:t>IndexError</a:t>
+            </a:r>
+            <a:r>
+              <a:rPr lang="de-DE" sz="1800" dirty="0">
+                <a:solidFill>
+                  <a:schemeClr val="tx1"/>
+                </a:solidFill>
+                <a:latin typeface="Calibri" panose="020F0502020204030204" pitchFamily="34" charset="0"/>
+                <a:ea typeface="Cambria Math" panose="02040503050406030204" pitchFamily="18" charset="0"/>
+                <a:cs typeface="Calibri" panose="020F0502020204030204" pitchFamily="34" charset="0"/>
+              </a:rPr>
+              <a:t> also </a:t>
+            </a:r>
+            <a:r>
+              <a:rPr lang="de-DE" sz="1800" dirty="0" err="1">
+                <a:solidFill>
+                  <a:schemeClr val="tx1"/>
+                </a:solidFill>
+                <a:latin typeface="Calibri" panose="020F0502020204030204" pitchFamily="34" charset="0"/>
+                <a:ea typeface="Cambria Math" panose="02040503050406030204" pitchFamily="18" charset="0"/>
+                <a:cs typeface="Calibri" panose="020F0502020204030204" pitchFamily="34" charset="0"/>
+              </a:rPr>
+              <a:t>if</a:t>
+            </a:r>
+            <a:r>
+              <a:rPr lang="de-DE" sz="1800" dirty="0">
+                <a:solidFill>
+                  <a:schemeClr val="tx1"/>
+                </a:solidFill>
+                <a:latin typeface="Calibri" panose="020F0502020204030204" pitchFamily="34" charset="0"/>
+                <a:ea typeface="Cambria Math" panose="02040503050406030204" pitchFamily="18" charset="0"/>
+                <a:cs typeface="Calibri" panose="020F0502020204030204" pitchFamily="34" charset="0"/>
+              </a:rPr>
+              <a:t> </a:t>
+            </a:r>
+            <a:r>
+              <a:rPr lang="de-DE" sz="1800" dirty="0" err="1">
+                <a:solidFill>
+                  <a:schemeClr val="tx1"/>
+                </a:solidFill>
+                <a:latin typeface="Calibri" panose="020F0502020204030204" pitchFamily="34" charset="0"/>
+                <a:ea typeface="Cambria Math" panose="02040503050406030204" pitchFamily="18" charset="0"/>
+                <a:cs typeface="Calibri" panose="020F0502020204030204" pitchFamily="34" charset="0"/>
+              </a:rPr>
+              <a:t>the</a:t>
+            </a:r>
+            <a:r>
+              <a:rPr lang="de-DE" sz="1800" dirty="0">
+                <a:solidFill>
+                  <a:schemeClr val="tx1"/>
+                </a:solidFill>
+                <a:latin typeface="Calibri" panose="020F0502020204030204" pitchFamily="34" charset="0"/>
+                <a:ea typeface="Cambria Math" panose="02040503050406030204" pitchFamily="18" charset="0"/>
+                <a:cs typeface="Calibri" panose="020F0502020204030204" pitchFamily="34" charset="0"/>
+              </a:rPr>
+              <a:t> </a:t>
+            </a:r>
+            <a:r>
+              <a:rPr lang="de-DE" sz="1800" dirty="0" err="1">
+                <a:solidFill>
+                  <a:schemeClr val="tx1"/>
+                </a:solidFill>
+                <a:latin typeface="Calibri" panose="020F0502020204030204" pitchFamily="34" charset="0"/>
+                <a:ea typeface="Cambria Math" panose="02040503050406030204" pitchFamily="18" charset="0"/>
+                <a:cs typeface="Calibri" panose="020F0502020204030204" pitchFamily="34" charset="0"/>
+              </a:rPr>
+              <a:t>list</a:t>
+            </a:r>
+            <a:r>
+              <a:rPr lang="de-DE" sz="1800" dirty="0">
+                <a:solidFill>
+                  <a:schemeClr val="tx1"/>
+                </a:solidFill>
+                <a:latin typeface="Calibri" panose="020F0502020204030204" pitchFamily="34" charset="0"/>
+                <a:ea typeface="Cambria Math" panose="02040503050406030204" pitchFamily="18" charset="0"/>
+                <a:cs typeface="Calibri" panose="020F0502020204030204" pitchFamily="34" charset="0"/>
+              </a:rPr>
+              <a:t> </a:t>
+            </a:r>
+            <a:r>
+              <a:rPr lang="de-DE" sz="1800" dirty="0" err="1">
+                <a:solidFill>
+                  <a:schemeClr val="tx1"/>
+                </a:solidFill>
+                <a:latin typeface="Calibri" panose="020F0502020204030204" pitchFamily="34" charset="0"/>
+                <a:ea typeface="Cambria Math" panose="02040503050406030204" pitchFamily="18" charset="0"/>
+                <a:cs typeface="Calibri" panose="020F0502020204030204" pitchFamily="34" charset="0"/>
+              </a:rPr>
+              <a:t>is</a:t>
+            </a:r>
+            <a:r>
+              <a:rPr lang="de-DE" sz="1800" dirty="0">
+                <a:solidFill>
+                  <a:schemeClr val="tx1"/>
+                </a:solidFill>
+                <a:latin typeface="Calibri" panose="020F0502020204030204" pitchFamily="34" charset="0"/>
+                <a:ea typeface="Cambria Math" panose="02040503050406030204" pitchFamily="18" charset="0"/>
+                <a:cs typeface="Calibri" panose="020F0502020204030204" pitchFamily="34" charset="0"/>
+              </a:rPr>
+              <a:t> </a:t>
+            </a:r>
+            <a:r>
+              <a:rPr lang="de-DE" sz="1800" dirty="0" err="1">
+                <a:solidFill>
+                  <a:schemeClr val="tx1"/>
+                </a:solidFill>
+                <a:latin typeface="Calibri" panose="020F0502020204030204" pitchFamily="34" charset="0"/>
+                <a:ea typeface="Cambria Math" panose="02040503050406030204" pitchFamily="18" charset="0"/>
+                <a:cs typeface="Calibri" panose="020F0502020204030204" pitchFamily="34" charset="0"/>
+              </a:rPr>
+              <a:t>empty</a:t>
+            </a:r>
             <a:endParaRPr lang="de-DE" sz="1800" dirty="0">
               <a:solidFill>
                 <a:schemeClr val="tx1"/>
@@ -39289,130 +38592,6 @@
             </a:endParaRPr>
           </a:p>
           <a:p>
-            <a:pPr marL="742950" lvl="1" indent="-285750">
-              <a:spcBef>
-                <a:spcPts val="640"/>
-              </a:spcBef>
-              <a:buFont typeface="Wingdings" panose="05000000000000000000" pitchFamily="2" charset="2"/>
-              <a:buChar char="v"/>
-            </a:pPr>
-            <a:r>
-              <a:rPr lang="de-DE" sz="1800" dirty="0" err="1">
-                <a:solidFill>
-                  <a:schemeClr val="tx1"/>
-                </a:solidFill>
-                <a:highlight>
-                  <a:srgbClr val="DAE3F3"/>
-                </a:highlight>
-                <a:latin typeface="Consolas" panose="020B0609020204030204" pitchFamily="49" charset="0"/>
-                <a:ea typeface="Cambria Math" panose="02040503050406030204" pitchFamily="18" charset="0"/>
-                <a:cs typeface="Calibri" panose="020F0502020204030204" pitchFamily="34" charset="0"/>
-              </a:rPr>
-              <a:t>numbers</a:t>
-            </a:r>
-            <a:r>
-              <a:rPr lang="de-DE" sz="1800" dirty="0">
-                <a:solidFill>
-                  <a:schemeClr val="tx1"/>
-                </a:solidFill>
-                <a:highlight>
-                  <a:srgbClr val="DAE3F3"/>
-                </a:highlight>
-                <a:latin typeface="Consolas" panose="020B0609020204030204" pitchFamily="49" charset="0"/>
-                <a:ea typeface="Cambria Math" panose="02040503050406030204" pitchFamily="18" charset="0"/>
-                <a:cs typeface="Calibri" panose="020F0502020204030204" pitchFamily="34" charset="0"/>
-              </a:rPr>
-              <a:t> = [1, 13, 42]</a:t>
-            </a:r>
-            <a:endParaRPr lang="de-DE" sz="1800" dirty="0">
-              <a:solidFill>
-                <a:schemeClr val="tx1"/>
-              </a:solidFill>
-              <a:highlight>
-                <a:srgbClr val="DAE3F3"/>
-              </a:highlight>
-              <a:latin typeface="Consolas" panose="020B0609020204030204" pitchFamily="49" charset="0"/>
-              <a:ea typeface="Cambria Math" panose="02040503050406030204" pitchFamily="18" charset="0"/>
-              <a:cs typeface="Calibri" panose="020F0502020204030204" pitchFamily="34" charset="0"/>
-            </a:endParaRPr>
-          </a:p>
-          <a:p>
-            <a:pPr marL="742950" lvl="1" indent="-285750">
-              <a:spcBef>
-                <a:spcPts val="640"/>
-              </a:spcBef>
-              <a:buFont typeface="Wingdings" panose="05000000000000000000" pitchFamily="2" charset="2"/>
-              <a:buChar char="v"/>
-            </a:pPr>
-            <a:r>
-              <a:rPr lang="de-DE" sz="1800" dirty="0" err="1">
-                <a:solidFill>
-                  <a:schemeClr val="tx1"/>
-                </a:solidFill>
-                <a:highlight>
-                  <a:srgbClr val="DAE3F3"/>
-                </a:highlight>
-                <a:latin typeface="Consolas" panose="020B0609020204030204" pitchFamily="49" charset="0"/>
-                <a:ea typeface="Cambria Math" panose="02040503050406030204" pitchFamily="18" charset="0"/>
-                <a:cs typeface="Calibri" panose="020F0502020204030204" pitchFamily="34" charset="0"/>
-              </a:rPr>
-              <a:t>print</a:t>
-            </a:r>
-            <a:r>
-              <a:rPr lang="de-DE" sz="1800" dirty="0">
-                <a:solidFill>
-                  <a:schemeClr val="tx1"/>
-                </a:solidFill>
-                <a:highlight>
-                  <a:srgbClr val="DAE3F3"/>
-                </a:highlight>
-                <a:latin typeface="Consolas" panose="020B0609020204030204" pitchFamily="49" charset="0"/>
-                <a:ea typeface="Cambria Math" panose="02040503050406030204" pitchFamily="18" charset="0"/>
-                <a:cs typeface="Calibri" panose="020F0502020204030204" pitchFamily="34" charset="0"/>
-              </a:rPr>
-              <a:t>(</a:t>
-            </a:r>
-            <a:r>
-              <a:rPr lang="de-DE" sz="1800" dirty="0" err="1">
-                <a:solidFill>
-                  <a:schemeClr val="tx1"/>
-                </a:solidFill>
-                <a:highlight>
-                  <a:srgbClr val="DAE3F3"/>
-                </a:highlight>
-                <a:latin typeface="Consolas" panose="020B0609020204030204" pitchFamily="49" charset="0"/>
-                <a:ea typeface="Cambria Math" panose="02040503050406030204" pitchFamily="18" charset="0"/>
-                <a:cs typeface="Calibri" panose="020F0502020204030204" pitchFamily="34" charset="0"/>
-              </a:rPr>
-              <a:t>numbers</a:t>
-            </a:r>
-            <a:r>
-              <a:rPr lang="de-DE" sz="1800" dirty="0">
-                <a:solidFill>
-                  <a:schemeClr val="tx1"/>
-                </a:solidFill>
-                <a:highlight>
-                  <a:srgbClr val="DAE3F3"/>
-                </a:highlight>
-                <a:latin typeface="Consolas" panose="020B0609020204030204" pitchFamily="49" charset="0"/>
-                <a:ea typeface="Cambria Math" panose="02040503050406030204" pitchFamily="18" charset="0"/>
-                <a:cs typeface="Calibri" panose="020F0502020204030204" pitchFamily="34" charset="0"/>
-              </a:rPr>
-              <a:t>[3])</a:t>
-            </a:r>
-            <a:endParaRPr lang="de-DE" sz="1800" dirty="0">
-              <a:solidFill>
-                <a:schemeClr val="tx1"/>
-              </a:solidFill>
-              <a:highlight>
-                <a:srgbClr val="DAE3F3"/>
-              </a:highlight>
-              <a:latin typeface="Consolas" panose="020B0609020204030204" pitchFamily="49" charset="0"/>
-              <a:ea typeface="Cambria Math" panose="02040503050406030204" pitchFamily="18" charset="0"/>
-              <a:cs typeface="Calibri" panose="020F0502020204030204" pitchFamily="34" charset="0"/>
-            </a:endParaRPr>
-          </a:p>
-          <a:p>
             <a:pPr marL="285750" indent="-285750">
               <a:spcBef>
                 <a:spcPts val="640"/>
@@ -39421,6 +38600,17 @@
               <a:buChar char="v"/>
             </a:pPr>
             <a:r>
+              <a:rPr lang="de-DE" sz="1800" dirty="0">
+                <a:solidFill>
+                  <a:schemeClr val="tx1"/>
+                </a:solidFill>
+                <a:latin typeface="Calibri" panose="020F0502020204030204" pitchFamily="34" charset="0"/>
+                <a:ea typeface="Cambria Math" panose="02040503050406030204" pitchFamily="18" charset="0"/>
+                <a:cs typeface="Calibri" panose="020F0502020204030204" pitchFamily="34" charset="0"/>
+              </a:rPr>
+              <a:t>General </a:t>
+            </a:r>
+            <a:r>
               <a:rPr lang="de-DE" sz="1800" dirty="0" err="1">
                 <a:solidFill>
                   <a:schemeClr val="tx1"/>
@@ -39429,7 +38619,7 @@
                 <a:ea typeface="Cambria Math" panose="02040503050406030204" pitchFamily="18" charset="0"/>
                 <a:cs typeface="Calibri" panose="020F0502020204030204" pitchFamily="34" charset="0"/>
               </a:rPr>
-              <a:t>Indexing</a:t>
+              <a:t>hint</a:t>
             </a:r>
             <a:r>
               <a:rPr lang="de-DE" sz="1800" dirty="0">
@@ -39440,6 +38630,28 @@
                 <a:ea typeface="Cambria Math" panose="02040503050406030204" pitchFamily="18" charset="0"/>
                 <a:cs typeface="Calibri" panose="020F0502020204030204" pitchFamily="34" charset="0"/>
               </a:rPr>
+              <a:t>: </a:t>
+            </a:r>
+            <a:r>
+              <a:rPr lang="de-DE" sz="1800" dirty="0" err="1">
+                <a:solidFill>
+                  <a:schemeClr val="tx1"/>
+                </a:solidFill>
+                <a:latin typeface="Calibri" panose="020F0502020204030204" pitchFamily="34" charset="0"/>
+                <a:ea typeface="Cambria Math" panose="02040503050406030204" pitchFamily="18" charset="0"/>
+                <a:cs typeface="Calibri" panose="020F0502020204030204" pitchFamily="34" charset="0"/>
+              </a:rPr>
+              <a:t>be</a:t>
+            </a:r>
+            <a:r>
+              <a:rPr lang="de-DE" sz="1800" dirty="0">
+                <a:solidFill>
+                  <a:schemeClr val="tx1"/>
+                </a:solidFill>
+                <a:latin typeface="Calibri" panose="020F0502020204030204" pitchFamily="34" charset="0"/>
+                <a:ea typeface="Cambria Math" panose="02040503050406030204" pitchFamily="18" charset="0"/>
+                <a:cs typeface="Calibri" panose="020F0502020204030204" pitchFamily="34" charset="0"/>
+              </a:rPr>
               <a:t> </a:t>
             </a:r>
             <a:r>
@@ -39451,6 +38663,50 @@
                 <a:ea typeface="Cambria Math" panose="02040503050406030204" pitchFamily="18" charset="0"/>
                 <a:cs typeface="Calibri" panose="020F0502020204030204" pitchFamily="34" charset="0"/>
               </a:rPr>
+              <a:t>always</a:t>
+            </a:r>
+            <a:r>
+              <a:rPr lang="de-DE" sz="1800" dirty="0">
+                <a:solidFill>
+                  <a:schemeClr val="tx1"/>
+                </a:solidFill>
+                <a:latin typeface="Calibri" panose="020F0502020204030204" pitchFamily="34" charset="0"/>
+                <a:ea typeface="Cambria Math" panose="02040503050406030204" pitchFamily="18" charset="0"/>
+                <a:cs typeface="Calibri" panose="020F0502020204030204" pitchFamily="34" charset="0"/>
+              </a:rPr>
+              <a:t> </a:t>
+            </a:r>
+            <a:r>
+              <a:rPr lang="de-DE" sz="1800" dirty="0" err="1">
+                <a:solidFill>
+                  <a:schemeClr val="tx1"/>
+                </a:solidFill>
+                <a:latin typeface="Calibri" panose="020F0502020204030204" pitchFamily="34" charset="0"/>
+                <a:ea typeface="Cambria Math" panose="02040503050406030204" pitchFamily="18" charset="0"/>
+                <a:cs typeface="Calibri" panose="020F0502020204030204" pitchFamily="34" charset="0"/>
+              </a:rPr>
+              <a:t>careful</a:t>
+            </a:r>
+            <a:r>
+              <a:rPr lang="de-DE" sz="1800" dirty="0">
+                <a:solidFill>
+                  <a:schemeClr val="tx1"/>
+                </a:solidFill>
+                <a:latin typeface="Calibri" panose="020F0502020204030204" pitchFamily="34" charset="0"/>
+                <a:ea typeface="Cambria Math" panose="02040503050406030204" pitchFamily="18" charset="0"/>
+                <a:cs typeface="Calibri" panose="020F0502020204030204" pitchFamily="34" charset="0"/>
+              </a:rPr>
+              <a:t> </a:t>
+            </a:r>
+            <a:r>
+              <a:rPr lang="de-DE" sz="1800" dirty="0" err="1">
+                <a:solidFill>
+                  <a:schemeClr val="tx1"/>
+                </a:solidFill>
+                <a:latin typeface="Calibri" panose="020F0502020204030204" pitchFamily="34" charset="0"/>
+                <a:ea typeface="Cambria Math" panose="02040503050406030204" pitchFamily="18" charset="0"/>
+                <a:cs typeface="Calibri" panose="020F0502020204030204" pitchFamily="34" charset="0"/>
+              </a:rPr>
               <a:t>with</a:t>
             </a:r>
             <a:r>
@@ -39465,493 +38721,27 @@
               <a:t> </a:t>
             </a:r>
             <a:r>
+              <a:rPr lang="de-DE" sz="1800" dirty="0" err="1">
+                <a:solidFill>
+                  <a:schemeClr val="tx1"/>
+                </a:solidFill>
+                <a:latin typeface="Calibri" panose="020F0502020204030204" pitchFamily="34" charset="0"/>
+                <a:ea typeface="Cambria Math" panose="02040503050406030204" pitchFamily="18" charset="0"/>
+                <a:cs typeface="Calibri" panose="020F0502020204030204" pitchFamily="34" charset="0"/>
+              </a:rPr>
+              <a:t>indexing</a:t>
+            </a:r>
+            <a:r>
               <a:rPr lang="de-DE" sz="1800" dirty="0">
                 <a:solidFill>
                   <a:schemeClr val="tx1"/>
                 </a:solidFill>
-                <a:highlight>
-                  <a:srgbClr val="DAE3F3"/>
-                </a:highlight>
-                <a:latin typeface="Calibri" panose="020F0502020204030204" pitchFamily="34" charset="0"/>
-                <a:ea typeface="Cambria Math" panose="02040503050406030204" pitchFamily="18" charset="0"/>
-                <a:cs typeface="Calibri" panose="020F0502020204030204" pitchFamily="34" charset="0"/>
-              </a:rPr>
-              <a:t>[-1] </a:t>
-            </a:r>
-            <a:r>
-              <a:rPr lang="de-DE" sz="1800" dirty="0">
-                <a:solidFill>
-                  <a:schemeClr val="tx1"/>
-                </a:solidFill>
-                <a:latin typeface="Calibri" panose="020F0502020204030204" pitchFamily="34" charset="0"/>
-                <a:ea typeface="Cambria Math" panose="02040503050406030204" pitchFamily="18" charset="0"/>
-                <a:cs typeface="Calibri" panose="020F0502020204030204" pitchFamily="34" charset="0"/>
-              </a:rPr>
-              <a:t> </a:t>
-            </a:r>
-            <a:r>
-              <a:rPr lang="de-DE" sz="1800" dirty="0" err="1">
-                <a:solidFill>
-                  <a:schemeClr val="tx1"/>
-                </a:solidFill>
-                <a:latin typeface="Calibri" panose="020F0502020204030204" pitchFamily="34" charset="0"/>
-                <a:ea typeface="Cambria Math" panose="02040503050406030204" pitchFamily="18" charset="0"/>
-                <a:cs typeface="Calibri" panose="020F0502020204030204" pitchFamily="34" charset="0"/>
-              </a:rPr>
-              <a:t>returns</a:t>
-            </a:r>
-            <a:r>
-              <a:rPr lang="de-DE" sz="1800" dirty="0">
-                <a:solidFill>
-                  <a:schemeClr val="tx1"/>
-                </a:solidFill>
-                <a:latin typeface="Calibri" panose="020F0502020204030204" pitchFamily="34" charset="0"/>
-                <a:ea typeface="Cambria Math" panose="02040503050406030204" pitchFamily="18" charset="0"/>
-                <a:cs typeface="Calibri" panose="020F0502020204030204" pitchFamily="34" charset="0"/>
-              </a:rPr>
-              <a:t> </a:t>
-            </a:r>
-            <a:r>
-              <a:rPr lang="de-DE" sz="1800" dirty="0" err="1">
-                <a:solidFill>
-                  <a:schemeClr val="tx1"/>
-                </a:solidFill>
-                <a:latin typeface="Calibri" panose="020F0502020204030204" pitchFamily="34" charset="0"/>
-                <a:ea typeface="Cambria Math" panose="02040503050406030204" pitchFamily="18" charset="0"/>
-                <a:cs typeface="Calibri" panose="020F0502020204030204" pitchFamily="34" charset="0"/>
-              </a:rPr>
-              <a:t>always</a:t>
-            </a:r>
-            <a:r>
-              <a:rPr lang="de-DE" sz="1800" dirty="0">
-                <a:solidFill>
-                  <a:schemeClr val="tx1"/>
-                </a:solidFill>
-                <a:latin typeface="Calibri" panose="020F0502020204030204" pitchFamily="34" charset="0"/>
-                <a:ea typeface="Cambria Math" panose="02040503050406030204" pitchFamily="18" charset="0"/>
-                <a:cs typeface="Calibri" panose="020F0502020204030204" pitchFamily="34" charset="0"/>
-              </a:rPr>
-              <a:t> </a:t>
-            </a:r>
-            <a:r>
-              <a:rPr lang="de-DE" sz="1800" dirty="0" err="1">
-                <a:solidFill>
-                  <a:schemeClr val="tx1"/>
-                </a:solidFill>
-                <a:latin typeface="Calibri" panose="020F0502020204030204" pitchFamily="34" charset="0"/>
-                <a:ea typeface="Cambria Math" panose="02040503050406030204" pitchFamily="18" charset="0"/>
-                <a:cs typeface="Calibri" panose="020F0502020204030204" pitchFamily="34" charset="0"/>
-              </a:rPr>
-              <a:t>the</a:t>
-            </a:r>
-            <a:r>
-              <a:rPr lang="de-DE" sz="1800" dirty="0">
-                <a:solidFill>
-                  <a:schemeClr val="tx1"/>
-                </a:solidFill>
-                <a:latin typeface="Calibri" panose="020F0502020204030204" pitchFamily="34" charset="0"/>
-                <a:ea typeface="Cambria Math" panose="02040503050406030204" pitchFamily="18" charset="0"/>
-                <a:cs typeface="Calibri" panose="020F0502020204030204" pitchFamily="34" charset="0"/>
-              </a:rPr>
-              <a:t> last </a:t>
-            </a:r>
-            <a:r>
-              <a:rPr lang="de-DE" sz="1800" dirty="0" err="1">
-                <a:solidFill>
-                  <a:schemeClr val="tx1"/>
-                </a:solidFill>
-                <a:latin typeface="Calibri" panose="020F0502020204030204" pitchFamily="34" charset="0"/>
-                <a:ea typeface="Cambria Math" panose="02040503050406030204" pitchFamily="18" charset="0"/>
-                <a:cs typeface="Calibri" panose="020F0502020204030204" pitchFamily="34" charset="0"/>
-              </a:rPr>
-              <a:t>element</a:t>
-            </a:r>
-            <a:r>
-              <a:rPr lang="de-DE" sz="1800" dirty="0">
-                <a:solidFill>
-                  <a:schemeClr val="tx1"/>
-                </a:solidFill>
-                <a:latin typeface="Calibri" panose="020F0502020204030204" pitchFamily="34" charset="0"/>
-                <a:ea typeface="Cambria Math" panose="02040503050406030204" pitchFamily="18" charset="0"/>
-                <a:cs typeface="Calibri" panose="020F0502020204030204" pitchFamily="34" charset="0"/>
-              </a:rPr>
-              <a:t> (</a:t>
-            </a:r>
-            <a:r>
-              <a:rPr lang="de-DE" sz="1800" dirty="0" err="1">
-                <a:solidFill>
-                  <a:schemeClr val="tx1"/>
-                </a:solidFill>
-                <a:latin typeface="Calibri" panose="020F0502020204030204" pitchFamily="34" charset="0"/>
-                <a:ea typeface="Cambria Math" panose="02040503050406030204" pitchFamily="18" charset="0"/>
-                <a:cs typeface="Calibri" panose="020F0502020204030204" pitchFamily="34" charset="0"/>
-              </a:rPr>
-              <a:t>recollect</a:t>
-            </a:r>
-            <a:r>
-              <a:rPr lang="de-DE" sz="1800" dirty="0">
-                <a:solidFill>
-                  <a:schemeClr val="tx1"/>
-                </a:solidFill>
-                <a:latin typeface="Calibri" panose="020F0502020204030204" pitchFamily="34" charset="0"/>
-                <a:ea typeface="Cambria Math" panose="02040503050406030204" pitchFamily="18" charset="0"/>
-                <a:cs typeface="Calibri" panose="020F0502020204030204" pitchFamily="34" charset="0"/>
-              </a:rPr>
-              <a:t> </a:t>
-            </a:r>
-            <a:r>
-              <a:rPr lang="de-DE" sz="1800" dirty="0" err="1">
-                <a:solidFill>
-                  <a:schemeClr val="tx1"/>
-                </a:solidFill>
-                <a:latin typeface="Calibri" panose="020F0502020204030204" pitchFamily="34" charset="0"/>
-                <a:ea typeface="Cambria Math" panose="02040503050406030204" pitchFamily="18" charset="0"/>
-                <a:cs typeface="Calibri" panose="020F0502020204030204" pitchFamily="34" charset="0"/>
-              </a:rPr>
-              <a:t>string</a:t>
-            </a:r>
-            <a:r>
-              <a:rPr lang="de-DE" sz="1800" dirty="0">
-                <a:solidFill>
-                  <a:schemeClr val="tx1"/>
-                </a:solidFill>
-                <a:latin typeface="Calibri" panose="020F0502020204030204" pitchFamily="34" charset="0"/>
-                <a:ea typeface="Cambria Math" panose="02040503050406030204" pitchFamily="18" charset="0"/>
-                <a:cs typeface="Calibri" panose="020F0502020204030204" pitchFamily="34" charset="0"/>
-              </a:rPr>
-              <a:t> </a:t>
-            </a:r>
-            <a:r>
-              <a:rPr lang="de-DE" sz="1800" dirty="0" err="1">
-                <a:solidFill>
-                  <a:schemeClr val="tx1"/>
-                </a:solidFill>
-                <a:latin typeface="Calibri" panose="020F0502020204030204" pitchFamily="34" charset="0"/>
-                <a:ea typeface="Cambria Math" panose="02040503050406030204" pitchFamily="18" charset="0"/>
-                <a:cs typeface="Calibri" panose="020F0502020204030204" pitchFamily="34" charset="0"/>
-              </a:rPr>
-              <a:t>slicing</a:t>
-            </a:r>
-            <a:r>
-              <a:rPr lang="de-DE" sz="1800" dirty="0">
-                <a:solidFill>
-                  <a:schemeClr val="tx1"/>
-                </a:solidFill>
-                <a:latin typeface="Calibri" panose="020F0502020204030204" pitchFamily="34" charset="0"/>
-                <a:ea typeface="Cambria Math" panose="02040503050406030204" pitchFamily="18" charset="0"/>
-                <a:cs typeface="Calibri" panose="020F0502020204030204" pitchFamily="34" charset="0"/>
-              </a:rPr>
-              <a:t>!)</a:t>
-            </a:r>
-            <a:endParaRPr lang="de-DE" sz="1800" dirty="0">
-              <a:solidFill>
-                <a:schemeClr val="tx1"/>
-              </a:solidFill>
-              <a:latin typeface="Calibri" panose="020F0502020204030204" pitchFamily="34" charset="0"/>
-              <a:ea typeface="Cambria Math" panose="02040503050406030204" pitchFamily="18" charset="0"/>
-              <a:cs typeface="Calibri" panose="020F0502020204030204" pitchFamily="34" charset="0"/>
-            </a:endParaRPr>
-          </a:p>
-          <a:p>
-            <a:pPr marL="285750" indent="-285750">
-              <a:spcBef>
-                <a:spcPts val="640"/>
-              </a:spcBef>
-              <a:buFont typeface="Wingdings" panose="05000000000000000000" pitchFamily="2" charset="2"/>
-              <a:buChar char="v"/>
-            </a:pPr>
-            <a:r>
-              <a:rPr lang="de-DE" sz="1800" dirty="0" err="1">
-                <a:solidFill>
-                  <a:schemeClr val="tx1"/>
-                </a:solidFill>
-                <a:highlight>
-                  <a:srgbClr val="DAE3F3"/>
-                </a:highlight>
-                <a:latin typeface="Calibri" panose="020F0502020204030204" pitchFamily="34" charset="0"/>
-                <a:ea typeface="Cambria Math" panose="02040503050406030204" pitchFamily="18" charset="0"/>
-                <a:cs typeface="Calibri" panose="020F0502020204030204" pitchFamily="34" charset="0"/>
-              </a:rPr>
-              <a:t>IndexError</a:t>
-            </a:r>
-            <a:r>
-              <a:rPr lang="de-DE" sz="1800" dirty="0">
-                <a:solidFill>
-                  <a:schemeClr val="tx1"/>
-                </a:solidFill>
-                <a:latin typeface="Calibri" panose="020F0502020204030204" pitchFamily="34" charset="0"/>
-                <a:ea typeface="Cambria Math" panose="02040503050406030204" pitchFamily="18" charset="0"/>
-                <a:cs typeface="Calibri" panose="020F0502020204030204" pitchFamily="34" charset="0"/>
-              </a:rPr>
-              <a:t> also </a:t>
-            </a:r>
-            <a:r>
-              <a:rPr lang="de-DE" sz="1800" dirty="0" err="1">
-                <a:solidFill>
-                  <a:schemeClr val="tx1"/>
-                </a:solidFill>
-                <a:latin typeface="Calibri" panose="020F0502020204030204" pitchFamily="34" charset="0"/>
-                <a:ea typeface="Cambria Math" panose="02040503050406030204" pitchFamily="18" charset="0"/>
-                <a:cs typeface="Calibri" panose="020F0502020204030204" pitchFamily="34" charset="0"/>
-              </a:rPr>
-              <a:t>if</a:t>
-            </a:r>
-            <a:r>
-              <a:rPr lang="de-DE" sz="1800" dirty="0">
-                <a:solidFill>
-                  <a:schemeClr val="tx1"/>
-                </a:solidFill>
-                <a:latin typeface="Calibri" panose="020F0502020204030204" pitchFamily="34" charset="0"/>
-                <a:ea typeface="Cambria Math" panose="02040503050406030204" pitchFamily="18" charset="0"/>
-                <a:cs typeface="Calibri" panose="020F0502020204030204" pitchFamily="34" charset="0"/>
-              </a:rPr>
-              <a:t> </a:t>
-            </a:r>
-            <a:r>
-              <a:rPr lang="de-DE" sz="1800" dirty="0" err="1">
-                <a:solidFill>
-                  <a:schemeClr val="tx1"/>
-                </a:solidFill>
-                <a:latin typeface="Calibri" panose="020F0502020204030204" pitchFamily="34" charset="0"/>
-                <a:ea typeface="Cambria Math" panose="02040503050406030204" pitchFamily="18" charset="0"/>
-                <a:cs typeface="Calibri" panose="020F0502020204030204" pitchFamily="34" charset="0"/>
-              </a:rPr>
-              <a:t>the</a:t>
-            </a:r>
-            <a:r>
-              <a:rPr lang="de-DE" sz="1800" dirty="0">
-                <a:solidFill>
-                  <a:schemeClr val="tx1"/>
-                </a:solidFill>
-                <a:latin typeface="Calibri" panose="020F0502020204030204" pitchFamily="34" charset="0"/>
-                <a:ea typeface="Cambria Math" panose="02040503050406030204" pitchFamily="18" charset="0"/>
-                <a:cs typeface="Calibri" panose="020F0502020204030204" pitchFamily="34" charset="0"/>
-              </a:rPr>
-              <a:t> </a:t>
-            </a:r>
-            <a:r>
-              <a:rPr lang="de-DE" sz="1800" dirty="0" err="1">
-                <a:solidFill>
-                  <a:schemeClr val="tx1"/>
-                </a:solidFill>
-                <a:latin typeface="Calibri" panose="020F0502020204030204" pitchFamily="34" charset="0"/>
-                <a:ea typeface="Cambria Math" panose="02040503050406030204" pitchFamily="18" charset="0"/>
-                <a:cs typeface="Calibri" panose="020F0502020204030204" pitchFamily="34" charset="0"/>
-              </a:rPr>
-              <a:t>list</a:t>
-            </a:r>
-            <a:r>
-              <a:rPr lang="de-DE" sz="1800" dirty="0">
-                <a:solidFill>
-                  <a:schemeClr val="tx1"/>
-                </a:solidFill>
-                <a:latin typeface="Calibri" panose="020F0502020204030204" pitchFamily="34" charset="0"/>
-                <a:ea typeface="Cambria Math" panose="02040503050406030204" pitchFamily="18" charset="0"/>
-                <a:cs typeface="Calibri" panose="020F0502020204030204" pitchFamily="34" charset="0"/>
-              </a:rPr>
-              <a:t> </a:t>
-            </a:r>
-            <a:r>
-              <a:rPr lang="de-DE" sz="1800" dirty="0" err="1">
-                <a:solidFill>
-                  <a:schemeClr val="tx1"/>
-                </a:solidFill>
-                <a:latin typeface="Calibri" panose="020F0502020204030204" pitchFamily="34" charset="0"/>
-                <a:ea typeface="Cambria Math" panose="02040503050406030204" pitchFamily="18" charset="0"/>
-                <a:cs typeface="Calibri" panose="020F0502020204030204" pitchFamily="34" charset="0"/>
-              </a:rPr>
-              <a:t>is</a:t>
-            </a:r>
-            <a:r>
-              <a:rPr lang="de-DE" sz="1800" dirty="0">
-                <a:solidFill>
-                  <a:schemeClr val="tx1"/>
-                </a:solidFill>
-                <a:latin typeface="Calibri" panose="020F0502020204030204" pitchFamily="34" charset="0"/>
-                <a:ea typeface="Cambria Math" panose="02040503050406030204" pitchFamily="18" charset="0"/>
-                <a:cs typeface="Calibri" panose="020F0502020204030204" pitchFamily="34" charset="0"/>
-              </a:rPr>
-              <a:t> </a:t>
-            </a:r>
-            <a:r>
-              <a:rPr lang="de-DE" sz="1800" dirty="0" err="1">
-                <a:solidFill>
-                  <a:schemeClr val="tx1"/>
-                </a:solidFill>
-                <a:latin typeface="Calibri" panose="020F0502020204030204" pitchFamily="34" charset="0"/>
-                <a:ea typeface="Cambria Math" panose="02040503050406030204" pitchFamily="18" charset="0"/>
-                <a:cs typeface="Calibri" panose="020F0502020204030204" pitchFamily="34" charset="0"/>
-              </a:rPr>
-              <a:t>empty</a:t>
-            </a:r>
-            <a:endParaRPr lang="de-DE" sz="1800" dirty="0">
-              <a:solidFill>
-                <a:schemeClr val="tx1"/>
-              </a:solidFill>
-              <a:latin typeface="Calibri" panose="020F0502020204030204" pitchFamily="34" charset="0"/>
-              <a:ea typeface="Cambria Math" panose="02040503050406030204" pitchFamily="18" charset="0"/>
-              <a:cs typeface="Calibri" panose="020F0502020204030204" pitchFamily="34" charset="0"/>
-            </a:endParaRPr>
-          </a:p>
-          <a:p>
-            <a:pPr marL="285750" indent="-285750">
-              <a:spcBef>
-                <a:spcPts val="640"/>
-              </a:spcBef>
-              <a:buFont typeface="Wingdings" panose="05000000000000000000" pitchFamily="2" charset="2"/>
-              <a:buChar char="v"/>
-            </a:pPr>
-            <a:r>
-              <a:rPr lang="de-DE" sz="1800" dirty="0">
-                <a:solidFill>
-                  <a:schemeClr val="tx1"/>
-                </a:solidFill>
-                <a:latin typeface="Calibri" panose="020F0502020204030204" pitchFamily="34" charset="0"/>
-                <a:ea typeface="Cambria Math" panose="02040503050406030204" pitchFamily="18" charset="0"/>
-                <a:cs typeface="Calibri" panose="020F0502020204030204" pitchFamily="34" charset="0"/>
-              </a:rPr>
-              <a:t>General </a:t>
-            </a:r>
-            <a:r>
-              <a:rPr lang="de-DE" sz="1800" dirty="0" err="1">
-                <a:solidFill>
-                  <a:schemeClr val="tx1"/>
-                </a:solidFill>
-                <a:latin typeface="Calibri" panose="020F0502020204030204" pitchFamily="34" charset="0"/>
-                <a:ea typeface="Cambria Math" panose="02040503050406030204" pitchFamily="18" charset="0"/>
-                <a:cs typeface="Calibri" panose="020F0502020204030204" pitchFamily="34" charset="0"/>
-              </a:rPr>
-              <a:t>hint</a:t>
-            </a:r>
-            <a:r>
-              <a:rPr lang="de-DE" sz="1800" dirty="0">
-                <a:solidFill>
-                  <a:schemeClr val="tx1"/>
-                </a:solidFill>
-                <a:latin typeface="Calibri" panose="020F0502020204030204" pitchFamily="34" charset="0"/>
-                <a:ea typeface="Cambria Math" panose="02040503050406030204" pitchFamily="18" charset="0"/>
-                <a:cs typeface="Calibri" panose="020F0502020204030204" pitchFamily="34" charset="0"/>
-              </a:rPr>
-              <a:t>: </a:t>
-            </a:r>
-            <a:r>
-              <a:rPr lang="de-DE" sz="1800" dirty="0" err="1">
-                <a:solidFill>
-                  <a:schemeClr val="tx1"/>
-                </a:solidFill>
-                <a:latin typeface="Calibri" panose="020F0502020204030204" pitchFamily="34" charset="0"/>
-                <a:ea typeface="Cambria Math" panose="02040503050406030204" pitchFamily="18" charset="0"/>
-                <a:cs typeface="Calibri" panose="020F0502020204030204" pitchFamily="34" charset="0"/>
-              </a:rPr>
-              <a:t>be</a:t>
-            </a:r>
-            <a:r>
-              <a:rPr lang="de-DE" sz="1800" dirty="0">
-                <a:solidFill>
-                  <a:schemeClr val="tx1"/>
-                </a:solidFill>
-                <a:latin typeface="Calibri" panose="020F0502020204030204" pitchFamily="34" charset="0"/>
-                <a:ea typeface="Cambria Math" panose="02040503050406030204" pitchFamily="18" charset="0"/>
-                <a:cs typeface="Calibri" panose="020F0502020204030204" pitchFamily="34" charset="0"/>
-              </a:rPr>
-              <a:t> </a:t>
-            </a:r>
-            <a:r>
-              <a:rPr lang="de-DE" sz="1800" dirty="0" err="1">
-                <a:solidFill>
-                  <a:schemeClr val="tx1"/>
-                </a:solidFill>
-                <a:latin typeface="Calibri" panose="020F0502020204030204" pitchFamily="34" charset="0"/>
-                <a:ea typeface="Cambria Math" panose="02040503050406030204" pitchFamily="18" charset="0"/>
-                <a:cs typeface="Calibri" panose="020F0502020204030204" pitchFamily="34" charset="0"/>
-              </a:rPr>
-              <a:t>always</a:t>
-            </a:r>
-            <a:r>
-              <a:rPr lang="de-DE" sz="1800" dirty="0">
-                <a:solidFill>
-                  <a:schemeClr val="tx1"/>
-                </a:solidFill>
-                <a:latin typeface="Calibri" panose="020F0502020204030204" pitchFamily="34" charset="0"/>
-                <a:ea typeface="Cambria Math" panose="02040503050406030204" pitchFamily="18" charset="0"/>
-                <a:cs typeface="Calibri" panose="020F0502020204030204" pitchFamily="34" charset="0"/>
-              </a:rPr>
-              <a:t> </a:t>
-            </a:r>
-            <a:r>
-              <a:rPr lang="de-DE" sz="1800" dirty="0" err="1">
-                <a:solidFill>
-                  <a:schemeClr val="tx1"/>
-                </a:solidFill>
-                <a:latin typeface="Calibri" panose="020F0502020204030204" pitchFamily="34" charset="0"/>
-                <a:ea typeface="Cambria Math" panose="02040503050406030204" pitchFamily="18" charset="0"/>
-                <a:cs typeface="Calibri" panose="020F0502020204030204" pitchFamily="34" charset="0"/>
-              </a:rPr>
-              <a:t>careful</a:t>
-            </a:r>
-            <a:r>
-              <a:rPr lang="de-DE" sz="1800" dirty="0">
-                <a:solidFill>
-                  <a:schemeClr val="tx1"/>
-                </a:solidFill>
-                <a:latin typeface="Calibri" panose="020F0502020204030204" pitchFamily="34" charset="0"/>
-                <a:ea typeface="Cambria Math" panose="02040503050406030204" pitchFamily="18" charset="0"/>
-                <a:cs typeface="Calibri" panose="020F0502020204030204" pitchFamily="34" charset="0"/>
-              </a:rPr>
-              <a:t> </a:t>
-            </a:r>
-            <a:r>
-              <a:rPr lang="de-DE" sz="1800" dirty="0" err="1">
-                <a:solidFill>
-                  <a:schemeClr val="tx1"/>
-                </a:solidFill>
-                <a:latin typeface="Calibri" panose="020F0502020204030204" pitchFamily="34" charset="0"/>
-                <a:ea typeface="Cambria Math" panose="02040503050406030204" pitchFamily="18" charset="0"/>
-                <a:cs typeface="Calibri" panose="020F0502020204030204" pitchFamily="34" charset="0"/>
-              </a:rPr>
-              <a:t>with</a:t>
-            </a:r>
-            <a:r>
-              <a:rPr lang="de-DE" sz="1800" dirty="0">
-                <a:solidFill>
-                  <a:schemeClr val="tx1"/>
-                </a:solidFill>
-                <a:latin typeface="Calibri" panose="020F0502020204030204" pitchFamily="34" charset="0"/>
-                <a:ea typeface="Cambria Math" panose="02040503050406030204" pitchFamily="18" charset="0"/>
-                <a:cs typeface="Calibri" panose="020F0502020204030204" pitchFamily="34" charset="0"/>
-              </a:rPr>
-              <a:t> </a:t>
-            </a:r>
-            <a:r>
-              <a:rPr lang="de-DE" sz="1800" dirty="0" err="1">
-                <a:solidFill>
-                  <a:schemeClr val="tx1"/>
-                </a:solidFill>
-                <a:latin typeface="Calibri" panose="020F0502020204030204" pitchFamily="34" charset="0"/>
-                <a:ea typeface="Cambria Math" panose="02040503050406030204" pitchFamily="18" charset="0"/>
-                <a:cs typeface="Calibri" panose="020F0502020204030204" pitchFamily="34" charset="0"/>
-              </a:rPr>
-              <a:t>indexing</a:t>
-            </a:r>
-            <a:r>
-              <a:rPr lang="de-DE" sz="1800" dirty="0">
-                <a:solidFill>
-                  <a:schemeClr val="tx1"/>
-                </a:solidFill>
                 <a:latin typeface="Calibri" panose="020F0502020204030204" pitchFamily="34" charset="0"/>
                 <a:ea typeface="Cambria Math" panose="02040503050406030204" pitchFamily="18" charset="0"/>
                 <a:cs typeface="Calibri" panose="020F0502020204030204" pitchFamily="34" charset="0"/>
               </a:rPr>
               <a:t>!</a:t>
             </a:r>
-            <a:endParaRPr lang="de-DE" sz="1800" dirty="0">
-              <a:solidFill>
-                <a:schemeClr val="tx1"/>
-              </a:solidFill>
-              <a:latin typeface="Calibri" panose="020F0502020204030204" pitchFamily="34" charset="0"/>
-              <a:ea typeface="Cambria Math" panose="02040503050406030204" pitchFamily="18" charset="0"/>
-              <a:cs typeface="Calibri" panose="020F0502020204030204" pitchFamily="34" charset="0"/>
-            </a:endParaRPr>
           </a:p>
           <a:p>
             <a:pPr marL="0" indent="0">
@@ -40006,11 +38796,6 @@
               </a:rPr>
               <a:t>    0         1            2</a:t>
             </a:r>
-            <a:endParaRPr lang="en-US" sz="1800" noProof="0" dirty="0">
-              <a:latin typeface="Calibri" panose="020F0502020204030204" pitchFamily="34" charset="0"/>
-              <a:ea typeface="Cambria Math" panose="02040503050406030204" pitchFamily="18" charset="0"/>
-              <a:cs typeface="Calibri" panose="020F0502020204030204" pitchFamily="34" charset="0"/>
-            </a:endParaRPr>
           </a:p>
         </p:txBody>
       </p:sp>
@@ -40633,14 +39418,6 @@
               </a:rPr>
               <a:t>!</a:t>
             </a:r>
-            <a:endParaRPr lang="de-DE" sz="1800" dirty="0">
-              <a:solidFill>
-                <a:schemeClr val="tx1"/>
-              </a:solidFill>
-              <a:latin typeface="Calibri" panose="020F0502020204030204" pitchFamily="34" charset="0"/>
-              <a:ea typeface="Cambria Math" panose="02040503050406030204" pitchFamily="18" charset="0"/>
-              <a:cs typeface="Calibri" panose="020F0502020204030204" pitchFamily="34" charset="0"/>
-            </a:endParaRPr>
           </a:p>
           <a:p>
             <a:pPr marL="285750" indent="-285750">
@@ -40837,14 +39614,6 @@
               </a:rPr>
               <a:t>!):</a:t>
             </a:r>
-            <a:endParaRPr lang="de-DE" sz="1800" dirty="0">
-              <a:solidFill>
-                <a:schemeClr val="tx1"/>
-              </a:solidFill>
-              <a:latin typeface="Calibri" panose="020F0502020204030204" pitchFamily="34" charset="0"/>
-              <a:ea typeface="Cambria Math" panose="02040503050406030204" pitchFamily="18" charset="0"/>
-              <a:cs typeface="Calibri" panose="020F0502020204030204" pitchFamily="34" charset="0"/>
-            </a:endParaRPr>
           </a:p>
           <a:p>
             <a:pPr marL="742950" lvl="1" indent="-285750">
@@ -40882,17 +39651,6 @@
               </a:rPr>
               <a:t>[i]</a:t>
             </a:r>
-            <a:endParaRPr lang="de-DE" sz="1800" dirty="0">
-              <a:solidFill>
-                <a:schemeClr val="tx1"/>
-              </a:solidFill>
-              <a:highlight>
-                <a:srgbClr val="DAE3F3"/>
-              </a:highlight>
-              <a:latin typeface="Calibri" panose="020F0502020204030204" pitchFamily="34" charset="0"/>
-              <a:ea typeface="Cambria Math" panose="02040503050406030204" pitchFamily="18" charset="0"/>
-              <a:cs typeface="Calibri" panose="020F0502020204030204" pitchFamily="34" charset="0"/>
-            </a:endParaRPr>
           </a:p>
           <a:p>
             <a:pPr marL="1200150" lvl="2" indent="-285750">
@@ -40957,14 +39715,6 @@
               </a:rPr>
               <a:t> </a:t>
             </a:r>
-            <a:endParaRPr lang="de-DE" sz="1800" dirty="0">
-              <a:solidFill>
-                <a:schemeClr val="tx1"/>
-              </a:solidFill>
-              <a:latin typeface="Calibri" panose="020F0502020204030204" pitchFamily="34" charset="0"/>
-              <a:ea typeface="Cambria Math" panose="02040503050406030204" pitchFamily="18" charset="0"/>
-              <a:cs typeface="Calibri" panose="020F0502020204030204" pitchFamily="34" charset="0"/>
-            </a:endParaRPr>
           </a:p>
           <a:p>
             <a:pPr marL="742950" lvl="1" indent="-285750">
@@ -41030,17 +39780,6 @@
               </a:rPr>
               <a:t>]    </a:t>
             </a:r>
-            <a:endParaRPr lang="de-DE" sz="1800" dirty="0">
-              <a:solidFill>
-                <a:schemeClr val="tx1"/>
-              </a:solidFill>
-              <a:highlight>
-                <a:srgbClr val="DAE3F3"/>
-              </a:highlight>
-              <a:latin typeface="Consolas" panose="020B0609020204030204" pitchFamily="49" charset="0"/>
-              <a:ea typeface="Cambria Math" panose="02040503050406030204" pitchFamily="18" charset="0"/>
-              <a:cs typeface="Calibri" panose="020F0502020204030204" pitchFamily="34" charset="0"/>
-            </a:endParaRPr>
           </a:p>
           <a:p>
             <a:pPr marL="1200150" lvl="2" indent="-285750">
@@ -41171,14 +39910,6 @@
               </a:rPr>
               <a:t>)</a:t>
             </a:r>
-            <a:endParaRPr lang="de-DE" sz="1800" dirty="0">
-              <a:solidFill>
-                <a:schemeClr val="tx1"/>
-              </a:solidFill>
-              <a:latin typeface="Calibri" panose="020F0502020204030204" pitchFamily="34" charset="0"/>
-              <a:ea typeface="Cambria Math" panose="02040503050406030204" pitchFamily="18" charset="0"/>
-              <a:cs typeface="Calibri" panose="020F0502020204030204" pitchFamily="34" charset="0"/>
-            </a:endParaRPr>
           </a:p>
           <a:p>
             <a:pPr marL="285750" indent="-285750">
@@ -41199,14 +39930,6 @@
               </a:rPr>
               <a:t>etc.</a:t>
             </a:r>
-            <a:endParaRPr lang="de-DE" sz="1800" dirty="0">
-              <a:solidFill>
-                <a:schemeClr val="tx1"/>
-              </a:solidFill>
-              <a:latin typeface="Calibri" panose="020F0502020204030204" pitchFamily="34" charset="0"/>
-              <a:ea typeface="Cambria Math" panose="02040503050406030204" pitchFamily="18" charset="0"/>
-              <a:cs typeface="Calibri" panose="020F0502020204030204" pitchFamily="34" charset="0"/>
-            </a:endParaRPr>
           </a:p>
           <a:p>
             <a:pPr marL="285750" indent="-285750">
@@ -41335,9 +40058,27 @@
                 <a:tableStyleId>{21E4AEA4-8DFA-4A89-87EB-49C32662AFE0}</a:tableStyleId>
               </a:tblPr>
               <a:tblGrid>
-                <a:gridCol w="1196444"/>
-                <a:gridCol w="3429930"/>
-                <a:gridCol w="3813280"/>
+                <a:gridCol w="1196444">
+                  <a:extLst>
+                    <a:ext uri="{9D8B030D-6E8A-4147-A177-3AD203B41FA5}">
+                      <a16:colId xmlns:a16="http://schemas.microsoft.com/office/drawing/2014/main" val="20000"/>
+                    </a:ext>
+                  </a:extLst>
+                </a:gridCol>
+                <a:gridCol w="3429930">
+                  <a:extLst>
+                    <a:ext uri="{9D8B030D-6E8A-4147-A177-3AD203B41FA5}">
+                      <a16:colId xmlns:a16="http://schemas.microsoft.com/office/drawing/2014/main" val="20001"/>
+                    </a:ext>
+                  </a:extLst>
+                </a:gridCol>
+                <a:gridCol w="3813280">
+                  <a:extLst>
+                    <a:ext uri="{9D8B030D-6E8A-4147-A177-3AD203B41FA5}">
+                      <a16:colId xmlns:a16="http://schemas.microsoft.com/office/drawing/2014/main" val="20002"/>
+                    </a:ext>
+                  </a:extLst>
+                </a:gridCol>
               </a:tblGrid>
               <a:tr h="474840">
                 <a:tc>
@@ -41396,6 +40137,11 @@
                   </a:txBody>
                   <a:tcPr marL="90000" marR="90000"/>
                 </a:tc>
+                <a:extLst>
+                  <a:ext uri="{0D108BD9-81ED-4DB2-BD59-A6C34878D82A}">
+                    <a16:rowId xmlns:a16="http://schemas.microsoft.com/office/drawing/2014/main" val="10000"/>
+                  </a:ext>
+                </a:extLst>
               </a:tr>
               <a:tr h="0">
                 <a:tc>
@@ -41428,11 +40174,6 @@
                         </a:rPr>
                         <a:t>True, if element (or subsequence)</a:t>
                       </a:r>
-                      <a:endParaRPr lang="en-US" sz="1800" strike="noStrike" spc="-1" dirty="0">
-                        <a:latin typeface="Calibri" panose="020F0502020204030204" pitchFamily="34" charset="0"/>
-                        <a:ea typeface="Calibri" panose="020F0502020204030204" pitchFamily="34" charset="0"/>
-                        <a:cs typeface="Calibri" panose="020F0502020204030204" pitchFamily="34" charset="0"/>
-                      </a:endParaRPr>
                     </a:p>
                     <a:p>
                       <a:r>
@@ -41443,11 +40184,6 @@
                         </a:rPr>
                         <a:t>belongs to the object</a:t>
                       </a:r>
-                      <a:endParaRPr lang="en-US" sz="1800" strike="noStrike" spc="-1" dirty="0">
-                        <a:latin typeface="Calibri" panose="020F0502020204030204" pitchFamily="34" charset="0"/>
-                        <a:ea typeface="Calibri" panose="020F0502020204030204" pitchFamily="34" charset="0"/>
-                        <a:cs typeface="Calibri" panose="020F0502020204030204" pitchFamily="34" charset="0"/>
-                      </a:endParaRPr>
                     </a:p>
                   </a:txBody>
                   <a:tcPr marL="90000" marR="90000"/>
@@ -41525,6 +40261,11 @@
                   </a:txBody>
                   <a:tcPr marL="90000" marR="90000"/>
                 </a:tc>
+                <a:extLst>
+                  <a:ext uri="{0D108BD9-81ED-4DB2-BD59-A6C34878D82A}">
+                    <a16:rowId xmlns:a16="http://schemas.microsoft.com/office/drawing/2014/main" val="10001"/>
+                  </a:ext>
+                </a:extLst>
               </a:tr>
               <a:tr h="0">
                 <a:tc>
@@ -41557,11 +40298,6 @@
                         </a:rPr>
                         <a:t>True, if element (or subsequence) </a:t>
                       </a:r>
-                      <a:endParaRPr lang="en-US" sz="1800" strike="noStrike" spc="-1" dirty="0">
-                        <a:latin typeface="Calibri" panose="020F0502020204030204" pitchFamily="34" charset="0"/>
-                        <a:ea typeface="Calibri" panose="020F0502020204030204" pitchFamily="34" charset="0"/>
-                        <a:cs typeface="Calibri" panose="020F0502020204030204" pitchFamily="34" charset="0"/>
-                      </a:endParaRPr>
                     </a:p>
                     <a:p>
                       <a:r>
@@ -41572,11 +40308,6 @@
                         </a:rPr>
                         <a:t>does not belong to the object</a:t>
                       </a:r>
-                      <a:endParaRPr lang="en-US" sz="1800" b="0" strike="noStrike" spc="-1" dirty="0">
-                        <a:latin typeface="Calibri" panose="020F0502020204030204" pitchFamily="34" charset="0"/>
-                        <a:ea typeface="Calibri" panose="020F0502020204030204" pitchFamily="34" charset="0"/>
-                        <a:cs typeface="Calibri" panose="020F0502020204030204" pitchFamily="34" charset="0"/>
-                      </a:endParaRPr>
                     </a:p>
                   </a:txBody>
                   <a:tcPr marL="90000" marR="90000"/>
@@ -41696,6 +40427,11 @@
                   </a:txBody>
                   <a:tcPr marL="90000" marR="90000"/>
                 </a:tc>
+                <a:extLst>
+                  <a:ext uri="{0D108BD9-81ED-4DB2-BD59-A6C34878D82A}">
+                    <a16:rowId xmlns:a16="http://schemas.microsoft.com/office/drawing/2014/main" val="10002"/>
+                  </a:ext>
+                </a:extLst>
               </a:tr>
             </a:tbl>
           </a:graphicData>
@@ -41985,6 +40721,8 @@
       </a:bgFillStyleLst>
     </a:fmtScheme>
   </a:themeElements>
+  <a:objectDefaults/>
+  <a:extraClrSchemeLst/>
   <a:extLst>
     <a:ext uri="{05A4C25C-085E-4340-85A3-A5531E510DB2}">
       <thm15:themeFamily xmlns:thm15="http://schemas.microsoft.com/office/thememl/2012/main" name="Office Theme" id="{62F939B6-93AF-4DB8-9C6B-D6C7DFDC589F}" vid="{4A3C46E8-61CC-4603-A589-7422A47A8E4A}"/>
@@ -42269,6 +41007,8 @@
       </a:bgFillStyleLst>
     </a:fmtScheme>
   </a:themeElements>
+  <a:objectDefaults/>
+  <a:extraClrSchemeLst/>
   <a:extLst>
     <a:ext uri="{05A4C25C-085E-4340-85A3-A5531E510DB2}">
       <thm15:themeFamily xmlns:thm15="http://schemas.microsoft.com/office/thememl/2012/main" name="Office Theme" id="{62F939B6-93AF-4DB8-9C6B-D6C7DFDC589F}" vid="{4A3C46E8-61CC-4603-A589-7422A47A8E4A}"/>
